--- a/output/★指導課訪問★３・４校時指導助言資料（例）.pptx
+++ b/output/★指導課訪問★３・４校時指導助言資料（例）.pptx
@@ -9587,7 +9587,7 @@
                 <a:ea typeface="メイリオ" panose="020B0604030504040204" pitchFamily="50" charset="-128"/>
                 <a:cs typeface="メイリオ" panose="020B0604030504040204" pitchFamily="50" charset="-128"/>
               </a:rPr>
-              <a:t>本日の視点を、明日の授業へ</a:t>
+              <a:t>本日の視点を、明日の授業改善へ</a:t>
             </a:r>
             <a:endParaRPr lang="en-US" altLang="ja-JP" sz="3200" b="1" u="sng" dirty="0">
               <a:solidFill>
@@ -9619,7 +9619,7 @@
                 <a:ea typeface="メイリオ" panose="020B0604030504040204" pitchFamily="50" charset="-128"/>
                 <a:cs typeface="メイリオ" panose="020B0604030504040204" pitchFamily="50" charset="-128"/>
               </a:rPr>
-              <a:t>・深い学びと研究主題の往還</a:t>
+              <a:t>・深い学びと研究主題は地続き</a:t>
             </a:r>
             <a:endParaRPr lang="en-US" altLang="ja-JP" sz="3200" b="1" dirty="0">
               <a:solidFill>
@@ -9651,7 +9651,7 @@
                 <a:ea typeface="メイリオ" panose="020B0604030504040204" pitchFamily="50" charset="-128"/>
                 <a:cs typeface="メイリオ" panose="020B0604030504040204" pitchFamily="50" charset="-128"/>
               </a:rPr>
-              <a:t>・「問い・資料・時間」を磨く</a:t>
+              <a:t>・「好き」を育み「得意」を伸ばす</a:t>
             </a:r>
             <a:r>
               <a:rPr lang="en-US" altLang="ja-JP" sz="3200" b="1" dirty="0">
@@ -9711,7 +9711,7 @@
                 <a:ea typeface="メイリオ" panose="020B0604030504040204" pitchFamily="50" charset="-128"/>
                 <a:cs typeface="メイリオ" panose="020B0604030504040204" pitchFamily="50" charset="-128"/>
               </a:rPr>
-              <a:t>・振り返りで生活・次時へつなぐ</a:t>
+              <a:t>・「幸せな学校はみんながつくる」</a:t>
             </a:r>
             <a:endParaRPr lang="en-US" altLang="ja-JP" sz="3200" b="1" dirty="0">
               <a:solidFill>

--- a/output/★指導課訪問★３・４校時指導助言資料（例）.pptx
+++ b/output/★指導課訪問★３・４校時指導助言資料（例）.pptx
@@ -6814,9 +6814,10 @@
                     <a:lumOff val="35000"/>
                   </a:schemeClr>
                 </a:solidFill>
-                <a:latin typeface="ＭＳ Ｐゴシック" panose="020B0600070205080204" pitchFamily="50" charset="-128"/>
-                <a:ea typeface="ＭＳ Ｐゴシック" panose="020B0600070205080204" pitchFamily="50" charset="-128"/>
                 <a:sym typeface="Arial"/>
+                <a:latin typeface="メイリオ"/>
+                <a:ea typeface="メイリオ"/>
+                <a:cs typeface="メイリオ"/>
               </a:rPr>
               <a:t>令和８年５月27日（水）</a:t>
             </a:r>
@@ -6850,9 +6851,10 @@
                     <a:lumOff val="35000"/>
                   </a:schemeClr>
                 </a:solidFill>
-                <a:latin typeface="ＭＳ Ｐゴシック" panose="020B0600070205080204" pitchFamily="50" charset="-128"/>
-                <a:ea typeface="ＭＳ Ｐゴシック" panose="020B0600070205080204" pitchFamily="50" charset="-128"/>
                 <a:sym typeface="Arial"/>
+                <a:latin typeface="メイリオ"/>
+                <a:ea typeface="メイリオ"/>
+                <a:cs typeface="メイリオ"/>
               </a:rPr>
               <a:t>練馬区教育委員会</a:t>
             </a:r>
@@ -6886,9 +6888,10 @@
                     <a:lumOff val="35000"/>
                   </a:schemeClr>
                 </a:solidFill>
-                <a:latin typeface="ＭＳ Ｐゴシック" panose="020B0600070205080204" pitchFamily="50" charset="-128"/>
-                <a:ea typeface="ＭＳ Ｐゴシック" panose="020B0600070205080204" pitchFamily="50" charset="-128"/>
                 <a:sym typeface="Arial"/>
+                <a:latin typeface="メイリオ"/>
+                <a:ea typeface="メイリオ"/>
+                <a:cs typeface="メイリオ"/>
               </a:rPr>
               <a:t>指導主事　</a:t>
             </a:r>
@@ -6900,8 +6903,9 @@
                     <a:lumOff val="35000"/>
                   </a:schemeClr>
                 </a:solidFill>
-                <a:latin typeface="ＭＳ Ｐゴシック" panose="020B0600070205080204" pitchFamily="50" charset="-128"/>
-                <a:ea typeface="ＭＳ Ｐゴシック" panose="020B0600070205080204" pitchFamily="50" charset="-128"/>
+                <a:latin typeface="メイリオ"/>
+                <a:ea typeface="メイリオ"/>
+                <a:cs typeface="メイリオ"/>
               </a:rPr>
               <a:t>紺多　章一郎</a:t>
             </a:r>
@@ -6935,7 +6939,7 @@
             <a:ext cx="9144000" cy="2865663"/>
           </a:xfrm>
           <a:solidFill>
-            <a:srgbClr val="07A973"/>
+            <a:srgbClr val="5B9BD5"/>
           </a:solidFill>
         </p:spPr>
         <p:txBody>
@@ -6946,12 +6950,13 @@
           <a:p>
             <a:pPr algn="l"/>
             <a:r>
-              <a:rPr lang="ja-JP" altLang="en-US" sz="2800" b="1" dirty="0">
+              <a:rPr lang="ja-JP" altLang="en-US" sz="4000" b="1" dirty="0">
                 <a:solidFill>
                   <a:schemeClr val="bg1"/>
                 </a:solidFill>
-                <a:latin typeface="游ゴシック" panose="020B0400000000000000" pitchFamily="50" charset="-128"/>
-                <a:ea typeface="游ゴシック" panose="020B0400000000000000" pitchFamily="50" charset="-128"/>
+                <a:latin typeface="メイリオ"/>
+                <a:ea typeface="メイリオ"/>
+                <a:cs typeface="メイリオ"/>
               </a:rPr>
               <a:t>　</a:t>
             </a:r>
@@ -6969,8 +6974,9 @@
                 <a:solidFill>
                   <a:schemeClr val="bg1"/>
                 </a:solidFill>
-                <a:latin typeface="游ゴシック" panose="020B0400000000000000" pitchFamily="50" charset="-128"/>
-                <a:ea typeface="游ゴシック" panose="020B0400000000000000" pitchFamily="50" charset="-128"/>
+                <a:latin typeface="メイリオ"/>
+                <a:ea typeface="メイリオ"/>
+                <a:cs typeface="メイリオ"/>
               </a:rPr>
               <a:t>　練馬区立向山小学校</a:t>
             </a:r>
@@ -6988,8 +6994,9 @@
                 <a:solidFill>
                   <a:schemeClr val="bg1"/>
                 </a:solidFill>
-                <a:latin typeface="游ゴシック" panose="020B0400000000000000" pitchFamily="50" charset="-128"/>
-                <a:ea typeface="游ゴシック" panose="020B0400000000000000" pitchFamily="50" charset="-128"/>
+                <a:latin typeface="メイリオ"/>
+                <a:ea typeface="メイリオ"/>
+                <a:cs typeface="メイリオ"/>
               </a:rPr>
               <a:t>　教育指導課訪問（３・４校時）</a:t>
             </a:r>
@@ -7134,7 +7141,7 @@
             <a:avLst/>
           </a:prstGeom>
           <a:solidFill>
-            <a:srgbClr val="07A973"/>
+            <a:srgbClr val="5B9BD5"/>
           </a:solidFill>
           <a:ln>
             <a:solidFill>
@@ -7164,18 +7171,24 @@
           <a:lstStyle/>
           <a:p>
             <a:r>
-              <a:rPr lang="ja-JP" altLang="en-US" sz="3000" b="1" dirty="0">
+              <a:rPr lang="ja-JP" altLang="en-US" sz="4000" b="1" dirty="0">
                 <a:solidFill>
                   <a:schemeClr val="bg1"/>
                 </a:solidFill>
+                <a:latin typeface="メイリオ"/>
+                <a:ea typeface="メイリオ"/>
+                <a:cs typeface="メイリオ"/>
               </a:rPr>
               <a:t>　</a:t>
             </a:r>
             <a:r>
-              <a:rPr lang="ja-JP" altLang="en-US" sz="3200" b="1" dirty="0">
+              <a:rPr lang="ja-JP" altLang="en-US" sz="4000" b="1" dirty="0">
                 <a:solidFill>
                   <a:schemeClr val="bg1"/>
                 </a:solidFill>
+                <a:latin typeface="メイリオ"/>
+                <a:ea typeface="メイリオ"/>
+                <a:cs typeface="メイリオ"/>
               </a:rPr>
               <a:t>３・４校時の授業について　</a:t>
             </a:r>
@@ -7233,9 +7246,9 @@
                     <a:lumOff val="35000"/>
                   </a:schemeClr>
                 </a:solidFill>
-                <a:latin typeface="メイリオ" panose="020B0604030504040204" pitchFamily="50" charset="-128"/>
-                <a:ea typeface="メイリオ" panose="020B0604030504040204" pitchFamily="50" charset="-128"/>
-                <a:cs typeface="メイリオ" panose="020B0604030504040204" pitchFamily="50" charset="-128"/>
+                <a:latin typeface="メイリオ"/>
+                <a:ea typeface="メイリオ"/>
+                <a:cs typeface="メイリオ"/>
               </a:rPr>
               <a:t>本日の２つの視点</a:t>
             </a:r>
@@ -7265,9 +7278,9 @@
                     <a:lumOff val="35000"/>
                   </a:schemeClr>
                 </a:solidFill>
-                <a:latin typeface="メイリオ" panose="020B0604030504040204" pitchFamily="50" charset="-128"/>
-                <a:ea typeface="メイリオ" panose="020B0604030504040204" pitchFamily="50" charset="-128"/>
-                <a:cs typeface="メイリオ" panose="020B0604030504040204" pitchFamily="50" charset="-128"/>
+                <a:latin typeface="メイリオ"/>
+                <a:ea typeface="メイリオ"/>
+                <a:cs typeface="メイリオ"/>
               </a:rPr>
               <a:t>・「主体的・対話的で深い学び」</a:t>
             </a:r>
@@ -7297,9 +7310,9 @@
                     <a:lumOff val="35000"/>
                   </a:schemeClr>
                 </a:solidFill>
-                <a:latin typeface="メイリオ" panose="020B0604030504040204" pitchFamily="50" charset="-128"/>
-                <a:ea typeface="メイリオ" panose="020B0604030504040204" pitchFamily="50" charset="-128"/>
-                <a:cs typeface="メイリオ" panose="020B0604030504040204" pitchFamily="50" charset="-128"/>
+                <a:latin typeface="メイリオ"/>
+                <a:ea typeface="メイリオ"/>
+                <a:cs typeface="メイリオ"/>
               </a:rPr>
               <a:t>・研究主題の具現</a:t>
             </a:r>
@@ -7329,9 +7342,9 @@
                     <a:lumOff val="35000"/>
                   </a:schemeClr>
                 </a:solidFill>
-                <a:latin typeface="メイリオ" panose="020B0604030504040204" pitchFamily="50" charset="-128"/>
-                <a:ea typeface="メイリオ" panose="020B0604030504040204" pitchFamily="50" charset="-128"/>
-                <a:cs typeface="メイリオ" panose="020B0604030504040204" pitchFamily="50" charset="-128"/>
+                <a:latin typeface="メイリオ"/>
+                <a:ea typeface="メイリオ"/>
+                <a:cs typeface="メイリオ"/>
               </a:rPr>
               <a:t>・授業の事実から学びを語る</a:t>
             </a:r>
@@ -7437,7 +7450,7 @@
             <a:avLst/>
           </a:prstGeom>
           <a:solidFill>
-            <a:srgbClr val="07A973"/>
+            <a:srgbClr val="5B9BD5"/>
           </a:solidFill>
           <a:ln>
             <a:solidFill>
@@ -7467,18 +7480,24 @@
           <a:lstStyle/>
           <a:p>
             <a:r>
-              <a:rPr lang="ja-JP" altLang="en-US" sz="3000" b="1" dirty="0">
+              <a:rPr lang="ja-JP" altLang="en-US" sz="4000" b="1" dirty="0">
                 <a:solidFill>
                   <a:schemeClr val="bg1"/>
                 </a:solidFill>
+                <a:latin typeface="メイリオ"/>
+                <a:ea typeface="メイリオ"/>
+                <a:cs typeface="メイリオ"/>
               </a:rPr>
               <a:t>　</a:t>
             </a:r>
             <a:r>
-              <a:rPr lang="ja-JP" altLang="en-US" sz="3200" b="1" dirty="0">
+              <a:rPr lang="ja-JP" altLang="en-US" sz="4000" b="1" dirty="0">
                 <a:solidFill>
                   <a:schemeClr val="bg1"/>
                 </a:solidFill>
+                <a:latin typeface="メイリオ"/>
+                <a:ea typeface="メイリオ"/>
+                <a:cs typeface="メイリオ"/>
               </a:rPr>
               <a:t>３・４校時の授業について　</a:t>
             </a:r>
@@ -7536,9 +7555,9 @@
                     <a:lumOff val="35000"/>
                   </a:schemeClr>
                 </a:solidFill>
-                <a:latin typeface="メイリオ" panose="020B0604030504040204" pitchFamily="50" charset="-128"/>
-                <a:ea typeface="メイリオ" panose="020B0604030504040204" pitchFamily="50" charset="-128"/>
-                <a:cs typeface="メイリオ" panose="020B0604030504040204" pitchFamily="50" charset="-128"/>
+                <a:latin typeface="メイリオ"/>
+                <a:ea typeface="メイリオ"/>
+                <a:cs typeface="メイリオ"/>
               </a:rPr>
               <a:t>研究主題の具現に向けた３つの視点</a:t>
             </a:r>
@@ -7568,9 +7587,9 @@
                     <a:lumOff val="35000"/>
                   </a:schemeClr>
                 </a:solidFill>
-                <a:latin typeface="メイリオ" panose="020B0604030504040204" pitchFamily="50" charset="-128"/>
-                <a:ea typeface="メイリオ" panose="020B0604030504040204" pitchFamily="50" charset="-128"/>
-                <a:cs typeface="メイリオ" panose="020B0604030504040204" pitchFamily="50" charset="-128"/>
+                <a:latin typeface="メイリオ"/>
+                <a:ea typeface="メイリオ"/>
+                <a:cs typeface="メイリオ"/>
               </a:rPr>
               <a:t>　①自ら関心をもち（教材との出会い）</a:t>
             </a:r>
@@ -7600,9 +7619,9 @@
                     <a:lumOff val="35000"/>
                   </a:schemeClr>
                 </a:solidFill>
-                <a:latin typeface="メイリオ" panose="020B0604030504040204" pitchFamily="50" charset="-128"/>
-                <a:ea typeface="メイリオ" panose="020B0604030504040204" pitchFamily="50" charset="-128"/>
-                <a:cs typeface="メイリオ" panose="020B0604030504040204" pitchFamily="50" charset="-128"/>
+                <a:latin typeface="メイリオ"/>
+                <a:ea typeface="メイリオ"/>
+                <a:cs typeface="メイリオ"/>
               </a:rPr>
               <a:t>　②考え（委ねる時間と戻る場）</a:t>
             </a:r>
@@ -7632,9 +7651,9 @@
                     <a:lumOff val="35000"/>
                   </a:schemeClr>
                 </a:solidFill>
-                <a:latin typeface="メイリオ" panose="020B0604030504040204" pitchFamily="50" charset="-128"/>
-                <a:ea typeface="メイリオ" panose="020B0604030504040204" pitchFamily="50" charset="-128"/>
-                <a:cs typeface="メイリオ" panose="020B0604030504040204" pitchFamily="50" charset="-128"/>
+                <a:latin typeface="メイリオ"/>
+                <a:ea typeface="メイリオ"/>
+                <a:cs typeface="メイリオ"/>
               </a:rPr>
               <a:t>　③行動しようとする（学びを次へ）</a:t>
             </a:r>
@@ -7740,7 +7759,7 @@
             <a:avLst/>
           </a:prstGeom>
           <a:solidFill>
-            <a:srgbClr val="07A973"/>
+            <a:srgbClr val="5B9BD5"/>
           </a:solidFill>
           <a:ln>
             <a:solidFill>
@@ -7770,18 +7789,24 @@
           <a:lstStyle/>
           <a:p>
             <a:r>
-              <a:rPr lang="ja-JP" altLang="en-US" sz="3000" b="1" dirty="0">
+              <a:rPr lang="ja-JP" altLang="en-US" sz="4000" b="1" dirty="0">
                 <a:solidFill>
                   <a:schemeClr val="bg1"/>
                 </a:solidFill>
+                <a:latin typeface="メイリオ"/>
+                <a:ea typeface="メイリオ"/>
+                <a:cs typeface="メイリオ"/>
               </a:rPr>
               <a:t>　</a:t>
             </a:r>
             <a:r>
-              <a:rPr lang="ja-JP" altLang="en-US" sz="3200" b="1" dirty="0">
+              <a:rPr lang="ja-JP" altLang="en-US" sz="4000" b="1" dirty="0">
                 <a:solidFill>
                   <a:schemeClr val="bg1"/>
                 </a:solidFill>
+                <a:latin typeface="メイリオ"/>
+                <a:ea typeface="メイリオ"/>
+                <a:cs typeface="メイリオ"/>
               </a:rPr>
               <a:t>３・４校時の授業について　①関心</a:t>
             </a:r>
@@ -7839,9 +7864,9 @@
                     <a:lumOff val="35000"/>
                   </a:schemeClr>
                 </a:solidFill>
-                <a:latin typeface="メイリオ" panose="020B0604030504040204" pitchFamily="50" charset="-128"/>
-                <a:ea typeface="メイリオ" panose="020B0604030504040204" pitchFamily="50" charset="-128"/>
-                <a:cs typeface="メイリオ" panose="020B0604030504040204" pitchFamily="50" charset="-128"/>
+                <a:latin typeface="メイリオ"/>
+                <a:ea typeface="メイリオ"/>
+                <a:cs typeface="メイリオ"/>
               </a:rPr>
               <a:t>1-全　体育（髙井他）</a:t>
             </a:r>
@@ -7905,9 +7930,9 @@
                     <a:lumOff val="35000"/>
                   </a:schemeClr>
                 </a:solidFill>
-                <a:latin typeface="メイリオ" panose="020B0604030504040204" pitchFamily="50" charset="-128"/>
-                <a:ea typeface="メイリオ" panose="020B0604030504040204" pitchFamily="50" charset="-128"/>
-                <a:cs typeface="メイリオ" panose="020B0604030504040204" pitchFamily="50" charset="-128"/>
+                <a:latin typeface="メイリオ"/>
+                <a:ea typeface="メイリオ"/>
+                <a:cs typeface="メイリオ"/>
               </a:rPr>
               <a:t>〈補足〉単元名で心を掴む</a:t>
             </a:r>
@@ -7971,9 +7996,9 @@
                     <a:lumOff val="35000"/>
                   </a:schemeClr>
                 </a:solidFill>
-                <a:latin typeface="メイリオ" panose="020B0604030504040204" pitchFamily="50" charset="-128"/>
-                <a:ea typeface="メイリオ" panose="020B0604030504040204" pitchFamily="50" charset="-128"/>
-                <a:cs typeface="メイリオ" panose="020B0604030504040204" pitchFamily="50" charset="-128"/>
+                <a:latin typeface="メイリオ"/>
+                <a:ea typeface="メイリオ"/>
+                <a:cs typeface="メイリオ"/>
               </a:rPr>
               <a:t>〈補足〉３つの場で「やってみたい」</a:t>
             </a:r>
@@ -8037,9 +8062,9 @@
                     <a:lumOff val="35000"/>
                   </a:schemeClr>
                 </a:solidFill>
-                <a:latin typeface="メイリオ" panose="020B0604030504040204" pitchFamily="50" charset="-128"/>
-                <a:ea typeface="メイリオ" panose="020B0604030504040204" pitchFamily="50" charset="-128"/>
-                <a:cs typeface="メイリオ" panose="020B0604030504040204" pitchFamily="50" charset="-128"/>
+                <a:latin typeface="メイリオ"/>
+                <a:ea typeface="メイリオ"/>
+                <a:cs typeface="メイリオ"/>
               </a:rPr>
               <a:t>〈補足〉教材との出会いが関心を決める</a:t>
             </a:r>
@@ -8098,7 +8123,11 @@
           <a:p>
             <a:pPr algn="ctr"/>
             <a:r>
-              <a:rPr kumimoji="1" lang="ja-JP" altLang="en-US" sz="3200" dirty="0"/>
+              <a:rPr kumimoji="1" lang="ja-JP" altLang="en-US" sz="3200" dirty="0">
+                <a:latin typeface="メイリオ"/>
+                <a:ea typeface="メイリオ"/>
+                <a:cs typeface="メイリオ"/>
+              </a:rPr>
               <a:t>写真</a:t>
             </a:r>
           </a:p>
@@ -8150,9 +8179,9 @@
                     <a:lumOff val="35000"/>
                   </a:schemeClr>
                 </a:solidFill>
-                <a:latin typeface="メイリオ" panose="020B0604030504040204" pitchFamily="50" charset="-128"/>
-                <a:ea typeface="メイリオ" panose="020B0604030504040204" pitchFamily="50" charset="-128"/>
-                <a:cs typeface="メイリオ" panose="020B0604030504040204" pitchFamily="50" charset="-128"/>
+                <a:latin typeface="メイリオ"/>
+                <a:ea typeface="メイリオ"/>
+                <a:cs typeface="メイリオ"/>
               </a:rPr>
               <a:t>5-1　図工（鈴木寛明）</a:t>
             </a:r>
@@ -8211,7 +8240,11 @@
           <a:p>
             <a:pPr algn="ctr"/>
             <a:r>
-              <a:rPr kumimoji="1" lang="ja-JP" altLang="en-US" sz="3200" dirty="0"/>
+              <a:rPr kumimoji="1" lang="ja-JP" altLang="en-US" sz="3200" dirty="0">
+                <a:latin typeface="メイリオ"/>
+                <a:ea typeface="メイリオ"/>
+                <a:cs typeface="メイリオ"/>
+              </a:rPr>
               <a:t>写真</a:t>
             </a:r>
           </a:p>
@@ -8305,7 +8338,7 @@
             <a:avLst/>
           </a:prstGeom>
           <a:solidFill>
-            <a:srgbClr val="07A973"/>
+            <a:srgbClr val="5B9BD5"/>
           </a:solidFill>
           <a:ln>
             <a:solidFill>
@@ -8335,18 +8368,24 @@
           <a:lstStyle/>
           <a:p>
             <a:r>
-              <a:rPr lang="ja-JP" altLang="en-US" sz="3000" b="1" dirty="0">
+              <a:rPr lang="ja-JP" altLang="en-US" sz="4000" b="1" dirty="0">
                 <a:solidFill>
                   <a:schemeClr val="bg1"/>
                 </a:solidFill>
+                <a:latin typeface="メイリオ"/>
+                <a:ea typeface="メイリオ"/>
+                <a:cs typeface="メイリオ"/>
               </a:rPr>
               <a:t>　</a:t>
             </a:r>
             <a:r>
-              <a:rPr lang="ja-JP" altLang="en-US" sz="3200" b="1" dirty="0">
+              <a:rPr lang="ja-JP" altLang="en-US" sz="4000" b="1" dirty="0">
                 <a:solidFill>
                   <a:schemeClr val="bg1"/>
                 </a:solidFill>
+                <a:latin typeface="メイリオ"/>
+                <a:ea typeface="メイリオ"/>
+                <a:cs typeface="メイリオ"/>
               </a:rPr>
               <a:t>３・４校時の授業について　②考え</a:t>
             </a:r>
@@ -8404,9 +8443,9 @@
                     <a:lumOff val="35000"/>
                   </a:schemeClr>
                 </a:solidFill>
-                <a:latin typeface="メイリオ" panose="020B0604030504040204" pitchFamily="50" charset="-128"/>
-                <a:ea typeface="メイリオ" panose="020B0604030504040204" pitchFamily="50" charset="-128"/>
-                <a:cs typeface="メイリオ" panose="020B0604030504040204" pitchFamily="50" charset="-128"/>
+                <a:latin typeface="メイリオ"/>
+                <a:ea typeface="メイリオ"/>
+                <a:cs typeface="メイリオ"/>
               </a:rPr>
               <a:t>2-1　算数（岩佐）</a:t>
             </a:r>
@@ -8470,9 +8509,9 @@
                     <a:lumOff val="35000"/>
                   </a:schemeClr>
                 </a:solidFill>
-                <a:latin typeface="メイリオ" panose="020B0604030504040204" pitchFamily="50" charset="-128"/>
-                <a:ea typeface="メイリオ" panose="020B0604030504040204" pitchFamily="50" charset="-128"/>
-                <a:cs typeface="メイリオ" panose="020B0604030504040204" pitchFamily="50" charset="-128"/>
+                <a:latin typeface="メイリオ"/>
+                <a:ea typeface="メイリオ"/>
+                <a:cs typeface="メイリオ"/>
               </a:rPr>
               <a:t>5-3　社会（小松）</a:t>
             </a:r>
@@ -8536,9 +8575,9 @@
                     <a:lumOff val="35000"/>
                   </a:schemeClr>
                 </a:solidFill>
-                <a:latin typeface="メイリオ" panose="020B0604030504040204" pitchFamily="50" charset="-128"/>
-                <a:ea typeface="メイリオ" panose="020B0604030504040204" pitchFamily="50" charset="-128"/>
-                <a:cs typeface="メイリオ" panose="020B0604030504040204" pitchFamily="50" charset="-128"/>
+                <a:latin typeface="メイリオ"/>
+                <a:ea typeface="メイリオ"/>
+                <a:cs typeface="メイリオ"/>
               </a:rPr>
               <a:t>4-2　国語（工藤）</a:t>
             </a:r>
@@ -8602,9 +8641,9 @@
                     <a:lumOff val="35000"/>
                   </a:schemeClr>
                 </a:solidFill>
-                <a:latin typeface="メイリオ" panose="020B0604030504040204" pitchFamily="50" charset="-128"/>
-                <a:ea typeface="メイリオ" panose="020B0604030504040204" pitchFamily="50" charset="-128"/>
-                <a:cs typeface="メイリオ" panose="020B0604030504040204" pitchFamily="50" charset="-128"/>
+                <a:latin typeface="メイリオ"/>
+                <a:ea typeface="メイリオ"/>
+                <a:cs typeface="メイリオ"/>
               </a:rPr>
               <a:t>6-3　道徳（松田）</a:t>
             </a:r>
@@ -8710,7 +8749,7 @@
             <a:avLst/>
           </a:prstGeom>
           <a:solidFill>
-            <a:srgbClr val="07A973"/>
+            <a:srgbClr val="5B9BD5"/>
           </a:solidFill>
           <a:ln>
             <a:solidFill>
@@ -8740,18 +8779,24 @@
           <a:lstStyle/>
           <a:p>
             <a:r>
-              <a:rPr lang="ja-JP" altLang="en-US" sz="3000" b="1" dirty="0">
+              <a:rPr lang="ja-JP" altLang="en-US" sz="4000" b="1" dirty="0">
                 <a:solidFill>
                   <a:schemeClr val="bg1"/>
                 </a:solidFill>
+                <a:latin typeface="メイリオ"/>
+                <a:ea typeface="メイリオ"/>
+                <a:cs typeface="メイリオ"/>
               </a:rPr>
               <a:t>　</a:t>
             </a:r>
             <a:r>
-              <a:rPr lang="ja-JP" altLang="en-US" sz="3200" b="1" dirty="0">
+              <a:rPr lang="ja-JP" altLang="en-US" sz="4000" b="1" dirty="0">
                 <a:solidFill>
                   <a:schemeClr val="bg1"/>
                 </a:solidFill>
+                <a:latin typeface="メイリオ"/>
+                <a:ea typeface="メイリオ"/>
+                <a:cs typeface="メイリオ"/>
               </a:rPr>
               <a:t>３・４校時の授業について　③行動</a:t>
             </a:r>
@@ -8809,9 +8854,9 @@
                     <a:lumOff val="35000"/>
                   </a:schemeClr>
                 </a:solidFill>
-                <a:latin typeface="メイリオ" panose="020B0604030504040204" pitchFamily="50" charset="-128"/>
-                <a:ea typeface="メイリオ" panose="020B0604030504040204" pitchFamily="50" charset="-128"/>
-                <a:cs typeface="メイリオ" panose="020B0604030504040204" pitchFamily="50" charset="-128"/>
+                <a:latin typeface="メイリオ"/>
+                <a:ea typeface="メイリオ"/>
+                <a:cs typeface="メイリオ"/>
               </a:rPr>
               <a:t>4-1　社会（三井）</a:t>
             </a:r>
@@ -8875,9 +8920,9 @@
                     <a:lumOff val="35000"/>
                   </a:schemeClr>
                 </a:solidFill>
-                <a:latin typeface="メイリオ" panose="020B0604030504040204" pitchFamily="50" charset="-128"/>
-                <a:ea typeface="メイリオ" panose="020B0604030504040204" pitchFamily="50" charset="-128"/>
-                <a:cs typeface="メイリオ" panose="020B0604030504040204" pitchFamily="50" charset="-128"/>
+                <a:latin typeface="メイリオ"/>
+                <a:ea typeface="メイリオ"/>
+                <a:cs typeface="メイリオ"/>
               </a:rPr>
               <a:t>5-2　体育（古江）</a:t>
             </a:r>
@@ -8941,9 +8986,9 @@
                     <a:lumOff val="35000"/>
                   </a:schemeClr>
                 </a:solidFill>
-                <a:latin typeface="メイリオ" panose="020B0604030504040204" pitchFamily="50" charset="-128"/>
-                <a:ea typeface="メイリオ" panose="020B0604030504040204" pitchFamily="50" charset="-128"/>
-                <a:cs typeface="メイリオ" panose="020B0604030504040204" pitchFamily="50" charset="-128"/>
+                <a:latin typeface="メイリオ"/>
+                <a:ea typeface="メイリオ"/>
+                <a:cs typeface="メイリオ"/>
               </a:rPr>
               <a:t>6-2　外国語（木下）</a:t>
             </a:r>
@@ -9007,9 +9052,9 @@
                     <a:lumOff val="35000"/>
                   </a:schemeClr>
                 </a:solidFill>
-                <a:latin typeface="メイリオ" panose="020B0604030504040204" pitchFamily="50" charset="-128"/>
-                <a:ea typeface="メイリオ" panose="020B0604030504040204" pitchFamily="50" charset="-128"/>
-                <a:cs typeface="メイリオ" panose="020B0604030504040204" pitchFamily="50" charset="-128"/>
+                <a:latin typeface="メイリオ"/>
+                <a:ea typeface="メイリオ"/>
+                <a:cs typeface="メイリオ"/>
               </a:rPr>
               <a:t>2-2　道徳（中牧）</a:t>
             </a:r>
@@ -9115,7 +9160,7 @@
             <a:avLst/>
           </a:prstGeom>
           <a:solidFill>
-            <a:srgbClr val="07A973"/>
+            <a:srgbClr val="5B9BD5"/>
           </a:solidFill>
           <a:ln>
             <a:solidFill>
@@ -9145,18 +9190,24 @@
           <a:lstStyle/>
           <a:p>
             <a:r>
-              <a:rPr lang="ja-JP" altLang="en-US" sz="3000" b="1" dirty="0">
+              <a:rPr lang="ja-JP" altLang="en-US" sz="4000" b="1" dirty="0">
                 <a:solidFill>
                   <a:schemeClr val="bg1"/>
                 </a:solidFill>
+                <a:latin typeface="メイリオ"/>
+                <a:ea typeface="メイリオ"/>
+                <a:cs typeface="メイリオ"/>
               </a:rPr>
               <a:t>　</a:t>
             </a:r>
             <a:r>
-              <a:rPr lang="ja-JP" altLang="en-US" sz="3200" b="1" dirty="0">
+              <a:rPr lang="ja-JP" altLang="en-US" sz="4000" b="1" dirty="0">
                 <a:solidFill>
                   <a:schemeClr val="bg1"/>
                 </a:solidFill>
+                <a:latin typeface="メイリオ"/>
+                <a:ea typeface="メイリオ"/>
+                <a:cs typeface="メイリオ"/>
               </a:rPr>
               <a:t>３・４校時の授業について　</a:t>
             </a:r>
@@ -9214,9 +9265,9 @@
                     <a:lumOff val="35000"/>
                   </a:schemeClr>
                 </a:solidFill>
-                <a:latin typeface="メイリオ" panose="020B0604030504040204" pitchFamily="50" charset="-128"/>
-                <a:ea typeface="メイリオ" panose="020B0604030504040204" pitchFamily="50" charset="-128"/>
-                <a:cs typeface="メイリオ" panose="020B0604030504040204" pitchFamily="50" charset="-128"/>
+                <a:latin typeface="メイリオ"/>
+                <a:ea typeface="メイリオ"/>
+                <a:cs typeface="メイリオ"/>
               </a:rPr>
               <a:t>研究主題の具現に向けた３つの視点</a:t>
             </a:r>
@@ -9246,9 +9297,9 @@
                     <a:lumOff val="35000"/>
                   </a:schemeClr>
                 </a:solidFill>
-                <a:latin typeface="メイリオ" panose="020B0604030504040204" pitchFamily="50" charset="-128"/>
-                <a:ea typeface="メイリオ" panose="020B0604030504040204" pitchFamily="50" charset="-128"/>
-                <a:cs typeface="メイリオ" panose="020B0604030504040204" pitchFamily="50" charset="-128"/>
+                <a:latin typeface="メイリオ"/>
+                <a:ea typeface="メイリオ"/>
+                <a:cs typeface="メイリオ"/>
               </a:rPr>
               <a:t>　①自ら関心をもち（教材との出会い）</a:t>
             </a:r>
@@ -9278,9 +9329,9 @@
                     <a:lumOff val="35000"/>
                   </a:schemeClr>
                 </a:solidFill>
-                <a:latin typeface="メイリオ" panose="020B0604030504040204" pitchFamily="50" charset="-128"/>
-                <a:ea typeface="メイリオ" panose="020B0604030504040204" pitchFamily="50" charset="-128"/>
-                <a:cs typeface="メイリオ" panose="020B0604030504040204" pitchFamily="50" charset="-128"/>
+                <a:latin typeface="メイリオ"/>
+                <a:ea typeface="メイリオ"/>
+                <a:cs typeface="メイリオ"/>
               </a:rPr>
               <a:t>　②考え（委ねる時間と戻る場）</a:t>
             </a:r>
@@ -9310,9 +9361,9 @@
                     <a:lumOff val="35000"/>
                   </a:schemeClr>
                 </a:solidFill>
-                <a:latin typeface="メイリオ" panose="020B0604030504040204" pitchFamily="50" charset="-128"/>
-                <a:ea typeface="メイリオ" panose="020B0604030504040204" pitchFamily="50" charset="-128"/>
-                <a:cs typeface="メイリオ" panose="020B0604030504040204" pitchFamily="50" charset="-128"/>
+                <a:latin typeface="メイリオ"/>
+                <a:ea typeface="メイリオ"/>
+                <a:cs typeface="メイリオ"/>
               </a:rPr>
               <a:t>　③行動しようとする（学びを次へ）</a:t>
             </a:r>
@@ -9418,7 +9469,7 @@
             <a:avLst/>
           </a:prstGeom>
           <a:solidFill>
-            <a:srgbClr val="07A973"/>
+            <a:srgbClr val="5B9BD5"/>
           </a:solidFill>
           <a:ln>
             <a:solidFill>
@@ -9448,18 +9499,24 @@
           <a:lstStyle/>
           <a:p>
             <a:r>
-              <a:rPr lang="ja-JP" altLang="en-US" sz="3000" b="1" dirty="0">
+              <a:rPr lang="ja-JP" altLang="en-US" sz="4000" b="1" dirty="0">
                 <a:solidFill>
                   <a:schemeClr val="bg1"/>
                 </a:solidFill>
+                <a:latin typeface="メイリオ"/>
+                <a:ea typeface="メイリオ"/>
+                <a:cs typeface="メイリオ"/>
               </a:rPr>
               <a:t>　</a:t>
             </a:r>
             <a:r>
-              <a:rPr lang="ja-JP" altLang="en-US" sz="3200" b="1" dirty="0">
+              <a:rPr lang="ja-JP" altLang="en-US" sz="4000" b="1" dirty="0">
                 <a:solidFill>
                   <a:schemeClr val="bg1"/>
                 </a:solidFill>
+                <a:latin typeface="メイリオ"/>
+                <a:ea typeface="メイリオ"/>
+                <a:cs typeface="メイリオ"/>
               </a:rPr>
               <a:t>３・４校時の授業について　</a:t>
             </a:r>
@@ -9517,9 +9574,9 @@
                     <a:lumOff val="35000"/>
                   </a:schemeClr>
                 </a:solidFill>
-                <a:latin typeface="メイリオ" panose="020B0604030504040204" pitchFamily="50" charset="-128"/>
-                <a:ea typeface="メイリオ" panose="020B0604030504040204" pitchFamily="50" charset="-128"/>
-                <a:cs typeface="メイリオ" panose="020B0604030504040204" pitchFamily="50" charset="-128"/>
+                <a:latin typeface="メイリオ"/>
+                <a:ea typeface="メイリオ"/>
+                <a:cs typeface="メイリオ"/>
               </a:rPr>
               <a:t>今後に向けて</a:t>
             </a:r>
@@ -9583,9 +9640,9 @@
                     <a:lumOff val="35000"/>
                   </a:schemeClr>
                 </a:solidFill>
-                <a:latin typeface="メイリオ" panose="020B0604030504040204" pitchFamily="50" charset="-128"/>
-                <a:ea typeface="メイリオ" panose="020B0604030504040204" pitchFamily="50" charset="-128"/>
-                <a:cs typeface="メイリオ" panose="020B0604030504040204" pitchFamily="50" charset="-128"/>
+                <a:latin typeface="メイリオ"/>
+                <a:ea typeface="メイリオ"/>
+                <a:cs typeface="メイリオ"/>
               </a:rPr>
               <a:t>本日の視点を、明日の授業改善へ</a:t>
             </a:r>
@@ -9615,9 +9672,9 @@
                     <a:lumOff val="35000"/>
                   </a:schemeClr>
                 </a:solidFill>
-                <a:latin typeface="メイリオ" panose="020B0604030504040204" pitchFamily="50" charset="-128"/>
-                <a:ea typeface="メイリオ" panose="020B0604030504040204" pitchFamily="50" charset="-128"/>
-                <a:cs typeface="メイリオ" panose="020B0604030504040204" pitchFamily="50" charset="-128"/>
+                <a:latin typeface="メイリオ"/>
+                <a:ea typeface="メイリオ"/>
+                <a:cs typeface="メイリオ"/>
               </a:rPr>
               <a:t>・深い学びと研究主題は地続き</a:t>
             </a:r>
@@ -9647,9 +9704,9 @@
                     <a:lumOff val="35000"/>
                   </a:schemeClr>
                 </a:solidFill>
-                <a:latin typeface="メイリオ" panose="020B0604030504040204" pitchFamily="50" charset="-128"/>
-                <a:ea typeface="メイリオ" panose="020B0604030504040204" pitchFamily="50" charset="-128"/>
-                <a:cs typeface="メイリオ" panose="020B0604030504040204" pitchFamily="50" charset="-128"/>
+                <a:latin typeface="メイリオ"/>
+                <a:ea typeface="メイリオ"/>
+                <a:cs typeface="メイリオ"/>
               </a:rPr>
               <a:t>・「好き」を育み「得意」を伸ばす</a:t>
             </a:r>
@@ -9707,9 +9764,9 @@
                     <a:lumOff val="35000"/>
                   </a:schemeClr>
                 </a:solidFill>
-                <a:latin typeface="メイリオ" panose="020B0604030504040204" pitchFamily="50" charset="-128"/>
-                <a:ea typeface="メイリオ" panose="020B0604030504040204" pitchFamily="50" charset="-128"/>
-                <a:cs typeface="メイリオ" panose="020B0604030504040204" pitchFamily="50" charset="-128"/>
+                <a:latin typeface="メイリオ"/>
+                <a:ea typeface="メイリオ"/>
+                <a:cs typeface="メイリオ"/>
               </a:rPr>
               <a:t>・「幸せな学校はみんながつくる」</a:t>
             </a:r>

--- a/output/★指導課訪問★３・４校時指導助言資料（例）.pptx
+++ b/output/★指導課訪問★３・４校時指導助言資料（例）.pptx
@@ -1316,7 +1316,36 @@
           <a:bodyPr/>
           <a:lstStyle/>
           <a:p>
-            <a:endParaRPr kumimoji="1" lang="ja-JP" altLang="en-US" dirty="0"/>
+            <a:r>
+              <a:rPr sz="1400">
+                <a:latin typeface="メイリオ"/>
+              </a:rPr>
+              <a:t>【①関心 補足ポイント】</a:t>
+            </a:r>
+          </a:p>
+          <a:p>
+            <a:r>
+              <a:rPr sz="1400">
+                <a:latin typeface="メイリオ"/>
+              </a:rPr>
+              <a:t>・単元名で心を掴む（１年体育「ボールをなげるのだ！あてるのだ！たおすのだ！」）</a:t>
+            </a:r>
+          </a:p>
+          <a:p>
+            <a:r>
+              <a:rPr sz="1400">
+                <a:latin typeface="メイリオ"/>
+              </a:rPr>
+              <a:t>・３つの場で「やってみたい」を引き出す（フラフープ・ターゲット／段ボール倒し／ロケット投げ）</a:t>
+            </a:r>
+          </a:p>
+          <a:p>
+            <a:r>
+              <a:rPr sz="1400">
+                <a:latin typeface="メイリオ"/>
+              </a:rPr>
+              <a:t>・教材との出会いが関心の質を決める（５年図工「オナマエアート」）</a:t>
+            </a:r>
           </a:p>
         </p:txBody>
       </p:sp>
@@ -7265,6 +7294,16 @@
             </a:endParaRPr>
           </a:p>
           <a:p>
+            <a:r>
+              <a:rPr lang="ja-JP" sz="2400" b="1" dirty="0">
+                <a:latin typeface="メイリオ"/>
+                <a:ea typeface="メイリオ"/>
+                <a:cs typeface="メイリオ"/>
+              </a:rPr>
+              <a:t>〜授業の事実から学びを語る〜</a:t>
+            </a:r>
+          </a:p>
+          <a:p>
             <a:pPr>
               <a:lnSpc>
                 <a:spcPct val="120000"/>
@@ -7315,38 +7354,6 @@
                 <a:cs typeface="メイリオ"/>
               </a:rPr>
               <a:t>・研究主題の具現</a:t>
-            </a:r>
-            <a:endParaRPr lang="en-US" altLang="ja-JP" sz="3600" b="1" dirty="0">
-              <a:solidFill>
-                <a:schemeClr val="tx1">
-                  <a:lumMod val="65000"/>
-                  <a:lumOff val="35000"/>
-                </a:schemeClr>
-              </a:solidFill>
-              <a:latin typeface="メイリオ" panose="020B0604030504040204" pitchFamily="50" charset="-128"/>
-              <a:ea typeface="メイリオ" panose="020B0604030504040204" pitchFamily="50" charset="-128"/>
-              <a:cs typeface="メイリオ" panose="020B0604030504040204" pitchFamily="50" charset="-128"/>
-            </a:endParaRPr>
-          </a:p>
-          <a:p>
-            <a:pPr>
-              <a:lnSpc>
-                <a:spcPct val="120000"/>
-              </a:lnSpc>
-            </a:pPr>
-            <a:r>
-              <a:rPr lang="ja-JP" altLang="en-US" sz="3600" b="1" dirty="0">
-                <a:solidFill>
-                  <a:schemeClr val="tx1">
-                    <a:lumMod val="65000"/>
-                    <a:lumOff val="35000"/>
-                  </a:schemeClr>
-                </a:solidFill>
-                <a:latin typeface="メイリオ"/>
-                <a:ea typeface="メイリオ"/>
-                <a:cs typeface="メイリオ"/>
-              </a:rPr>
-              <a:t>・授業の事実から学びを語る</a:t>
             </a:r>
             <a:endParaRPr lang="en-US" altLang="ja-JP" sz="3600" b="1" dirty="0">
               <a:solidFill>
@@ -7869,204 +7876,6 @@
                 <a:cs typeface="メイリオ"/>
               </a:rPr>
               <a:t>1-全　体育（髙井他）</a:t>
-            </a:r>
-            <a:endParaRPr lang="en-US" altLang="ja-JP" sz="2400" b="1" dirty="0">
-              <a:solidFill>
-                <a:schemeClr val="tx1">
-                  <a:lumMod val="65000"/>
-                  <a:lumOff val="35000"/>
-                </a:schemeClr>
-              </a:solidFill>
-              <a:latin typeface="メイリオ" panose="020B0604030504040204" pitchFamily="50" charset="-128"/>
-              <a:ea typeface="メイリオ" panose="020B0604030504040204" pitchFamily="50" charset="-128"/>
-              <a:cs typeface="メイリオ" panose="020B0604030504040204" pitchFamily="50" charset="-128"/>
-            </a:endParaRPr>
-          </a:p>
-        </p:txBody>
-      </p:sp>
-      <p:sp>
-        <p:nvSpPr>
-          <p:cNvPr id="2" name="正方形/長方形 1">
-            <a:extLst>
-              <a:ext uri="{FF2B5EF4-FFF2-40B4-BE49-F238E27FC236}">
-                <a16:creationId xmlns:a16="http://schemas.microsoft.com/office/drawing/2014/main" id="{CFE1E1FD-B193-3B9D-6C3D-A01212A849E4}"/>
-              </a:ext>
-            </a:extLst>
-          </p:cNvPr>
-          <p:cNvSpPr/>
-          <p:nvPr/>
-        </p:nvSpPr>
-        <p:spPr bwMode="white">
-          <a:xfrm>
-            <a:off x="-3414027" y="1434268"/>
-            <a:ext cx="3339266" cy="517065"/>
-          </a:xfrm>
-          <a:prstGeom prst="rect">
-            <a:avLst/>
-          </a:prstGeom>
-          <a:solidFill>
-            <a:schemeClr val="bg1"/>
-          </a:solidFill>
-          <a:ln>
-            <a:noFill/>
-          </a:ln>
-        </p:spPr>
-        <p:txBody>
-          <a:bodyPr wrap="square">
-            <a:spAutoFit/>
-          </a:bodyPr>
-          <a:lstStyle/>
-          <a:p>
-            <a:pPr>
-              <a:lnSpc>
-                <a:spcPct val="120000"/>
-              </a:lnSpc>
-            </a:pPr>
-            <a:r>
-              <a:rPr lang="ja-JP" altLang="en-US" sz="2400" b="1" dirty="0">
-                <a:solidFill>
-                  <a:schemeClr val="tx1">
-                    <a:lumMod val="65000"/>
-                    <a:lumOff val="35000"/>
-                  </a:schemeClr>
-                </a:solidFill>
-                <a:latin typeface="メイリオ"/>
-                <a:ea typeface="メイリオ"/>
-                <a:cs typeface="メイリオ"/>
-              </a:rPr>
-              <a:t>〈補足〉単元名で心を掴む</a:t>
-            </a:r>
-            <a:endParaRPr lang="en-US" altLang="ja-JP" sz="2400" b="1" dirty="0">
-              <a:solidFill>
-                <a:schemeClr val="tx1">
-                  <a:lumMod val="65000"/>
-                  <a:lumOff val="35000"/>
-                </a:schemeClr>
-              </a:solidFill>
-              <a:latin typeface="メイリオ" panose="020B0604030504040204" pitchFamily="50" charset="-128"/>
-              <a:ea typeface="メイリオ" panose="020B0604030504040204" pitchFamily="50" charset="-128"/>
-              <a:cs typeface="メイリオ" panose="020B0604030504040204" pitchFamily="50" charset="-128"/>
-            </a:endParaRPr>
-          </a:p>
-        </p:txBody>
-      </p:sp>
-      <p:sp>
-        <p:nvSpPr>
-          <p:cNvPr id="3" name="正方形/長方形 2">
-            <a:extLst>
-              <a:ext uri="{FF2B5EF4-FFF2-40B4-BE49-F238E27FC236}">
-                <a16:creationId xmlns:a16="http://schemas.microsoft.com/office/drawing/2014/main" id="{E77B05B5-448D-2AE3-53FB-A4237D7F6069}"/>
-              </a:ext>
-            </a:extLst>
-          </p:cNvPr>
-          <p:cNvSpPr/>
-          <p:nvPr/>
-        </p:nvSpPr>
-        <p:spPr bwMode="white">
-          <a:xfrm>
-            <a:off x="-3414027" y="2313217"/>
-            <a:ext cx="3339266" cy="517065"/>
-          </a:xfrm>
-          <a:prstGeom prst="rect">
-            <a:avLst/>
-          </a:prstGeom>
-          <a:solidFill>
-            <a:schemeClr val="bg1"/>
-          </a:solidFill>
-          <a:ln>
-            <a:noFill/>
-          </a:ln>
-        </p:spPr>
-        <p:txBody>
-          <a:bodyPr wrap="square">
-            <a:spAutoFit/>
-          </a:bodyPr>
-          <a:lstStyle/>
-          <a:p>
-            <a:pPr>
-              <a:lnSpc>
-                <a:spcPct val="120000"/>
-              </a:lnSpc>
-            </a:pPr>
-            <a:r>
-              <a:rPr lang="ja-JP" altLang="en-US" sz="2400" b="1" dirty="0">
-                <a:solidFill>
-                  <a:schemeClr val="tx1">
-                    <a:lumMod val="65000"/>
-                    <a:lumOff val="35000"/>
-                  </a:schemeClr>
-                </a:solidFill>
-                <a:latin typeface="メイリオ"/>
-                <a:ea typeface="メイリオ"/>
-                <a:cs typeface="メイリオ"/>
-              </a:rPr>
-              <a:t>〈補足〉３つの場で「やってみたい」</a:t>
-            </a:r>
-            <a:endParaRPr lang="en-US" altLang="ja-JP" sz="2400" b="1" dirty="0">
-              <a:solidFill>
-                <a:schemeClr val="tx1">
-                  <a:lumMod val="65000"/>
-                  <a:lumOff val="35000"/>
-                </a:schemeClr>
-              </a:solidFill>
-              <a:latin typeface="メイリオ" panose="020B0604030504040204" pitchFamily="50" charset="-128"/>
-              <a:ea typeface="メイリオ" panose="020B0604030504040204" pitchFamily="50" charset="-128"/>
-              <a:cs typeface="メイリオ" panose="020B0604030504040204" pitchFamily="50" charset="-128"/>
-            </a:endParaRPr>
-          </a:p>
-        </p:txBody>
-      </p:sp>
-      <p:sp>
-        <p:nvSpPr>
-          <p:cNvPr id="5" name="正方形/長方形 4">
-            <a:extLst>
-              <a:ext uri="{FF2B5EF4-FFF2-40B4-BE49-F238E27FC236}">
-                <a16:creationId xmlns:a16="http://schemas.microsoft.com/office/drawing/2014/main" id="{812FE207-E0BC-2DE8-191E-399D59E5D037}"/>
-              </a:ext>
-            </a:extLst>
-          </p:cNvPr>
-          <p:cNvSpPr/>
-          <p:nvPr/>
-        </p:nvSpPr>
-        <p:spPr bwMode="white">
-          <a:xfrm>
-            <a:off x="-3414027" y="3027217"/>
-            <a:ext cx="3339266" cy="517065"/>
-          </a:xfrm>
-          <a:prstGeom prst="rect">
-            <a:avLst/>
-          </a:prstGeom>
-          <a:solidFill>
-            <a:schemeClr val="bg1"/>
-          </a:solidFill>
-          <a:ln>
-            <a:noFill/>
-          </a:ln>
-        </p:spPr>
-        <p:txBody>
-          <a:bodyPr wrap="square">
-            <a:spAutoFit/>
-          </a:bodyPr>
-          <a:lstStyle/>
-          <a:p>
-            <a:pPr>
-              <a:lnSpc>
-                <a:spcPct val="120000"/>
-              </a:lnSpc>
-            </a:pPr>
-            <a:r>
-              <a:rPr lang="ja-JP" altLang="en-US" sz="2400" b="1" dirty="0">
-                <a:solidFill>
-                  <a:schemeClr val="tx1">
-                    <a:lumMod val="65000"/>
-                    <a:lumOff val="35000"/>
-                  </a:schemeClr>
-                </a:solidFill>
-                <a:latin typeface="メイリオ"/>
-                <a:ea typeface="メイリオ"/>
-                <a:cs typeface="メイリオ"/>
-              </a:rPr>
-              <a:t>〈補足〉教材との出会いが関心を決める</a:t>
             </a:r>
             <a:endParaRPr lang="en-US" altLang="ja-JP" sz="2400" b="1" dirty="0">
               <a:solidFill>

--- a/output/★指導課訪問★３・４校時指導助言資料（例）.pptx
+++ b/output/★指導課訪問★３・４校時指導助言資料（例）.pptx
@@ -7839,8 +7839,8 @@
         </p:nvSpPr>
         <p:spPr bwMode="white">
           <a:xfrm>
-            <a:off x="489758" y="803740"/>
-            <a:ext cx="3628642" cy="517065"/>
+            <a:off x="489758" y="658368"/>
+            <a:ext cx="3628642" cy="749808"/>
           </a:xfrm>
           <a:prstGeom prst="rect">
             <a:avLst/>
@@ -7858,36 +7858,26 @@
           </a:bodyPr>
           <a:lstStyle/>
           <a:p>
-            <a:pPr>
-              <a:lnSpc>
-                <a:spcPct val="120000"/>
-              </a:lnSpc>
-            </a:pPr>
+            <a:pPr algn="l"/>
             <a:r>
-              <a:rPr lang="ja-JP" altLang="en-US" sz="2400" b="1" dirty="0">
-                <a:solidFill>
-                  <a:schemeClr val="tx1">
-                    <a:lumMod val="65000"/>
-                    <a:lumOff val="35000"/>
-                  </a:schemeClr>
-                </a:solidFill>
+              <a:rPr lang="ja-JP" sz="2000" b="1" dirty="0">
                 <a:latin typeface="メイリオ"/>
                 <a:ea typeface="メイリオ"/>
                 <a:cs typeface="メイリオ"/>
               </a:rPr>
               <a:t>1-全　体育（髙井他）</a:t>
             </a:r>
-            <a:endParaRPr lang="en-US" altLang="ja-JP" sz="2400" b="1" dirty="0">
-              <a:solidFill>
-                <a:schemeClr val="tx1">
-                  <a:lumMod val="65000"/>
-                  <a:lumOff val="35000"/>
-                </a:schemeClr>
-              </a:solidFill>
-              <a:latin typeface="メイリオ" panose="020B0604030504040204" pitchFamily="50" charset="-128"/>
-              <a:ea typeface="メイリオ" panose="020B0604030504040204" pitchFamily="50" charset="-128"/>
-              <a:cs typeface="メイリオ" panose="020B0604030504040204" pitchFamily="50" charset="-128"/>
-            </a:endParaRPr>
+          </a:p>
+          <a:p>
+            <a:pPr algn="l"/>
+            <a:r>
+              <a:rPr lang="ja-JP" sz="1400" b="0" dirty="0">
+                <a:latin typeface="メイリオ"/>
+                <a:ea typeface="メイリオ"/>
+                <a:cs typeface="メイリオ"/>
+              </a:rPr>
+              <a:t>「ボールをなげるのだ！あてるのだ！たおすのだ！」</a:t>
+            </a:r>
           </a:p>
         </p:txBody>
       </p:sp>
@@ -7956,8 +7946,8 @@
         </p:nvSpPr>
         <p:spPr bwMode="white">
           <a:xfrm>
-            <a:off x="4983758" y="803740"/>
-            <a:ext cx="3571042" cy="517065"/>
+            <a:off x="4983758" y="658368"/>
+            <a:ext cx="3571042" cy="749808"/>
           </a:xfrm>
           <a:prstGeom prst="rect">
             <a:avLst/>
@@ -7975,36 +7965,26 @@
           </a:bodyPr>
           <a:lstStyle/>
           <a:p>
-            <a:pPr>
-              <a:lnSpc>
-                <a:spcPct val="120000"/>
-              </a:lnSpc>
-            </a:pPr>
+            <a:pPr algn="l"/>
             <a:r>
-              <a:rPr lang="ja-JP" altLang="en-US" sz="2400" b="1" dirty="0">
-                <a:solidFill>
-                  <a:schemeClr val="tx1">
-                    <a:lumMod val="65000"/>
-                    <a:lumOff val="35000"/>
-                  </a:schemeClr>
-                </a:solidFill>
+              <a:rPr lang="ja-JP" sz="2000" b="1" dirty="0">
                 <a:latin typeface="メイリオ"/>
                 <a:ea typeface="メイリオ"/>
                 <a:cs typeface="メイリオ"/>
               </a:rPr>
               <a:t>5-1　図工（鈴木寛明）</a:t>
             </a:r>
-            <a:endParaRPr lang="en-US" altLang="ja-JP" sz="2400" b="1" dirty="0">
-              <a:solidFill>
-                <a:schemeClr val="tx1">
-                  <a:lumMod val="65000"/>
-                  <a:lumOff val="35000"/>
-                </a:schemeClr>
-              </a:solidFill>
-              <a:latin typeface="メイリオ" panose="020B0604030504040204" pitchFamily="50" charset="-128"/>
-              <a:ea typeface="メイリオ" panose="020B0604030504040204" pitchFamily="50" charset="-128"/>
-              <a:cs typeface="メイリオ" panose="020B0604030504040204" pitchFamily="50" charset="-128"/>
-            </a:endParaRPr>
+          </a:p>
+          <a:p>
+            <a:pPr algn="l"/>
+            <a:r>
+              <a:rPr lang="ja-JP" sz="1400" b="0" dirty="0">
+                <a:latin typeface="メイリオ"/>
+                <a:ea typeface="メイリオ"/>
+                <a:cs typeface="メイリオ"/>
+              </a:rPr>
+              <a:t>「オナマエアート」</a:t>
+            </a:r>
           </a:p>
         </p:txBody>
       </p:sp>
@@ -8220,8 +8200,8 @@
         </p:nvSpPr>
         <p:spPr bwMode="white">
           <a:xfrm>
-            <a:off x="489758" y="900000"/>
-            <a:ext cx="4000000" cy="517065"/>
+            <a:off x="489758" y="822960"/>
+            <a:ext cx="4000000" cy="914400"/>
           </a:xfrm>
           <a:prstGeom prst="rect">
             <a:avLst/>
@@ -8239,36 +8219,26 @@
           </a:bodyPr>
           <a:lstStyle/>
           <a:p>
-            <a:pPr>
-              <a:lnSpc>
-                <a:spcPct val="120000"/>
-              </a:lnSpc>
-            </a:pPr>
+            <a:pPr algn="l"/>
             <a:r>
-              <a:rPr lang="ja-JP" altLang="en-US" sz="2400" b="1" dirty="0">
-                <a:solidFill>
-                  <a:schemeClr val="tx1">
-                    <a:lumMod val="65000"/>
-                    <a:lumOff val="35000"/>
-                  </a:schemeClr>
-                </a:solidFill>
+              <a:rPr lang="ja-JP" sz="2200" b="1" dirty="0">
                 <a:latin typeface="メイリオ"/>
                 <a:ea typeface="メイリオ"/>
                 <a:cs typeface="メイリオ"/>
               </a:rPr>
               <a:t>2-1　算数（岩佐）</a:t>
             </a:r>
-            <a:endParaRPr lang="en-US" altLang="ja-JP" sz="2400" b="1" dirty="0">
-              <a:solidFill>
-                <a:schemeClr val="tx1">
-                  <a:lumMod val="65000"/>
-                  <a:lumOff val="35000"/>
-                </a:schemeClr>
-              </a:solidFill>
-              <a:latin typeface="メイリオ" panose="020B0604030504040204" pitchFamily="50" charset="-128"/>
-              <a:ea typeface="メイリオ" panose="020B0604030504040204" pitchFamily="50" charset="-128"/>
-              <a:cs typeface="メイリオ" panose="020B0604030504040204" pitchFamily="50" charset="-128"/>
-            </a:endParaRPr>
+          </a:p>
+          <a:p>
+            <a:pPr algn="l"/>
+            <a:r>
+              <a:rPr lang="ja-JP" sz="1600" b="0" dirty="0">
+                <a:latin typeface="メイリオ"/>
+                <a:ea typeface="メイリオ"/>
+                <a:cs typeface="メイリオ"/>
+              </a:rPr>
+              <a:t>「長さのたんい」</a:t>
+            </a:r>
           </a:p>
         </p:txBody>
       </p:sp>
@@ -8286,8 +8256,8 @@
         </p:nvSpPr>
         <p:spPr bwMode="white">
           <a:xfrm>
-            <a:off x="4700000" y="900000"/>
-            <a:ext cx="4000000" cy="517065"/>
+            <a:off x="4700000" y="822960"/>
+            <a:ext cx="4000000" cy="914400"/>
           </a:xfrm>
           <a:prstGeom prst="rect">
             <a:avLst/>
@@ -8305,36 +8275,26 @@
           </a:bodyPr>
           <a:lstStyle/>
           <a:p>
-            <a:pPr>
-              <a:lnSpc>
-                <a:spcPct val="120000"/>
-              </a:lnSpc>
-            </a:pPr>
+            <a:pPr algn="l"/>
             <a:r>
-              <a:rPr lang="ja-JP" altLang="en-US" sz="2400" b="1" dirty="0">
-                <a:solidFill>
-                  <a:schemeClr val="tx1">
-                    <a:lumMod val="65000"/>
-                    <a:lumOff val="35000"/>
-                  </a:schemeClr>
-                </a:solidFill>
+              <a:rPr lang="ja-JP" sz="2200" b="1" dirty="0">
                 <a:latin typeface="メイリオ"/>
                 <a:ea typeface="メイリオ"/>
                 <a:cs typeface="メイリオ"/>
               </a:rPr>
               <a:t>5-3　社会（小松）</a:t>
             </a:r>
-            <a:endParaRPr lang="en-US" altLang="ja-JP" sz="2400" b="1" dirty="0">
-              <a:solidFill>
-                <a:schemeClr val="tx1">
-                  <a:lumMod val="65000"/>
-                  <a:lumOff val="35000"/>
-                </a:schemeClr>
-              </a:solidFill>
-              <a:latin typeface="メイリオ" panose="020B0604030504040204" pitchFamily="50" charset="-128"/>
-              <a:ea typeface="メイリオ" panose="020B0604030504040204" pitchFamily="50" charset="-128"/>
-              <a:cs typeface="メイリオ" panose="020B0604030504040204" pitchFamily="50" charset="-128"/>
-            </a:endParaRPr>
+          </a:p>
+          <a:p>
+            <a:pPr algn="l"/>
+            <a:r>
+              <a:rPr lang="ja-JP" sz="1600" b="0" dirty="0">
+                <a:latin typeface="メイリオ"/>
+                <a:ea typeface="メイリオ"/>
+                <a:cs typeface="メイリオ"/>
+              </a:rPr>
+              <a:t>「日本の国土とわたしたちのくらし」</a:t>
+            </a:r>
           </a:p>
         </p:txBody>
       </p:sp>
@@ -8352,8 +8312,8 @@
         </p:nvSpPr>
         <p:spPr bwMode="white">
           <a:xfrm>
-            <a:off x="489758" y="2700000"/>
-            <a:ext cx="4000000" cy="517065"/>
+            <a:off x="489758" y="2606040"/>
+            <a:ext cx="4000000" cy="914400"/>
           </a:xfrm>
           <a:prstGeom prst="rect">
             <a:avLst/>
@@ -8371,36 +8331,26 @@
           </a:bodyPr>
           <a:lstStyle/>
           <a:p>
-            <a:pPr>
-              <a:lnSpc>
-                <a:spcPct val="120000"/>
-              </a:lnSpc>
-            </a:pPr>
+            <a:pPr algn="l"/>
             <a:r>
-              <a:rPr lang="ja-JP" altLang="en-US" sz="2400" b="1" dirty="0">
-                <a:solidFill>
-                  <a:schemeClr val="tx1">
-                    <a:lumMod val="65000"/>
-                    <a:lumOff val="35000"/>
-                  </a:schemeClr>
-                </a:solidFill>
+              <a:rPr lang="ja-JP" sz="2200" b="1" dirty="0">
                 <a:latin typeface="メイリオ"/>
                 <a:ea typeface="メイリオ"/>
                 <a:cs typeface="メイリオ"/>
               </a:rPr>
               <a:t>4-2　国語（工藤）</a:t>
             </a:r>
-            <a:endParaRPr lang="en-US" altLang="ja-JP" sz="2400" b="1" dirty="0">
-              <a:solidFill>
-                <a:schemeClr val="tx1">
-                  <a:lumMod val="65000"/>
-                  <a:lumOff val="35000"/>
-                </a:schemeClr>
-              </a:solidFill>
-              <a:latin typeface="メイリオ" panose="020B0604030504040204" pitchFamily="50" charset="-128"/>
-              <a:ea typeface="メイリオ" panose="020B0604030504040204" pitchFamily="50" charset="-128"/>
-              <a:cs typeface="メイリオ" panose="020B0604030504040204" pitchFamily="50" charset="-128"/>
-            </a:endParaRPr>
+          </a:p>
+          <a:p>
+            <a:pPr algn="l"/>
+            <a:r>
+              <a:rPr lang="ja-JP" sz="1600" b="0" dirty="0">
+                <a:latin typeface="メイリオ"/>
+                <a:ea typeface="メイリオ"/>
+                <a:cs typeface="メイリオ"/>
+              </a:rPr>
+              <a:t>「アップとルーズで伝える」</a:t>
+            </a:r>
           </a:p>
         </p:txBody>
       </p:sp>
@@ -8418,8 +8368,8 @@
         </p:nvSpPr>
         <p:spPr bwMode="white">
           <a:xfrm>
-            <a:off x="4700000" y="2700000"/>
-            <a:ext cx="4000000" cy="517065"/>
+            <a:off x="4700000" y="2606040"/>
+            <a:ext cx="4000000" cy="914400"/>
           </a:xfrm>
           <a:prstGeom prst="rect">
             <a:avLst/>
@@ -8437,36 +8387,26 @@
           </a:bodyPr>
           <a:lstStyle/>
           <a:p>
-            <a:pPr>
-              <a:lnSpc>
-                <a:spcPct val="120000"/>
-              </a:lnSpc>
-            </a:pPr>
+            <a:pPr algn="l"/>
             <a:r>
-              <a:rPr lang="ja-JP" altLang="en-US" sz="2400" b="1" dirty="0">
-                <a:solidFill>
-                  <a:schemeClr val="tx1">
-                    <a:lumMod val="65000"/>
-                    <a:lumOff val="35000"/>
-                  </a:schemeClr>
-                </a:solidFill>
+              <a:rPr lang="ja-JP" sz="2200" b="1" dirty="0">
                 <a:latin typeface="メイリオ"/>
                 <a:ea typeface="メイリオ"/>
                 <a:cs typeface="メイリオ"/>
               </a:rPr>
               <a:t>6-3　道徳（松田）</a:t>
             </a:r>
-            <a:endParaRPr lang="en-US" altLang="ja-JP" sz="2400" b="1" dirty="0">
-              <a:solidFill>
-                <a:schemeClr val="tx1">
-                  <a:lumMod val="65000"/>
-                  <a:lumOff val="35000"/>
-                </a:schemeClr>
-              </a:solidFill>
-              <a:latin typeface="メイリオ" panose="020B0604030504040204" pitchFamily="50" charset="-128"/>
-              <a:ea typeface="メイリオ" panose="020B0604030504040204" pitchFamily="50" charset="-128"/>
-              <a:cs typeface="メイリオ" panose="020B0604030504040204" pitchFamily="50" charset="-128"/>
-            </a:endParaRPr>
+          </a:p>
+          <a:p>
+            <a:pPr algn="l"/>
+            <a:r>
+              <a:rPr lang="ja-JP" sz="1600" b="0" dirty="0">
+                <a:latin typeface="メイリオ"/>
+                <a:ea typeface="メイリオ"/>
+                <a:cs typeface="メイリオ"/>
+              </a:rPr>
+              <a:t>「子ども会のキャンプ」</a:t>
+            </a:r>
           </a:p>
         </p:txBody>
       </p:sp>
@@ -8631,8 +8571,8 @@
         </p:nvSpPr>
         <p:spPr bwMode="white">
           <a:xfrm>
-            <a:off x="489758" y="900000"/>
-            <a:ext cx="4000000" cy="517065"/>
+            <a:off x="489758" y="822960"/>
+            <a:ext cx="4000000" cy="914400"/>
           </a:xfrm>
           <a:prstGeom prst="rect">
             <a:avLst/>
@@ -8650,36 +8590,26 @@
           </a:bodyPr>
           <a:lstStyle/>
           <a:p>
-            <a:pPr>
-              <a:lnSpc>
-                <a:spcPct val="120000"/>
-              </a:lnSpc>
-            </a:pPr>
+            <a:pPr algn="l"/>
             <a:r>
-              <a:rPr lang="ja-JP" altLang="en-US" sz="2400" b="1" dirty="0">
-                <a:solidFill>
-                  <a:schemeClr val="tx1">
-                    <a:lumMod val="65000"/>
-                    <a:lumOff val="35000"/>
-                  </a:schemeClr>
-                </a:solidFill>
+              <a:rPr lang="ja-JP" sz="2200" b="1" dirty="0">
                 <a:latin typeface="メイリオ"/>
                 <a:ea typeface="メイリオ"/>
                 <a:cs typeface="メイリオ"/>
               </a:rPr>
               <a:t>4-1　社会（三井）</a:t>
             </a:r>
-            <a:endParaRPr lang="en-US" altLang="ja-JP" sz="2400" b="1" dirty="0">
-              <a:solidFill>
-                <a:schemeClr val="tx1">
-                  <a:lumMod val="65000"/>
-                  <a:lumOff val="35000"/>
-                </a:schemeClr>
-              </a:solidFill>
-              <a:latin typeface="メイリオ" panose="020B0604030504040204" pitchFamily="50" charset="-128"/>
-              <a:ea typeface="メイリオ" panose="020B0604030504040204" pitchFamily="50" charset="-128"/>
-              <a:cs typeface="メイリオ" panose="020B0604030504040204" pitchFamily="50" charset="-128"/>
-            </a:endParaRPr>
+          </a:p>
+          <a:p>
+            <a:pPr algn="l"/>
+            <a:r>
+              <a:rPr lang="ja-JP" sz="1600" b="0" dirty="0">
+                <a:latin typeface="メイリオ"/>
+                <a:ea typeface="メイリオ"/>
+                <a:cs typeface="メイリオ"/>
+              </a:rPr>
+              <a:t>「健康なくらし」</a:t>
+            </a:r>
           </a:p>
         </p:txBody>
       </p:sp>
@@ -8697,8 +8627,8 @@
         </p:nvSpPr>
         <p:spPr bwMode="white">
           <a:xfrm>
-            <a:off x="4700000" y="900000"/>
-            <a:ext cx="4000000" cy="517065"/>
+            <a:off x="4700000" y="822960"/>
+            <a:ext cx="4000000" cy="914400"/>
           </a:xfrm>
           <a:prstGeom prst="rect">
             <a:avLst/>
@@ -8716,36 +8646,26 @@
           </a:bodyPr>
           <a:lstStyle/>
           <a:p>
-            <a:pPr>
-              <a:lnSpc>
-                <a:spcPct val="120000"/>
-              </a:lnSpc>
-            </a:pPr>
+            <a:pPr algn="l"/>
             <a:r>
-              <a:rPr lang="ja-JP" altLang="en-US" sz="2400" b="1" dirty="0">
-                <a:solidFill>
-                  <a:schemeClr val="tx1">
-                    <a:lumMod val="65000"/>
-                    <a:lumOff val="35000"/>
-                  </a:schemeClr>
-                </a:solidFill>
+              <a:rPr lang="ja-JP" sz="2200" b="1" dirty="0">
                 <a:latin typeface="メイリオ"/>
                 <a:ea typeface="メイリオ"/>
                 <a:cs typeface="メイリオ"/>
               </a:rPr>
               <a:t>5-2　体育（古江）</a:t>
             </a:r>
-            <a:endParaRPr lang="en-US" altLang="ja-JP" sz="2400" b="1" dirty="0">
-              <a:solidFill>
-                <a:schemeClr val="tx1">
-                  <a:lumMod val="65000"/>
-                  <a:lumOff val="35000"/>
-                </a:schemeClr>
-              </a:solidFill>
-              <a:latin typeface="メイリオ" panose="020B0604030504040204" pitchFamily="50" charset="-128"/>
-              <a:ea typeface="メイリオ" panose="020B0604030504040204" pitchFamily="50" charset="-128"/>
-              <a:cs typeface="メイリオ" panose="020B0604030504040204" pitchFamily="50" charset="-128"/>
-            </a:endParaRPr>
+          </a:p>
+          <a:p>
+            <a:pPr algn="l"/>
+            <a:r>
+              <a:rPr lang="ja-JP" sz="1600" b="0" dirty="0">
+                <a:latin typeface="メイリオ"/>
+                <a:ea typeface="メイリオ"/>
+                <a:cs typeface="メイリオ"/>
+              </a:rPr>
+              <a:t>「ハンドボール」</a:t>
+            </a:r>
           </a:p>
         </p:txBody>
       </p:sp>
@@ -8763,8 +8683,8 @@
         </p:nvSpPr>
         <p:spPr bwMode="white">
           <a:xfrm>
-            <a:off x="489758" y="2700000"/>
-            <a:ext cx="4000000" cy="517065"/>
+            <a:off x="489758" y="2606040"/>
+            <a:ext cx="4000000" cy="914400"/>
           </a:xfrm>
           <a:prstGeom prst="rect">
             <a:avLst/>
@@ -8782,36 +8702,26 @@
           </a:bodyPr>
           <a:lstStyle/>
           <a:p>
-            <a:pPr>
-              <a:lnSpc>
-                <a:spcPct val="120000"/>
-              </a:lnSpc>
-            </a:pPr>
+            <a:pPr algn="l"/>
             <a:r>
-              <a:rPr lang="ja-JP" altLang="en-US" sz="2400" b="1" dirty="0">
-                <a:solidFill>
-                  <a:schemeClr val="tx1">
-                    <a:lumMod val="65000"/>
-                    <a:lumOff val="35000"/>
-                  </a:schemeClr>
-                </a:solidFill>
+              <a:rPr lang="ja-JP" sz="2200" b="1" dirty="0">
                 <a:latin typeface="メイリオ"/>
                 <a:ea typeface="メイリオ"/>
                 <a:cs typeface="メイリオ"/>
               </a:rPr>
               <a:t>6-2　外国語（木下）</a:t>
             </a:r>
-            <a:endParaRPr lang="en-US" altLang="ja-JP" sz="2400" b="1" dirty="0">
-              <a:solidFill>
-                <a:schemeClr val="tx1">
-                  <a:lumMod val="65000"/>
-                  <a:lumOff val="35000"/>
-                </a:schemeClr>
-              </a:solidFill>
-              <a:latin typeface="メイリオ" panose="020B0604030504040204" pitchFamily="50" charset="-128"/>
-              <a:ea typeface="メイリオ" panose="020B0604030504040204" pitchFamily="50" charset="-128"/>
-              <a:cs typeface="メイリオ" panose="020B0604030504040204" pitchFamily="50" charset="-128"/>
-            </a:endParaRPr>
+          </a:p>
+          <a:p>
+            <a:pPr algn="l"/>
+            <a:r>
+              <a:rPr lang="ja-JP" sz="1600" b="0" dirty="0">
+                <a:latin typeface="メイリオ"/>
+                <a:ea typeface="メイリオ"/>
+                <a:cs typeface="メイリオ"/>
+              </a:rPr>
+              <a:t>「Welcome to Japan.」</a:t>
+            </a:r>
           </a:p>
         </p:txBody>
       </p:sp>
@@ -8829,8 +8739,8 @@
         </p:nvSpPr>
         <p:spPr bwMode="white">
           <a:xfrm>
-            <a:off x="4700000" y="2700000"/>
-            <a:ext cx="4000000" cy="517065"/>
+            <a:off x="4700000" y="2606040"/>
+            <a:ext cx="4000000" cy="914400"/>
           </a:xfrm>
           <a:prstGeom prst="rect">
             <a:avLst/>
@@ -8848,36 +8758,26 @@
           </a:bodyPr>
           <a:lstStyle/>
           <a:p>
-            <a:pPr>
-              <a:lnSpc>
-                <a:spcPct val="120000"/>
-              </a:lnSpc>
-            </a:pPr>
+            <a:pPr algn="l"/>
             <a:r>
-              <a:rPr lang="ja-JP" altLang="en-US" sz="2400" b="1" dirty="0">
-                <a:solidFill>
-                  <a:schemeClr val="tx1">
-                    <a:lumMod val="65000"/>
-                    <a:lumOff val="35000"/>
-                  </a:schemeClr>
-                </a:solidFill>
+              <a:rPr lang="ja-JP" sz="2200" b="1" dirty="0">
                 <a:latin typeface="メイリオ"/>
                 <a:ea typeface="メイリオ"/>
                 <a:cs typeface="メイリオ"/>
               </a:rPr>
               <a:t>2-2　道徳（中牧）</a:t>
             </a:r>
-            <a:endParaRPr lang="en-US" altLang="ja-JP" sz="2400" b="1" dirty="0">
-              <a:solidFill>
-                <a:schemeClr val="tx1">
-                  <a:lumMod val="65000"/>
-                  <a:lumOff val="35000"/>
-                </a:schemeClr>
-              </a:solidFill>
-              <a:latin typeface="メイリオ" panose="020B0604030504040204" pitchFamily="50" charset="-128"/>
-              <a:ea typeface="メイリオ" panose="020B0604030504040204" pitchFamily="50" charset="-128"/>
-              <a:cs typeface="メイリオ" panose="020B0604030504040204" pitchFamily="50" charset="-128"/>
-            </a:endParaRPr>
+          </a:p>
+          <a:p>
+            <a:pPr algn="l"/>
+            <a:r>
+              <a:rPr lang="ja-JP" sz="1600" b="0" dirty="0">
+                <a:latin typeface="メイリオ"/>
+                <a:ea typeface="メイリオ"/>
+                <a:cs typeface="メイリオ"/>
+              </a:rPr>
+              <a:t>「けんかをしたけど」</a:t>
+            </a:r>
           </a:p>
         </p:txBody>
       </p:sp>

--- a/output/★指導課訪問★３・４校時指導助言資料（例）.pptx
+++ b/output/★指導課訪問★３・４校時指導助言資料（例）.pptx
@@ -5,20 +5,27 @@
     <p:sldMasterId id="2147483670" r:id="rId1"/>
   </p:sldMasterIdLst>
   <p:notesMasterIdLst>
-    <p:notesMasterId r:id="rId10"/>
+    <p:notesMasterId r:id="rId16"/>
   </p:notesMasterIdLst>
   <p:handoutMasterIdLst>
-    <p:handoutMasterId r:id="rId11"/>
+    <p:handoutMasterId r:id="rId17"/>
   </p:handoutMasterIdLst>
   <p:sldIdLst>
     <p:sldId id="256" r:id="rId2"/>
-    <p:sldId id="525" r:id="rId3"/>
-    <p:sldId id="519" r:id="rId4"/>
-    <p:sldId id="515" r:id="rId5"/>
-    <p:sldId id="526" r:id="rId6"/>
-    <p:sldId id="527" r:id="rId7"/>
-    <p:sldId id="528" r:id="rId8"/>
-    <p:sldId id="521" r:id="rId9"/>
+    <p:sldId id="539" r:id="rId3"/>
+    <p:sldId id="731" r:id="rId4"/>
+    <p:sldId id="525" r:id="rId5"/>
+    <p:sldId id="262" r:id="rId6"/>
+    <p:sldId id="519" r:id="rId7"/>
+    <p:sldId id="515" r:id="rId8"/>
+    <p:sldId id="526" r:id="rId9"/>
+    <p:sldId id="732" r:id="rId22"/>
+    <p:sldId id="527" r:id="rId10"/>
+    <p:sldId id="729" r:id="rId11"/>
+    <p:sldId id="521" r:id="rId12"/>
+    <p:sldId id="728" r:id="rId13"/>
+    <p:sldId id="355" r:id="rId14"/>
+    <p:sldId id="727" r:id="rId15"/>
   </p:sldIdLst>
   <p:sldSz cx="9144000" cy="5143500" type="screen16x9"/>
   <p:notesSz cx="9869488" cy="6737350"/>
@@ -352,7 +359,7 @@
           <a:p>
             <a:fld id="{EC2A2779-45BC-43BE-9EC8-D38CFB0D7052}" type="datetimeFigureOut">
               <a:rPr kumimoji="1" lang="ja-JP" altLang="en-US" smtClean="0"/>
-              <a:t>2026/4/9</a:t>
+              <a:t>2026/5/26</a:t>
             </a:fld>
             <a:endParaRPr kumimoji="1" lang="ja-JP" altLang="en-US"/>
           </a:p>
@@ -980,7 +987,660 @@
 </p:notes>
 </file>
 
+<file path=ppt/notesSlides/notesSlide10.xml><?xml version="1.0" encoding="utf-8"?>
+<p:notes xmlns:a="http://schemas.openxmlformats.org/drawingml/2006/main" xmlns:r="http://schemas.openxmlformats.org/officeDocument/2006/relationships" xmlns:p="http://schemas.openxmlformats.org/presentationml/2006/main">
+  <p:cSld>
+    <p:spTree>
+      <p:nvGrpSpPr>
+        <p:cNvPr id="1" name="">
+          <a:extLst>
+            <a:ext uri="{FF2B5EF4-FFF2-40B4-BE49-F238E27FC236}">
+              <a16:creationId xmlns:a16="http://schemas.microsoft.com/office/drawing/2014/main" id="{C0287E78-44DE-2A20-A6AE-89EEA38EEB28}"/>
+            </a:ext>
+          </a:extLst>
+        </p:cNvPr>
+        <p:cNvGrpSpPr/>
+        <p:nvPr/>
+      </p:nvGrpSpPr>
+      <p:grpSpPr>
+        <a:xfrm>
+          <a:off x="0" y="0"/>
+          <a:ext cx="0" cy="0"/>
+          <a:chOff x="0" y="0"/>
+          <a:chExt cx="0" cy="0"/>
+        </a:xfrm>
+      </p:grpSpPr>
+      <p:sp>
+        <p:nvSpPr>
+          <p:cNvPr id="2" name="スライド イメージ プレースホルダー 1">
+            <a:extLst>
+              <a:ext uri="{FF2B5EF4-FFF2-40B4-BE49-F238E27FC236}">
+                <a16:creationId xmlns:a16="http://schemas.microsoft.com/office/drawing/2014/main" id="{CCDBD9E5-D7BE-00C8-1052-4030E3A1EECE}"/>
+              </a:ext>
+            </a:extLst>
+          </p:cNvPr>
+          <p:cNvSpPr>
+            <a:spLocks noGrp="1" noRot="1" noChangeAspect="1"/>
+          </p:cNvSpPr>
+          <p:nvPr>
+            <p:ph type="sldImg"/>
+          </p:nvPr>
+        </p:nvSpPr>
+        <p:spPr/>
+      </p:sp>
+      <p:sp>
+        <p:nvSpPr>
+          <p:cNvPr id="3" name="ノート プレースホルダー 2">
+            <a:extLst>
+              <a:ext uri="{FF2B5EF4-FFF2-40B4-BE49-F238E27FC236}">
+                <a16:creationId xmlns:a16="http://schemas.microsoft.com/office/drawing/2014/main" id="{20D73994-14EE-4D23-8910-38A32DD0CA37}"/>
+              </a:ext>
+            </a:extLst>
+          </p:cNvPr>
+          <p:cNvSpPr>
+            <a:spLocks noGrp="1"/>
+          </p:cNvSpPr>
+          <p:nvPr>
+            <p:ph type="body" idx="1"/>
+          </p:nvPr>
+        </p:nvSpPr>
+        <p:spPr/>
+        <p:txBody>
+          <a:bodyPr/>
+          <a:lstStyle/>
+          <a:p>
+            <a:endParaRPr kumimoji="1" lang="ja-JP" altLang="en-US" dirty="0"/>
+          </a:p>
+        </p:txBody>
+      </p:sp>
+      <p:sp>
+        <p:nvSpPr>
+          <p:cNvPr id="4" name="日付プレースホルダー 3">
+            <a:extLst>
+              <a:ext uri="{FF2B5EF4-FFF2-40B4-BE49-F238E27FC236}">
+                <a16:creationId xmlns:a16="http://schemas.microsoft.com/office/drawing/2014/main" id="{48CBB6B2-776E-F92E-1FBB-D8F94A1AEED5}"/>
+              </a:ext>
+            </a:extLst>
+          </p:cNvPr>
+          <p:cNvSpPr>
+            <a:spLocks noGrp="1"/>
+          </p:cNvSpPr>
+          <p:nvPr>
+            <p:ph type="dt" idx="10"/>
+          </p:nvPr>
+        </p:nvSpPr>
+        <p:spPr/>
+        <p:txBody>
+          <a:bodyPr/>
+          <a:lstStyle/>
+          <a:p>
+            <a:r>
+              <a:rPr kumimoji="1" lang="en-US" altLang="ja-JP" dirty="0"/>
+              <a:t>2021/3/24</a:t>
+            </a:r>
+            <a:endParaRPr kumimoji="1" lang="ja-JP" altLang="en-US"/>
+          </a:p>
+        </p:txBody>
+      </p:sp>
+      <p:sp>
+        <p:nvSpPr>
+          <p:cNvPr id="5" name="スライド番号プレースホルダー 4">
+            <a:extLst>
+              <a:ext uri="{FF2B5EF4-FFF2-40B4-BE49-F238E27FC236}">
+                <a16:creationId xmlns:a16="http://schemas.microsoft.com/office/drawing/2014/main" id="{5FCCF6C3-8655-85C8-088D-AAF3E0A292D6}"/>
+              </a:ext>
+            </a:extLst>
+          </p:cNvPr>
+          <p:cNvSpPr>
+            <a:spLocks noGrp="1"/>
+          </p:cNvSpPr>
+          <p:nvPr>
+            <p:ph type="sldNum" sz="quarter" idx="11"/>
+          </p:nvPr>
+        </p:nvSpPr>
+        <p:spPr/>
+        <p:txBody>
+          <a:bodyPr/>
+          <a:lstStyle/>
+          <a:p>
+            <a:fld id="{EBF652ED-4E8E-4FA7-8EF4-2DDF6FB21FCE}" type="slidenum">
+              <a:rPr kumimoji="1" lang="ja-JP" altLang="en-US" smtClean="0"/>
+              <a:t>11</a:t>
+            </a:fld>
+            <a:endParaRPr kumimoji="1" lang="ja-JP" altLang="en-US"/>
+          </a:p>
+        </p:txBody>
+      </p:sp>
+    </p:spTree>
+    <p:extLst>
+      <p:ext uri="{BB962C8B-B14F-4D97-AF65-F5344CB8AC3E}">
+        <p14:creationId xmlns:p14="http://schemas.microsoft.com/office/powerpoint/2010/main" val="293604143"/>
+      </p:ext>
+    </p:extLst>
+  </p:cSld>
+  <p:clrMapOvr>
+    <a:masterClrMapping/>
+  </p:clrMapOvr>
+</p:notes>
+</file>
+
+<file path=ppt/notesSlides/notesSlide11.xml><?xml version="1.0" encoding="utf-8"?>
+<p:notes xmlns:a="http://schemas.openxmlformats.org/drawingml/2006/main" xmlns:r="http://schemas.openxmlformats.org/officeDocument/2006/relationships" xmlns:p="http://schemas.openxmlformats.org/presentationml/2006/main" showMasterSp="0" showMasterPhAnim="0">
+  <p:cSld>
+    <p:spTree>
+      <p:nvGrpSpPr>
+        <p:cNvPr id="1" name="Shape 235"/>
+        <p:cNvGrpSpPr/>
+        <p:nvPr/>
+      </p:nvGrpSpPr>
+      <p:grpSpPr>
+        <a:xfrm>
+          <a:off x="0" y="0"/>
+          <a:ext cx="0" cy="0"/>
+          <a:chOff x="0" y="0"/>
+          <a:chExt cx="0" cy="0"/>
+        </a:xfrm>
+      </p:grpSpPr>
+      <p:sp>
+        <p:nvSpPr>
+          <p:cNvPr id="236" name="Google Shape;236;g169ca163b2d_2_83:notes"/>
+          <p:cNvSpPr txBox="1">
+            <a:spLocks noGrp="1"/>
+          </p:cNvSpPr>
+          <p:nvPr>
+            <p:ph type="body" idx="1"/>
+          </p:nvPr>
+        </p:nvSpPr>
+        <p:spPr>
+          <a:xfrm>
+            <a:off x="464041" y="6907189"/>
+            <a:ext cx="3712315" cy="6543652"/>
+          </a:xfrm>
+          <a:prstGeom prst="rect">
+            <a:avLst/>
+          </a:prstGeom>
+        </p:spPr>
+        <p:txBody>
+          <a:bodyPr spcFirstLastPara="1" wrap="square" lIns="91425" tIns="91425" rIns="91425" bIns="91425" anchor="t" anchorCtr="0">
+            <a:noAutofit/>
+          </a:bodyPr>
+          <a:lstStyle/>
+          <a:p>
+            <a:pPr marL="0" lvl="0" indent="0" algn="l" rtl="0">
+              <a:spcBef>
+                <a:spcPts val="0"/>
+              </a:spcBef>
+              <a:spcAft>
+                <a:spcPts val="0"/>
+              </a:spcAft>
+              <a:buNone/>
+            </a:pPr>
+            <a:endParaRPr dirty="0"/>
+          </a:p>
+        </p:txBody>
+      </p:sp>
+      <p:sp>
+        <p:nvSpPr>
+          <p:cNvPr id="237" name="Google Shape;237;g169ca163b2d_2_83:notes"/>
+          <p:cNvSpPr>
+            <a:spLocks noGrp="1" noRot="1" noChangeAspect="1"/>
+          </p:cNvSpPr>
+          <p:nvPr>
+            <p:ph type="sldImg" idx="2"/>
+          </p:nvPr>
+        </p:nvSpPr>
+        <p:spPr>
+          <a:xfrm>
+            <a:off x="-2525713" y="1090613"/>
+            <a:ext cx="9693276" cy="5453062"/>
+          </a:xfrm>
+          <a:custGeom>
+            <a:avLst/>
+            <a:gdLst/>
+            <a:ahLst/>
+            <a:cxnLst/>
+            <a:rect l="l" t="t" r="r" b="b"/>
+            <a:pathLst>
+              <a:path w="120000" h="120000" extrusionOk="0">
+                <a:moveTo>
+                  <a:pt x="0" y="0"/>
+                </a:moveTo>
+                <a:lnTo>
+                  <a:pt x="120000" y="0"/>
+                </a:lnTo>
+                <a:lnTo>
+                  <a:pt x="120000" y="120000"/>
+                </a:lnTo>
+                <a:lnTo>
+                  <a:pt x="0" y="120000"/>
+                </a:lnTo>
+                <a:close/>
+              </a:path>
+            </a:pathLst>
+          </a:custGeom>
+        </p:spPr>
+      </p:sp>
+    </p:spTree>
+    <p:extLst>
+      <p:ext uri="{BB962C8B-B14F-4D97-AF65-F5344CB8AC3E}">
+        <p14:creationId xmlns:p14="http://schemas.microsoft.com/office/powerpoint/2010/main" val="1050499582"/>
+      </p:ext>
+    </p:extLst>
+  </p:cSld>
+  <p:clrMapOvr>
+    <a:masterClrMapping/>
+  </p:clrMapOvr>
+</p:notes>
+</file>
+
+<file path=ppt/notesSlides/notesSlide12.xml><?xml version="1.0" encoding="utf-8"?>
+<p:notes xmlns:a="http://schemas.openxmlformats.org/drawingml/2006/main" xmlns:r="http://schemas.openxmlformats.org/officeDocument/2006/relationships" xmlns:p="http://schemas.openxmlformats.org/presentationml/2006/main" showMasterSp="0" showMasterPhAnim="0">
+  <p:cSld>
+    <p:spTree>
+      <p:nvGrpSpPr>
+        <p:cNvPr id="1" name="Shape 235">
+          <a:extLst>
+            <a:ext uri="{FF2B5EF4-FFF2-40B4-BE49-F238E27FC236}">
+              <a16:creationId xmlns:a16="http://schemas.microsoft.com/office/drawing/2014/main" id="{19C153A2-599A-E891-D131-D38888C3EAD1}"/>
+            </a:ext>
+          </a:extLst>
+        </p:cNvPr>
+        <p:cNvGrpSpPr/>
+        <p:nvPr/>
+      </p:nvGrpSpPr>
+      <p:grpSpPr>
+        <a:xfrm>
+          <a:off x="0" y="0"/>
+          <a:ext cx="0" cy="0"/>
+          <a:chOff x="0" y="0"/>
+          <a:chExt cx="0" cy="0"/>
+        </a:xfrm>
+      </p:grpSpPr>
+      <p:sp>
+        <p:nvSpPr>
+          <p:cNvPr id="236" name="Google Shape;236;g169ca163b2d_2_83:notes">
+            <a:extLst>
+              <a:ext uri="{FF2B5EF4-FFF2-40B4-BE49-F238E27FC236}">
+                <a16:creationId xmlns:a16="http://schemas.microsoft.com/office/drawing/2014/main" id="{4011F2C0-815A-DDDC-1C16-F6EE9F1656BE}"/>
+              </a:ext>
+            </a:extLst>
+          </p:cNvPr>
+          <p:cNvSpPr txBox="1">
+            <a:spLocks noGrp="1"/>
+          </p:cNvSpPr>
+          <p:nvPr>
+            <p:ph type="body" idx="1"/>
+          </p:nvPr>
+        </p:nvSpPr>
+        <p:spPr>
+          <a:xfrm>
+            <a:off x="464041" y="6907189"/>
+            <a:ext cx="3712315" cy="6543652"/>
+          </a:xfrm>
+          <a:prstGeom prst="rect">
+            <a:avLst/>
+          </a:prstGeom>
+        </p:spPr>
+        <p:txBody>
+          <a:bodyPr spcFirstLastPara="1" wrap="square" lIns="91425" tIns="91425" rIns="91425" bIns="91425" anchor="t" anchorCtr="0">
+            <a:noAutofit/>
+          </a:bodyPr>
+          <a:lstStyle/>
+          <a:p>
+            <a:pPr marL="0" lvl="0" indent="0" algn="l" rtl="0">
+              <a:spcBef>
+                <a:spcPts val="0"/>
+              </a:spcBef>
+              <a:spcAft>
+                <a:spcPts val="0"/>
+              </a:spcAft>
+              <a:buNone/>
+            </a:pPr>
+            <a:endParaRPr dirty="0"/>
+          </a:p>
+        </p:txBody>
+      </p:sp>
+      <p:sp>
+        <p:nvSpPr>
+          <p:cNvPr id="237" name="Google Shape;237;g169ca163b2d_2_83:notes">
+            <a:extLst>
+              <a:ext uri="{FF2B5EF4-FFF2-40B4-BE49-F238E27FC236}">
+                <a16:creationId xmlns:a16="http://schemas.microsoft.com/office/drawing/2014/main" id="{D3C5D57B-F659-D016-EE00-617C92766116}"/>
+              </a:ext>
+            </a:extLst>
+          </p:cNvPr>
+          <p:cNvSpPr>
+            <a:spLocks noGrp="1" noRot="1" noChangeAspect="1"/>
+          </p:cNvSpPr>
+          <p:nvPr>
+            <p:ph type="sldImg" idx="2"/>
+          </p:nvPr>
+        </p:nvSpPr>
+        <p:spPr>
+          <a:xfrm>
+            <a:off x="-2525713" y="1090613"/>
+            <a:ext cx="9693276" cy="5453062"/>
+          </a:xfrm>
+          <a:custGeom>
+            <a:avLst/>
+            <a:gdLst/>
+            <a:ahLst/>
+            <a:cxnLst/>
+            <a:rect l="l" t="t" r="r" b="b"/>
+            <a:pathLst>
+              <a:path w="120000" h="120000" extrusionOk="0">
+                <a:moveTo>
+                  <a:pt x="0" y="0"/>
+                </a:moveTo>
+                <a:lnTo>
+                  <a:pt x="120000" y="0"/>
+                </a:lnTo>
+                <a:lnTo>
+                  <a:pt x="120000" y="120000"/>
+                </a:lnTo>
+                <a:lnTo>
+                  <a:pt x="0" y="120000"/>
+                </a:lnTo>
+                <a:close/>
+              </a:path>
+            </a:pathLst>
+          </a:custGeom>
+        </p:spPr>
+      </p:sp>
+    </p:spTree>
+    <p:extLst>
+      <p:ext uri="{BB962C8B-B14F-4D97-AF65-F5344CB8AC3E}">
+        <p14:creationId xmlns:p14="http://schemas.microsoft.com/office/powerpoint/2010/main" val="2917268637"/>
+      </p:ext>
+    </p:extLst>
+  </p:cSld>
+  <p:clrMapOvr>
+    <a:masterClrMapping/>
+  </p:clrMapOvr>
+</p:notes>
+</file>
+
 <file path=ppt/notesSlides/notesSlide2.xml><?xml version="1.0" encoding="utf-8"?>
+<p:notes xmlns:a="http://schemas.openxmlformats.org/drawingml/2006/main" xmlns:r="http://schemas.openxmlformats.org/officeDocument/2006/relationships" xmlns:p="http://schemas.openxmlformats.org/presentationml/2006/main">
+  <p:cSld>
+    <p:spTree>
+      <p:nvGrpSpPr>
+        <p:cNvPr id="1" name="">
+          <a:extLst>
+            <a:ext uri="{FF2B5EF4-FFF2-40B4-BE49-F238E27FC236}">
+              <a16:creationId xmlns:a16="http://schemas.microsoft.com/office/drawing/2014/main" id="{DE9689DA-6814-B492-6FDF-C05F1C91CD8B}"/>
+            </a:ext>
+          </a:extLst>
+        </p:cNvPr>
+        <p:cNvGrpSpPr/>
+        <p:nvPr/>
+      </p:nvGrpSpPr>
+      <p:grpSpPr>
+        <a:xfrm>
+          <a:off x="0" y="0"/>
+          <a:ext cx="0" cy="0"/>
+          <a:chOff x="0" y="0"/>
+          <a:chExt cx="0" cy="0"/>
+        </a:xfrm>
+      </p:grpSpPr>
+      <p:sp>
+        <p:nvSpPr>
+          <p:cNvPr id="2" name="スライド イメージ プレースホルダー 1">
+            <a:extLst>
+              <a:ext uri="{FF2B5EF4-FFF2-40B4-BE49-F238E27FC236}">
+                <a16:creationId xmlns:a16="http://schemas.microsoft.com/office/drawing/2014/main" id="{59136912-A6DC-16A6-101E-28B4F903A077}"/>
+              </a:ext>
+            </a:extLst>
+          </p:cNvPr>
+          <p:cNvSpPr>
+            <a:spLocks noGrp="1" noRot="1" noChangeAspect="1"/>
+          </p:cNvSpPr>
+          <p:nvPr>
+            <p:ph type="sldImg"/>
+          </p:nvPr>
+        </p:nvSpPr>
+        <p:spPr/>
+      </p:sp>
+      <p:sp>
+        <p:nvSpPr>
+          <p:cNvPr id="3" name="ノート プレースホルダー 2">
+            <a:extLst>
+              <a:ext uri="{FF2B5EF4-FFF2-40B4-BE49-F238E27FC236}">
+                <a16:creationId xmlns:a16="http://schemas.microsoft.com/office/drawing/2014/main" id="{ACC83917-F4B1-8D5B-2907-CA280858F851}"/>
+              </a:ext>
+            </a:extLst>
+          </p:cNvPr>
+          <p:cNvSpPr>
+            <a:spLocks noGrp="1"/>
+          </p:cNvSpPr>
+          <p:nvPr>
+            <p:ph type="body" idx="1"/>
+          </p:nvPr>
+        </p:nvSpPr>
+        <p:spPr/>
+        <p:txBody>
+          <a:bodyPr/>
+          <a:lstStyle/>
+          <a:p>
+            <a:pPr marL="158750" indent="0">
+              <a:buNone/>
+            </a:pPr>
+            <a:endParaRPr kumimoji="1" lang="ja-JP" altLang="en-US" dirty="0"/>
+          </a:p>
+        </p:txBody>
+      </p:sp>
+      <p:sp>
+        <p:nvSpPr>
+          <p:cNvPr id="4" name="日付プレースホルダー 3">
+            <a:extLst>
+              <a:ext uri="{FF2B5EF4-FFF2-40B4-BE49-F238E27FC236}">
+                <a16:creationId xmlns:a16="http://schemas.microsoft.com/office/drawing/2014/main" id="{4992F5D5-E114-67BC-5235-48FE9499E7A5}"/>
+              </a:ext>
+            </a:extLst>
+          </p:cNvPr>
+          <p:cNvSpPr>
+            <a:spLocks noGrp="1"/>
+          </p:cNvSpPr>
+          <p:nvPr>
+            <p:ph type="dt" idx="10"/>
+          </p:nvPr>
+        </p:nvSpPr>
+        <p:spPr/>
+        <p:txBody>
+          <a:bodyPr/>
+          <a:lstStyle/>
+          <a:p>
+            <a:r>
+              <a:rPr kumimoji="1" lang="en-US" altLang="ja-JP" dirty="0"/>
+              <a:t>2021/3/24</a:t>
+            </a:r>
+            <a:endParaRPr kumimoji="1" lang="ja-JP" altLang="en-US"/>
+          </a:p>
+        </p:txBody>
+      </p:sp>
+      <p:sp>
+        <p:nvSpPr>
+          <p:cNvPr id="5" name="スライド番号プレースホルダー 4">
+            <a:extLst>
+              <a:ext uri="{FF2B5EF4-FFF2-40B4-BE49-F238E27FC236}">
+                <a16:creationId xmlns:a16="http://schemas.microsoft.com/office/drawing/2014/main" id="{AFDC4779-E3E4-D0E2-0270-A3D0989834C0}"/>
+              </a:ext>
+            </a:extLst>
+          </p:cNvPr>
+          <p:cNvSpPr>
+            <a:spLocks noGrp="1"/>
+          </p:cNvSpPr>
+          <p:nvPr>
+            <p:ph type="sldNum" sz="quarter" idx="11"/>
+          </p:nvPr>
+        </p:nvSpPr>
+        <p:spPr/>
+        <p:txBody>
+          <a:bodyPr/>
+          <a:lstStyle/>
+          <a:p>
+            <a:fld id="{EBF652ED-4E8E-4FA7-8EF4-2DDF6FB21FCE}" type="slidenum">
+              <a:rPr kumimoji="1" lang="ja-JP" altLang="en-US" smtClean="0"/>
+              <a:t>2</a:t>
+            </a:fld>
+            <a:endParaRPr kumimoji="1" lang="ja-JP" altLang="en-US"/>
+          </a:p>
+        </p:txBody>
+      </p:sp>
+    </p:spTree>
+    <p:extLst>
+      <p:ext uri="{BB962C8B-B14F-4D97-AF65-F5344CB8AC3E}">
+        <p14:creationId xmlns:p14="http://schemas.microsoft.com/office/powerpoint/2010/main" val="4128270564"/>
+      </p:ext>
+    </p:extLst>
+  </p:cSld>
+  <p:clrMapOvr>
+    <a:masterClrMapping/>
+  </p:clrMapOvr>
+</p:notes>
+</file>
+
+<file path=ppt/notesSlides/notesSlide3.xml><?xml version="1.0" encoding="utf-8"?>
+<p:notes xmlns:a="http://schemas.openxmlformats.org/drawingml/2006/main" xmlns:r="http://schemas.openxmlformats.org/officeDocument/2006/relationships" xmlns:p="http://schemas.openxmlformats.org/presentationml/2006/main">
+  <p:cSld>
+    <p:spTree>
+      <p:nvGrpSpPr>
+        <p:cNvPr id="1" name="">
+          <a:extLst>
+            <a:ext uri="{FF2B5EF4-FFF2-40B4-BE49-F238E27FC236}">
+              <a16:creationId xmlns:a16="http://schemas.microsoft.com/office/drawing/2014/main" id="{0F37B0F6-9B25-69C1-F3EE-E7ABC1D98FC5}"/>
+            </a:ext>
+          </a:extLst>
+        </p:cNvPr>
+        <p:cNvGrpSpPr/>
+        <p:nvPr/>
+      </p:nvGrpSpPr>
+      <p:grpSpPr>
+        <a:xfrm>
+          <a:off x="0" y="0"/>
+          <a:ext cx="0" cy="0"/>
+          <a:chOff x="0" y="0"/>
+          <a:chExt cx="0" cy="0"/>
+        </a:xfrm>
+      </p:grpSpPr>
+      <p:sp>
+        <p:nvSpPr>
+          <p:cNvPr id="2" name="スライド イメージ プレースホルダー 1">
+            <a:extLst>
+              <a:ext uri="{FF2B5EF4-FFF2-40B4-BE49-F238E27FC236}">
+                <a16:creationId xmlns:a16="http://schemas.microsoft.com/office/drawing/2014/main" id="{F24F5D6A-7954-8C34-4C25-62A42168A0EE}"/>
+              </a:ext>
+            </a:extLst>
+          </p:cNvPr>
+          <p:cNvSpPr>
+            <a:spLocks noGrp="1" noRot="1" noChangeAspect="1"/>
+          </p:cNvSpPr>
+          <p:nvPr>
+            <p:ph type="sldImg"/>
+          </p:nvPr>
+        </p:nvSpPr>
+        <p:spPr/>
+      </p:sp>
+      <p:sp>
+        <p:nvSpPr>
+          <p:cNvPr id="3" name="ノート プレースホルダー 2">
+            <a:extLst>
+              <a:ext uri="{FF2B5EF4-FFF2-40B4-BE49-F238E27FC236}">
+                <a16:creationId xmlns:a16="http://schemas.microsoft.com/office/drawing/2014/main" id="{05E541D3-0CC8-5C55-CC7E-AE5186536517}"/>
+              </a:ext>
+            </a:extLst>
+          </p:cNvPr>
+          <p:cNvSpPr>
+            <a:spLocks noGrp="1"/>
+          </p:cNvSpPr>
+          <p:nvPr>
+            <p:ph type="body" idx="1"/>
+          </p:nvPr>
+        </p:nvSpPr>
+        <p:spPr/>
+        <p:txBody>
+          <a:bodyPr/>
+          <a:lstStyle/>
+          <a:p>
+            <a:pPr marL="158750" indent="0">
+              <a:buNone/>
+            </a:pPr>
+            <a:endParaRPr kumimoji="1" lang="ja-JP" altLang="en-US" dirty="0"/>
+          </a:p>
+        </p:txBody>
+      </p:sp>
+      <p:sp>
+        <p:nvSpPr>
+          <p:cNvPr id="4" name="日付プレースホルダー 3">
+            <a:extLst>
+              <a:ext uri="{FF2B5EF4-FFF2-40B4-BE49-F238E27FC236}">
+                <a16:creationId xmlns:a16="http://schemas.microsoft.com/office/drawing/2014/main" id="{7900251E-AF94-B6B1-E5A4-FE7FAAC60EDE}"/>
+              </a:ext>
+            </a:extLst>
+          </p:cNvPr>
+          <p:cNvSpPr>
+            <a:spLocks noGrp="1"/>
+          </p:cNvSpPr>
+          <p:nvPr>
+            <p:ph type="dt" idx="10"/>
+          </p:nvPr>
+        </p:nvSpPr>
+        <p:spPr/>
+        <p:txBody>
+          <a:bodyPr/>
+          <a:lstStyle/>
+          <a:p>
+            <a:r>
+              <a:rPr kumimoji="1" lang="en-US" altLang="ja-JP" dirty="0"/>
+              <a:t>2021/3/24</a:t>
+            </a:r>
+            <a:endParaRPr kumimoji="1" lang="ja-JP" altLang="en-US"/>
+          </a:p>
+        </p:txBody>
+      </p:sp>
+      <p:sp>
+        <p:nvSpPr>
+          <p:cNvPr id="5" name="スライド番号プレースホルダー 4">
+            <a:extLst>
+              <a:ext uri="{FF2B5EF4-FFF2-40B4-BE49-F238E27FC236}">
+                <a16:creationId xmlns:a16="http://schemas.microsoft.com/office/drawing/2014/main" id="{E763A965-C0B8-39AD-D221-9120317A05AA}"/>
+              </a:ext>
+            </a:extLst>
+          </p:cNvPr>
+          <p:cNvSpPr>
+            <a:spLocks noGrp="1"/>
+          </p:cNvSpPr>
+          <p:nvPr>
+            <p:ph type="sldNum" sz="quarter" idx="11"/>
+          </p:nvPr>
+        </p:nvSpPr>
+        <p:spPr/>
+        <p:txBody>
+          <a:bodyPr/>
+          <a:lstStyle/>
+          <a:p>
+            <a:fld id="{EBF652ED-4E8E-4FA7-8EF4-2DDF6FB21FCE}" type="slidenum">
+              <a:rPr kumimoji="1" lang="ja-JP" altLang="en-US" smtClean="0"/>
+              <a:t>3</a:t>
+            </a:fld>
+            <a:endParaRPr kumimoji="1" lang="ja-JP" altLang="en-US"/>
+          </a:p>
+        </p:txBody>
+      </p:sp>
+    </p:spTree>
+    <p:extLst>
+      <p:ext uri="{BB962C8B-B14F-4D97-AF65-F5344CB8AC3E}">
+        <p14:creationId xmlns:p14="http://schemas.microsoft.com/office/powerpoint/2010/main" val="3186444107"/>
+      </p:ext>
+    </p:extLst>
+  </p:cSld>
+  <p:clrMapOvr>
+    <a:masterClrMapping/>
+  </p:clrMapOvr>
+</p:notes>
+</file>
+
+<file path=ppt/notesSlides/notesSlide4.xml><?xml version="1.0" encoding="utf-8"?>
 <p:notes xmlns:a="http://schemas.openxmlformats.org/drawingml/2006/main" xmlns:r="http://schemas.openxmlformats.org/officeDocument/2006/relationships" xmlns:p="http://schemas.openxmlformats.org/presentationml/2006/main">
   <p:cSld>
     <p:spTree>
@@ -1098,7 +1758,7 @@
           <a:p>
             <a:fld id="{EBF652ED-4E8E-4FA7-8EF4-2DDF6FB21FCE}" type="slidenum">
               <a:rPr kumimoji="1" lang="ja-JP" altLang="en-US" smtClean="0"/>
-              <a:t>2</a:t>
+              <a:t>4</a:t>
             </a:fld>
             <a:endParaRPr kumimoji="1" lang="ja-JP" altLang="en-US"/>
           </a:p>
@@ -1117,7 +1777,7 @@
 </p:notes>
 </file>
 
-<file path=ppt/notesSlides/notesSlide3.xml><?xml version="1.0" encoding="utf-8"?>
+<file path=ppt/notesSlides/notesSlide5.xml><?xml version="1.0" encoding="utf-8"?>
 <p:notes xmlns:a="http://schemas.openxmlformats.org/drawingml/2006/main" xmlns:r="http://schemas.openxmlformats.org/officeDocument/2006/relationships" xmlns:p="http://schemas.openxmlformats.org/presentationml/2006/main">
   <p:cSld>
     <p:spTree>
@@ -1235,7 +1895,7 @@
           <a:p>
             <a:fld id="{EBF652ED-4E8E-4FA7-8EF4-2DDF6FB21FCE}" type="slidenum">
               <a:rPr kumimoji="1" lang="ja-JP" altLang="en-US" smtClean="0"/>
-              <a:t>3</a:t>
+              <a:t>6</a:t>
             </a:fld>
             <a:endParaRPr kumimoji="1" lang="ja-JP" altLang="en-US"/>
           </a:p>
@@ -1254,7 +1914,7 @@
 </p:notes>
 </file>
 
-<file path=ppt/notesSlides/notesSlide4.xml><?xml version="1.0" encoding="utf-8"?>
+<file path=ppt/notesSlides/notesSlide6.xml><?xml version="1.0" encoding="utf-8"?>
 <p:notes xmlns:a="http://schemas.openxmlformats.org/drawingml/2006/main" xmlns:r="http://schemas.openxmlformats.org/officeDocument/2006/relationships" xmlns:p="http://schemas.openxmlformats.org/presentationml/2006/main">
   <p:cSld>
     <p:spTree>
@@ -1401,7 +2061,7 @@
           <a:p>
             <a:fld id="{EBF652ED-4E8E-4FA7-8EF4-2DDF6FB21FCE}" type="slidenum">
               <a:rPr kumimoji="1" lang="ja-JP" altLang="en-US" smtClean="0"/>
-              <a:t>4</a:t>
+              <a:t>7</a:t>
             </a:fld>
             <a:endParaRPr kumimoji="1" lang="ja-JP" altLang="en-US"/>
           </a:p>
@@ -1420,7 +2080,7 @@
 </p:notes>
 </file>
 
-<file path=ppt/notesSlides/notesSlide5.xml><?xml version="1.0" encoding="utf-8"?>
+<file path=ppt/notesSlides/notesSlide7.xml><?xml version="1.0" encoding="utf-8"?>
 <p:notes xmlns:a="http://schemas.openxmlformats.org/drawingml/2006/main" xmlns:r="http://schemas.openxmlformats.org/officeDocument/2006/relationships" xmlns:p="http://schemas.openxmlformats.org/presentationml/2006/main">
   <p:cSld>
     <p:spTree>
@@ -1538,7 +2198,7 @@
           <a:p>
             <a:fld id="{EBF652ED-4E8E-4FA7-8EF4-2DDF6FB21FCE}" type="slidenum">
               <a:rPr kumimoji="1" lang="ja-JP" altLang="en-US" smtClean="0"/>
-              <a:t>5</a:t>
+              <a:t>8</a:t>
             </a:fld>
             <a:endParaRPr kumimoji="1" lang="ja-JP" altLang="en-US"/>
           </a:p>
@@ -1557,7 +2217,7 @@
 </p:notes>
 </file>
 
-<file path=ppt/notesSlides/notesSlide6.xml><?xml version="1.0" encoding="utf-8"?>
+<file path=ppt/notesSlides/notesSlide8.xml><?xml version="1.0" encoding="utf-8"?>
 <p:notes xmlns:a="http://schemas.openxmlformats.org/drawingml/2006/main" xmlns:r="http://schemas.openxmlformats.org/officeDocument/2006/relationships" xmlns:p="http://schemas.openxmlformats.org/presentationml/2006/main">
   <p:cSld>
     <p:spTree>
@@ -1675,7 +2335,7 @@
           <a:p>
             <a:fld id="{EBF652ED-4E8E-4FA7-8EF4-2DDF6FB21FCE}" type="slidenum">
               <a:rPr kumimoji="1" lang="ja-JP" altLang="en-US" smtClean="0"/>
-              <a:t>6</a:t>
+              <a:t>9</a:t>
             </a:fld>
             <a:endParaRPr kumimoji="1" lang="ja-JP" altLang="en-US"/>
           </a:p>
@@ -1694,7 +2354,7 @@
 </p:notes>
 </file>
 
-<file path=ppt/notesSlides/notesSlide7.xml><?xml version="1.0" encoding="utf-8"?>
+<file path=ppt/notesSlides/notesSlide9.xml><?xml version="1.0" encoding="utf-8"?>
 <p:notes xmlns:a="http://schemas.openxmlformats.org/drawingml/2006/main" xmlns:r="http://schemas.openxmlformats.org/officeDocument/2006/relationships" xmlns:p="http://schemas.openxmlformats.org/presentationml/2006/main">
   <p:cSld>
     <p:spTree>
@@ -1702,7 +2362,7 @@
         <p:cNvPr id="1" name="">
           <a:extLst>
             <a:ext uri="{FF2B5EF4-FFF2-40B4-BE49-F238E27FC236}">
-              <a16:creationId xmlns:a16="http://schemas.microsoft.com/office/drawing/2014/main" id="{684AEB8E-C70D-5074-A72B-09CA3EF7C7B3}"/>
+              <a16:creationId xmlns:a16="http://schemas.microsoft.com/office/drawing/2014/main" id="{6901A904-9A28-623C-46D8-ACDCE0748718}"/>
             </a:ext>
           </a:extLst>
         </p:cNvPr>
@@ -1722,7 +2382,7 @@
           <p:cNvPr id="2" name="スライド イメージ プレースホルダー 1">
             <a:extLst>
               <a:ext uri="{FF2B5EF4-FFF2-40B4-BE49-F238E27FC236}">
-                <a16:creationId xmlns:a16="http://schemas.microsoft.com/office/drawing/2014/main" id="{2E14791D-A483-6832-B02D-2AD2C3140D5F}"/>
+                <a16:creationId xmlns:a16="http://schemas.microsoft.com/office/drawing/2014/main" id="{5C2FC816-1A51-77D4-E12B-F43542A89799}"/>
               </a:ext>
             </a:extLst>
           </p:cNvPr>
@@ -1740,7 +2400,7 @@
           <p:cNvPr id="3" name="ノート プレースホルダー 2">
             <a:extLst>
               <a:ext uri="{FF2B5EF4-FFF2-40B4-BE49-F238E27FC236}">
-                <a16:creationId xmlns:a16="http://schemas.microsoft.com/office/drawing/2014/main" id="{BBC278DB-6293-AEFF-1360-8DB4106CAE82}"/>
+                <a16:creationId xmlns:a16="http://schemas.microsoft.com/office/drawing/2014/main" id="{AC88BACE-30CA-8B9D-D857-9804D98F9186}"/>
               </a:ext>
             </a:extLst>
           </p:cNvPr>
@@ -1765,7 +2425,7 @@
           <p:cNvPr id="4" name="日付プレースホルダー 3">
             <a:extLst>
               <a:ext uri="{FF2B5EF4-FFF2-40B4-BE49-F238E27FC236}">
-                <a16:creationId xmlns:a16="http://schemas.microsoft.com/office/drawing/2014/main" id="{C9825AF5-118E-41D2-EC0D-8E018B9EBD90}"/>
+                <a16:creationId xmlns:a16="http://schemas.microsoft.com/office/drawing/2014/main" id="{4A62D9CC-22BC-706B-F61F-33C902E1E444}"/>
               </a:ext>
             </a:extLst>
           </p:cNvPr>
@@ -1794,7 +2454,7 @@
           <p:cNvPr id="5" name="スライド番号プレースホルダー 4">
             <a:extLst>
               <a:ext uri="{FF2B5EF4-FFF2-40B4-BE49-F238E27FC236}">
-                <a16:creationId xmlns:a16="http://schemas.microsoft.com/office/drawing/2014/main" id="{140B3CB6-2DE6-7F82-9AFF-CA86B41E327C}"/>
+                <a16:creationId xmlns:a16="http://schemas.microsoft.com/office/drawing/2014/main" id="{7A3CB5FF-281C-C6EE-BA87-3FBE2698F203}"/>
               </a:ext>
             </a:extLst>
           </p:cNvPr>
@@ -1812,7 +2472,7 @@
           <a:p>
             <a:fld id="{EBF652ED-4E8E-4FA7-8EF4-2DDF6FB21FCE}" type="slidenum">
               <a:rPr kumimoji="1" lang="ja-JP" altLang="en-US" smtClean="0"/>
-              <a:t>7</a:t>
+              <a:t>10</a:t>
             </a:fld>
             <a:endParaRPr kumimoji="1" lang="ja-JP" altLang="en-US"/>
           </a:p>
@@ -1821,144 +2481,7 @@
     </p:spTree>
     <p:extLst>
       <p:ext uri="{BB962C8B-B14F-4D97-AF65-F5344CB8AC3E}">
-        <p14:creationId xmlns:p14="http://schemas.microsoft.com/office/powerpoint/2010/main" val="2883221536"/>
-      </p:ext>
-    </p:extLst>
-  </p:cSld>
-  <p:clrMapOvr>
-    <a:masterClrMapping/>
-  </p:clrMapOvr>
-</p:notes>
-</file>
-
-<file path=ppt/notesSlides/notesSlide8.xml><?xml version="1.0" encoding="utf-8"?>
-<p:notes xmlns:a="http://schemas.openxmlformats.org/drawingml/2006/main" xmlns:r="http://schemas.openxmlformats.org/officeDocument/2006/relationships" xmlns:p="http://schemas.openxmlformats.org/presentationml/2006/main">
-  <p:cSld>
-    <p:spTree>
-      <p:nvGrpSpPr>
-        <p:cNvPr id="1" name="">
-          <a:extLst>
-            <a:ext uri="{FF2B5EF4-FFF2-40B4-BE49-F238E27FC236}">
-              <a16:creationId xmlns:a16="http://schemas.microsoft.com/office/drawing/2014/main" id="{C0287E78-44DE-2A20-A6AE-89EEA38EEB28}"/>
-            </a:ext>
-          </a:extLst>
-        </p:cNvPr>
-        <p:cNvGrpSpPr/>
-        <p:nvPr/>
-      </p:nvGrpSpPr>
-      <p:grpSpPr>
-        <a:xfrm>
-          <a:off x="0" y="0"/>
-          <a:ext cx="0" cy="0"/>
-          <a:chOff x="0" y="0"/>
-          <a:chExt cx="0" cy="0"/>
-        </a:xfrm>
-      </p:grpSpPr>
-      <p:sp>
-        <p:nvSpPr>
-          <p:cNvPr id="2" name="スライド イメージ プレースホルダー 1">
-            <a:extLst>
-              <a:ext uri="{FF2B5EF4-FFF2-40B4-BE49-F238E27FC236}">
-                <a16:creationId xmlns:a16="http://schemas.microsoft.com/office/drawing/2014/main" id="{CCDBD9E5-D7BE-00C8-1052-4030E3A1EECE}"/>
-              </a:ext>
-            </a:extLst>
-          </p:cNvPr>
-          <p:cNvSpPr>
-            <a:spLocks noGrp="1" noRot="1" noChangeAspect="1"/>
-          </p:cNvSpPr>
-          <p:nvPr>
-            <p:ph type="sldImg"/>
-          </p:nvPr>
-        </p:nvSpPr>
-        <p:spPr/>
-      </p:sp>
-      <p:sp>
-        <p:nvSpPr>
-          <p:cNvPr id="3" name="ノート プレースホルダー 2">
-            <a:extLst>
-              <a:ext uri="{FF2B5EF4-FFF2-40B4-BE49-F238E27FC236}">
-                <a16:creationId xmlns:a16="http://schemas.microsoft.com/office/drawing/2014/main" id="{20D73994-14EE-4D23-8910-38A32DD0CA37}"/>
-              </a:ext>
-            </a:extLst>
-          </p:cNvPr>
-          <p:cNvSpPr>
-            <a:spLocks noGrp="1"/>
-          </p:cNvSpPr>
-          <p:nvPr>
-            <p:ph type="body" idx="1"/>
-          </p:nvPr>
-        </p:nvSpPr>
-        <p:spPr/>
-        <p:txBody>
-          <a:bodyPr/>
-          <a:lstStyle/>
-          <a:p>
-            <a:endParaRPr kumimoji="1" lang="ja-JP" altLang="en-US" dirty="0"/>
-          </a:p>
-        </p:txBody>
-      </p:sp>
-      <p:sp>
-        <p:nvSpPr>
-          <p:cNvPr id="4" name="日付プレースホルダー 3">
-            <a:extLst>
-              <a:ext uri="{FF2B5EF4-FFF2-40B4-BE49-F238E27FC236}">
-                <a16:creationId xmlns:a16="http://schemas.microsoft.com/office/drawing/2014/main" id="{48CBB6B2-776E-F92E-1FBB-D8F94A1AEED5}"/>
-              </a:ext>
-            </a:extLst>
-          </p:cNvPr>
-          <p:cNvSpPr>
-            <a:spLocks noGrp="1"/>
-          </p:cNvSpPr>
-          <p:nvPr>
-            <p:ph type="dt" idx="10"/>
-          </p:nvPr>
-        </p:nvSpPr>
-        <p:spPr/>
-        <p:txBody>
-          <a:bodyPr/>
-          <a:lstStyle/>
-          <a:p>
-            <a:r>
-              <a:rPr kumimoji="1" lang="en-US" altLang="ja-JP" dirty="0"/>
-              <a:t>2021/3/24</a:t>
-            </a:r>
-            <a:endParaRPr kumimoji="1" lang="ja-JP" altLang="en-US"/>
-          </a:p>
-        </p:txBody>
-      </p:sp>
-      <p:sp>
-        <p:nvSpPr>
-          <p:cNvPr id="5" name="スライド番号プレースホルダー 4">
-            <a:extLst>
-              <a:ext uri="{FF2B5EF4-FFF2-40B4-BE49-F238E27FC236}">
-                <a16:creationId xmlns:a16="http://schemas.microsoft.com/office/drawing/2014/main" id="{5FCCF6C3-8655-85C8-088D-AAF3E0A292D6}"/>
-              </a:ext>
-            </a:extLst>
-          </p:cNvPr>
-          <p:cNvSpPr>
-            <a:spLocks noGrp="1"/>
-          </p:cNvSpPr>
-          <p:nvPr>
-            <p:ph type="sldNum" sz="quarter" idx="11"/>
-          </p:nvPr>
-        </p:nvSpPr>
-        <p:spPr/>
-        <p:txBody>
-          <a:bodyPr/>
-          <a:lstStyle/>
-          <a:p>
-            <a:fld id="{EBF652ED-4E8E-4FA7-8EF4-2DDF6FB21FCE}" type="slidenum">
-              <a:rPr kumimoji="1" lang="ja-JP" altLang="en-US" smtClean="0"/>
-              <a:t>8</a:t>
-            </a:fld>
-            <a:endParaRPr kumimoji="1" lang="ja-JP" altLang="en-US"/>
-          </a:p>
-        </p:txBody>
-      </p:sp>
-    </p:spTree>
-    <p:extLst>
-      <p:ext uri="{BB962C8B-B14F-4D97-AF65-F5344CB8AC3E}">
-        <p14:creationId xmlns:p14="http://schemas.microsoft.com/office/powerpoint/2010/main" val="293604143"/>
+        <p14:creationId xmlns:p14="http://schemas.microsoft.com/office/powerpoint/2010/main" val="3819605793"/>
       </p:ext>
     </p:extLst>
   </p:cSld>
@@ -2823,6 +3346,206 @@
         </p:txBody>
       </p:sp>
     </p:spTree>
+  </p:cSld>
+  <p:clrMapOvr>
+    <a:masterClrMapping/>
+  </p:clrMapOvr>
+</p:sldLayout>
+</file>
+
+<file path=ppt/slideLayouts/slideLayout12.xml><?xml version="1.0" encoding="utf-8"?>
+<p:sldLayout xmlns:a="http://schemas.openxmlformats.org/drawingml/2006/main" xmlns:r="http://schemas.openxmlformats.org/officeDocument/2006/relationships" xmlns:p="http://schemas.openxmlformats.org/presentationml/2006/main" type="obj">
+  <p:cSld name="タイトルとコンテンツ">
+    <p:spTree>
+      <p:nvGrpSpPr>
+        <p:cNvPr id="1" name=""/>
+        <p:cNvGrpSpPr/>
+        <p:nvPr/>
+      </p:nvGrpSpPr>
+      <p:grpSpPr>
+        <a:xfrm>
+          <a:off x="0" y="0"/>
+          <a:ext cx="0" cy="0"/>
+          <a:chOff x="0" y="0"/>
+          <a:chExt cx="0" cy="0"/>
+        </a:xfrm>
+      </p:grpSpPr>
+      <p:sp>
+        <p:nvSpPr>
+          <p:cNvPr id="2" name="タイトル 1"/>
+          <p:cNvSpPr>
+            <a:spLocks noGrp="1"/>
+          </p:cNvSpPr>
+          <p:nvPr>
+            <p:ph type="title"/>
+          </p:nvPr>
+        </p:nvSpPr>
+        <p:spPr/>
+        <p:txBody>
+          <a:bodyPr/>
+          <a:lstStyle/>
+          <a:p>
+            <a:r>
+              <a:rPr kumimoji="1" lang="ja-JP" altLang="en-US"/>
+              <a:t>マスター タイトルの書式設定</a:t>
+            </a:r>
+          </a:p>
+        </p:txBody>
+      </p:sp>
+      <p:sp>
+        <p:nvSpPr>
+          <p:cNvPr id="3" name="コンテンツ プレースホルダー 2"/>
+          <p:cNvSpPr>
+            <a:spLocks noGrp="1"/>
+          </p:cNvSpPr>
+          <p:nvPr>
+            <p:ph idx="1"/>
+          </p:nvPr>
+        </p:nvSpPr>
+        <p:spPr/>
+        <p:txBody>
+          <a:bodyPr/>
+          <a:lstStyle/>
+          <a:p>
+            <a:pPr lvl="0"/>
+            <a:r>
+              <a:rPr kumimoji="1" lang="ja-JP" altLang="en-US"/>
+              <a:t>マスター テキストの書式設定</a:t>
+            </a:r>
+          </a:p>
+          <a:p>
+            <a:pPr lvl="1"/>
+            <a:r>
+              <a:rPr kumimoji="1" lang="ja-JP" altLang="en-US"/>
+              <a:t>第 </a:t>
+            </a:r>
+            <a:r>
+              <a:rPr kumimoji="1" lang="en-US" altLang="ja-JP"/>
+              <a:t>2 </a:t>
+            </a:r>
+            <a:r>
+              <a:rPr kumimoji="1" lang="ja-JP" altLang="en-US"/>
+              <a:t>レベル</a:t>
+            </a:r>
+          </a:p>
+          <a:p>
+            <a:pPr lvl="2"/>
+            <a:r>
+              <a:rPr kumimoji="1" lang="ja-JP" altLang="en-US"/>
+              <a:t>第 </a:t>
+            </a:r>
+            <a:r>
+              <a:rPr kumimoji="1" lang="en-US" altLang="ja-JP"/>
+              <a:t>3 </a:t>
+            </a:r>
+            <a:r>
+              <a:rPr kumimoji="1" lang="ja-JP" altLang="en-US"/>
+              <a:t>レベル</a:t>
+            </a:r>
+          </a:p>
+          <a:p>
+            <a:pPr lvl="3"/>
+            <a:r>
+              <a:rPr kumimoji="1" lang="ja-JP" altLang="en-US"/>
+              <a:t>第 </a:t>
+            </a:r>
+            <a:r>
+              <a:rPr kumimoji="1" lang="en-US" altLang="ja-JP"/>
+              <a:t>4 </a:t>
+            </a:r>
+            <a:r>
+              <a:rPr kumimoji="1" lang="ja-JP" altLang="en-US"/>
+              <a:t>レベル</a:t>
+            </a:r>
+          </a:p>
+          <a:p>
+            <a:pPr lvl="4"/>
+            <a:r>
+              <a:rPr kumimoji="1" lang="ja-JP" altLang="en-US"/>
+              <a:t>第 </a:t>
+            </a:r>
+            <a:r>
+              <a:rPr kumimoji="1" lang="en-US" altLang="ja-JP"/>
+              <a:t>5 </a:t>
+            </a:r>
+            <a:r>
+              <a:rPr kumimoji="1" lang="ja-JP" altLang="en-US"/>
+              <a:t>レベル</a:t>
+            </a:r>
+          </a:p>
+        </p:txBody>
+      </p:sp>
+      <p:sp>
+        <p:nvSpPr>
+          <p:cNvPr id="4" name="日付プレースホルダー 3"/>
+          <p:cNvSpPr>
+            <a:spLocks noGrp="1"/>
+          </p:cNvSpPr>
+          <p:nvPr>
+            <p:ph type="dt" sz="half" idx="10"/>
+          </p:nvPr>
+        </p:nvSpPr>
+        <p:spPr/>
+        <p:txBody>
+          <a:bodyPr/>
+          <a:lstStyle/>
+          <a:p>
+            <a:fld id="{E1C8DB18-F118-4E03-B042-5FAD6EB649E2}" type="datetime1">
+              <a:rPr kumimoji="1" lang="ja-JP" altLang="en-US" smtClean="0"/>
+              <a:t>2026/5/26</a:t>
+            </a:fld>
+            <a:endParaRPr kumimoji="1" lang="ja-JP" altLang="en-US"/>
+          </a:p>
+        </p:txBody>
+      </p:sp>
+      <p:sp>
+        <p:nvSpPr>
+          <p:cNvPr id="5" name="フッター プレースホルダー 4"/>
+          <p:cNvSpPr>
+            <a:spLocks noGrp="1"/>
+          </p:cNvSpPr>
+          <p:nvPr>
+            <p:ph type="ftr" sz="quarter" idx="11"/>
+          </p:nvPr>
+        </p:nvSpPr>
+        <p:spPr/>
+        <p:txBody>
+          <a:bodyPr/>
+          <a:lstStyle/>
+          <a:p>
+            <a:endParaRPr kumimoji="1" lang="ja-JP" altLang="en-US"/>
+          </a:p>
+        </p:txBody>
+      </p:sp>
+      <p:sp>
+        <p:nvSpPr>
+          <p:cNvPr id="6" name="スライド番号プレースホルダー 5"/>
+          <p:cNvSpPr>
+            <a:spLocks noGrp="1"/>
+          </p:cNvSpPr>
+          <p:nvPr>
+            <p:ph type="sldNum" sz="quarter" idx="12"/>
+          </p:nvPr>
+        </p:nvSpPr>
+        <p:spPr/>
+        <p:txBody>
+          <a:bodyPr/>
+          <a:lstStyle/>
+          <a:p>
+            <a:fld id="{4A7B46D6-F21A-4DD7-8FBA-FBACCF13E108}" type="slidenum">
+              <a:rPr kumimoji="1" lang="ja-JP" altLang="en-US" smtClean="0"/>
+              <a:t>‹#›</a:t>
+            </a:fld>
+            <a:endParaRPr kumimoji="1" lang="ja-JP" altLang="en-US"/>
+          </a:p>
+        </p:txBody>
+      </p:sp>
+    </p:spTree>
+    <p:extLst>
+      <p:ext uri="{BB962C8B-B14F-4D97-AF65-F5344CB8AC3E}">
+        <p14:creationId xmlns:p14="http://schemas.microsoft.com/office/powerpoint/2010/main" val="1878813461"/>
+      </p:ext>
+    </p:extLst>
   </p:cSld>
   <p:clrMapOvr>
     <a:masterClrMapping/>
@@ -6028,6 +6751,7 @@
     <p:sldLayoutId id="2147483656" r:id="rId9"/>
     <p:sldLayoutId id="2147483657" r:id="rId10"/>
     <p:sldLayoutId id="2147483658" r:id="rId11"/>
+    <p:sldLayoutId id="2147483671" r:id="rId12"/>
   </p:sldLayoutIdLst>
   <p:hf sldNum="0" hdr="0" ftr="0" dt="0"/>
   <p:txStyles>
@@ -6809,8 +7533,8 @@
         </p:nvSpPr>
         <p:spPr>
           <a:xfrm>
-            <a:off x="6038044" y="3232858"/>
-            <a:ext cx="2795442" cy="1478131"/>
+            <a:off x="5690382" y="3718193"/>
+            <a:ext cx="3143104" cy="1036687"/>
           </a:xfrm>
           <a:prstGeom prst="rect">
             <a:avLst/>
@@ -6844,9 +7568,6 @@
                   </a:schemeClr>
                 </a:solidFill>
                 <a:sym typeface="Arial"/>
-                <a:latin typeface="メイリオ"/>
-                <a:ea typeface="メイリオ"/>
-                <a:cs typeface="メイリオ"/>
               </a:rPr>
               <a:t>令和８年５月27日（水）</a:t>
             </a:r>
@@ -6881,9 +7602,6 @@
                   </a:schemeClr>
                 </a:solidFill>
                 <a:sym typeface="Arial"/>
-                <a:latin typeface="メイリオ"/>
-                <a:ea typeface="メイリオ"/>
-                <a:cs typeface="メイリオ"/>
               </a:rPr>
               <a:t>練馬区教育委員会</a:t>
             </a:r>
@@ -6918,9 +7636,6 @@
                   </a:schemeClr>
                 </a:solidFill>
                 <a:sym typeface="Arial"/>
-                <a:latin typeface="メイリオ"/>
-                <a:ea typeface="メイリオ"/>
-                <a:cs typeface="メイリオ"/>
               </a:rPr>
               <a:t>指導主事　</a:t>
             </a:r>
@@ -7059,10 +7774,10 @@
       </p:sp>
       <p:pic>
         <p:nvPicPr>
-          <p:cNvPr id="2" name="図 1" descr="抽象, 挿絵 が含まれている画像&#10;&#10;AI 生成コンテンツは誤りを含む可能性があります。">
+          <p:cNvPr id="4" name="図 3">
             <a:extLst>
               <a:ext uri="{FF2B5EF4-FFF2-40B4-BE49-F238E27FC236}">
-                <a16:creationId xmlns:a16="http://schemas.microsoft.com/office/drawing/2014/main" id="{379B1C8B-579E-B03D-E60F-6F86A97CFE8B}"/>
+                <a16:creationId xmlns:a16="http://schemas.microsoft.com/office/drawing/2014/main" id="{8BCF7D57-B099-BCA6-6CF2-6DD172067611}"/>
               </a:ext>
             </a:extLst>
           </p:cNvPr>
@@ -7079,8 +7794,8 @@
         </p:blipFill>
         <p:spPr>
           <a:xfrm>
-            <a:off x="812995" y="3009900"/>
-            <a:ext cx="3211398" cy="2133600"/>
+            <a:off x="633276" y="2958529"/>
+            <a:ext cx="2370176" cy="1945072"/>
           </a:xfrm>
           <a:prstGeom prst="rect">
             <a:avLst/>
@@ -7095,7 +7810,7 @@
 </p:sld>
 </file>
 
-<file path=ppt/slides/slide2.xml><?xml version="1.0" encoding="utf-8"?>
+<file path=ppt/slides/slide10.xml><?xml version="1.0" encoding="utf-8"?>
 <p:sld xmlns:a="http://schemas.openxmlformats.org/drawingml/2006/main" xmlns:r="http://schemas.openxmlformats.org/officeDocument/2006/relationships" xmlns:p="http://schemas.openxmlformats.org/presentationml/2006/main">
   <p:cSld>
     <p:spTree>
@@ -7103,7 +7818,7 @@
         <p:cNvPr id="1" name="">
           <a:extLst>
             <a:ext uri="{FF2B5EF4-FFF2-40B4-BE49-F238E27FC236}">
-              <a16:creationId xmlns:a16="http://schemas.microsoft.com/office/drawing/2014/main" id="{EEF1D3C9-DA06-2360-20FE-D74FEFB05E4B}"/>
+              <a16:creationId xmlns:a16="http://schemas.microsoft.com/office/drawing/2014/main" id="{FE7B42D7-2122-C921-2C93-C06AF6E3DA47}"/>
             </a:ext>
           </a:extLst>
         </p:cNvPr>
@@ -7123,7 +7838,7 @@
           <p:cNvPr id="8" name="正方形/長方形 7">
             <a:extLst>
               <a:ext uri="{FF2B5EF4-FFF2-40B4-BE49-F238E27FC236}">
-                <a16:creationId xmlns:a16="http://schemas.microsoft.com/office/drawing/2014/main" id="{883CEDA9-7196-12AB-8B24-555D95D63C5D}"/>
+                <a16:creationId xmlns:a16="http://schemas.microsoft.com/office/drawing/2014/main" id="{FD724A89-2580-D591-20FE-044E5BEFBAE5}"/>
               </a:ext>
             </a:extLst>
           </p:cNvPr>
@@ -7154,7 +7869,7 @@
           <p:cNvPr id="16" name="正方形/長方形 15">
             <a:extLst>
               <a:ext uri="{FF2B5EF4-FFF2-40B4-BE49-F238E27FC236}">
-                <a16:creationId xmlns:a16="http://schemas.microsoft.com/office/drawing/2014/main" id="{745391DB-BFA8-70BC-47AF-C870A4F9A906}"/>
+                <a16:creationId xmlns:a16="http://schemas.microsoft.com/office/drawing/2014/main" id="{4D9C61A6-0D7D-D7A1-EB3A-F1D29C27CCA7}"/>
               </a:ext>
             </a:extLst>
           </p:cNvPr>
@@ -7208,18 +7923,7 @@
                 <a:ea typeface="メイリオ"/>
                 <a:cs typeface="メイリオ"/>
               </a:rPr>
-              <a:t>　</a:t>
-            </a:r>
-            <a:r>
-              <a:rPr lang="ja-JP" altLang="en-US" sz="4000" b="1" dirty="0">
-                <a:solidFill>
-                  <a:schemeClr val="bg1"/>
-                </a:solidFill>
-                <a:latin typeface="メイリオ"/>
-                <a:ea typeface="メイリオ"/>
-                <a:cs typeface="メイリオ"/>
-              </a:rPr>
-              <a:t>３・４校時の授業について　</a:t>
+              <a:t>　３・４校時の授業について　③行動</a:t>
             </a:r>
             <a:endParaRPr lang="en-US" altLang="ja-JP" sz="3200" b="1" dirty="0">
               <a:solidFill>
@@ -7234,7 +7938,7 @@
           <p:cNvPr id="9" name="正方形/長方形 8">
             <a:extLst>
               <a:ext uri="{FF2B5EF4-FFF2-40B4-BE49-F238E27FC236}">
-                <a16:creationId xmlns:a16="http://schemas.microsoft.com/office/drawing/2014/main" id="{6242ACF5-38B3-DDF6-38BA-9842170ED879}"/>
+                <a16:creationId xmlns:a16="http://schemas.microsoft.com/office/drawing/2014/main" id="{C5D3743F-9B80-8301-2727-28B24CEB585F}"/>
               </a:ext>
             </a:extLst>
           </p:cNvPr>
@@ -7243,8 +7947,8 @@
         </p:nvSpPr>
         <p:spPr bwMode="white">
           <a:xfrm>
-            <a:off x="470947" y="970565"/>
-            <a:ext cx="8019225" cy="2723823"/>
+            <a:off x="489758" y="822960"/>
+            <a:ext cx="4000000" cy="914400"/>
           </a:xfrm>
           <a:prstGeom prst="rect">
             <a:avLst/>
@@ -7262,117 +7966,201 @@
           </a:bodyPr>
           <a:lstStyle/>
           <a:p>
-            <a:pPr>
-              <a:lnSpc>
-                <a:spcPct val="120000"/>
-              </a:lnSpc>
-            </a:pPr>
-            <a:r>
-              <a:rPr lang="ja-JP" altLang="en-US" sz="3600" b="1" u="sng" dirty="0">
-                <a:solidFill>
-                  <a:schemeClr val="tx1">
-                    <a:lumMod val="65000"/>
-                    <a:lumOff val="35000"/>
-                  </a:schemeClr>
-                </a:solidFill>
+            <a:pPr algn="l"/>
+            <a:r>
+              <a:rPr lang="ja-JP" sz="2200" b="1" dirty="0">
                 <a:latin typeface="メイリオ"/>
                 <a:ea typeface="メイリオ"/>
                 <a:cs typeface="メイリオ"/>
               </a:rPr>
-              <a:t>本日の２つの視点</a:t>
-            </a:r>
-            <a:endParaRPr lang="en-US" altLang="ja-JP" sz="3600" b="1" u="sng" dirty="0">
-              <a:solidFill>
-                <a:schemeClr val="tx1">
-                  <a:lumMod val="65000"/>
-                  <a:lumOff val="35000"/>
-                </a:schemeClr>
-              </a:solidFill>
-              <a:latin typeface="メイリオ" panose="020B0604030504040204" pitchFamily="50" charset="-128"/>
-              <a:ea typeface="メイリオ" panose="020B0604030504040204" pitchFamily="50" charset="-128"/>
-              <a:cs typeface="メイリオ" panose="020B0604030504040204" pitchFamily="50" charset="-128"/>
-            </a:endParaRPr>
-          </a:p>
-          <a:p>
-            <a:r>
-              <a:rPr lang="ja-JP" sz="2400" b="1" dirty="0">
+              <a:t>4-1　社会（三井 新）</a:t>
+            </a:r>
+          </a:p>
+          <a:p>
+            <a:pPr algn="l"/>
+            <a:r>
+              <a:rPr lang="ja-JP" sz="1600" b="0" dirty="0">
                 <a:latin typeface="メイリオ"/>
                 <a:ea typeface="メイリオ"/>
                 <a:cs typeface="メイリオ"/>
               </a:rPr>
-              <a:t>〜授業の事実から学びを語る〜</a:t>
-            </a:r>
-          </a:p>
-          <a:p>
-            <a:pPr>
-              <a:lnSpc>
-                <a:spcPct val="120000"/>
-              </a:lnSpc>
-            </a:pPr>
-            <a:r>
-              <a:rPr lang="ja-JP" altLang="en-US" sz="3600" b="1" dirty="0">
-                <a:solidFill>
-                  <a:schemeClr val="tx1">
-                    <a:lumMod val="65000"/>
-                    <a:lumOff val="35000"/>
-                  </a:schemeClr>
-                </a:solidFill>
+              <a:t>「健康なくらし」</a:t>
+            </a:r>
+          </a:p>
+        </p:txBody>
+      </p:sp>
+      <p:sp>
+        <p:nvSpPr>
+          <p:cNvPr id="2" name="正方形/長方形 1">
+            <a:extLst>
+              <a:ext uri="{FF2B5EF4-FFF2-40B4-BE49-F238E27FC236}">
+                <a16:creationId xmlns:a16="http://schemas.microsoft.com/office/drawing/2014/main" id="{6E270405-A8B6-2B0E-EA8E-6FC8C7CBA1D9}"/>
+              </a:ext>
+            </a:extLst>
+          </p:cNvPr>
+          <p:cNvSpPr/>
+          <p:nvPr/>
+        </p:nvSpPr>
+        <p:spPr bwMode="white">
+          <a:xfrm>
+            <a:off x="4700000" y="822960"/>
+            <a:ext cx="4000000" cy="914400"/>
+          </a:xfrm>
+          <a:prstGeom prst="rect">
+            <a:avLst/>
+          </a:prstGeom>
+          <a:solidFill>
+            <a:schemeClr val="bg1"/>
+          </a:solidFill>
+          <a:ln>
+            <a:noFill/>
+          </a:ln>
+        </p:spPr>
+        <p:txBody>
+          <a:bodyPr wrap="square">
+            <a:spAutoFit/>
+          </a:bodyPr>
+          <a:lstStyle/>
+          <a:p>
+            <a:pPr algn="l"/>
+            <a:r>
+              <a:rPr lang="ja-JP" sz="2200" b="1" dirty="0">
                 <a:latin typeface="メイリオ"/>
                 <a:ea typeface="メイリオ"/>
                 <a:cs typeface="メイリオ"/>
               </a:rPr>
-              <a:t>・「主体的・対話的で深い学び」</a:t>
-            </a:r>
-            <a:endParaRPr lang="en-US" altLang="ja-JP" sz="3600" b="1" dirty="0">
-              <a:solidFill>
-                <a:schemeClr val="tx1">
-                  <a:lumMod val="65000"/>
-                  <a:lumOff val="35000"/>
-                </a:schemeClr>
-              </a:solidFill>
-              <a:latin typeface="メイリオ" panose="020B0604030504040204" pitchFamily="50" charset="-128"/>
-              <a:ea typeface="メイリオ" panose="020B0604030504040204" pitchFamily="50" charset="-128"/>
-              <a:cs typeface="メイリオ" panose="020B0604030504040204" pitchFamily="50" charset="-128"/>
-            </a:endParaRPr>
-          </a:p>
-          <a:p>
-            <a:pPr>
-              <a:lnSpc>
-                <a:spcPct val="120000"/>
-              </a:lnSpc>
-            </a:pPr>
-            <a:r>
-              <a:rPr lang="ja-JP" altLang="en-US" sz="3600" b="1" dirty="0">
-                <a:solidFill>
-                  <a:schemeClr val="tx1">
-                    <a:lumMod val="65000"/>
-                    <a:lumOff val="35000"/>
-                  </a:schemeClr>
-                </a:solidFill>
+              <a:t>5-2　体育（古江 渓那）</a:t>
+            </a:r>
+          </a:p>
+          <a:p>
+            <a:pPr algn="l"/>
+            <a:r>
+              <a:rPr lang="ja-JP" sz="1600" b="0" dirty="0">
                 <a:latin typeface="メイリオ"/>
                 <a:ea typeface="メイリオ"/>
                 <a:cs typeface="メイリオ"/>
               </a:rPr>
-              <a:t>・研究主題の具現</a:t>
-            </a:r>
-            <a:endParaRPr lang="en-US" altLang="ja-JP" sz="3600" b="1" dirty="0">
-              <a:solidFill>
-                <a:schemeClr val="tx1">
-                  <a:lumMod val="65000"/>
-                  <a:lumOff val="35000"/>
-                </a:schemeClr>
-              </a:solidFill>
-              <a:latin typeface="メイリオ" panose="020B0604030504040204" pitchFamily="50" charset="-128"/>
-              <a:ea typeface="メイリオ" panose="020B0604030504040204" pitchFamily="50" charset="-128"/>
-              <a:cs typeface="メイリオ" panose="020B0604030504040204" pitchFamily="50" charset="-128"/>
-            </a:endParaRPr>
+              <a:t>「ハンドボール」</a:t>
+            </a:r>
+          </a:p>
+        </p:txBody>
+      </p:sp>
+      <p:sp>
+        <p:nvSpPr>
+          <p:cNvPr id="3" name="正方形/長方形 2">
+            <a:extLst>
+              <a:ext uri="{FF2B5EF4-FFF2-40B4-BE49-F238E27FC236}">
+                <a16:creationId xmlns:a16="http://schemas.microsoft.com/office/drawing/2014/main" id="{41044BF6-66AC-7531-FFD7-AE2565339A18}"/>
+              </a:ext>
+            </a:extLst>
+          </p:cNvPr>
+          <p:cNvSpPr/>
+          <p:nvPr/>
+        </p:nvSpPr>
+        <p:spPr bwMode="white">
+          <a:xfrm>
+            <a:off x="489758" y="2606040"/>
+            <a:ext cx="4000000" cy="914400"/>
+          </a:xfrm>
+          <a:prstGeom prst="rect">
+            <a:avLst/>
+          </a:prstGeom>
+          <a:solidFill>
+            <a:schemeClr val="bg1"/>
+          </a:solidFill>
+          <a:ln>
+            <a:noFill/>
+          </a:ln>
+        </p:spPr>
+        <p:txBody>
+          <a:bodyPr wrap="square">
+            <a:spAutoFit/>
+          </a:bodyPr>
+          <a:lstStyle/>
+          <a:p>
+            <a:pPr algn="l"/>
+            <a:r>
+              <a:rPr lang="ja-JP" sz="2200" b="1" dirty="0">
+                <a:latin typeface="メイリオ"/>
+                <a:ea typeface="メイリオ"/>
+                <a:cs typeface="メイリオ"/>
+              </a:rPr>
+              <a:t>6-2　外国語（木下）</a:t>
+            </a:r>
+          </a:p>
+          <a:p>
+            <a:pPr algn="l"/>
+            <a:r>
+              <a:rPr lang="ja-JP" sz="1600" b="0" dirty="0">
+                <a:latin typeface="メイリオ"/>
+                <a:ea typeface="メイリオ"/>
+                <a:cs typeface="メイリオ"/>
+              </a:rPr>
+              <a:t>「Welcome to Japan.」</a:t>
+            </a:r>
+          </a:p>
+        </p:txBody>
+      </p:sp>
+      <p:sp>
+        <p:nvSpPr>
+          <p:cNvPr id="5" name="正方形/長方形 4">
+            <a:extLst>
+              <a:ext uri="{FF2B5EF4-FFF2-40B4-BE49-F238E27FC236}">
+                <a16:creationId xmlns:a16="http://schemas.microsoft.com/office/drawing/2014/main" id="{84877F31-44E4-C62E-AC94-341DD920F663}"/>
+              </a:ext>
+            </a:extLst>
+          </p:cNvPr>
+          <p:cNvSpPr/>
+          <p:nvPr/>
+        </p:nvSpPr>
+        <p:spPr bwMode="white">
+          <a:xfrm>
+            <a:off x="4700000" y="2606040"/>
+            <a:ext cx="4000000" cy="914400"/>
+          </a:xfrm>
+          <a:prstGeom prst="rect">
+            <a:avLst/>
+          </a:prstGeom>
+          <a:solidFill>
+            <a:schemeClr val="bg1"/>
+          </a:solidFill>
+          <a:ln>
+            <a:noFill/>
+          </a:ln>
+        </p:spPr>
+        <p:txBody>
+          <a:bodyPr wrap="square">
+            <a:spAutoFit/>
+          </a:bodyPr>
+          <a:lstStyle/>
+          <a:p>
+            <a:pPr algn="l"/>
+            <a:r>
+              <a:rPr lang="ja-JP" sz="2200" b="1" dirty="0">
+                <a:latin typeface="メイリオ"/>
+                <a:ea typeface="メイリオ"/>
+                <a:cs typeface="メイリオ"/>
+              </a:rPr>
+              <a:t>2-2　道徳（中牧 万優）</a:t>
+            </a:r>
+          </a:p>
+          <a:p>
+            <a:pPr algn="l"/>
+            <a:r>
+              <a:rPr lang="ja-JP" sz="1600" b="0" dirty="0">
+                <a:latin typeface="メイリオ"/>
+                <a:ea typeface="メイリオ"/>
+                <a:cs typeface="メイリオ"/>
+              </a:rPr>
+              <a:t>「けんかをしたけど」</a:t>
+            </a:r>
           </a:p>
         </p:txBody>
       </p:sp>
     </p:spTree>
     <p:extLst>
       <p:ext uri="{BB962C8B-B14F-4D97-AF65-F5344CB8AC3E}">
-        <p14:creationId xmlns:p14="http://schemas.microsoft.com/office/powerpoint/2010/main" val="1812740082"/>
+        <p14:creationId xmlns:p14="http://schemas.microsoft.com/office/powerpoint/2010/main" val="255766459"/>
       </p:ext>
     </p:extLst>
   </p:cSld>
@@ -7382,7 +8170,7 @@
 </p:sld>
 </file>
 
-<file path=ppt/slides/slide3.xml><?xml version="1.0" encoding="utf-8"?>
+<file path=ppt/slides/slide11.xml><?xml version="1.0" encoding="utf-8"?>
 <p:sld xmlns:a="http://schemas.openxmlformats.org/drawingml/2006/main" xmlns:r="http://schemas.openxmlformats.org/officeDocument/2006/relationships" xmlns:p="http://schemas.openxmlformats.org/presentationml/2006/main">
   <p:cSld>
     <p:spTree>
@@ -7390,7 +8178,7 @@
         <p:cNvPr id="1" name="">
           <a:extLst>
             <a:ext uri="{FF2B5EF4-FFF2-40B4-BE49-F238E27FC236}">
-              <a16:creationId xmlns:a16="http://schemas.microsoft.com/office/drawing/2014/main" id="{EE7ACCFB-11A9-A167-FC3C-2B1CFB996FEC}"/>
+              <a16:creationId xmlns:a16="http://schemas.microsoft.com/office/drawing/2014/main" id="{5DCA69D4-9E83-C4B8-C70A-C1B659D78E76}"/>
             </a:ext>
           </a:extLst>
         </p:cNvPr>
@@ -7410,7 +8198,7 @@
           <p:cNvPr id="8" name="正方形/長方形 7">
             <a:extLst>
               <a:ext uri="{FF2B5EF4-FFF2-40B4-BE49-F238E27FC236}">
-                <a16:creationId xmlns:a16="http://schemas.microsoft.com/office/drawing/2014/main" id="{553072CC-638E-F6B3-3AFC-C1FC2B03597D}"/>
+                <a16:creationId xmlns:a16="http://schemas.microsoft.com/office/drawing/2014/main" id="{35946C94-B9F0-DD15-84F0-73069CCD52BD}"/>
               </a:ext>
             </a:extLst>
           </p:cNvPr>
@@ -7441,7 +8229,7 @@
           <p:cNvPr id="16" name="正方形/長方形 15">
             <a:extLst>
               <a:ext uri="{FF2B5EF4-FFF2-40B4-BE49-F238E27FC236}">
-                <a16:creationId xmlns:a16="http://schemas.microsoft.com/office/drawing/2014/main" id="{5754C457-EAA5-6979-2193-2CF285EC2BD5}"/>
+                <a16:creationId xmlns:a16="http://schemas.microsoft.com/office/drawing/2014/main" id="{D36C533A-086A-4556-3962-87B1BAE2DE27}"/>
               </a:ext>
             </a:extLst>
           </p:cNvPr>
@@ -7495,18 +8283,7 @@
                 <a:ea typeface="メイリオ"/>
                 <a:cs typeface="メイリオ"/>
               </a:rPr>
-              <a:t>　</a:t>
-            </a:r>
-            <a:r>
-              <a:rPr lang="ja-JP" altLang="en-US" sz="4000" b="1" dirty="0">
-                <a:solidFill>
-                  <a:schemeClr val="bg1"/>
-                </a:solidFill>
-                <a:latin typeface="メイリオ"/>
-                <a:ea typeface="メイリオ"/>
-                <a:cs typeface="メイリオ"/>
-              </a:rPr>
-              <a:t>３・４校時の授業について　</a:t>
+              <a:t>　３・４校時の授業について　</a:t>
             </a:r>
             <a:endParaRPr lang="en-US" altLang="ja-JP" sz="3200" b="1" dirty="0">
               <a:solidFill>
@@ -7521,7 +8298,7 @@
           <p:cNvPr id="9" name="正方形/長方形 8">
             <a:extLst>
               <a:ext uri="{FF2B5EF4-FFF2-40B4-BE49-F238E27FC236}">
-                <a16:creationId xmlns:a16="http://schemas.microsoft.com/office/drawing/2014/main" id="{7A251EF3-8BF8-CF13-1EDD-BB47337CA447}"/>
+                <a16:creationId xmlns:a16="http://schemas.microsoft.com/office/drawing/2014/main" id="{4661EA82-9C22-9A67-DBBB-EC5A2E6C6A75}"/>
               </a:ext>
             </a:extLst>
           </p:cNvPr>
@@ -7531,7 +8308,7 @@
         <p:spPr bwMode="white">
           <a:xfrm>
             <a:off x="470947" y="970565"/>
-            <a:ext cx="8019225" cy="2723823"/>
+            <a:ext cx="8019225" cy="3507114"/>
           </a:xfrm>
           <a:prstGeom prst="rect">
             <a:avLst/>
@@ -7555,7 +8332,7 @@
               </a:lnSpc>
             </a:pPr>
             <a:r>
-              <a:rPr lang="ja-JP" altLang="en-US" sz="3600" b="1" dirty="0">
+              <a:rPr lang="ja-JP" altLang="en-US" sz="3000" b="1" dirty="0">
                 <a:solidFill>
                   <a:schemeClr val="tx1">
                     <a:lumMod val="65000"/>
@@ -7566,9 +8343,9 @@
                 <a:ea typeface="メイリオ"/>
                 <a:cs typeface="メイリオ"/>
               </a:rPr>
-              <a:t>研究主題の具現に向けた３つの視点</a:t>
-            </a:r>
-            <a:endParaRPr lang="en-US" altLang="ja-JP" sz="3600" b="1" dirty="0">
+              <a:t>「主体的な学び」の具現に向けた３つの視点</a:t>
+            </a:r>
+            <a:endParaRPr lang="en-US" altLang="ja-JP" sz="3000" b="1" dirty="0">
               <a:solidFill>
                 <a:schemeClr val="tx1">
                   <a:lumMod val="65000"/>
@@ -7587,20 +8364,166 @@
               </a:lnSpc>
             </a:pPr>
             <a:r>
-              <a:rPr lang="ja-JP" altLang="en-US" sz="3600" b="1" dirty="0">
+              <a:rPr lang="ja-JP" altLang="en-US" sz="2600" b="1" dirty="0">
                 <a:solidFill>
                   <a:schemeClr val="tx1">
                     <a:lumMod val="65000"/>
                     <a:lumOff val="35000"/>
                   </a:schemeClr>
                 </a:solidFill>
-                <a:latin typeface="メイリオ"/>
-                <a:ea typeface="メイリオ"/>
+                <a:latin typeface="メイリオ" panose="020B0604030504040204" pitchFamily="50" charset="-128"/>
+                <a:ea typeface="メイリオ" panose="020B0604030504040204" pitchFamily="50" charset="-128"/>
                 <a:cs typeface="メイリオ"/>
               </a:rPr>
-              <a:t>　①自ら関心をもち（教材との出会い）</a:t>
-            </a:r>
-            <a:endParaRPr lang="en-US" altLang="ja-JP" sz="3600" b="1" dirty="0">
+              <a:t>①</a:t>
+            </a:r>
+            <a:r>
+              <a:rPr lang="ja-JP" altLang="ja-JP" sz="2600" dirty="0">
+                <a:latin typeface="メイリオ" panose="020B0604030504040204" pitchFamily="50" charset="-128"/>
+                <a:ea typeface="メイリオ" panose="020B0604030504040204" pitchFamily="50" charset="-128"/>
+              </a:rPr>
+              <a:t>【自ら関心をもち、見通しをもつ工夫】</a:t>
+            </a:r>
+            <a:endParaRPr lang="en-US" altLang="ja-JP" sz="2600" dirty="0">
+              <a:latin typeface="メイリオ" panose="020B0604030504040204" pitchFamily="50" charset="-128"/>
+              <a:ea typeface="メイリオ" panose="020B0604030504040204" pitchFamily="50" charset="-128"/>
+            </a:endParaRPr>
+          </a:p>
+          <a:p>
+            <a:pPr>
+              <a:lnSpc>
+                <a:spcPct val="120000"/>
+              </a:lnSpc>
+            </a:pPr>
+            <a:r>
+              <a:rPr lang="ja-JP" altLang="en-US" sz="2600" dirty="0">
+                <a:latin typeface="メイリオ" panose="020B0604030504040204" pitchFamily="50" charset="-128"/>
+                <a:ea typeface="メイリオ" panose="020B0604030504040204" pitchFamily="50" charset="-128"/>
+              </a:rPr>
+              <a:t>　　　　　　　　</a:t>
+            </a:r>
+            <a:r>
+              <a:rPr lang="ja-JP" altLang="ja-JP" sz="2600" dirty="0">
+                <a:latin typeface="メイリオ" panose="020B0604030504040204" pitchFamily="50" charset="-128"/>
+                <a:ea typeface="メイリオ" panose="020B0604030504040204" pitchFamily="50" charset="-128"/>
+              </a:rPr>
+              <a:t>（教材との出会い・課題の設定）</a:t>
+            </a:r>
+            <a:endParaRPr lang="en-US" altLang="ja-JP" sz="2600" dirty="0">
+              <a:latin typeface="メイリオ" panose="020B0604030504040204" pitchFamily="50" charset="-128"/>
+              <a:ea typeface="メイリオ" panose="020B0604030504040204" pitchFamily="50" charset="-128"/>
+            </a:endParaRPr>
+          </a:p>
+          <a:p>
+            <a:pPr>
+              <a:lnSpc>
+                <a:spcPct val="120000"/>
+              </a:lnSpc>
+            </a:pPr>
+            <a:r>
+              <a:rPr lang="ja-JP" altLang="en-US" sz="2600" b="1" dirty="0">
+                <a:solidFill>
+                  <a:schemeClr val="tx1">
+                    <a:lumMod val="65000"/>
+                    <a:lumOff val="35000"/>
+                  </a:schemeClr>
+                </a:solidFill>
+                <a:latin typeface="メイリオ" panose="020B0604030504040204" pitchFamily="50" charset="-128"/>
+                <a:ea typeface="メイリオ" panose="020B0604030504040204" pitchFamily="50" charset="-128"/>
+                <a:cs typeface="メイリオ"/>
+              </a:rPr>
+              <a:t>②</a:t>
+            </a:r>
+            <a:r>
+              <a:rPr lang="ja-JP" altLang="ja-JP" sz="2600" dirty="0">
+                <a:latin typeface="メイリオ" panose="020B0604030504040204" pitchFamily="50" charset="-128"/>
+                <a:ea typeface="メイリオ" panose="020B0604030504040204" pitchFamily="50" charset="-128"/>
+              </a:rPr>
+              <a:t>【考えを深め、自己調整する工夫】</a:t>
+            </a:r>
+            <a:endParaRPr lang="en-US" altLang="ja-JP" sz="2600" dirty="0">
+              <a:latin typeface="メイリオ" panose="020B0604030504040204" pitchFamily="50" charset="-128"/>
+              <a:ea typeface="メイリオ" panose="020B0604030504040204" pitchFamily="50" charset="-128"/>
+            </a:endParaRPr>
+          </a:p>
+          <a:p>
+            <a:pPr>
+              <a:lnSpc>
+                <a:spcPct val="120000"/>
+              </a:lnSpc>
+            </a:pPr>
+            <a:r>
+              <a:rPr lang="ja-JP" altLang="en-US" sz="2600" dirty="0">
+                <a:latin typeface="メイリオ" panose="020B0604030504040204" pitchFamily="50" charset="-128"/>
+                <a:ea typeface="メイリオ" panose="020B0604030504040204" pitchFamily="50" charset="-128"/>
+              </a:rPr>
+              <a:t>　　　　　　　</a:t>
+            </a:r>
+            <a:r>
+              <a:rPr lang="ja-JP" altLang="ja-JP" sz="2600" dirty="0">
+                <a:latin typeface="メイリオ" panose="020B0604030504040204" pitchFamily="50" charset="-128"/>
+                <a:ea typeface="メイリオ" panose="020B0604030504040204" pitchFamily="50" charset="-128"/>
+              </a:rPr>
+              <a:t>（委ねる時間と協働的な問い直し）</a:t>
+            </a:r>
+            <a:endParaRPr lang="en-US" altLang="ja-JP" sz="2600" dirty="0">
+              <a:latin typeface="メイリオ" panose="020B0604030504040204" pitchFamily="50" charset="-128"/>
+              <a:ea typeface="メイリオ" panose="020B0604030504040204" pitchFamily="50" charset="-128"/>
+            </a:endParaRPr>
+          </a:p>
+          <a:p>
+            <a:pPr>
+              <a:lnSpc>
+                <a:spcPct val="120000"/>
+              </a:lnSpc>
+            </a:pPr>
+            <a:r>
+              <a:rPr lang="ja-JP" altLang="en-US" sz="2600" b="1" dirty="0">
+                <a:solidFill>
+                  <a:schemeClr val="tx1">
+                    <a:lumMod val="65000"/>
+                    <a:lumOff val="35000"/>
+                  </a:schemeClr>
+                </a:solidFill>
+                <a:latin typeface="メイリオ" panose="020B0604030504040204" pitchFamily="50" charset="-128"/>
+                <a:ea typeface="メイリオ" panose="020B0604030504040204" pitchFamily="50" charset="-128"/>
+                <a:cs typeface="メイリオ"/>
+              </a:rPr>
+              <a:t>③</a:t>
+            </a:r>
+            <a:r>
+              <a:rPr lang="ja-JP" altLang="ja-JP" sz="2600" dirty="0">
+                <a:latin typeface="メイリオ" panose="020B0604030504040204" pitchFamily="50" charset="-128"/>
+                <a:ea typeface="メイリオ" panose="020B0604030504040204" pitchFamily="50" charset="-128"/>
+              </a:rPr>
+              <a:t>【学びを振り返り、次への行動へつなげる工夫】</a:t>
+            </a:r>
+            <a:endParaRPr lang="en-US" altLang="ja-JP" sz="2600" dirty="0">
+              <a:latin typeface="メイリオ" panose="020B0604030504040204" pitchFamily="50" charset="-128"/>
+              <a:ea typeface="メイリオ" panose="020B0604030504040204" pitchFamily="50" charset="-128"/>
+            </a:endParaRPr>
+          </a:p>
+          <a:p>
+            <a:pPr>
+              <a:lnSpc>
+                <a:spcPct val="120000"/>
+              </a:lnSpc>
+            </a:pPr>
+            <a:r>
+              <a:rPr lang="ja-JP" altLang="en-US" sz="2600" dirty="0">
+                <a:latin typeface="メイリオ" panose="020B0604030504040204" pitchFamily="50" charset="-128"/>
+                <a:ea typeface="メイリオ" panose="020B0604030504040204" pitchFamily="50" charset="-128"/>
+              </a:rPr>
+              <a:t>　　　　　　　　　　　　</a:t>
+            </a:r>
+            <a:r>
+              <a:rPr lang="ja-JP" altLang="ja-JP" sz="2600" dirty="0">
+                <a:latin typeface="メイリオ" panose="020B0604030504040204" pitchFamily="50" charset="-128"/>
+                <a:ea typeface="メイリオ" panose="020B0604030504040204" pitchFamily="50" charset="-128"/>
+              </a:rPr>
+              <a:t>（変容の自覚と実践化）</a:t>
+            </a:r>
+            <a:endParaRPr lang="en-US" altLang="ja-JP" sz="2600" b="1" dirty="0">
               <a:solidFill>
                 <a:schemeClr val="tx1">
                   <a:lumMod val="65000"/>
@@ -7612,76 +8535,12 @@
               <a:cs typeface="メイリオ" panose="020B0604030504040204" pitchFamily="50" charset="-128"/>
             </a:endParaRPr>
           </a:p>
-          <a:p>
-            <a:pPr>
-              <a:lnSpc>
-                <a:spcPct val="120000"/>
-              </a:lnSpc>
-            </a:pPr>
-            <a:r>
-              <a:rPr lang="ja-JP" altLang="en-US" sz="3600" b="1" dirty="0">
-                <a:solidFill>
-                  <a:schemeClr val="tx1">
-                    <a:lumMod val="65000"/>
-                    <a:lumOff val="35000"/>
-                  </a:schemeClr>
-                </a:solidFill>
-                <a:latin typeface="メイリオ"/>
-                <a:ea typeface="メイリオ"/>
-                <a:cs typeface="メイリオ"/>
-              </a:rPr>
-              <a:t>　②考え（委ねる時間と戻る場）</a:t>
-            </a:r>
-            <a:endParaRPr lang="en-US" altLang="ja-JP" sz="3600" b="1" dirty="0">
-              <a:solidFill>
-                <a:schemeClr val="tx1">
-                  <a:lumMod val="65000"/>
-                  <a:lumOff val="35000"/>
-                </a:schemeClr>
-              </a:solidFill>
-              <a:latin typeface="メイリオ" panose="020B0604030504040204" pitchFamily="50" charset="-128"/>
-              <a:ea typeface="メイリオ" panose="020B0604030504040204" pitchFamily="50" charset="-128"/>
-              <a:cs typeface="メイリオ" panose="020B0604030504040204" pitchFamily="50" charset="-128"/>
-            </a:endParaRPr>
-          </a:p>
-          <a:p>
-            <a:pPr>
-              <a:lnSpc>
-                <a:spcPct val="120000"/>
-              </a:lnSpc>
-            </a:pPr>
-            <a:r>
-              <a:rPr lang="ja-JP" altLang="en-US" sz="3600" b="1" dirty="0">
-                <a:solidFill>
-                  <a:schemeClr val="tx1">
-                    <a:lumMod val="65000"/>
-                    <a:lumOff val="35000"/>
-                  </a:schemeClr>
-                </a:solidFill>
-                <a:latin typeface="メイリオ"/>
-                <a:ea typeface="メイリオ"/>
-                <a:cs typeface="メイリオ"/>
-              </a:rPr>
-              <a:t>　③行動しようとする（学びを次へ）</a:t>
-            </a:r>
-            <a:endParaRPr lang="en-US" altLang="ja-JP" sz="3600" b="1" dirty="0">
-              <a:solidFill>
-                <a:schemeClr val="tx1">
-                  <a:lumMod val="65000"/>
-                  <a:lumOff val="35000"/>
-                </a:schemeClr>
-              </a:solidFill>
-              <a:latin typeface="メイリオ" panose="020B0604030504040204" pitchFamily="50" charset="-128"/>
-              <a:ea typeface="メイリオ" panose="020B0604030504040204" pitchFamily="50" charset="-128"/>
-              <a:cs typeface="メイリオ" panose="020B0604030504040204" pitchFamily="50" charset="-128"/>
-            </a:endParaRPr>
-          </a:p>
         </p:txBody>
       </p:sp>
     </p:spTree>
     <p:extLst>
       <p:ext uri="{BB962C8B-B14F-4D97-AF65-F5344CB8AC3E}">
-        <p14:creationId xmlns:p14="http://schemas.microsoft.com/office/powerpoint/2010/main" val="3216189916"/>
+        <p14:creationId xmlns:p14="http://schemas.microsoft.com/office/powerpoint/2010/main" val="3755253943"/>
       </p:ext>
     </p:extLst>
   </p:cSld>
@@ -7691,7 +8550,7 @@
 </p:sld>
 </file>
 
-<file path=ppt/slides/slide4.xml><?xml version="1.0" encoding="utf-8"?>
+<file path=ppt/slides/slide12.xml><?xml version="1.0" encoding="utf-8"?>
 <p:sld xmlns:a="http://schemas.openxmlformats.org/drawingml/2006/main" xmlns:r="http://schemas.openxmlformats.org/officeDocument/2006/relationships" xmlns:p="http://schemas.openxmlformats.org/presentationml/2006/main">
   <p:cSld>
     <p:spTree>
@@ -7699,7 +8558,7 @@
         <p:cNvPr id="1" name="">
           <a:extLst>
             <a:ext uri="{FF2B5EF4-FFF2-40B4-BE49-F238E27FC236}">
-              <a16:creationId xmlns:a16="http://schemas.microsoft.com/office/drawing/2014/main" id="{2F5B79F4-05D2-BF79-07BC-ED7DCF574AA9}"/>
+              <a16:creationId xmlns:a16="http://schemas.microsoft.com/office/drawing/2014/main" id="{F42973C5-949A-0B47-375C-47B674A7E0F7}"/>
             </a:ext>
           </a:extLst>
         </p:cNvPr>
@@ -7719,7 +8578,7 @@
           <p:cNvPr id="8" name="正方形/長方形 7">
             <a:extLst>
               <a:ext uri="{FF2B5EF4-FFF2-40B4-BE49-F238E27FC236}">
-                <a16:creationId xmlns:a16="http://schemas.microsoft.com/office/drawing/2014/main" id="{62D3125A-579A-5C8B-1BAC-E2491CBE01AA}"/>
+                <a16:creationId xmlns:a16="http://schemas.microsoft.com/office/drawing/2014/main" id="{C556DA15-1216-AE2D-19F4-BE0E23E4579F}"/>
               </a:ext>
             </a:extLst>
           </p:cNvPr>
@@ -7750,7 +8609,7 @@
           <p:cNvPr id="16" name="正方形/長方形 15">
             <a:extLst>
               <a:ext uri="{FF2B5EF4-FFF2-40B4-BE49-F238E27FC236}">
-                <a16:creationId xmlns:a16="http://schemas.microsoft.com/office/drawing/2014/main" id="{1D217E0A-F267-CC5F-AAEF-3CC0E0E7BA77}"/>
+                <a16:creationId xmlns:a16="http://schemas.microsoft.com/office/drawing/2014/main" id="{1CF88AA8-D5AA-2FFC-B5F9-8677ACCDECF3}"/>
               </a:ext>
             </a:extLst>
           </p:cNvPr>
@@ -7804,18 +8663,7 @@
                 <a:ea typeface="メイリオ"/>
                 <a:cs typeface="メイリオ"/>
               </a:rPr>
-              <a:t>　</a:t>
-            </a:r>
-            <a:r>
-              <a:rPr lang="ja-JP" altLang="en-US" sz="4000" b="1" dirty="0">
-                <a:solidFill>
-                  <a:schemeClr val="bg1"/>
-                </a:solidFill>
-                <a:latin typeface="メイリオ"/>
-                <a:ea typeface="メイリオ"/>
-                <a:cs typeface="メイリオ"/>
-              </a:rPr>
-              <a:t>３・４校時の授業について　①関心</a:t>
+              <a:t>　３・４校時の授業について　</a:t>
             </a:r>
             <a:endParaRPr lang="en-US" altLang="ja-JP" sz="3200" b="1" dirty="0">
               <a:solidFill>
@@ -7830,7 +8678,7 @@
           <p:cNvPr id="9" name="正方形/長方形 8">
             <a:extLst>
               <a:ext uri="{FF2B5EF4-FFF2-40B4-BE49-F238E27FC236}">
-                <a16:creationId xmlns:a16="http://schemas.microsoft.com/office/drawing/2014/main" id="{77876903-AD43-5597-093C-B3A30EBDBD14}"/>
+                <a16:creationId xmlns:a16="http://schemas.microsoft.com/office/drawing/2014/main" id="{E79F7953-85A4-8E6B-482F-C62C34E3940C}"/>
               </a:ext>
             </a:extLst>
           </p:cNvPr>
@@ -7839,8 +8687,8 @@
         </p:nvSpPr>
         <p:spPr bwMode="white">
           <a:xfrm>
-            <a:off x="489758" y="658368"/>
-            <a:ext cx="3628642" cy="749808"/>
+            <a:off x="562387" y="606813"/>
+            <a:ext cx="8019225" cy="658642"/>
           </a:xfrm>
           <a:prstGeom prst="rect">
             <a:avLst/>
@@ -7858,49 +8706,1521 @@
           </a:bodyPr>
           <a:lstStyle/>
           <a:p>
-            <a:pPr algn="l"/>
-            <a:r>
-              <a:rPr lang="ja-JP" sz="2000" b="1" dirty="0">
+            <a:pPr>
+              <a:lnSpc>
+                <a:spcPct val="120000"/>
+              </a:lnSpc>
+            </a:pPr>
+            <a:r>
+              <a:rPr lang="ja-JP" altLang="en-US" sz="3200" b="1" dirty="0">
+                <a:solidFill>
+                  <a:schemeClr val="tx1">
+                    <a:lumMod val="65000"/>
+                    <a:lumOff val="35000"/>
+                  </a:schemeClr>
+                </a:solidFill>
                 <a:latin typeface="メイリオ"/>
                 <a:ea typeface="メイリオ"/>
                 <a:cs typeface="メイリオ"/>
               </a:rPr>
-              <a:t>1-全　体育（髙井他）</a:t>
-            </a:r>
-          </a:p>
-          <a:p>
-            <a:pPr algn="l"/>
-            <a:r>
-              <a:rPr lang="ja-JP" sz="1400" b="0" dirty="0">
-                <a:latin typeface="メイリオ"/>
-                <a:ea typeface="メイリオ"/>
-                <a:cs typeface="メイリオ"/>
-              </a:rPr>
-              <a:t>「ボールをなげるのだ！あてるのだ！たおすのだ！」</a:t>
-            </a:r>
-          </a:p>
-        </p:txBody>
-      </p:sp>
-      <p:sp>
-        <p:nvSpPr>
-          <p:cNvPr id="6" name="正方形/長方形 5">
+              <a:t>今後に向けて</a:t>
+            </a:r>
+            <a:endParaRPr lang="en-US" altLang="ja-JP" sz="3200" b="1" dirty="0">
+              <a:solidFill>
+                <a:schemeClr val="tx1">
+                  <a:lumMod val="65000"/>
+                  <a:lumOff val="35000"/>
+                </a:schemeClr>
+              </a:solidFill>
+              <a:latin typeface="メイリオ" panose="020B0604030504040204" pitchFamily="50" charset="-128"/>
+              <a:ea typeface="メイリオ" panose="020B0604030504040204" pitchFamily="50" charset="-128"/>
+              <a:cs typeface="メイリオ" panose="020B0604030504040204" pitchFamily="50" charset="-128"/>
+            </a:endParaRPr>
+          </a:p>
+        </p:txBody>
+      </p:sp>
+      <p:sp>
+        <p:nvSpPr>
+          <p:cNvPr id="2" name="正方形/長方形 1">
             <a:extLst>
               <a:ext uri="{FF2B5EF4-FFF2-40B4-BE49-F238E27FC236}">
-                <a16:creationId xmlns:a16="http://schemas.microsoft.com/office/drawing/2014/main" id="{085A74E2-1D9E-0368-1A5B-0CDBA4352FC1}"/>
+                <a16:creationId xmlns:a16="http://schemas.microsoft.com/office/drawing/2014/main" id="{111F27B4-4610-6AB1-6927-2CFCFD115F37}"/>
               </a:ext>
             </a:extLst>
           </p:cNvPr>
           <p:cNvSpPr/>
           <p:nvPr/>
         </p:nvSpPr>
-        <p:spPr>
+        <p:spPr bwMode="white">
           <a:xfrm>
-            <a:off x="489758" y="1434268"/>
-            <a:ext cx="3628642" cy="2748932"/>
+            <a:off x="562387" y="1356032"/>
+            <a:ext cx="8019225" cy="2431435"/>
           </a:xfrm>
           <a:prstGeom prst="rect">
             <a:avLst/>
           </a:prstGeom>
+          <a:solidFill>
+            <a:schemeClr val="bg1"/>
+          </a:solidFill>
+          <a:ln>
+            <a:noFill/>
+          </a:ln>
+        </p:spPr>
+        <p:txBody>
+          <a:bodyPr wrap="square">
+            <a:spAutoFit/>
+          </a:bodyPr>
+          <a:lstStyle/>
+          <a:p>
+            <a:pPr>
+              <a:lnSpc>
+                <a:spcPct val="120000"/>
+              </a:lnSpc>
+            </a:pPr>
+            <a:r>
+              <a:rPr lang="ja-JP" altLang="en-US" sz="3200" b="1" u="sng" dirty="0">
+                <a:solidFill>
+                  <a:schemeClr val="tx1">
+                    <a:lumMod val="65000"/>
+                    <a:lumOff val="35000"/>
+                  </a:schemeClr>
+                </a:solidFill>
+                <a:latin typeface="メイリオ"/>
+                <a:ea typeface="メイリオ"/>
+                <a:cs typeface="メイリオ"/>
+              </a:rPr>
+              <a:t>本日の視点を、明日の授業改善へ</a:t>
+            </a:r>
+            <a:endParaRPr lang="en-US" altLang="ja-JP" sz="3200" b="1" u="sng" dirty="0">
+              <a:solidFill>
+                <a:schemeClr val="tx1">
+                  <a:lumMod val="65000"/>
+                  <a:lumOff val="35000"/>
+                </a:schemeClr>
+              </a:solidFill>
+              <a:latin typeface="メイリオ" panose="020B0604030504040204" pitchFamily="50" charset="-128"/>
+              <a:ea typeface="メイリオ" panose="020B0604030504040204" pitchFamily="50" charset="-128"/>
+              <a:cs typeface="メイリオ" panose="020B0604030504040204" pitchFamily="50" charset="-128"/>
+            </a:endParaRPr>
+          </a:p>
+          <a:p>
+            <a:pPr>
+              <a:lnSpc>
+                <a:spcPct val="120000"/>
+              </a:lnSpc>
+            </a:pPr>
+            <a:r>
+              <a:rPr lang="ja-JP" altLang="en-US" sz="3200" b="1" dirty="0">
+                <a:solidFill>
+                  <a:schemeClr val="tx1">
+                    <a:lumMod val="65000"/>
+                    <a:lumOff val="35000"/>
+                  </a:schemeClr>
+                </a:solidFill>
+                <a:latin typeface="メイリオ"/>
+                <a:ea typeface="メイリオ"/>
+                <a:cs typeface="メイリオ"/>
+              </a:rPr>
+              <a:t>・深い学びと研究主題は地続き</a:t>
+            </a:r>
+            <a:endParaRPr lang="en-US" altLang="ja-JP" sz="3200" b="1" dirty="0">
+              <a:solidFill>
+                <a:schemeClr val="tx1">
+                  <a:lumMod val="65000"/>
+                  <a:lumOff val="35000"/>
+                </a:schemeClr>
+              </a:solidFill>
+              <a:latin typeface="メイリオ" panose="020B0604030504040204" pitchFamily="50" charset="-128"/>
+              <a:ea typeface="メイリオ" panose="020B0604030504040204" pitchFamily="50" charset="-128"/>
+              <a:cs typeface="メイリオ" panose="020B0604030504040204" pitchFamily="50" charset="-128"/>
+            </a:endParaRPr>
+          </a:p>
+          <a:p>
+            <a:pPr>
+              <a:lnSpc>
+                <a:spcPct val="120000"/>
+              </a:lnSpc>
+            </a:pPr>
+            <a:r>
+              <a:rPr lang="ja-JP" altLang="en-US" sz="3200" b="1" dirty="0">
+                <a:solidFill>
+                  <a:schemeClr val="tx1">
+                    <a:lumMod val="65000"/>
+                    <a:lumOff val="35000"/>
+                  </a:schemeClr>
+                </a:solidFill>
+                <a:latin typeface="メイリオ"/>
+                <a:ea typeface="メイリオ"/>
+                <a:cs typeface="メイリオ"/>
+              </a:rPr>
+              <a:t>・「好き」を育み「得意」を伸ばす</a:t>
+            </a:r>
+            <a:endParaRPr lang="en-US" altLang="ja-JP" sz="3200" b="1" dirty="0">
+              <a:solidFill>
+                <a:schemeClr val="tx1">
+                  <a:lumMod val="65000"/>
+                  <a:lumOff val="35000"/>
+                </a:schemeClr>
+              </a:solidFill>
+              <a:latin typeface="メイリオ" panose="020B0604030504040204" pitchFamily="50" charset="-128"/>
+              <a:ea typeface="メイリオ" panose="020B0604030504040204" pitchFamily="50" charset="-128"/>
+              <a:cs typeface="メイリオ" panose="020B0604030504040204" pitchFamily="50" charset="-128"/>
+            </a:endParaRPr>
+          </a:p>
+          <a:p>
+            <a:pPr>
+              <a:lnSpc>
+                <a:spcPct val="120000"/>
+              </a:lnSpc>
+            </a:pPr>
+            <a:r>
+              <a:rPr lang="ja-JP" altLang="en-US" sz="3200" b="1" dirty="0">
+                <a:solidFill>
+                  <a:schemeClr val="tx1">
+                    <a:lumMod val="65000"/>
+                    <a:lumOff val="35000"/>
+                  </a:schemeClr>
+                </a:solidFill>
+                <a:latin typeface="メイリオ"/>
+                <a:ea typeface="メイリオ"/>
+                <a:cs typeface="メイリオ"/>
+              </a:rPr>
+              <a:t>・「幸せな学校はみんながつくる」</a:t>
+            </a:r>
+            <a:endParaRPr lang="en-US" altLang="ja-JP" sz="3200" b="1" dirty="0">
+              <a:solidFill>
+                <a:schemeClr val="tx1">
+                  <a:lumMod val="65000"/>
+                  <a:lumOff val="35000"/>
+                </a:schemeClr>
+              </a:solidFill>
+              <a:latin typeface="メイリオ" panose="020B0604030504040204" pitchFamily="50" charset="-128"/>
+              <a:ea typeface="メイリオ" panose="020B0604030504040204" pitchFamily="50" charset="-128"/>
+              <a:cs typeface="メイリオ" panose="020B0604030504040204" pitchFamily="50" charset="-128"/>
+            </a:endParaRPr>
+          </a:p>
+        </p:txBody>
+      </p:sp>
+      <p:pic>
+        <p:nvPicPr>
+          <p:cNvPr id="5" name="Picture 4" descr="image1.png"/>
+          <p:cNvPicPr>
+            <a:picLocks noChangeAspect="1"/>
+          </p:cNvPicPr>
+          <p:nvPr/>
+        </p:nvPicPr>
+        <p:blipFill>
+          <a:blip r:embed="rId3"/>
+          <a:stretch>
+            <a:fillRect/>
+          </a:stretch>
+        </p:blipFill>
+        <p:spPr>
+          <a:xfrm>
+            <a:off x="7051997" y="3580720"/>
+            <a:ext cx="1870268" cy="1258834"/>
+          </a:xfrm>
+          <a:prstGeom prst="rect">
+            <a:avLst/>
+          </a:prstGeom>
+        </p:spPr>
+      </p:pic>
+    </p:spTree>
+    <p:extLst>
+      <p:ext uri="{BB962C8B-B14F-4D97-AF65-F5344CB8AC3E}">
+        <p14:creationId xmlns:p14="http://schemas.microsoft.com/office/powerpoint/2010/main" val="2299701922"/>
+      </p:ext>
+    </p:extLst>
+  </p:cSld>
+  <p:clrMapOvr>
+    <a:masterClrMapping/>
+  </p:clrMapOvr>
+</p:sld>
+</file>
+
+<file path=ppt/slides/slide13.xml><?xml version="1.0" encoding="utf-8"?>
+<p:sld xmlns:a="http://schemas.openxmlformats.org/drawingml/2006/main" xmlns:r="http://schemas.openxmlformats.org/officeDocument/2006/relationships" xmlns:p="http://schemas.openxmlformats.org/presentationml/2006/main">
+  <p:cSld>
+    <p:spTree>
+      <p:nvGrpSpPr>
+        <p:cNvPr id="1" name=""/>
+        <p:cNvGrpSpPr/>
+        <p:nvPr/>
+      </p:nvGrpSpPr>
+      <p:grpSpPr>
+        <a:xfrm>
+          <a:off x="0" y="0"/>
+          <a:ext cx="0" cy="0"/>
+          <a:chOff x="0" y="0"/>
+          <a:chExt cx="0" cy="0"/>
+        </a:xfrm>
+      </p:grpSpPr>
+      <p:sp>
+        <p:nvSpPr>
+          <p:cNvPr id="2" name="Rectangle 1"/>
+          <p:cNvSpPr/>
+          <p:nvPr/>
+        </p:nvSpPr>
+        <p:spPr>
+          <a:xfrm>
+            <a:off x="4230" y="0"/>
+            <a:ext cx="9135541" cy="611434"/>
+          </a:xfrm>
+          <a:prstGeom prst="rect">
+            <a:avLst/>
+          </a:prstGeom>
+          <a:solidFill>
+            <a:srgbClr val="00B0F0"/>
+          </a:solidFill>
+          <a:ln>
+            <a:noFill/>
+          </a:ln>
+          <a:effectLst/>
+        </p:spPr>
+        <p:style>
+          <a:lnRef idx="1">
+            <a:schemeClr val="accent1"/>
+          </a:lnRef>
+          <a:fillRef idx="3">
+            <a:schemeClr val="accent1"/>
+          </a:fillRef>
+          <a:effectRef idx="2">
+            <a:schemeClr val="accent1"/>
+          </a:effectRef>
+          <a:fontRef idx="minor">
+            <a:schemeClr val="lt1"/>
+          </a:fontRef>
+        </p:style>
+        <p:txBody>
+          <a:bodyPr rtlCol="0" anchor="ctr"/>
+          <a:lstStyle/>
+          <a:p>
+            <a:pPr algn="ctr"/>
+            <a:endParaRPr sz="1399"/>
+          </a:p>
+        </p:txBody>
+      </p:sp>
+      <p:sp>
+        <p:nvSpPr>
+          <p:cNvPr id="3" name="TextBox 2"/>
+          <p:cNvSpPr txBox="1"/>
+          <p:nvPr/>
+        </p:nvSpPr>
+        <p:spPr>
+          <a:xfrm>
+            <a:off x="220030" y="103223"/>
+            <a:ext cx="8703941" cy="404988"/>
+          </a:xfrm>
+          <a:prstGeom prst="rect">
+            <a:avLst/>
+          </a:prstGeom>
+          <a:noFill/>
+          <a:ln>
+            <a:noFill/>
+          </a:ln>
+        </p:spPr>
+        <p:txBody>
+          <a:bodyPr wrap="square" lIns="35967" tIns="17983" rIns="35967" bIns="17983" anchor="ctr">
+            <a:spAutoFit/>
+          </a:bodyPr>
+          <a:lstStyle/>
+          <a:p>
+            <a:pPr algn="l"/>
+            <a:r>
+              <a:rPr sz="2398" b="1">
+                <a:solidFill>
+                  <a:srgbClr val="FFFFFF"/>
+                </a:solidFill>
+                <a:latin typeface="メイリオ"/>
+                <a:ea typeface="メイリオ"/>
+              </a:rPr>
+              <a:t>まとめ ②</a:t>
+            </a:r>
+          </a:p>
+        </p:txBody>
+      </p:sp>
+      <p:sp>
+        <p:nvSpPr>
+          <p:cNvPr id="4" name="TextBox 3"/>
+          <p:cNvSpPr txBox="1"/>
+          <p:nvPr/>
+        </p:nvSpPr>
+        <p:spPr>
+          <a:xfrm>
+            <a:off x="363896" y="909865"/>
+            <a:ext cx="6653839" cy="374239"/>
+          </a:xfrm>
+          <a:prstGeom prst="rect">
+            <a:avLst/>
+          </a:prstGeom>
+          <a:noFill/>
+          <a:ln>
+            <a:noFill/>
+          </a:ln>
+        </p:spPr>
+        <p:txBody>
+          <a:bodyPr wrap="square" lIns="35967" tIns="17983" rIns="35967" bIns="17983" anchor="ctr">
+            <a:spAutoFit/>
+          </a:bodyPr>
+          <a:lstStyle/>
+          <a:p>
+            <a:pPr algn="l"/>
+            <a:r>
+              <a:rPr sz="2198" b="1">
+                <a:solidFill>
+                  <a:srgbClr val="1A1A1A"/>
+                </a:solidFill>
+                <a:latin typeface="メイリオ"/>
+                <a:ea typeface="メイリオ"/>
+              </a:rPr>
+              <a:t>○ 教師の役割で大切にしたいこと</a:t>
+            </a:r>
+          </a:p>
+        </p:txBody>
+      </p:sp>
+      <p:pic>
+        <p:nvPicPr>
+          <p:cNvPr id="5" name="Picture 4" descr="image2.png"/>
+          <p:cNvPicPr>
+            <a:picLocks noChangeAspect="1"/>
+          </p:cNvPicPr>
+          <p:nvPr/>
+        </p:nvPicPr>
+        <p:blipFill>
+          <a:blip r:embed="rId2"/>
+          <a:stretch>
+            <a:fillRect/>
+          </a:stretch>
+        </p:blipFill>
+        <p:spPr>
+          <a:xfrm>
+            <a:off x="7053702" y="683367"/>
+            <a:ext cx="1870268" cy="1438668"/>
+          </a:xfrm>
+          <a:prstGeom prst="rect">
+            <a:avLst/>
+          </a:prstGeom>
+        </p:spPr>
+      </p:pic>
+      <p:sp>
+        <p:nvSpPr>
+          <p:cNvPr id="6" name="TextBox 5"/>
+          <p:cNvSpPr txBox="1"/>
+          <p:nvPr/>
+        </p:nvSpPr>
+        <p:spPr>
+          <a:xfrm>
+            <a:off x="363896" y="1547173"/>
+            <a:ext cx="6653839" cy="466358"/>
+          </a:xfrm>
+          <a:prstGeom prst="rect">
+            <a:avLst/>
+          </a:prstGeom>
+          <a:noFill/>
+          <a:ln>
+            <a:noFill/>
+          </a:ln>
+        </p:spPr>
+        <p:txBody>
+          <a:bodyPr wrap="square" lIns="35967" tIns="17983" rIns="35967" bIns="17983" anchor="ctr">
+            <a:spAutoFit/>
+          </a:bodyPr>
+          <a:lstStyle/>
+          <a:p>
+            <a:pPr algn="ctr"/>
+            <a:r>
+              <a:rPr sz="2797" b="1">
+                <a:solidFill>
+                  <a:srgbClr val="002060"/>
+                </a:solidFill>
+                <a:latin typeface="メイリオ"/>
+                <a:ea typeface="メイリオ"/>
+              </a:rPr>
+              <a:t>ファシリテーター</a:t>
+            </a:r>
+          </a:p>
+        </p:txBody>
+      </p:sp>
+      <p:sp>
+        <p:nvSpPr>
+          <p:cNvPr id="7" name="Rectangle 6"/>
+          <p:cNvSpPr/>
+          <p:nvPr/>
+        </p:nvSpPr>
+        <p:spPr>
+          <a:xfrm>
+            <a:off x="363896" y="2229935"/>
+            <a:ext cx="4136170" cy="287734"/>
+          </a:xfrm>
+          <a:prstGeom prst="rect">
+            <a:avLst/>
+          </a:prstGeom>
+          <a:solidFill>
+            <a:srgbClr val="002060"/>
+          </a:solidFill>
+          <a:ln>
+            <a:noFill/>
+          </a:ln>
+          <a:effectLst/>
+        </p:spPr>
+        <p:style>
+          <a:lnRef idx="1">
+            <a:schemeClr val="accent1"/>
+          </a:lnRef>
+          <a:fillRef idx="3">
+            <a:schemeClr val="accent1"/>
+          </a:fillRef>
+          <a:effectRef idx="2">
+            <a:schemeClr val="accent1"/>
+          </a:effectRef>
+          <a:fontRef idx="minor">
+            <a:schemeClr val="lt1"/>
+          </a:fontRef>
+        </p:style>
+        <p:txBody>
+          <a:bodyPr rtlCol="0" anchor="ctr"/>
+          <a:lstStyle/>
+          <a:p>
+            <a:pPr algn="ctr"/>
+            <a:endParaRPr sz="1399"/>
+          </a:p>
+        </p:txBody>
+      </p:sp>
+      <p:sp>
+        <p:nvSpPr>
+          <p:cNvPr id="8" name="TextBox 7"/>
+          <p:cNvSpPr txBox="1"/>
+          <p:nvPr/>
+        </p:nvSpPr>
+        <p:spPr>
+          <a:xfrm>
+            <a:off x="363896" y="2217432"/>
+            <a:ext cx="4136170" cy="312740"/>
+          </a:xfrm>
+          <a:prstGeom prst="rect">
+            <a:avLst/>
+          </a:prstGeom>
+          <a:noFill/>
+          <a:ln>
+            <a:noFill/>
+          </a:ln>
+        </p:spPr>
+        <p:txBody>
+          <a:bodyPr wrap="square" lIns="35967" tIns="17983" rIns="35967" bIns="17983" anchor="ctr">
+            <a:spAutoFit/>
+          </a:bodyPr>
+          <a:lstStyle/>
+          <a:p>
+            <a:pPr algn="ctr"/>
+            <a:r>
+              <a:rPr sz="1798" b="1">
+                <a:solidFill>
+                  <a:srgbClr val="FFFFFF"/>
+                </a:solidFill>
+                <a:latin typeface="メイリオ"/>
+                <a:ea typeface="メイリオ"/>
+              </a:rPr>
+              <a:t>・「問い」</a:t>
+            </a:r>
+          </a:p>
+        </p:txBody>
+      </p:sp>
+      <p:sp>
+        <p:nvSpPr>
+          <p:cNvPr id="9" name="Rectangle 8"/>
+          <p:cNvSpPr/>
+          <p:nvPr/>
+        </p:nvSpPr>
+        <p:spPr>
+          <a:xfrm>
+            <a:off x="363896" y="2517669"/>
+            <a:ext cx="4136170" cy="1438668"/>
+          </a:xfrm>
+          <a:prstGeom prst="rect">
+            <a:avLst/>
+          </a:prstGeom>
+          <a:solidFill>
+            <a:srgbClr val="DAE3F3"/>
+          </a:solidFill>
+          <a:ln w="12700">
+            <a:solidFill>
+              <a:srgbClr val="002060"/>
+            </a:solidFill>
+          </a:ln>
+          <a:effectLst/>
+        </p:spPr>
+        <p:style>
+          <a:lnRef idx="1">
+            <a:schemeClr val="accent1"/>
+          </a:lnRef>
+          <a:fillRef idx="3">
+            <a:schemeClr val="accent1"/>
+          </a:fillRef>
+          <a:effectRef idx="2">
+            <a:schemeClr val="accent1"/>
+          </a:effectRef>
+          <a:fontRef idx="minor">
+            <a:schemeClr val="lt1"/>
+          </a:fontRef>
+        </p:style>
+        <p:txBody>
+          <a:bodyPr rtlCol="0" anchor="ctr"/>
+          <a:lstStyle/>
+          <a:p>
+            <a:pPr algn="ctr"/>
+            <a:endParaRPr sz="1399"/>
+          </a:p>
+        </p:txBody>
+      </p:sp>
+      <p:sp>
+        <p:nvSpPr>
+          <p:cNvPr id="10" name="TextBox 9"/>
+          <p:cNvSpPr txBox="1"/>
+          <p:nvPr/>
+        </p:nvSpPr>
+        <p:spPr>
+          <a:xfrm>
+            <a:off x="471796" y="2553636"/>
+            <a:ext cx="3920370" cy="1044892"/>
+          </a:xfrm>
+          <a:prstGeom prst="rect">
+            <a:avLst/>
+          </a:prstGeom>
+          <a:noFill/>
+          <a:ln>
+            <a:noFill/>
+          </a:ln>
+        </p:spPr>
+        <p:txBody>
+          <a:bodyPr wrap="square" lIns="35967" tIns="17983" rIns="35967" bIns="17983" anchor="t">
+            <a:spAutoFit/>
+          </a:bodyPr>
+          <a:lstStyle/>
+          <a:p>
+            <a:pPr algn="l">
+              <a:lnSpc>
+                <a:spcPct val="140000"/>
+              </a:lnSpc>
+            </a:pPr>
+            <a:r>
+              <a:rPr sz="1599" b="1" dirty="0">
+                <a:solidFill>
+                  <a:srgbClr val="1A1A1A"/>
+                </a:solidFill>
+                <a:latin typeface="メイリオ"/>
+                <a:ea typeface="メイリオ"/>
+              </a:rPr>
+              <a:t>・</a:t>
+            </a:r>
+            <a:r>
+              <a:rPr sz="1599" b="1" dirty="0" err="1">
+                <a:solidFill>
+                  <a:srgbClr val="1A1A1A"/>
+                </a:solidFill>
+                <a:latin typeface="メイリオ"/>
+                <a:ea typeface="メイリオ"/>
+              </a:rPr>
+              <a:t>聞きたくなる</a:t>
+            </a:r>
+            <a:r>
+              <a:rPr sz="1599" b="1" dirty="0" err="1">
+                <a:solidFill>
+                  <a:srgbClr val="FF0000"/>
+                </a:solidFill>
+                <a:latin typeface="メイリオ"/>
+                <a:ea typeface="メイリオ"/>
+              </a:rPr>
+              <a:t>話題</a:t>
+            </a:r>
+            <a:r>
+              <a:rPr sz="1599" b="1" dirty="0" err="1">
+                <a:solidFill>
+                  <a:srgbClr val="1A1A1A"/>
+                </a:solidFill>
+                <a:latin typeface="メイリオ"/>
+                <a:ea typeface="メイリオ"/>
+              </a:rPr>
+              <a:t>を提示する</a:t>
+            </a:r>
+            <a:endParaRPr sz="1599" b="1" dirty="0">
+              <a:solidFill>
+                <a:srgbClr val="1A1A1A"/>
+              </a:solidFill>
+              <a:latin typeface="メイリオ"/>
+              <a:ea typeface="メイリオ"/>
+            </a:endParaRPr>
+          </a:p>
+          <a:p>
+            <a:pPr algn="l">
+              <a:lnSpc>
+                <a:spcPct val="140000"/>
+              </a:lnSpc>
+            </a:pPr>
+            <a:r>
+              <a:rPr sz="1599" b="1" dirty="0">
+                <a:solidFill>
+                  <a:srgbClr val="1A1A1A"/>
+                </a:solidFill>
+                <a:latin typeface="メイリオ"/>
+                <a:ea typeface="メイリオ"/>
+              </a:rPr>
+              <a:t>・</a:t>
+            </a:r>
+            <a:r>
+              <a:rPr sz="1599" b="1" dirty="0" err="1">
+                <a:solidFill>
+                  <a:srgbClr val="1A1A1A"/>
+                </a:solidFill>
+                <a:latin typeface="メイリオ"/>
+                <a:ea typeface="メイリオ"/>
+              </a:rPr>
+              <a:t>考えたくなる</a:t>
+            </a:r>
+            <a:r>
+              <a:rPr sz="1599" b="1" dirty="0" err="1">
+                <a:solidFill>
+                  <a:srgbClr val="FF0000"/>
+                </a:solidFill>
+                <a:latin typeface="メイリオ"/>
+                <a:ea typeface="メイリオ"/>
+              </a:rPr>
+              <a:t>発問</a:t>
+            </a:r>
+            <a:r>
+              <a:rPr sz="1599" b="1" dirty="0" err="1">
+                <a:solidFill>
+                  <a:srgbClr val="1A1A1A"/>
+                </a:solidFill>
+                <a:latin typeface="メイリオ"/>
+                <a:ea typeface="メイリオ"/>
+              </a:rPr>
+              <a:t>をする</a:t>
+            </a:r>
+            <a:endParaRPr sz="1599" b="1" dirty="0">
+              <a:solidFill>
+                <a:srgbClr val="1A1A1A"/>
+              </a:solidFill>
+              <a:latin typeface="メイリオ"/>
+              <a:ea typeface="メイリオ"/>
+            </a:endParaRPr>
+          </a:p>
+          <a:p>
+            <a:pPr algn="l">
+              <a:lnSpc>
+                <a:spcPct val="140000"/>
+              </a:lnSpc>
+            </a:pPr>
+            <a:r>
+              <a:rPr sz="1599" b="1" dirty="0">
+                <a:solidFill>
+                  <a:srgbClr val="1A1A1A"/>
+                </a:solidFill>
+                <a:latin typeface="メイリオ"/>
+                <a:ea typeface="メイリオ"/>
+              </a:rPr>
+              <a:t>・</a:t>
+            </a:r>
+            <a:r>
+              <a:rPr sz="1599" b="1" dirty="0" err="1">
+                <a:solidFill>
+                  <a:srgbClr val="FF0000"/>
+                </a:solidFill>
+                <a:latin typeface="メイリオ"/>
+                <a:ea typeface="メイリオ"/>
+              </a:rPr>
+              <a:t>追発問</a:t>
+            </a:r>
+            <a:r>
+              <a:rPr sz="1599" b="1" dirty="0" err="1">
+                <a:solidFill>
+                  <a:srgbClr val="1A1A1A"/>
+                </a:solidFill>
+                <a:latin typeface="メイリオ"/>
+                <a:ea typeface="メイリオ"/>
+              </a:rPr>
+              <a:t>で対話を深める</a:t>
+            </a:r>
+            <a:endParaRPr sz="1599" b="1" dirty="0">
+              <a:solidFill>
+                <a:srgbClr val="1A1A1A"/>
+              </a:solidFill>
+              <a:latin typeface="メイリオ"/>
+              <a:ea typeface="メイリオ"/>
+            </a:endParaRPr>
+          </a:p>
+        </p:txBody>
+      </p:sp>
+      <p:sp>
+        <p:nvSpPr>
+          <p:cNvPr id="11" name="Rectangle 10"/>
+          <p:cNvSpPr/>
+          <p:nvPr/>
+        </p:nvSpPr>
+        <p:spPr>
+          <a:xfrm>
+            <a:off x="4643934" y="2229935"/>
+            <a:ext cx="4136170" cy="287734"/>
+          </a:xfrm>
+          <a:prstGeom prst="rect">
+            <a:avLst/>
+          </a:prstGeom>
+          <a:solidFill>
+            <a:srgbClr val="002060"/>
+          </a:solidFill>
+          <a:ln>
+            <a:noFill/>
+          </a:ln>
+          <a:effectLst/>
+        </p:spPr>
+        <p:style>
+          <a:lnRef idx="1">
+            <a:schemeClr val="accent1"/>
+          </a:lnRef>
+          <a:fillRef idx="3">
+            <a:schemeClr val="accent1"/>
+          </a:fillRef>
+          <a:effectRef idx="2">
+            <a:schemeClr val="accent1"/>
+          </a:effectRef>
+          <a:fontRef idx="minor">
+            <a:schemeClr val="lt1"/>
+          </a:fontRef>
+        </p:style>
+        <p:txBody>
+          <a:bodyPr rtlCol="0" anchor="ctr"/>
+          <a:lstStyle/>
+          <a:p>
+            <a:pPr algn="ctr"/>
+            <a:endParaRPr sz="1399"/>
+          </a:p>
+        </p:txBody>
+      </p:sp>
+      <p:sp>
+        <p:nvSpPr>
+          <p:cNvPr id="12" name="TextBox 11"/>
+          <p:cNvSpPr txBox="1"/>
+          <p:nvPr/>
+        </p:nvSpPr>
+        <p:spPr>
+          <a:xfrm>
+            <a:off x="4643934" y="2217432"/>
+            <a:ext cx="4136170" cy="312740"/>
+          </a:xfrm>
+          <a:prstGeom prst="rect">
+            <a:avLst/>
+          </a:prstGeom>
+          <a:noFill/>
+          <a:ln>
+            <a:noFill/>
+          </a:ln>
+        </p:spPr>
+        <p:txBody>
+          <a:bodyPr wrap="square" lIns="35967" tIns="17983" rIns="35967" bIns="17983" anchor="ctr">
+            <a:spAutoFit/>
+          </a:bodyPr>
+          <a:lstStyle/>
+          <a:p>
+            <a:pPr algn="ctr"/>
+            <a:r>
+              <a:rPr sz="1798" b="1">
+                <a:solidFill>
+                  <a:srgbClr val="FFFFFF"/>
+                </a:solidFill>
+                <a:latin typeface="メイリオ"/>
+                <a:ea typeface="メイリオ"/>
+              </a:rPr>
+              <a:t>・「価値付け」</a:t>
+            </a:r>
+          </a:p>
+        </p:txBody>
+      </p:sp>
+      <p:sp>
+        <p:nvSpPr>
+          <p:cNvPr id="13" name="Rectangle 12"/>
+          <p:cNvSpPr/>
+          <p:nvPr/>
+        </p:nvSpPr>
+        <p:spPr>
+          <a:xfrm>
+            <a:off x="4643934" y="2517669"/>
+            <a:ext cx="4136170" cy="1438668"/>
+          </a:xfrm>
+          <a:prstGeom prst="rect">
+            <a:avLst/>
+          </a:prstGeom>
+          <a:solidFill>
+            <a:srgbClr val="DAE3F3"/>
+          </a:solidFill>
+          <a:ln w="12700">
+            <a:solidFill>
+              <a:srgbClr val="002060"/>
+            </a:solidFill>
+          </a:ln>
+          <a:effectLst/>
+        </p:spPr>
+        <p:style>
+          <a:lnRef idx="1">
+            <a:schemeClr val="accent1"/>
+          </a:lnRef>
+          <a:fillRef idx="3">
+            <a:schemeClr val="accent1"/>
+          </a:fillRef>
+          <a:effectRef idx="2">
+            <a:schemeClr val="accent1"/>
+          </a:effectRef>
+          <a:fontRef idx="minor">
+            <a:schemeClr val="lt1"/>
+          </a:fontRef>
+        </p:style>
+        <p:txBody>
+          <a:bodyPr rtlCol="0" anchor="ctr"/>
+          <a:lstStyle/>
+          <a:p>
+            <a:pPr algn="ctr"/>
+            <a:endParaRPr sz="1399"/>
+          </a:p>
+        </p:txBody>
+      </p:sp>
+      <p:sp>
+        <p:nvSpPr>
+          <p:cNvPr id="14" name="TextBox 13"/>
+          <p:cNvSpPr txBox="1"/>
+          <p:nvPr/>
+        </p:nvSpPr>
+        <p:spPr>
+          <a:xfrm>
+            <a:off x="4751834" y="2553636"/>
+            <a:ext cx="3920370" cy="1044892"/>
+          </a:xfrm>
+          <a:prstGeom prst="rect">
+            <a:avLst/>
+          </a:prstGeom>
+          <a:noFill/>
+          <a:ln>
+            <a:noFill/>
+          </a:ln>
+        </p:spPr>
+        <p:txBody>
+          <a:bodyPr wrap="square" lIns="35967" tIns="17983" rIns="35967" bIns="17983" anchor="t">
+            <a:spAutoFit/>
+          </a:bodyPr>
+          <a:lstStyle/>
+          <a:p>
+            <a:pPr algn="l">
+              <a:lnSpc>
+                <a:spcPct val="140000"/>
+              </a:lnSpc>
+            </a:pPr>
+            <a:r>
+              <a:rPr sz="1599" b="1" dirty="0">
+                <a:solidFill>
+                  <a:srgbClr val="1A1A1A"/>
+                </a:solidFill>
+                <a:latin typeface="メイリオ"/>
+                <a:ea typeface="メイリオ"/>
+              </a:rPr>
+              <a:t>・「</a:t>
+            </a:r>
+            <a:r>
+              <a:rPr sz="1599" b="1" dirty="0" err="1">
+                <a:solidFill>
+                  <a:srgbClr val="1A1A1A"/>
+                </a:solidFill>
+                <a:latin typeface="メイリオ"/>
+                <a:ea typeface="メイリオ"/>
+              </a:rPr>
+              <a:t>いい質問だね」と</a:t>
+            </a:r>
+            <a:r>
+              <a:rPr sz="1599" b="1" dirty="0" err="1">
+                <a:solidFill>
+                  <a:srgbClr val="FF0000"/>
+                </a:solidFill>
+                <a:latin typeface="メイリオ"/>
+                <a:ea typeface="メイリオ"/>
+              </a:rPr>
+              <a:t>意味づける</a:t>
+            </a:r>
+            <a:endParaRPr sz="1599" b="1" dirty="0">
+              <a:solidFill>
+                <a:srgbClr val="FF0000"/>
+              </a:solidFill>
+              <a:latin typeface="メイリオ"/>
+              <a:ea typeface="メイリオ"/>
+            </a:endParaRPr>
+          </a:p>
+          <a:p>
+            <a:pPr algn="l">
+              <a:lnSpc>
+                <a:spcPct val="140000"/>
+              </a:lnSpc>
+            </a:pPr>
+            <a:r>
+              <a:rPr sz="1599" b="1" dirty="0">
+                <a:solidFill>
+                  <a:srgbClr val="1A1A1A"/>
+                </a:solidFill>
+                <a:latin typeface="メイリオ"/>
+                <a:ea typeface="メイリオ"/>
+              </a:rPr>
+              <a:t>・</a:t>
+            </a:r>
+            <a:r>
+              <a:rPr sz="1599" b="1" dirty="0" err="1">
+                <a:solidFill>
+                  <a:srgbClr val="1A1A1A"/>
+                </a:solidFill>
+                <a:latin typeface="メイリオ"/>
+                <a:ea typeface="メイリオ"/>
+              </a:rPr>
+              <a:t>発言を</a:t>
+            </a:r>
+            <a:r>
+              <a:rPr sz="1599" b="1" dirty="0" err="1">
+                <a:solidFill>
+                  <a:srgbClr val="FF0000"/>
+                </a:solidFill>
+                <a:latin typeface="メイリオ"/>
+                <a:ea typeface="メイリオ"/>
+              </a:rPr>
+              <a:t>言語化</a:t>
+            </a:r>
+            <a:r>
+              <a:rPr sz="1599" b="1" dirty="0" err="1">
+                <a:solidFill>
+                  <a:srgbClr val="1A1A1A"/>
+                </a:solidFill>
+                <a:latin typeface="メイリオ"/>
+                <a:ea typeface="メイリオ"/>
+              </a:rPr>
+              <a:t>して返す</a:t>
+            </a:r>
+            <a:endParaRPr sz="1599" b="1" dirty="0">
+              <a:solidFill>
+                <a:srgbClr val="1A1A1A"/>
+              </a:solidFill>
+              <a:latin typeface="メイリオ"/>
+              <a:ea typeface="メイリオ"/>
+            </a:endParaRPr>
+          </a:p>
+          <a:p>
+            <a:pPr algn="l">
+              <a:lnSpc>
+                <a:spcPct val="140000"/>
+              </a:lnSpc>
+            </a:pPr>
+            <a:r>
+              <a:rPr sz="1599" b="1" dirty="0">
+                <a:solidFill>
+                  <a:srgbClr val="1A1A1A"/>
+                </a:solidFill>
+                <a:latin typeface="メイリオ"/>
+                <a:ea typeface="メイリオ"/>
+              </a:rPr>
+              <a:t>・</a:t>
+            </a:r>
+            <a:r>
+              <a:rPr sz="1599" b="1" dirty="0" err="1">
+                <a:solidFill>
+                  <a:srgbClr val="1A1A1A"/>
+                </a:solidFill>
+                <a:latin typeface="メイリオ"/>
+                <a:ea typeface="メイリオ"/>
+              </a:rPr>
+              <a:t>対話の</a:t>
+            </a:r>
+            <a:r>
+              <a:rPr sz="1599" b="1" dirty="0" err="1">
+                <a:solidFill>
+                  <a:srgbClr val="FF0000"/>
+                </a:solidFill>
+                <a:latin typeface="メイリオ"/>
+                <a:ea typeface="メイリオ"/>
+              </a:rPr>
+              <a:t>質を共有</a:t>
+            </a:r>
+            <a:r>
+              <a:rPr sz="1599" b="1" dirty="0" err="1">
+                <a:solidFill>
+                  <a:srgbClr val="1A1A1A"/>
+                </a:solidFill>
+                <a:latin typeface="メイリオ"/>
+                <a:ea typeface="メイリオ"/>
+              </a:rPr>
+              <a:t>する</a:t>
+            </a:r>
+            <a:endParaRPr sz="1599" b="1" dirty="0">
+              <a:solidFill>
+                <a:srgbClr val="1A1A1A"/>
+              </a:solidFill>
+              <a:latin typeface="メイリオ"/>
+              <a:ea typeface="メイリオ"/>
+            </a:endParaRPr>
+          </a:p>
+        </p:txBody>
+      </p:sp>
+      <p:sp>
+        <p:nvSpPr>
+          <p:cNvPr id="17" name="TextBox 16"/>
+          <p:cNvSpPr txBox="1"/>
+          <p:nvPr/>
+        </p:nvSpPr>
+        <p:spPr>
+          <a:xfrm>
+            <a:off x="8240603" y="4891472"/>
+            <a:ext cx="719334" cy="189936"/>
+          </a:xfrm>
+          <a:prstGeom prst="rect">
+            <a:avLst/>
+          </a:prstGeom>
+          <a:noFill/>
+          <a:ln>
+            <a:noFill/>
+          </a:ln>
+        </p:spPr>
+        <p:txBody>
+          <a:bodyPr wrap="square" lIns="35967" tIns="17983" rIns="35967" bIns="17983" anchor="t">
+            <a:spAutoFit/>
+          </a:bodyPr>
+          <a:lstStyle/>
+          <a:p>
+            <a:pPr algn="r"/>
+            <a:r>
+              <a:rPr sz="999">
+                <a:solidFill>
+                  <a:srgbClr val="666666"/>
+                </a:solidFill>
+                <a:latin typeface="メイリオ"/>
+                <a:ea typeface="メイリオ"/>
+              </a:rPr>
+              <a:t>11 / 11</a:t>
+            </a:r>
+          </a:p>
+        </p:txBody>
+      </p:sp>
+    </p:spTree>
+  </p:cSld>
+  <p:clrMapOvr>
+    <a:masterClrMapping/>
+  </p:clrMapOvr>
+</p:sld>
+</file>
+
+<file path=ppt/slides/slide14.xml><?xml version="1.0" encoding="utf-8"?>
+<p:sld xmlns:a="http://schemas.openxmlformats.org/drawingml/2006/main" xmlns:r="http://schemas.openxmlformats.org/officeDocument/2006/relationships" xmlns:p="http://schemas.openxmlformats.org/presentationml/2006/main">
+  <p:cSld>
+    <p:spTree>
+      <p:nvGrpSpPr>
+        <p:cNvPr id="1" name="Shape 238"/>
+        <p:cNvGrpSpPr/>
+        <p:nvPr/>
+      </p:nvGrpSpPr>
+      <p:grpSpPr>
+        <a:xfrm>
+          <a:off x="0" y="0"/>
+          <a:ext cx="0" cy="0"/>
+          <a:chOff x="0" y="0"/>
+          <a:chExt cx="0" cy="0"/>
+        </a:xfrm>
+      </p:grpSpPr>
+      <p:sp>
+        <p:nvSpPr>
+          <p:cNvPr id="239" name="Google Shape;239;p31"/>
+          <p:cNvSpPr txBox="1"/>
+          <p:nvPr/>
+        </p:nvSpPr>
+        <p:spPr>
+          <a:xfrm>
+            <a:off x="453191" y="829061"/>
+            <a:ext cx="7884675" cy="484718"/>
+          </a:xfrm>
+          <a:prstGeom prst="rect">
+            <a:avLst/>
+          </a:prstGeom>
+          <a:noFill/>
+          <a:ln>
+            <a:noFill/>
+          </a:ln>
+        </p:spPr>
+        <p:txBody>
+          <a:bodyPr spcFirstLastPara="1" wrap="square" lIns="68569" tIns="34275" rIns="68569" bIns="34275" anchor="t" anchorCtr="0">
+            <a:spAutoFit/>
+          </a:bodyPr>
+          <a:lstStyle/>
+          <a:p>
+            <a:r>
+              <a:rPr lang="ja-JP" altLang="en-US" sz="2700" dirty="0">
+                <a:solidFill>
+                  <a:schemeClr val="dk1"/>
+                </a:solidFill>
+                <a:latin typeface="Meiryo"/>
+                <a:ea typeface="Meiryo"/>
+                <a:cs typeface="Meiryo"/>
+                <a:sym typeface="Meiryo"/>
+              </a:rPr>
+              <a:t>教師による</a:t>
+            </a:r>
+            <a:r>
+              <a:rPr lang="ja-JP" altLang="en-US" sz="2700" u="sng" dirty="0">
+                <a:solidFill>
+                  <a:schemeClr val="dk1"/>
+                </a:solidFill>
+                <a:latin typeface="Meiryo"/>
+                <a:ea typeface="Meiryo"/>
+                <a:cs typeface="Meiryo"/>
+                <a:sym typeface="Meiryo"/>
+              </a:rPr>
+              <a:t>指導中心</a:t>
+            </a:r>
+            <a:r>
+              <a:rPr lang="ja-JP" altLang="en-US" sz="2700" dirty="0">
+                <a:solidFill>
+                  <a:schemeClr val="dk1"/>
+                </a:solidFill>
+                <a:latin typeface="Meiryo"/>
+                <a:ea typeface="Meiryo"/>
+                <a:cs typeface="Meiryo"/>
+                <a:sym typeface="Meiryo"/>
+              </a:rPr>
+              <a:t>から、児童による</a:t>
+            </a:r>
+            <a:r>
+              <a:rPr lang="ja-JP" altLang="en-US" sz="2700" u="sng" dirty="0">
+                <a:solidFill>
+                  <a:schemeClr val="dk1"/>
+                </a:solidFill>
+                <a:latin typeface="Meiryo"/>
+                <a:ea typeface="Meiryo"/>
+                <a:cs typeface="Meiryo"/>
+                <a:sym typeface="Meiryo"/>
+              </a:rPr>
+              <a:t>学び中心</a:t>
+            </a:r>
+            <a:r>
+              <a:rPr lang="ja-JP" altLang="en-US" sz="2700" dirty="0">
+                <a:solidFill>
+                  <a:schemeClr val="dk1"/>
+                </a:solidFill>
+                <a:latin typeface="Meiryo"/>
+                <a:ea typeface="Meiryo"/>
+                <a:cs typeface="Meiryo"/>
+                <a:sym typeface="Meiryo"/>
+              </a:rPr>
+              <a:t>へ</a:t>
+            </a:r>
+            <a:endParaRPr sz="2700" dirty="0">
+              <a:solidFill>
+                <a:schemeClr val="dk1"/>
+              </a:solidFill>
+              <a:latin typeface="Meiryo"/>
+              <a:ea typeface="Meiryo"/>
+              <a:cs typeface="Meiryo"/>
+              <a:sym typeface="Meiryo"/>
+            </a:endParaRPr>
+          </a:p>
+        </p:txBody>
+      </p:sp>
+      <p:sp>
+        <p:nvSpPr>
+          <p:cNvPr id="240" name="Google Shape;240;p31"/>
+          <p:cNvSpPr txBox="1"/>
+          <p:nvPr/>
+        </p:nvSpPr>
+        <p:spPr>
+          <a:xfrm>
+            <a:off x="453191" y="1425676"/>
+            <a:ext cx="7884675" cy="484718"/>
+          </a:xfrm>
+          <a:prstGeom prst="rect">
+            <a:avLst/>
+          </a:prstGeom>
+          <a:noFill/>
+          <a:ln>
+            <a:noFill/>
+          </a:ln>
+        </p:spPr>
+        <p:txBody>
+          <a:bodyPr spcFirstLastPara="1" wrap="square" lIns="68569" tIns="34275" rIns="68569" bIns="34275" anchor="t" anchorCtr="0">
+            <a:spAutoFit/>
+          </a:bodyPr>
+          <a:lstStyle/>
+          <a:p>
+            <a:r>
+              <a:rPr lang="ja-JP" altLang="en-US" sz="2700" dirty="0">
+                <a:solidFill>
+                  <a:schemeClr val="dk1"/>
+                </a:solidFill>
+                <a:latin typeface="Meiryo"/>
+                <a:ea typeface="Meiryo"/>
+                <a:cs typeface="Meiryo"/>
+                <a:sym typeface="Meiryo"/>
+              </a:rPr>
+              <a:t>教師が「</a:t>
+            </a:r>
+            <a:r>
+              <a:rPr lang="ja-JP" altLang="en-US" sz="2700" u="sng" dirty="0">
+                <a:solidFill>
+                  <a:schemeClr val="dk1"/>
+                </a:solidFill>
+                <a:latin typeface="Meiryo"/>
+                <a:ea typeface="Meiryo"/>
+                <a:cs typeface="Meiryo"/>
+                <a:sym typeface="Meiryo"/>
+              </a:rPr>
+              <a:t>教えたか</a:t>
+            </a:r>
+            <a:r>
+              <a:rPr lang="ja-JP" altLang="en-US" sz="2700" dirty="0">
+                <a:solidFill>
+                  <a:schemeClr val="dk1"/>
+                </a:solidFill>
+                <a:latin typeface="Meiryo"/>
+                <a:ea typeface="Meiryo"/>
+                <a:cs typeface="Meiryo"/>
+                <a:sym typeface="Meiryo"/>
+              </a:rPr>
+              <a:t>」から、児童が「</a:t>
+            </a:r>
+            <a:r>
+              <a:rPr lang="ja-JP" altLang="en-US" sz="2700" u="sng" dirty="0">
+                <a:solidFill>
+                  <a:schemeClr val="dk1"/>
+                </a:solidFill>
+                <a:latin typeface="Meiryo"/>
+                <a:ea typeface="Meiryo"/>
+                <a:cs typeface="Meiryo"/>
+                <a:sym typeface="Meiryo"/>
+              </a:rPr>
+              <a:t>学んだか</a:t>
+            </a:r>
+            <a:r>
+              <a:rPr lang="ja-JP" altLang="en-US" sz="2700" dirty="0">
+                <a:solidFill>
+                  <a:schemeClr val="dk1"/>
+                </a:solidFill>
+                <a:latin typeface="Meiryo"/>
+                <a:ea typeface="Meiryo"/>
+                <a:cs typeface="Meiryo"/>
+                <a:sym typeface="Meiryo"/>
+              </a:rPr>
+              <a:t>」へ</a:t>
+            </a:r>
+            <a:endParaRPr sz="2700" dirty="0">
+              <a:solidFill>
+                <a:schemeClr val="dk1"/>
+              </a:solidFill>
+              <a:latin typeface="Meiryo"/>
+              <a:ea typeface="Meiryo"/>
+              <a:cs typeface="Meiryo"/>
+              <a:sym typeface="Meiryo"/>
+            </a:endParaRPr>
+          </a:p>
+        </p:txBody>
+      </p:sp>
+      <p:pic>
+        <p:nvPicPr>
+          <p:cNvPr id="241" name="Google Shape;241;p31"/>
+          <p:cNvPicPr preferRelativeResize="0"/>
+          <p:nvPr/>
+        </p:nvPicPr>
+        <p:blipFill>
+          <a:blip r:embed="rId3">
+            <a:alphaModFix/>
+          </a:blip>
+          <a:stretch>
+            <a:fillRect/>
+          </a:stretch>
+        </p:blipFill>
+        <p:spPr>
+          <a:xfrm>
+            <a:off x="3594357" y="2095163"/>
+            <a:ext cx="1871176" cy="1892925"/>
+          </a:xfrm>
+          <a:prstGeom prst="rect">
+            <a:avLst/>
+          </a:prstGeom>
+          <a:noFill/>
+          <a:ln>
+            <a:noFill/>
+          </a:ln>
+        </p:spPr>
+      </p:pic>
+      <p:sp>
+        <p:nvSpPr>
+          <p:cNvPr id="242" name="Google Shape;242;p31"/>
+          <p:cNvSpPr txBox="1"/>
+          <p:nvPr/>
+        </p:nvSpPr>
+        <p:spPr>
+          <a:xfrm>
+            <a:off x="1299318" y="4439026"/>
+            <a:ext cx="7311825" cy="427010"/>
+          </a:xfrm>
+          <a:prstGeom prst="rect">
+            <a:avLst/>
+          </a:prstGeom>
+          <a:noFill/>
+          <a:ln>
+            <a:noFill/>
+          </a:ln>
+        </p:spPr>
+        <p:txBody>
+          <a:bodyPr spcFirstLastPara="1" wrap="square" lIns="68569" tIns="34275" rIns="68569" bIns="34275" anchor="t" anchorCtr="0">
+            <a:spAutoFit/>
+          </a:bodyPr>
+          <a:lstStyle/>
+          <a:p>
+            <a:r>
+              <a:rPr lang="ja-JP" altLang="en-US" sz="2325" dirty="0">
+                <a:solidFill>
+                  <a:schemeClr val="dk1"/>
+                </a:solidFill>
+                <a:latin typeface="Meiryo"/>
+                <a:ea typeface="Meiryo"/>
+                <a:cs typeface="Meiryo"/>
+                <a:sym typeface="Meiryo"/>
+              </a:rPr>
+              <a:t>授業のハンドルを少しずつ子供たちへ渡すイメージ</a:t>
+            </a:r>
+            <a:endParaRPr sz="2325" dirty="0">
+              <a:solidFill>
+                <a:schemeClr val="dk1"/>
+              </a:solidFill>
+              <a:latin typeface="Meiryo"/>
+              <a:ea typeface="Meiryo"/>
+              <a:cs typeface="Meiryo"/>
+              <a:sym typeface="Meiryo"/>
+            </a:endParaRPr>
+          </a:p>
+        </p:txBody>
+      </p:sp>
+      <p:pic>
+        <p:nvPicPr>
+          <p:cNvPr id="243" name="Google Shape;243;p31"/>
+          <p:cNvPicPr preferRelativeResize="0"/>
+          <p:nvPr/>
+        </p:nvPicPr>
+        <p:blipFill>
+          <a:blip r:embed="rId4">
+            <a:alphaModFix/>
+          </a:blip>
+          <a:stretch>
+            <a:fillRect/>
+          </a:stretch>
+        </p:blipFill>
+        <p:spPr>
+          <a:xfrm>
+            <a:off x="726507" y="2095181"/>
+            <a:ext cx="2261719" cy="2120363"/>
+          </a:xfrm>
+          <a:prstGeom prst="rect">
+            <a:avLst/>
+          </a:prstGeom>
+          <a:noFill/>
+          <a:ln>
+            <a:noFill/>
+          </a:ln>
+        </p:spPr>
+      </p:pic>
+      <p:pic>
+        <p:nvPicPr>
+          <p:cNvPr id="244" name="Google Shape;244;p31"/>
+          <p:cNvPicPr preferRelativeResize="0"/>
+          <p:nvPr/>
+        </p:nvPicPr>
+        <p:blipFill>
+          <a:blip r:embed="rId5">
+            <a:alphaModFix/>
+          </a:blip>
+          <a:stretch>
+            <a:fillRect/>
+          </a:stretch>
+        </p:blipFill>
+        <p:spPr>
+          <a:xfrm>
+            <a:off x="5862900" y="2175825"/>
+            <a:ext cx="2490884" cy="2120362"/>
+          </a:xfrm>
+          <a:prstGeom prst="rect">
+            <a:avLst/>
+          </a:prstGeom>
+          <a:noFill/>
+          <a:ln>
+            <a:noFill/>
+          </a:ln>
+        </p:spPr>
+      </p:pic>
+      <p:sp>
+        <p:nvSpPr>
+          <p:cNvPr id="245" name="Google Shape;245;p31"/>
+          <p:cNvSpPr/>
+          <p:nvPr/>
+        </p:nvSpPr>
+        <p:spPr>
+          <a:xfrm>
+            <a:off x="3284456" y="4042800"/>
+            <a:ext cx="2490975" cy="396225"/>
+          </a:xfrm>
+          <a:prstGeom prst="stripedRightArrow">
+            <a:avLst>
+              <a:gd name="adj1" fmla="val 32425"/>
+              <a:gd name="adj2" fmla="val 115356"/>
+            </a:avLst>
+          </a:prstGeom>
+          <a:solidFill>
+            <a:srgbClr val="FFFF00"/>
+          </a:solidFill>
+          <a:ln w="9525" cap="flat" cmpd="sng">
+            <a:solidFill>
+              <a:schemeClr val="dk1"/>
+            </a:solidFill>
+            <a:prstDash val="solid"/>
+            <a:round/>
+            <a:headEnd type="none" w="sm" len="sm"/>
+            <a:tailEnd type="none" w="sm" len="sm"/>
+          </a:ln>
+        </p:spPr>
+        <p:txBody>
+          <a:bodyPr spcFirstLastPara="1" wrap="square" lIns="68569" tIns="68569" rIns="68569" bIns="68569" anchor="ctr" anchorCtr="0">
+            <a:noAutofit/>
+          </a:bodyPr>
+          <a:lstStyle/>
+          <a:p>
+            <a:endParaRPr sz="1050" dirty="0"/>
+          </a:p>
+        </p:txBody>
+      </p:sp>
+      <p:sp>
+        <p:nvSpPr>
+          <p:cNvPr id="3" name="正方形/長方形 2">
+            <a:extLst>
+              <a:ext uri="{FF2B5EF4-FFF2-40B4-BE49-F238E27FC236}">
+                <a16:creationId xmlns:a16="http://schemas.microsoft.com/office/drawing/2014/main" id="{D48FBE51-22C3-3E20-30F1-3D4BEFD436F4}"/>
+              </a:ext>
+            </a:extLst>
+          </p:cNvPr>
+          <p:cNvSpPr/>
+          <p:nvPr/>
+        </p:nvSpPr>
+        <p:spPr>
+          <a:xfrm>
+            <a:off x="0" y="-7150"/>
+            <a:ext cx="9144000" cy="613963"/>
+          </a:xfrm>
+          <a:prstGeom prst="rect">
+            <a:avLst/>
+          </a:prstGeom>
+          <a:solidFill>
+            <a:srgbClr val="00B0F0"/>
+          </a:solidFill>
+          <a:ln>
+            <a:solidFill>
+              <a:schemeClr val="tx2">
+                <a:lumMod val="40000"/>
+                <a:lumOff val="60000"/>
+              </a:schemeClr>
+            </a:solidFill>
+          </a:ln>
         </p:spPr>
         <p:style>
           <a:lnRef idx="2">
@@ -7920,94 +10240,97 @@
           <a:bodyPr rtlCol="0" anchor="ctr"/>
           <a:lstStyle/>
           <a:p>
-            <a:pPr algn="ctr"/>
-            <a:r>
-              <a:rPr kumimoji="1" lang="ja-JP" altLang="en-US" sz="3200" dirty="0">
-                <a:latin typeface="メイリオ"/>
-                <a:ea typeface="メイリオ"/>
-                <a:cs typeface="メイリオ"/>
-              </a:rPr>
-              <a:t>写真</a:t>
-            </a:r>
-          </a:p>
-        </p:txBody>
-      </p:sp>
-      <p:sp>
-        <p:nvSpPr>
-          <p:cNvPr id="7" name="正方形/長方形 6">
+            <a:r>
+              <a:rPr lang="ja-JP" altLang="en-US" sz="3000" b="1" dirty="0">
+                <a:solidFill>
+                  <a:schemeClr val="bg1"/>
+                </a:solidFill>
+              </a:rPr>
+              <a:t>　</a:t>
+            </a:r>
+            <a:r>
+              <a:rPr lang="ja-JP" altLang="en-US" sz="3200" b="1" dirty="0">
+                <a:solidFill>
+                  <a:schemeClr val="bg1"/>
+                </a:solidFill>
+              </a:rPr>
+              <a:t>まとめ</a:t>
+            </a:r>
+            <a:endParaRPr lang="en-US" altLang="ja-JP" sz="3200" b="1" dirty="0">
+              <a:solidFill>
+                <a:schemeClr val="bg1"/>
+              </a:solidFill>
+            </a:endParaRPr>
+          </a:p>
+        </p:txBody>
+      </p:sp>
+    </p:spTree>
+    <p:extLst>
+      <p:ext uri="{BB962C8B-B14F-4D97-AF65-F5344CB8AC3E}">
+        <p14:creationId xmlns:p14="http://schemas.microsoft.com/office/powerpoint/2010/main" val="3739902879"/>
+      </p:ext>
+    </p:extLst>
+  </p:cSld>
+  <p:clrMapOvr>
+    <a:masterClrMapping/>
+  </p:clrMapOvr>
+</p:sld>
+</file>
+
+<file path=ppt/slides/slide15.xml><?xml version="1.0" encoding="utf-8"?>
+<p:sld xmlns:a="http://schemas.openxmlformats.org/drawingml/2006/main" xmlns:r="http://schemas.openxmlformats.org/officeDocument/2006/relationships" xmlns:p="http://schemas.openxmlformats.org/presentationml/2006/main">
+  <p:cSld>
+    <p:spTree>
+      <p:nvGrpSpPr>
+        <p:cNvPr id="1" name="Shape 238">
+          <a:extLst>
+            <a:ext uri="{FF2B5EF4-FFF2-40B4-BE49-F238E27FC236}">
+              <a16:creationId xmlns:a16="http://schemas.microsoft.com/office/drawing/2014/main" id="{B9C3298D-945F-862A-9DE6-EC57AB414CA2}"/>
+            </a:ext>
+          </a:extLst>
+        </p:cNvPr>
+        <p:cNvGrpSpPr/>
+        <p:nvPr/>
+      </p:nvGrpSpPr>
+      <p:grpSpPr>
+        <a:xfrm>
+          <a:off x="0" y="0"/>
+          <a:ext cx="0" cy="0"/>
+          <a:chOff x="0" y="0"/>
+          <a:chExt cx="0" cy="0"/>
+        </a:xfrm>
+      </p:grpSpPr>
+      <p:sp>
+        <p:nvSpPr>
+          <p:cNvPr id="3" name="正方形/長方形 2">
             <a:extLst>
               <a:ext uri="{FF2B5EF4-FFF2-40B4-BE49-F238E27FC236}">
-                <a16:creationId xmlns:a16="http://schemas.microsoft.com/office/drawing/2014/main" id="{B19BE3AD-40B7-C3E5-338E-DF2FB57229DB}"/>
+                <a16:creationId xmlns:a16="http://schemas.microsoft.com/office/drawing/2014/main" id="{3F7BC8C5-5E33-3D93-C08A-4693CBB88B5A}"/>
               </a:ext>
             </a:extLst>
           </p:cNvPr>
           <p:cNvSpPr/>
           <p:nvPr/>
         </p:nvSpPr>
-        <p:spPr bwMode="white">
+        <p:spPr>
           <a:xfrm>
-            <a:off x="4983758" y="658368"/>
-            <a:ext cx="3571042" cy="749808"/>
+            <a:off x="0" y="-7150"/>
+            <a:ext cx="9144000" cy="613963"/>
           </a:xfrm>
           <a:prstGeom prst="rect">
             <a:avLst/>
           </a:prstGeom>
           <a:solidFill>
-            <a:schemeClr val="bg1"/>
+            <a:srgbClr val="00B0F0"/>
           </a:solidFill>
           <a:ln>
-            <a:noFill/>
+            <a:solidFill>
+              <a:schemeClr val="tx2">
+                <a:lumMod val="40000"/>
+                <a:lumOff val="60000"/>
+              </a:schemeClr>
+            </a:solidFill>
           </a:ln>
-        </p:spPr>
-        <p:txBody>
-          <a:bodyPr wrap="square">
-            <a:spAutoFit/>
-          </a:bodyPr>
-          <a:lstStyle/>
-          <a:p>
-            <a:pPr algn="l"/>
-            <a:r>
-              <a:rPr lang="ja-JP" sz="2000" b="1" dirty="0">
-                <a:latin typeface="メイリオ"/>
-                <a:ea typeface="メイリオ"/>
-                <a:cs typeface="メイリオ"/>
-              </a:rPr>
-              <a:t>5-1　図工（鈴木寛明）</a:t>
-            </a:r>
-          </a:p>
-          <a:p>
-            <a:pPr algn="l"/>
-            <a:r>
-              <a:rPr lang="ja-JP" sz="1400" b="0" dirty="0">
-                <a:latin typeface="メイリオ"/>
-                <a:ea typeface="メイリオ"/>
-                <a:cs typeface="メイリオ"/>
-              </a:rPr>
-              <a:t>「オナマエアート」</a:t>
-            </a:r>
-          </a:p>
-        </p:txBody>
-      </p:sp>
-      <p:sp>
-        <p:nvSpPr>
-          <p:cNvPr id="10" name="正方形/長方形 9">
-            <a:extLst>
-              <a:ext uri="{FF2B5EF4-FFF2-40B4-BE49-F238E27FC236}">
-                <a16:creationId xmlns:a16="http://schemas.microsoft.com/office/drawing/2014/main" id="{A280738D-FE28-ADBF-BF48-A9DCFE692FDE}"/>
-              </a:ext>
-            </a:extLst>
-          </p:cNvPr>
-          <p:cNvSpPr/>
-          <p:nvPr/>
-        </p:nvSpPr>
-        <p:spPr>
-          <a:xfrm>
-            <a:off x="4926158" y="1434268"/>
-            <a:ext cx="3628642" cy="2748932"/>
-          </a:xfrm>
-          <a:prstGeom prst="rect">
-            <a:avLst/>
-          </a:prstGeom>
         </p:spPr>
         <p:style>
           <a:lnRef idx="2">
@@ -8027,22 +10350,1218 @@
           <a:bodyPr rtlCol="0" anchor="ctr"/>
           <a:lstStyle/>
           <a:p>
-            <a:pPr algn="ctr"/>
-            <a:r>
-              <a:rPr kumimoji="1" lang="ja-JP" altLang="en-US" sz="3200" dirty="0">
+            <a:r>
+              <a:rPr lang="ja-JP" altLang="en-US" sz="3000" b="1" dirty="0">
+                <a:solidFill>
+                  <a:schemeClr val="bg1"/>
+                </a:solidFill>
+              </a:rPr>
+              <a:t>　</a:t>
+            </a:r>
+            <a:r>
+              <a:rPr lang="ja-JP" altLang="en-US" sz="3200" b="1" dirty="0">
+                <a:solidFill>
+                  <a:schemeClr val="bg1"/>
+                </a:solidFill>
+              </a:rPr>
+              <a:t>まとめ</a:t>
+            </a:r>
+            <a:endParaRPr lang="en-US" altLang="ja-JP" sz="3200" b="1" dirty="0">
+              <a:solidFill>
+                <a:schemeClr val="bg1"/>
+              </a:solidFill>
+            </a:endParaRPr>
+          </a:p>
+        </p:txBody>
+      </p:sp>
+      <p:sp>
+        <p:nvSpPr>
+          <p:cNvPr id="2" name="TextBox 3">
+            <a:extLst>
+              <a:ext uri="{FF2B5EF4-FFF2-40B4-BE49-F238E27FC236}">
+                <a16:creationId xmlns:a16="http://schemas.microsoft.com/office/drawing/2014/main" id="{B3F80E6A-7CB8-FAE7-C612-60EF6EB7B7CD}"/>
+              </a:ext>
+            </a:extLst>
+          </p:cNvPr>
+          <p:cNvSpPr txBox="1"/>
+          <p:nvPr/>
+        </p:nvSpPr>
+        <p:spPr>
+          <a:xfrm>
+            <a:off x="363896" y="909865"/>
+            <a:ext cx="6653839" cy="374239"/>
+          </a:xfrm>
+          <a:prstGeom prst="rect">
+            <a:avLst/>
+          </a:prstGeom>
+          <a:noFill/>
+          <a:ln>
+            <a:noFill/>
+          </a:ln>
+        </p:spPr>
+        <p:txBody>
+          <a:bodyPr wrap="square" lIns="35967" tIns="17983" rIns="35967" bIns="17983" anchor="ctr">
+            <a:spAutoFit/>
+          </a:bodyPr>
+          <a:lstStyle/>
+          <a:p>
+            <a:pPr algn="l"/>
+            <a:r>
+              <a:rPr sz="2198" b="1" dirty="0">
+                <a:solidFill>
+                  <a:srgbClr val="1A1A1A"/>
+                </a:solidFill>
+                <a:latin typeface="メイリオ"/>
+                <a:ea typeface="メイリオ"/>
+              </a:rPr>
+              <a:t>○ </a:t>
+            </a:r>
+            <a:r>
+              <a:rPr lang="ja-JP" altLang="en-US" sz="2198" b="1" dirty="0">
+                <a:solidFill>
+                  <a:srgbClr val="1A1A1A"/>
+                </a:solidFill>
+                <a:latin typeface="メイリオ"/>
+                <a:ea typeface="メイリオ"/>
+              </a:rPr>
+              <a:t>終わりに</a:t>
+            </a:r>
+            <a:endParaRPr sz="2198" b="1" dirty="0">
+              <a:solidFill>
+                <a:srgbClr val="1A1A1A"/>
+              </a:solidFill>
+              <a:latin typeface="メイリオ"/>
+              <a:ea typeface="メイリオ"/>
+            </a:endParaRPr>
+          </a:p>
+        </p:txBody>
+      </p:sp>
+    </p:spTree>
+    <p:extLst>
+      <p:ext uri="{BB962C8B-B14F-4D97-AF65-F5344CB8AC3E}">
+        <p14:creationId xmlns:p14="http://schemas.microsoft.com/office/powerpoint/2010/main" val="1138538942"/>
+      </p:ext>
+    </p:extLst>
+  </p:cSld>
+  <p:clrMapOvr>
+    <a:masterClrMapping/>
+  </p:clrMapOvr>
+</p:sld>
+</file>
+
+<file path=ppt/slides/slide2.xml><?xml version="1.0" encoding="utf-8"?>
+<p:sld xmlns:a="http://schemas.openxmlformats.org/drawingml/2006/main" xmlns:r="http://schemas.openxmlformats.org/officeDocument/2006/relationships" xmlns:p="http://schemas.openxmlformats.org/presentationml/2006/main">
+  <p:cSld>
+    <p:spTree>
+      <p:nvGrpSpPr>
+        <p:cNvPr id="1" name="">
+          <a:extLst>
+            <a:ext uri="{FF2B5EF4-FFF2-40B4-BE49-F238E27FC236}">
+              <a16:creationId xmlns:a16="http://schemas.microsoft.com/office/drawing/2014/main" id="{9F7E7DC1-EDDA-E849-AC56-3F88BA0A656C}"/>
+            </a:ext>
+          </a:extLst>
+        </p:cNvPr>
+        <p:cNvGrpSpPr/>
+        <p:nvPr/>
+      </p:nvGrpSpPr>
+      <p:grpSpPr>
+        <a:xfrm>
+          <a:off x="0" y="0"/>
+          <a:ext cx="0" cy="0"/>
+          <a:chOff x="0" y="0"/>
+          <a:chExt cx="0" cy="0"/>
+        </a:xfrm>
+      </p:grpSpPr>
+      <p:sp>
+        <p:nvSpPr>
+          <p:cNvPr id="8" name="正方形/長方形 7">
+            <a:extLst>
+              <a:ext uri="{FF2B5EF4-FFF2-40B4-BE49-F238E27FC236}">
+                <a16:creationId xmlns:a16="http://schemas.microsoft.com/office/drawing/2014/main" id="{00A1878C-5802-696D-B5BA-1EACB2AF8C7E}"/>
+              </a:ext>
+            </a:extLst>
+          </p:cNvPr>
+          <p:cNvSpPr/>
+          <p:nvPr/>
+        </p:nvSpPr>
+        <p:spPr>
+          <a:xfrm>
+            <a:off x="169555" y="572908"/>
+            <a:ext cx="6815054" cy="461665"/>
+          </a:xfrm>
+          <a:prstGeom prst="rect">
+            <a:avLst/>
+          </a:prstGeom>
+        </p:spPr>
+        <p:txBody>
+          <a:bodyPr wrap="square">
+            <a:spAutoFit/>
+          </a:bodyPr>
+          <a:lstStyle/>
+          <a:p>
+            <a:endParaRPr lang="en-US" altLang="ja-JP" sz="2400" b="1" dirty="0"/>
+          </a:p>
+        </p:txBody>
+      </p:sp>
+      <p:graphicFrame>
+        <p:nvGraphicFramePr>
+          <p:cNvPr id="4" name="表 3">
+            <a:extLst>
+              <a:ext uri="{FF2B5EF4-FFF2-40B4-BE49-F238E27FC236}">
+                <a16:creationId xmlns:a16="http://schemas.microsoft.com/office/drawing/2014/main" id="{1FC22D7A-BA68-35D2-5681-DD95636B38C0}"/>
+              </a:ext>
+            </a:extLst>
+          </p:cNvPr>
+          <p:cNvGraphicFramePr>
+            <a:graphicFrameLocks noGrp="1"/>
+          </p:cNvGraphicFramePr>
+          <p:nvPr>
+            <p:extLst>
+              <p:ext uri="{D42A27DB-BD31-4B8C-83A1-F6EECF244321}">
+                <p14:modId xmlns:p14="http://schemas.microsoft.com/office/powerpoint/2010/main" val="21751514"/>
+              </p:ext>
+            </p:extLst>
+          </p:nvPr>
+        </p:nvGraphicFramePr>
+        <p:xfrm>
+          <a:off x="76200" y="1679787"/>
+          <a:ext cx="8847667" cy="2640023"/>
+        </p:xfrm>
+        <a:graphic>
+          <a:graphicData uri="http://schemas.openxmlformats.org/drawingml/2006/table">
+            <a:tbl>
+              <a:tblPr firstRow="1" bandRow="1">
+                <a:tableStyleId>{5940675A-B579-460E-94D1-54222C63F5DA}</a:tableStyleId>
+              </a:tblPr>
+              <a:tblGrid>
+                <a:gridCol w="6060248">
+                  <a:extLst>
+                    <a:ext uri="{9D8B030D-6E8A-4147-A177-3AD203B41FA5}">
+                      <a16:colId xmlns:a16="http://schemas.microsoft.com/office/drawing/2014/main" val="2491099294"/>
+                    </a:ext>
+                  </a:extLst>
+                </a:gridCol>
+                <a:gridCol w="1375522">
+                  <a:extLst>
+                    <a:ext uri="{9D8B030D-6E8A-4147-A177-3AD203B41FA5}">
+                      <a16:colId xmlns:a16="http://schemas.microsoft.com/office/drawing/2014/main" val="4195128873"/>
+                    </a:ext>
+                  </a:extLst>
+                </a:gridCol>
+                <a:gridCol w="1411897">
+                  <a:extLst>
+                    <a:ext uri="{9D8B030D-6E8A-4147-A177-3AD203B41FA5}">
+                      <a16:colId xmlns:a16="http://schemas.microsoft.com/office/drawing/2014/main" val="2599010338"/>
+                    </a:ext>
+                  </a:extLst>
+                </a:gridCol>
+              </a:tblGrid>
+              <a:tr h="1044669">
+                <a:tc>
+                  <a:txBody>
+                    <a:bodyPr/>
+                    <a:lstStyle/>
+                    <a:p>
+                      <a:pPr algn="ctr"/>
+                      <a:r>
+                        <a:rPr kumimoji="1" lang="ja-JP" altLang="en-US" sz="2800" dirty="0">
+                          <a:solidFill>
+                            <a:schemeClr val="tx1"/>
+                          </a:solidFill>
+                        </a:rPr>
+                        <a:t>質問項目</a:t>
+                      </a:r>
+                    </a:p>
+                  </a:txBody>
+                  <a:tcPr anchor="ctr"/>
+                </a:tc>
+                <a:tc>
+                  <a:txBody>
+                    <a:bodyPr/>
+                    <a:lstStyle/>
+                    <a:p>
+                      <a:pPr algn="ctr"/>
+                      <a:r>
+                        <a:rPr kumimoji="1" lang="ja-JP" altLang="en-US" sz="2800" dirty="0">
+                          <a:solidFill>
+                            <a:schemeClr val="tx1"/>
+                          </a:solidFill>
+                        </a:rPr>
+                        <a:t>区</a:t>
+                      </a:r>
+                    </a:p>
+                  </a:txBody>
+                  <a:tcPr anchor="ctr"/>
+                </a:tc>
+                <a:tc>
+                  <a:txBody>
+                    <a:bodyPr/>
+                    <a:lstStyle/>
+                    <a:p>
+                      <a:pPr algn="ctr"/>
+                      <a:r>
+                        <a:rPr kumimoji="1" lang="ja-JP" altLang="en-US" sz="2800" dirty="0">
+                          <a:solidFill>
+                            <a:schemeClr val="tx1"/>
+                          </a:solidFill>
+                        </a:rPr>
+                        <a:t>向山小</a:t>
+                      </a:r>
+                    </a:p>
+                  </a:txBody>
+                  <a:tcPr anchor="ctr"/>
+                </a:tc>
+                <a:extLst>
+                  <a:ext uri="{0D108BD9-81ED-4DB2-BD59-A6C34878D82A}">
+                    <a16:rowId xmlns:a16="http://schemas.microsoft.com/office/drawing/2014/main" val="712921817"/>
+                  </a:ext>
+                </a:extLst>
+              </a:tr>
+              <a:tr h="797677">
+                <a:tc>
+                  <a:txBody>
+                    <a:bodyPr/>
+                    <a:lstStyle/>
+                    <a:p>
+                      <a:r>
+                        <a:rPr lang="ja-JP" altLang="ja-JP" sz="2000" b="1" i="0" u="none" strike="noStrike" cap="none" dirty="0">
+                          <a:solidFill>
+                            <a:schemeClr val="tx1"/>
+                          </a:solidFill>
+                          <a:effectLst/>
+                          <a:latin typeface="+mn-lt"/>
+                          <a:ea typeface="+mn-ea"/>
+                          <a:cs typeface="+mn-cs"/>
+                          <a:sym typeface="Arial"/>
+                        </a:rPr>
+                        <a:t>分からないことや詳しく知りたいことがあったときに、自分で学び方を考え、工夫することはできていますか</a:t>
+                      </a:r>
+                    </a:p>
+                  </a:txBody>
+                  <a:tcPr anchor="ctr"/>
+                </a:tc>
+                <a:tc>
+                  <a:txBody>
+                    <a:bodyPr/>
+                    <a:lstStyle/>
+                    <a:p>
+                      <a:r>
+                        <a:rPr kumimoji="1" lang="en-US" altLang="ja-JP" sz="2800" dirty="0">
+                          <a:solidFill>
+                            <a:schemeClr val="tx1"/>
+                          </a:solidFill>
+                        </a:rPr>
+                        <a:t>81.1%</a:t>
+                      </a:r>
+                      <a:endParaRPr kumimoji="1" lang="ja-JP" altLang="en-US" sz="2800" dirty="0">
+                        <a:solidFill>
+                          <a:schemeClr val="tx1"/>
+                        </a:solidFill>
+                      </a:endParaRPr>
+                    </a:p>
+                  </a:txBody>
+                  <a:tcPr anchor="ctr"/>
+                </a:tc>
+                <a:tc>
+                  <a:txBody>
+                    <a:bodyPr/>
+                    <a:lstStyle/>
+                    <a:p>
+                      <a:r>
+                        <a:rPr kumimoji="1" lang="en-US" altLang="ja-JP" sz="2800" dirty="0">
+                          <a:solidFill>
+                            <a:srgbClr val="0070C0"/>
+                          </a:solidFill>
+                        </a:rPr>
+                        <a:t>80.0</a:t>
+                      </a:r>
+                      <a:r>
+                        <a:rPr kumimoji="1" lang="ja-JP" altLang="en-US" sz="2800" dirty="0">
+                          <a:solidFill>
+                            <a:srgbClr val="0070C0"/>
+                          </a:solidFill>
+                        </a:rPr>
+                        <a:t>％</a:t>
+                      </a:r>
+                    </a:p>
+                  </a:txBody>
+                  <a:tcPr anchor="ctr"/>
+                </a:tc>
+                <a:extLst>
+                  <a:ext uri="{0D108BD9-81ED-4DB2-BD59-A6C34878D82A}">
+                    <a16:rowId xmlns:a16="http://schemas.microsoft.com/office/drawing/2014/main" val="3095764373"/>
+                  </a:ext>
+                </a:extLst>
+              </a:tr>
+              <a:tr h="797677">
+                <a:tc>
+                  <a:txBody>
+                    <a:bodyPr/>
+                    <a:lstStyle/>
+                    <a:p>
+                      <a:r>
+                        <a:rPr lang="ja-JP" altLang="en-US" sz="2000" b="1" i="0" u="none" strike="noStrike" cap="none" dirty="0">
+                          <a:solidFill>
+                            <a:schemeClr val="tx1"/>
+                          </a:solidFill>
+                          <a:effectLst/>
+                          <a:latin typeface="+mn-lt"/>
+                          <a:ea typeface="+mn-ea"/>
+                          <a:cs typeface="+mn-cs"/>
+                          <a:sym typeface="Arial"/>
+                        </a:rPr>
+                        <a:t>授業で学んだことを、次の学習や実生活に結びつけて考えたり、生かしたりすることができると思いますか</a:t>
+                      </a:r>
+                      <a:endParaRPr kumimoji="1" lang="ja-JP" altLang="en-US" sz="3600" b="1" dirty="0">
+                        <a:solidFill>
+                          <a:schemeClr val="tx1"/>
+                        </a:solidFill>
+                      </a:endParaRPr>
+                    </a:p>
+                  </a:txBody>
+                  <a:tcPr anchor="ctr"/>
+                </a:tc>
+                <a:tc>
+                  <a:txBody>
+                    <a:bodyPr/>
+                    <a:lstStyle/>
+                    <a:p>
+                      <a:r>
+                        <a:rPr kumimoji="1" lang="en-US" altLang="ja-JP" sz="2800" dirty="0">
+                          <a:solidFill>
+                            <a:schemeClr val="tx1"/>
+                          </a:solidFill>
+                        </a:rPr>
+                        <a:t>80.6%</a:t>
+                      </a:r>
+                      <a:endParaRPr kumimoji="1" lang="ja-JP" altLang="en-US" sz="2800" dirty="0">
+                        <a:solidFill>
+                          <a:schemeClr val="tx1"/>
+                        </a:solidFill>
+                      </a:endParaRPr>
+                    </a:p>
+                  </a:txBody>
+                  <a:tcPr anchor="ctr"/>
+                </a:tc>
+                <a:tc>
+                  <a:txBody>
+                    <a:bodyPr/>
+                    <a:lstStyle/>
+                    <a:p>
+                      <a:r>
+                        <a:rPr kumimoji="1" lang="en-US" altLang="ja-JP" sz="2800" dirty="0">
+                          <a:solidFill>
+                            <a:srgbClr val="FF0000"/>
+                          </a:solidFill>
+                        </a:rPr>
+                        <a:t>90.6</a:t>
+                      </a:r>
+                      <a:r>
+                        <a:rPr kumimoji="1" lang="ja-JP" altLang="en-US" sz="2800" dirty="0">
+                          <a:solidFill>
+                            <a:srgbClr val="FF0000"/>
+                          </a:solidFill>
+                        </a:rPr>
+                        <a:t>％</a:t>
+                      </a:r>
+                    </a:p>
+                  </a:txBody>
+                  <a:tcPr anchor="ctr"/>
+                </a:tc>
+                <a:extLst>
+                  <a:ext uri="{0D108BD9-81ED-4DB2-BD59-A6C34878D82A}">
+                    <a16:rowId xmlns:a16="http://schemas.microsoft.com/office/drawing/2014/main" val="2139117679"/>
+                  </a:ext>
+                </a:extLst>
+              </a:tr>
+            </a:tbl>
+          </a:graphicData>
+        </a:graphic>
+      </p:graphicFrame>
+      <p:sp>
+        <p:nvSpPr>
+          <p:cNvPr id="2" name="正方形/長方形 1">
+            <a:extLst>
+              <a:ext uri="{FF2B5EF4-FFF2-40B4-BE49-F238E27FC236}">
+                <a16:creationId xmlns:a16="http://schemas.microsoft.com/office/drawing/2014/main" id="{AD7C4A96-79D9-4810-06B6-A4752B4E9BA4}"/>
+              </a:ext>
+            </a:extLst>
+          </p:cNvPr>
+          <p:cNvSpPr/>
+          <p:nvPr/>
+        </p:nvSpPr>
+        <p:spPr>
+          <a:xfrm>
+            <a:off x="0" y="6741"/>
+            <a:ext cx="9144000" cy="969412"/>
+          </a:xfrm>
+          <a:prstGeom prst="rect">
+            <a:avLst/>
+          </a:prstGeom>
+          <a:solidFill>
+            <a:srgbClr val="5B9BD5"/>
+          </a:solidFill>
+          <a:ln>
+            <a:solidFill>
+              <a:schemeClr val="tx2">
+                <a:lumMod val="40000"/>
+                <a:lumOff val="60000"/>
+              </a:schemeClr>
+            </a:solidFill>
+          </a:ln>
+        </p:spPr>
+        <p:style>
+          <a:lnRef idx="2">
+            <a:schemeClr val="dk1"/>
+          </a:lnRef>
+          <a:fillRef idx="1">
+            <a:schemeClr val="lt1"/>
+          </a:fillRef>
+          <a:effectRef idx="0">
+            <a:schemeClr val="dk1"/>
+          </a:effectRef>
+          <a:fontRef idx="minor">
+            <a:schemeClr val="dk1"/>
+          </a:fontRef>
+        </p:style>
+        <p:txBody>
+          <a:bodyPr rtlCol="0" anchor="ctr"/>
+          <a:lstStyle/>
+          <a:p>
+            <a:r>
+              <a:rPr lang="ja-JP" altLang="en-US" sz="3200" b="1" dirty="0">
+                <a:solidFill>
+                  <a:schemeClr val="bg1"/>
+                </a:solidFill>
+              </a:rPr>
+              <a:t>令和７年度全国学力・学習状況調査</a:t>
+            </a:r>
+            <a:endParaRPr lang="en-US" altLang="ja-JP" sz="3200" b="1" dirty="0">
+              <a:solidFill>
+                <a:schemeClr val="bg1"/>
+              </a:solidFill>
+            </a:endParaRPr>
+          </a:p>
+          <a:p>
+            <a:r>
+              <a:rPr lang="ja-JP" altLang="en-US" sz="3200" b="1" dirty="0">
+                <a:solidFill>
+                  <a:schemeClr val="bg1"/>
+                </a:solidFill>
+              </a:rPr>
+              <a:t>児童質問用紙より</a:t>
+            </a:r>
+            <a:endParaRPr lang="en-US" altLang="ja-JP" sz="3600" b="1" dirty="0">
+              <a:solidFill>
+                <a:schemeClr val="bg1"/>
+              </a:solidFill>
+            </a:endParaRPr>
+          </a:p>
+        </p:txBody>
+      </p:sp>
+    </p:spTree>
+    <p:extLst>
+      <p:ext uri="{BB962C8B-B14F-4D97-AF65-F5344CB8AC3E}">
+        <p14:creationId xmlns:p14="http://schemas.microsoft.com/office/powerpoint/2010/main" val="3019393261"/>
+      </p:ext>
+    </p:extLst>
+  </p:cSld>
+  <p:clrMapOvr>
+    <a:masterClrMapping/>
+  </p:clrMapOvr>
+</p:sld>
+</file>
+
+<file path=ppt/slides/slide3.xml><?xml version="1.0" encoding="utf-8"?>
+<p:sld xmlns:a="http://schemas.openxmlformats.org/drawingml/2006/main" xmlns:r="http://schemas.openxmlformats.org/officeDocument/2006/relationships" xmlns:p="http://schemas.openxmlformats.org/presentationml/2006/main">
+  <p:cSld>
+    <p:spTree>
+      <p:nvGrpSpPr>
+        <p:cNvPr id="1" name="">
+          <a:extLst>
+            <a:ext uri="{FF2B5EF4-FFF2-40B4-BE49-F238E27FC236}">
+              <a16:creationId xmlns:a16="http://schemas.microsoft.com/office/drawing/2014/main" id="{FAD4D58E-4D8F-A1E1-2537-561D48BA479E}"/>
+            </a:ext>
+          </a:extLst>
+        </p:cNvPr>
+        <p:cNvGrpSpPr/>
+        <p:nvPr/>
+      </p:nvGrpSpPr>
+      <p:grpSpPr>
+        <a:xfrm>
+          <a:off x="0" y="0"/>
+          <a:ext cx="0" cy="0"/>
+          <a:chOff x="0" y="0"/>
+          <a:chExt cx="0" cy="0"/>
+        </a:xfrm>
+      </p:grpSpPr>
+      <p:sp>
+        <p:nvSpPr>
+          <p:cNvPr id="8" name="正方形/長方形 7">
+            <a:extLst>
+              <a:ext uri="{FF2B5EF4-FFF2-40B4-BE49-F238E27FC236}">
+                <a16:creationId xmlns:a16="http://schemas.microsoft.com/office/drawing/2014/main" id="{382CD490-F1C5-1A71-26B4-619E0A9A7897}"/>
+              </a:ext>
+            </a:extLst>
+          </p:cNvPr>
+          <p:cNvSpPr/>
+          <p:nvPr/>
+        </p:nvSpPr>
+        <p:spPr>
+          <a:xfrm>
+            <a:off x="169555" y="572908"/>
+            <a:ext cx="6815054" cy="461665"/>
+          </a:xfrm>
+          <a:prstGeom prst="rect">
+            <a:avLst/>
+          </a:prstGeom>
+        </p:spPr>
+        <p:txBody>
+          <a:bodyPr wrap="square">
+            <a:spAutoFit/>
+          </a:bodyPr>
+          <a:lstStyle/>
+          <a:p>
+            <a:endParaRPr lang="en-US" altLang="ja-JP" sz="2400" b="1" dirty="0"/>
+          </a:p>
+        </p:txBody>
+      </p:sp>
+      <p:graphicFrame>
+        <p:nvGraphicFramePr>
+          <p:cNvPr id="4" name="表 3">
+            <a:extLst>
+              <a:ext uri="{FF2B5EF4-FFF2-40B4-BE49-F238E27FC236}">
+                <a16:creationId xmlns:a16="http://schemas.microsoft.com/office/drawing/2014/main" id="{7991133E-73CF-82E8-49FD-3BF2C062BB6A}"/>
+              </a:ext>
+            </a:extLst>
+          </p:cNvPr>
+          <p:cNvGraphicFramePr>
+            <a:graphicFrameLocks noGrp="1"/>
+          </p:cNvGraphicFramePr>
+          <p:nvPr/>
+        </p:nvGraphicFramePr>
+        <p:xfrm>
+          <a:off x="76200" y="1679787"/>
+          <a:ext cx="8847667" cy="2640023"/>
+        </p:xfrm>
+        <a:graphic>
+          <a:graphicData uri="http://schemas.openxmlformats.org/drawingml/2006/table">
+            <a:tbl>
+              <a:tblPr firstRow="1" bandRow="1">
+                <a:tableStyleId>{5940675A-B579-460E-94D1-54222C63F5DA}</a:tableStyleId>
+              </a:tblPr>
+              <a:tblGrid>
+                <a:gridCol w="6060248">
+                  <a:extLst>
+                    <a:ext uri="{9D8B030D-6E8A-4147-A177-3AD203B41FA5}">
+                      <a16:colId xmlns:a16="http://schemas.microsoft.com/office/drawing/2014/main" val="2491099294"/>
+                    </a:ext>
+                  </a:extLst>
+                </a:gridCol>
+                <a:gridCol w="1375522">
+                  <a:extLst>
+                    <a:ext uri="{9D8B030D-6E8A-4147-A177-3AD203B41FA5}">
+                      <a16:colId xmlns:a16="http://schemas.microsoft.com/office/drawing/2014/main" val="4195128873"/>
+                    </a:ext>
+                  </a:extLst>
+                </a:gridCol>
+                <a:gridCol w="1411897">
+                  <a:extLst>
+                    <a:ext uri="{9D8B030D-6E8A-4147-A177-3AD203B41FA5}">
+                      <a16:colId xmlns:a16="http://schemas.microsoft.com/office/drawing/2014/main" val="2599010338"/>
+                    </a:ext>
+                  </a:extLst>
+                </a:gridCol>
+              </a:tblGrid>
+              <a:tr h="1044669">
+                <a:tc>
+                  <a:txBody>
+                    <a:bodyPr/>
+                    <a:lstStyle/>
+                    <a:p>
+                      <a:pPr algn="ctr"/>
+                      <a:r>
+                        <a:rPr kumimoji="1" lang="ja-JP" altLang="en-US" sz="2800" dirty="0">
+                          <a:solidFill>
+                            <a:schemeClr val="tx1"/>
+                          </a:solidFill>
+                        </a:rPr>
+                        <a:t>質問項目</a:t>
+                      </a:r>
+                    </a:p>
+                  </a:txBody>
+                  <a:tcPr anchor="ctr"/>
+                </a:tc>
+                <a:tc>
+                  <a:txBody>
+                    <a:bodyPr/>
+                    <a:lstStyle/>
+                    <a:p>
+                      <a:pPr algn="ctr"/>
+                      <a:r>
+                        <a:rPr kumimoji="1" lang="ja-JP" altLang="en-US" sz="2800" dirty="0">
+                          <a:solidFill>
+                            <a:schemeClr val="tx1"/>
+                          </a:solidFill>
+                        </a:rPr>
+                        <a:t>区</a:t>
+                      </a:r>
+                    </a:p>
+                  </a:txBody>
+                  <a:tcPr anchor="ctr"/>
+                </a:tc>
+                <a:tc>
+                  <a:txBody>
+                    <a:bodyPr/>
+                    <a:lstStyle/>
+                    <a:p>
+                      <a:pPr algn="ctr"/>
+                      <a:r>
+                        <a:rPr kumimoji="1" lang="ja-JP" altLang="en-US" sz="2800" dirty="0">
+                          <a:solidFill>
+                            <a:schemeClr val="tx1"/>
+                          </a:solidFill>
+                        </a:rPr>
+                        <a:t>向山小</a:t>
+                      </a:r>
+                    </a:p>
+                  </a:txBody>
+                  <a:tcPr anchor="ctr"/>
+                </a:tc>
+                <a:extLst>
+                  <a:ext uri="{0D108BD9-81ED-4DB2-BD59-A6C34878D82A}">
+                    <a16:rowId xmlns:a16="http://schemas.microsoft.com/office/drawing/2014/main" val="712921817"/>
+                  </a:ext>
+                </a:extLst>
+              </a:tr>
+              <a:tr h="797677">
+                <a:tc>
+                  <a:txBody>
+                    <a:bodyPr/>
+                    <a:lstStyle/>
+                    <a:p>
+                      <a:r>
+                        <a:rPr lang="ja-JP" altLang="ja-JP" sz="2000" b="1" i="0" u="none" strike="noStrike" cap="none" dirty="0">
+                          <a:solidFill>
+                            <a:schemeClr val="tx1"/>
+                          </a:solidFill>
+                          <a:effectLst/>
+                          <a:latin typeface="+mn-lt"/>
+                          <a:ea typeface="+mn-ea"/>
+                          <a:cs typeface="+mn-cs"/>
+                          <a:sym typeface="Arial"/>
+                        </a:rPr>
+                        <a:t>分からないことや詳しく知りたいことがあったときに、自分で学び方を考え、工夫することはできていますか</a:t>
+                      </a:r>
+                    </a:p>
+                  </a:txBody>
+                  <a:tcPr anchor="ctr"/>
+                </a:tc>
+                <a:tc>
+                  <a:txBody>
+                    <a:bodyPr/>
+                    <a:lstStyle/>
+                    <a:p>
+                      <a:r>
+                        <a:rPr kumimoji="1" lang="en-US" altLang="ja-JP" sz="2800" dirty="0">
+                          <a:solidFill>
+                            <a:schemeClr val="tx1"/>
+                          </a:solidFill>
+                        </a:rPr>
+                        <a:t>81.1%</a:t>
+                      </a:r>
+                      <a:endParaRPr kumimoji="1" lang="ja-JP" altLang="en-US" sz="2800" dirty="0">
+                        <a:solidFill>
+                          <a:schemeClr val="tx1"/>
+                        </a:solidFill>
+                      </a:endParaRPr>
+                    </a:p>
+                  </a:txBody>
+                  <a:tcPr anchor="ctr"/>
+                </a:tc>
+                <a:tc>
+                  <a:txBody>
+                    <a:bodyPr/>
+                    <a:lstStyle/>
+                    <a:p>
+                      <a:r>
+                        <a:rPr kumimoji="1" lang="ja-JP" altLang="en-US" sz="2800" dirty="0">
+                          <a:solidFill>
+                            <a:schemeClr val="tx1"/>
+                          </a:solidFill>
+                          <a:highlight>
+                            <a:srgbClr val="FFFF00"/>
+                          </a:highlight>
+                        </a:rPr>
+                        <a:t>　　　</a:t>
+                      </a:r>
+                      <a:r>
+                        <a:rPr kumimoji="1" lang="ja-JP" altLang="en-US" sz="2800" dirty="0">
+                          <a:solidFill>
+                            <a:schemeClr val="tx1"/>
+                          </a:solidFill>
+                        </a:rPr>
+                        <a:t>％</a:t>
+                      </a:r>
+                    </a:p>
+                  </a:txBody>
+                  <a:tcPr anchor="ctr"/>
+                </a:tc>
+                <a:extLst>
+                  <a:ext uri="{0D108BD9-81ED-4DB2-BD59-A6C34878D82A}">
+                    <a16:rowId xmlns:a16="http://schemas.microsoft.com/office/drawing/2014/main" val="3095764373"/>
+                  </a:ext>
+                </a:extLst>
+              </a:tr>
+              <a:tr h="797677">
+                <a:tc>
+                  <a:txBody>
+                    <a:bodyPr/>
+                    <a:lstStyle/>
+                    <a:p>
+                      <a:r>
+                        <a:rPr lang="ja-JP" altLang="en-US" sz="2000" b="1" i="0" u="none" strike="noStrike" cap="none" dirty="0">
+                          <a:solidFill>
+                            <a:schemeClr val="tx1"/>
+                          </a:solidFill>
+                          <a:effectLst/>
+                          <a:latin typeface="+mn-lt"/>
+                          <a:ea typeface="+mn-ea"/>
+                          <a:cs typeface="+mn-cs"/>
+                          <a:sym typeface="Arial"/>
+                        </a:rPr>
+                        <a:t>授業で学んだことを、次の学習や実生活に結びつけて考えたり、生かしたりすることができると思いますか</a:t>
+                      </a:r>
+                      <a:endParaRPr kumimoji="1" lang="ja-JP" altLang="en-US" sz="3600" b="1" dirty="0">
+                        <a:solidFill>
+                          <a:schemeClr val="tx1"/>
+                        </a:solidFill>
+                      </a:endParaRPr>
+                    </a:p>
+                  </a:txBody>
+                  <a:tcPr anchor="ctr"/>
+                </a:tc>
+                <a:tc>
+                  <a:txBody>
+                    <a:bodyPr/>
+                    <a:lstStyle/>
+                    <a:p>
+                      <a:r>
+                        <a:rPr kumimoji="1" lang="en-US" altLang="ja-JP" sz="2800" dirty="0">
+                          <a:solidFill>
+                            <a:schemeClr val="tx1"/>
+                          </a:solidFill>
+                        </a:rPr>
+                        <a:t>80.6%</a:t>
+                      </a:r>
+                      <a:endParaRPr kumimoji="1" lang="ja-JP" altLang="en-US" sz="2800" dirty="0">
+                        <a:solidFill>
+                          <a:schemeClr val="tx1"/>
+                        </a:solidFill>
+                      </a:endParaRPr>
+                    </a:p>
+                  </a:txBody>
+                  <a:tcPr anchor="ctr"/>
+                </a:tc>
+                <a:tc>
+                  <a:txBody>
+                    <a:bodyPr/>
+                    <a:lstStyle/>
+                    <a:p>
+                      <a:r>
+                        <a:rPr kumimoji="1" lang="ja-JP" altLang="en-US" sz="2800" dirty="0">
+                          <a:solidFill>
+                            <a:schemeClr val="tx1"/>
+                          </a:solidFill>
+                          <a:highlight>
+                            <a:srgbClr val="FFFF00"/>
+                          </a:highlight>
+                        </a:rPr>
+                        <a:t>　　　</a:t>
+                      </a:r>
+                      <a:r>
+                        <a:rPr kumimoji="1" lang="ja-JP" altLang="en-US" sz="2800" dirty="0">
+                          <a:solidFill>
+                            <a:schemeClr val="tx1"/>
+                          </a:solidFill>
+                        </a:rPr>
+                        <a:t>％</a:t>
+                      </a:r>
+                    </a:p>
+                  </a:txBody>
+                  <a:tcPr anchor="ctr"/>
+                </a:tc>
+                <a:extLst>
+                  <a:ext uri="{0D108BD9-81ED-4DB2-BD59-A6C34878D82A}">
+                    <a16:rowId xmlns:a16="http://schemas.microsoft.com/office/drawing/2014/main" val="2139117679"/>
+                  </a:ext>
+                </a:extLst>
+              </a:tr>
+            </a:tbl>
+          </a:graphicData>
+        </a:graphic>
+      </p:graphicFrame>
+      <p:sp>
+        <p:nvSpPr>
+          <p:cNvPr id="2" name="正方形/長方形 1">
+            <a:extLst>
+              <a:ext uri="{FF2B5EF4-FFF2-40B4-BE49-F238E27FC236}">
+                <a16:creationId xmlns:a16="http://schemas.microsoft.com/office/drawing/2014/main" id="{10A59541-EBCC-5F00-6CDD-2D399B886B1B}"/>
+              </a:ext>
+            </a:extLst>
+          </p:cNvPr>
+          <p:cNvSpPr/>
+          <p:nvPr/>
+        </p:nvSpPr>
+        <p:spPr>
+          <a:xfrm>
+            <a:off x="0" y="6741"/>
+            <a:ext cx="9144000" cy="969412"/>
+          </a:xfrm>
+          <a:prstGeom prst="rect">
+            <a:avLst/>
+          </a:prstGeom>
+          <a:solidFill>
+            <a:srgbClr val="5B9BD5"/>
+          </a:solidFill>
+          <a:ln>
+            <a:solidFill>
+              <a:schemeClr val="tx2">
+                <a:lumMod val="40000"/>
+                <a:lumOff val="60000"/>
+              </a:schemeClr>
+            </a:solidFill>
+          </a:ln>
+        </p:spPr>
+        <p:style>
+          <a:lnRef idx="2">
+            <a:schemeClr val="dk1"/>
+          </a:lnRef>
+          <a:fillRef idx="1">
+            <a:schemeClr val="lt1"/>
+          </a:fillRef>
+          <a:effectRef idx="0">
+            <a:schemeClr val="dk1"/>
+          </a:effectRef>
+          <a:fontRef idx="minor">
+            <a:schemeClr val="dk1"/>
+          </a:fontRef>
+        </p:style>
+        <p:txBody>
+          <a:bodyPr rtlCol="0" anchor="ctr"/>
+          <a:lstStyle/>
+          <a:p>
+            <a:r>
+              <a:rPr lang="ja-JP" altLang="en-US" sz="3200" b="1" dirty="0">
+                <a:solidFill>
+                  <a:schemeClr val="bg1"/>
+                </a:solidFill>
+              </a:rPr>
+              <a:t>令和７年度全国学力・学習状況調査</a:t>
+            </a:r>
+            <a:endParaRPr lang="en-US" altLang="ja-JP" sz="3200" b="1" dirty="0">
+              <a:solidFill>
+                <a:schemeClr val="bg1"/>
+              </a:solidFill>
+            </a:endParaRPr>
+          </a:p>
+          <a:p>
+            <a:r>
+              <a:rPr lang="ja-JP" altLang="en-US" sz="3200" b="1" dirty="0">
+                <a:solidFill>
+                  <a:schemeClr val="bg1"/>
+                </a:solidFill>
+              </a:rPr>
+              <a:t>児童質問用紙より</a:t>
+            </a:r>
+            <a:endParaRPr lang="en-US" altLang="ja-JP" sz="3600" b="1" dirty="0">
+              <a:solidFill>
+                <a:schemeClr val="bg1"/>
+              </a:solidFill>
+            </a:endParaRPr>
+          </a:p>
+        </p:txBody>
+      </p:sp>
+    </p:spTree>
+    <p:extLst>
+      <p:ext uri="{BB962C8B-B14F-4D97-AF65-F5344CB8AC3E}">
+        <p14:creationId xmlns:p14="http://schemas.microsoft.com/office/powerpoint/2010/main" val="2547792710"/>
+      </p:ext>
+    </p:extLst>
+  </p:cSld>
+  <p:clrMapOvr>
+    <a:masterClrMapping/>
+  </p:clrMapOvr>
+</p:sld>
+</file>
+
+<file path=ppt/slides/slide4.xml><?xml version="1.0" encoding="utf-8"?>
+<p:sld xmlns:a="http://schemas.openxmlformats.org/drawingml/2006/main" xmlns:r="http://schemas.openxmlformats.org/officeDocument/2006/relationships" xmlns:p="http://schemas.openxmlformats.org/presentationml/2006/main">
+  <p:cSld>
+    <p:spTree>
+      <p:nvGrpSpPr>
+        <p:cNvPr id="1" name="">
+          <a:extLst>
+            <a:ext uri="{FF2B5EF4-FFF2-40B4-BE49-F238E27FC236}">
+              <a16:creationId xmlns:a16="http://schemas.microsoft.com/office/drawing/2014/main" id="{EEF1D3C9-DA06-2360-20FE-D74FEFB05E4B}"/>
+            </a:ext>
+          </a:extLst>
+        </p:cNvPr>
+        <p:cNvGrpSpPr/>
+        <p:nvPr/>
+      </p:nvGrpSpPr>
+      <p:grpSpPr>
+        <a:xfrm>
+          <a:off x="0" y="0"/>
+          <a:ext cx="0" cy="0"/>
+          <a:chOff x="0" y="0"/>
+          <a:chExt cx="0" cy="0"/>
+        </a:xfrm>
+      </p:grpSpPr>
+      <p:sp>
+        <p:nvSpPr>
+          <p:cNvPr id="8" name="正方形/長方形 7">
+            <a:extLst>
+              <a:ext uri="{FF2B5EF4-FFF2-40B4-BE49-F238E27FC236}">
+                <a16:creationId xmlns:a16="http://schemas.microsoft.com/office/drawing/2014/main" id="{883CEDA9-7196-12AB-8B24-555D95D63C5D}"/>
+              </a:ext>
+            </a:extLst>
+          </p:cNvPr>
+          <p:cNvSpPr/>
+          <p:nvPr/>
+        </p:nvSpPr>
+        <p:spPr>
+          <a:xfrm>
+            <a:off x="169555" y="572908"/>
+            <a:ext cx="6815054" cy="461665"/>
+          </a:xfrm>
+          <a:prstGeom prst="rect">
+            <a:avLst/>
+          </a:prstGeom>
+        </p:spPr>
+        <p:txBody>
+          <a:bodyPr wrap="square">
+            <a:spAutoFit/>
+          </a:bodyPr>
+          <a:lstStyle/>
+          <a:p>
+            <a:endParaRPr lang="en-US" altLang="ja-JP" sz="2400" b="1" dirty="0"/>
+          </a:p>
+        </p:txBody>
+      </p:sp>
+      <p:sp>
+        <p:nvSpPr>
+          <p:cNvPr id="16" name="正方形/長方形 15">
+            <a:extLst>
+              <a:ext uri="{FF2B5EF4-FFF2-40B4-BE49-F238E27FC236}">
+                <a16:creationId xmlns:a16="http://schemas.microsoft.com/office/drawing/2014/main" id="{745391DB-BFA8-70BC-47AF-C870A4F9A906}"/>
+              </a:ext>
+            </a:extLst>
+          </p:cNvPr>
+          <p:cNvSpPr/>
+          <p:nvPr/>
+        </p:nvSpPr>
+        <p:spPr>
+          <a:xfrm>
+            <a:off x="0" y="0"/>
+            <a:ext cx="9144000" cy="613963"/>
+          </a:xfrm>
+          <a:prstGeom prst="rect">
+            <a:avLst/>
+          </a:prstGeom>
+          <a:solidFill>
+            <a:srgbClr val="5B9BD5"/>
+          </a:solidFill>
+          <a:ln>
+            <a:solidFill>
+              <a:schemeClr val="tx2">
+                <a:lumMod val="40000"/>
+                <a:lumOff val="60000"/>
+              </a:schemeClr>
+            </a:solidFill>
+          </a:ln>
+        </p:spPr>
+        <p:style>
+          <a:lnRef idx="2">
+            <a:schemeClr val="dk1"/>
+          </a:lnRef>
+          <a:fillRef idx="1">
+            <a:schemeClr val="lt1"/>
+          </a:fillRef>
+          <a:effectRef idx="0">
+            <a:schemeClr val="dk1"/>
+          </a:effectRef>
+          <a:fontRef idx="minor">
+            <a:schemeClr val="dk1"/>
+          </a:fontRef>
+        </p:style>
+        <p:txBody>
+          <a:bodyPr rtlCol="0" anchor="ctr"/>
+          <a:lstStyle/>
+          <a:p>
+            <a:r>
+              <a:rPr lang="ja-JP" altLang="en-US" sz="4000" b="1" dirty="0">
+                <a:solidFill>
+                  <a:schemeClr val="bg1"/>
+                </a:solidFill>
                 <a:latin typeface="メイリオ"/>
                 <a:ea typeface="メイリオ"/>
                 <a:cs typeface="メイリオ"/>
               </a:rPr>
-              <a:t>写真</a:t>
-            </a:r>
+              <a:t>　３・４校時の授業について　</a:t>
+            </a:r>
+            <a:endParaRPr lang="en-US" altLang="ja-JP" sz="3200" b="1" dirty="0">
+              <a:solidFill>
+                <a:schemeClr val="bg1"/>
+              </a:solidFill>
+            </a:endParaRPr>
+          </a:p>
+        </p:txBody>
+      </p:sp>
+      <p:sp>
+        <p:nvSpPr>
+          <p:cNvPr id="9" name="正方形/長方形 8">
+            <a:extLst>
+              <a:ext uri="{FF2B5EF4-FFF2-40B4-BE49-F238E27FC236}">
+                <a16:creationId xmlns:a16="http://schemas.microsoft.com/office/drawing/2014/main" id="{6242ACF5-38B3-DDF6-38BA-9842170ED879}"/>
+              </a:ext>
+            </a:extLst>
+          </p:cNvPr>
+          <p:cNvSpPr/>
+          <p:nvPr/>
+        </p:nvSpPr>
+        <p:spPr bwMode="white">
+          <a:xfrm>
+            <a:off x="470947" y="1034573"/>
+            <a:ext cx="8019225" cy="2428357"/>
+          </a:xfrm>
+          <a:prstGeom prst="rect">
+            <a:avLst/>
+          </a:prstGeom>
+          <a:solidFill>
+            <a:schemeClr val="bg1"/>
+          </a:solidFill>
+          <a:ln>
+            <a:noFill/>
+          </a:ln>
+        </p:spPr>
+        <p:txBody>
+          <a:bodyPr wrap="square">
+            <a:spAutoFit/>
+          </a:bodyPr>
+          <a:lstStyle/>
+          <a:p>
+            <a:pPr>
+              <a:lnSpc>
+                <a:spcPct val="120000"/>
+              </a:lnSpc>
+            </a:pPr>
+            <a:r>
+              <a:rPr lang="ja-JP" altLang="en-US" sz="3600" b="1" u="sng" dirty="0">
+                <a:solidFill>
+                  <a:schemeClr val="tx1">
+                    <a:lumMod val="65000"/>
+                    <a:lumOff val="35000"/>
+                  </a:schemeClr>
+                </a:solidFill>
+                <a:latin typeface="メイリオ"/>
+                <a:ea typeface="メイリオ"/>
+                <a:cs typeface="メイリオ"/>
+              </a:rPr>
+              <a:t>本日の視点</a:t>
+            </a:r>
+            <a:endParaRPr lang="en-US" altLang="ja-JP" sz="3600" b="1" u="sng" dirty="0">
+              <a:solidFill>
+                <a:schemeClr val="tx1">
+                  <a:lumMod val="65000"/>
+                  <a:lumOff val="35000"/>
+                </a:schemeClr>
+              </a:solidFill>
+              <a:latin typeface="メイリオ" panose="020B0604030504040204" pitchFamily="50" charset="-128"/>
+              <a:ea typeface="メイリオ" panose="020B0604030504040204" pitchFamily="50" charset="-128"/>
+              <a:cs typeface="メイリオ" panose="020B0604030504040204" pitchFamily="50" charset="-128"/>
+            </a:endParaRPr>
+          </a:p>
+          <a:p>
+            <a:r>
+              <a:rPr lang="ja-JP" sz="2400" b="1" dirty="0">
+                <a:latin typeface="メイリオ"/>
+                <a:ea typeface="メイリオ"/>
+                <a:cs typeface="メイリオ"/>
+              </a:rPr>
+              <a:t>〜授業の事実から学びを語る〜</a:t>
+            </a:r>
+          </a:p>
+          <a:p>
+            <a:pPr>
+              <a:lnSpc>
+                <a:spcPct val="120000"/>
+              </a:lnSpc>
+            </a:pPr>
+            <a:r>
+              <a:rPr lang="ja-JP" altLang="en-US" sz="3600" b="1" dirty="0">
+                <a:solidFill>
+                  <a:schemeClr val="tx1">
+                    <a:lumMod val="65000"/>
+                    <a:lumOff val="35000"/>
+                  </a:schemeClr>
+                </a:solidFill>
+                <a:latin typeface="メイリオ"/>
+                <a:ea typeface="メイリオ"/>
+                <a:cs typeface="メイリオ"/>
+              </a:rPr>
+              <a:t>・「主体的・対話的で深い学び」</a:t>
+            </a:r>
+            <a:endParaRPr lang="en-US" altLang="ja-JP" sz="3600" b="1" dirty="0">
+              <a:solidFill>
+                <a:schemeClr val="tx1">
+                  <a:lumMod val="65000"/>
+                  <a:lumOff val="35000"/>
+                </a:schemeClr>
+              </a:solidFill>
+              <a:latin typeface="メイリオ"/>
+              <a:ea typeface="メイリオ"/>
+              <a:cs typeface="メイリオ"/>
+            </a:endParaRPr>
+          </a:p>
+          <a:p>
+            <a:pPr>
+              <a:lnSpc>
+                <a:spcPct val="120000"/>
+              </a:lnSpc>
+            </a:pPr>
+            <a:r>
+              <a:rPr lang="ja-JP" altLang="en-US" sz="3600" b="1" dirty="0">
+                <a:solidFill>
+                  <a:schemeClr val="tx1">
+                    <a:lumMod val="65000"/>
+                    <a:lumOff val="35000"/>
+                  </a:schemeClr>
+                </a:solidFill>
+                <a:latin typeface="メイリオ"/>
+                <a:ea typeface="メイリオ"/>
+                <a:cs typeface="メイリオ" panose="020B0604030504040204" pitchFamily="50" charset="-128"/>
+              </a:rPr>
+              <a:t>　　→主体的な学びについて</a:t>
+            </a:r>
+            <a:endParaRPr lang="en-US" altLang="ja-JP" sz="3600" b="1" dirty="0">
+              <a:solidFill>
+                <a:schemeClr val="tx1">
+                  <a:lumMod val="65000"/>
+                  <a:lumOff val="35000"/>
+                </a:schemeClr>
+              </a:solidFill>
+              <a:latin typeface="メイリオ" panose="020B0604030504040204" pitchFamily="50" charset="-128"/>
+              <a:ea typeface="メイリオ" panose="020B0604030504040204" pitchFamily="50" charset="-128"/>
+              <a:cs typeface="メイリオ" panose="020B0604030504040204" pitchFamily="50" charset="-128"/>
+            </a:endParaRPr>
           </a:p>
         </p:txBody>
       </p:sp>
     </p:spTree>
     <p:extLst>
       <p:ext uri="{BB962C8B-B14F-4D97-AF65-F5344CB8AC3E}">
-        <p14:creationId xmlns:p14="http://schemas.microsoft.com/office/powerpoint/2010/main" val="2424294063"/>
+        <p14:creationId xmlns:p14="http://schemas.microsoft.com/office/powerpoint/2010/main" val="1812740082"/>
       </p:ext>
     </p:extLst>
   </p:cSld>
@@ -8057,10 +11576,1008 @@
   <p:cSld>
     <p:spTree>
       <p:nvGrpSpPr>
+        <p:cNvPr id="1" name=""/>
+        <p:cNvGrpSpPr/>
+        <p:nvPr/>
+      </p:nvGrpSpPr>
+      <p:grpSpPr>
+        <a:xfrm>
+          <a:off x="0" y="0"/>
+          <a:ext cx="0" cy="0"/>
+          <a:chOff x="0" y="0"/>
+          <a:chExt cx="0" cy="0"/>
+        </a:xfrm>
+      </p:grpSpPr>
+      <p:sp>
+        <p:nvSpPr>
+          <p:cNvPr id="3" name="コンテンツ プレースホルダー 2"/>
+          <p:cNvSpPr>
+            <a:spLocks noGrp="1"/>
+          </p:cNvSpPr>
+          <p:nvPr>
+            <p:ph idx="1"/>
+          </p:nvPr>
+        </p:nvSpPr>
+        <p:spPr>
+          <a:xfrm>
+            <a:off x="204716" y="622503"/>
+            <a:ext cx="4943903" cy="491702"/>
+          </a:xfrm>
+        </p:spPr>
+        <p:txBody>
+          <a:bodyPr>
+            <a:noAutofit/>
+          </a:bodyPr>
+          <a:lstStyle/>
+          <a:p>
+            <a:pPr marL="0" indent="0">
+              <a:buNone/>
+            </a:pPr>
+            <a:r>
+              <a:rPr lang="ja-JP" altLang="en-US" sz="2400" b="1" dirty="0"/>
+              <a:t>「主体的な学び」のイメージ</a:t>
+            </a:r>
+          </a:p>
+        </p:txBody>
+      </p:sp>
+      <p:sp>
+        <p:nvSpPr>
+          <p:cNvPr id="6" name="ドーナツ 5"/>
+          <p:cNvSpPr/>
+          <p:nvPr/>
+        </p:nvSpPr>
+        <p:spPr>
+          <a:xfrm>
+            <a:off x="1107395" y="1474466"/>
+            <a:ext cx="3114814" cy="3176660"/>
+          </a:xfrm>
+          <a:prstGeom prst="donut">
+            <a:avLst>
+              <a:gd name="adj" fmla="val 6613"/>
+            </a:avLst>
+          </a:prstGeom>
+          <a:solidFill>
+            <a:schemeClr val="bg1">
+              <a:lumMod val="85000"/>
+            </a:schemeClr>
+          </a:solidFill>
+        </p:spPr>
+        <p:style>
+          <a:lnRef idx="2">
+            <a:schemeClr val="accent1">
+              <a:shade val="50000"/>
+            </a:schemeClr>
+          </a:lnRef>
+          <a:fillRef idx="1">
+            <a:schemeClr val="accent1"/>
+          </a:fillRef>
+          <a:effectRef idx="0">
+            <a:schemeClr val="accent1"/>
+          </a:effectRef>
+          <a:fontRef idx="minor">
+            <a:schemeClr val="lt1"/>
+          </a:fontRef>
+        </p:style>
+        <p:txBody>
+          <a:bodyPr rtlCol="0" anchor="ctr"/>
+          <a:lstStyle/>
+          <a:p>
+            <a:pPr algn="ctr"/>
+            <a:endParaRPr lang="ja-JP" altLang="en-US" sz="1050" b="1">
+              <a:solidFill>
+                <a:schemeClr val="tx1"/>
+              </a:solidFill>
+            </a:endParaRPr>
+          </a:p>
+        </p:txBody>
+      </p:sp>
+      <p:sp>
+        <p:nvSpPr>
+          <p:cNvPr id="7" name="角丸四角形 6"/>
+          <p:cNvSpPr/>
+          <p:nvPr/>
+        </p:nvSpPr>
+        <p:spPr>
+          <a:xfrm>
+            <a:off x="1864484" y="1224978"/>
+            <a:ext cx="1659768" cy="798253"/>
+          </a:xfrm>
+          <a:prstGeom prst="roundRect">
+            <a:avLst/>
+          </a:prstGeom>
+          <a:solidFill>
+            <a:schemeClr val="accent4">
+              <a:lumMod val="20000"/>
+              <a:lumOff val="80000"/>
+            </a:schemeClr>
+          </a:solidFill>
+        </p:spPr>
+        <p:style>
+          <a:lnRef idx="2">
+            <a:schemeClr val="accent1">
+              <a:shade val="50000"/>
+            </a:schemeClr>
+          </a:lnRef>
+          <a:fillRef idx="1">
+            <a:schemeClr val="accent1"/>
+          </a:fillRef>
+          <a:effectRef idx="0">
+            <a:schemeClr val="accent1"/>
+          </a:effectRef>
+          <a:fontRef idx="minor">
+            <a:schemeClr val="lt1"/>
+          </a:fontRef>
+        </p:style>
+        <p:txBody>
+          <a:bodyPr rtlCol="0" anchor="ctr"/>
+          <a:lstStyle/>
+          <a:p>
+            <a:pPr algn="ctr"/>
+            <a:r>
+              <a:rPr lang="ja-JP" altLang="en-US" sz="1050" b="1" dirty="0">
+                <a:solidFill>
+                  <a:schemeClr val="tx1"/>
+                </a:solidFill>
+                <a:latin typeface="+mn-ea"/>
+              </a:rPr>
+              <a:t>興味や関心を</a:t>
+            </a:r>
+            <a:endParaRPr lang="en-US" altLang="ja-JP" sz="1050" b="1" dirty="0">
+              <a:solidFill>
+                <a:schemeClr val="tx1"/>
+              </a:solidFill>
+              <a:latin typeface="+mn-ea"/>
+            </a:endParaRPr>
+          </a:p>
+          <a:p>
+            <a:pPr algn="ctr"/>
+            <a:r>
+              <a:rPr lang="ja-JP" altLang="en-US" sz="1050" b="1" dirty="0">
+                <a:solidFill>
+                  <a:schemeClr val="tx1"/>
+                </a:solidFill>
+                <a:latin typeface="+mn-ea"/>
+              </a:rPr>
+              <a:t>高める</a:t>
+            </a:r>
+          </a:p>
+        </p:txBody>
+      </p:sp>
+      <p:sp>
+        <p:nvSpPr>
+          <p:cNvPr id="8" name="角丸四角形 7"/>
+          <p:cNvSpPr/>
+          <p:nvPr/>
+        </p:nvSpPr>
+        <p:spPr>
+          <a:xfrm>
+            <a:off x="204716" y="2272718"/>
+            <a:ext cx="1659768" cy="798253"/>
+          </a:xfrm>
+          <a:prstGeom prst="roundRect">
+            <a:avLst/>
+          </a:prstGeom>
+          <a:solidFill>
+            <a:schemeClr val="accent4">
+              <a:lumMod val="20000"/>
+              <a:lumOff val="80000"/>
+            </a:schemeClr>
+          </a:solidFill>
+        </p:spPr>
+        <p:style>
+          <a:lnRef idx="2">
+            <a:schemeClr val="accent1">
+              <a:shade val="50000"/>
+            </a:schemeClr>
+          </a:lnRef>
+          <a:fillRef idx="1">
+            <a:schemeClr val="accent1"/>
+          </a:fillRef>
+          <a:effectRef idx="0">
+            <a:schemeClr val="accent1"/>
+          </a:effectRef>
+          <a:fontRef idx="minor">
+            <a:schemeClr val="lt1"/>
+          </a:fontRef>
+        </p:style>
+        <p:txBody>
+          <a:bodyPr rtlCol="0" anchor="ctr"/>
+          <a:lstStyle/>
+          <a:p>
+            <a:pPr algn="ctr"/>
+            <a:r>
+              <a:rPr lang="ja-JP" altLang="en-US" sz="1050" b="1" dirty="0">
+                <a:solidFill>
+                  <a:schemeClr val="tx1"/>
+                </a:solidFill>
+                <a:latin typeface="+mn-ea"/>
+              </a:rPr>
+              <a:t>振り返って</a:t>
+            </a:r>
+            <a:endParaRPr lang="en-US" altLang="ja-JP" sz="1050" b="1" dirty="0">
+              <a:solidFill>
+                <a:schemeClr val="tx1"/>
+              </a:solidFill>
+              <a:latin typeface="+mn-ea"/>
+            </a:endParaRPr>
+          </a:p>
+          <a:p>
+            <a:pPr algn="ctr"/>
+            <a:r>
+              <a:rPr lang="ja-JP" altLang="en-US" sz="1050" b="1" dirty="0">
+                <a:solidFill>
+                  <a:schemeClr val="tx1"/>
+                </a:solidFill>
+                <a:latin typeface="+mn-ea"/>
+              </a:rPr>
+              <a:t>次へつなげる</a:t>
+            </a:r>
+          </a:p>
+        </p:txBody>
+      </p:sp>
+      <p:sp>
+        <p:nvSpPr>
+          <p:cNvPr id="9" name="角丸四角形 8"/>
+          <p:cNvSpPr/>
+          <p:nvPr/>
+        </p:nvSpPr>
+        <p:spPr>
+          <a:xfrm>
+            <a:off x="3524251" y="2256369"/>
+            <a:ext cx="1659768" cy="798253"/>
+          </a:xfrm>
+          <a:prstGeom prst="roundRect">
+            <a:avLst/>
+          </a:prstGeom>
+          <a:solidFill>
+            <a:schemeClr val="accent4">
+              <a:lumMod val="20000"/>
+              <a:lumOff val="80000"/>
+            </a:schemeClr>
+          </a:solidFill>
+        </p:spPr>
+        <p:style>
+          <a:lnRef idx="2">
+            <a:schemeClr val="accent1">
+              <a:shade val="50000"/>
+            </a:schemeClr>
+          </a:lnRef>
+          <a:fillRef idx="1">
+            <a:schemeClr val="accent1"/>
+          </a:fillRef>
+          <a:effectRef idx="0">
+            <a:schemeClr val="accent1"/>
+          </a:effectRef>
+          <a:fontRef idx="minor">
+            <a:schemeClr val="lt1"/>
+          </a:fontRef>
+        </p:style>
+        <p:txBody>
+          <a:bodyPr rtlCol="0" anchor="ctr"/>
+          <a:lstStyle/>
+          <a:p>
+            <a:pPr lvl="0" algn="ctr"/>
+            <a:r>
+              <a:rPr lang="ja-JP" altLang="en-US" sz="1050" b="1" dirty="0">
+                <a:solidFill>
+                  <a:schemeClr val="tx1"/>
+                </a:solidFill>
+                <a:latin typeface="+mn-ea"/>
+              </a:rPr>
+              <a:t>見通しを</a:t>
+            </a:r>
+            <a:endParaRPr lang="en-US" altLang="ja-JP" sz="1050" b="1" dirty="0">
+              <a:solidFill>
+                <a:schemeClr val="tx1"/>
+              </a:solidFill>
+              <a:latin typeface="+mn-ea"/>
+            </a:endParaRPr>
+          </a:p>
+          <a:p>
+            <a:pPr lvl="0" algn="ctr"/>
+            <a:r>
+              <a:rPr lang="ja-JP" altLang="en-US" sz="1050" b="1" dirty="0">
+                <a:solidFill>
+                  <a:schemeClr val="tx1"/>
+                </a:solidFill>
+                <a:latin typeface="+mn-ea"/>
+              </a:rPr>
+              <a:t>もつ</a:t>
+            </a:r>
+          </a:p>
+        </p:txBody>
+      </p:sp>
+      <p:sp>
+        <p:nvSpPr>
+          <p:cNvPr id="10" name="角丸四角形 9"/>
+          <p:cNvSpPr/>
+          <p:nvPr/>
+        </p:nvSpPr>
+        <p:spPr>
+          <a:xfrm>
+            <a:off x="665465" y="3869226"/>
+            <a:ext cx="1659768" cy="798253"/>
+          </a:xfrm>
+          <a:prstGeom prst="roundRect">
+            <a:avLst/>
+          </a:prstGeom>
+          <a:solidFill>
+            <a:schemeClr val="accent4">
+              <a:lumMod val="20000"/>
+              <a:lumOff val="80000"/>
+            </a:schemeClr>
+          </a:solidFill>
+        </p:spPr>
+        <p:style>
+          <a:lnRef idx="2">
+            <a:schemeClr val="accent1">
+              <a:shade val="50000"/>
+            </a:schemeClr>
+          </a:lnRef>
+          <a:fillRef idx="1">
+            <a:schemeClr val="accent1"/>
+          </a:fillRef>
+          <a:effectRef idx="0">
+            <a:schemeClr val="accent1"/>
+          </a:effectRef>
+          <a:fontRef idx="minor">
+            <a:schemeClr val="lt1"/>
+          </a:fontRef>
+        </p:style>
+        <p:txBody>
+          <a:bodyPr rtlCol="0" anchor="ctr"/>
+          <a:lstStyle/>
+          <a:p>
+            <a:pPr lvl="0" algn="ctr"/>
+            <a:r>
+              <a:rPr lang="ja-JP" altLang="en-US" sz="1050" b="1" dirty="0">
+                <a:solidFill>
+                  <a:schemeClr val="tx1"/>
+                </a:solidFill>
+                <a:latin typeface="+mn-ea"/>
+              </a:rPr>
+              <a:t>粘り強く</a:t>
+            </a:r>
+            <a:endParaRPr lang="en-US" altLang="ja-JP" sz="1050" b="1" dirty="0">
+              <a:solidFill>
+                <a:schemeClr val="tx1"/>
+              </a:solidFill>
+              <a:latin typeface="+mn-ea"/>
+            </a:endParaRPr>
+          </a:p>
+          <a:p>
+            <a:pPr lvl="0" algn="ctr"/>
+            <a:r>
+              <a:rPr lang="ja-JP" altLang="en-US" sz="1050" b="1" dirty="0">
+                <a:solidFill>
+                  <a:schemeClr val="tx1"/>
+                </a:solidFill>
+                <a:latin typeface="+mn-ea"/>
+              </a:rPr>
+              <a:t>取り組む</a:t>
+            </a:r>
+          </a:p>
+        </p:txBody>
+      </p:sp>
+      <p:sp>
+        <p:nvSpPr>
+          <p:cNvPr id="11" name="角丸四角形 10"/>
+          <p:cNvSpPr/>
+          <p:nvPr/>
+        </p:nvSpPr>
+        <p:spPr>
+          <a:xfrm>
+            <a:off x="3004347" y="3869226"/>
+            <a:ext cx="1659768" cy="798253"/>
+          </a:xfrm>
+          <a:prstGeom prst="roundRect">
+            <a:avLst/>
+          </a:prstGeom>
+          <a:solidFill>
+            <a:schemeClr val="accent4">
+              <a:lumMod val="20000"/>
+              <a:lumOff val="80000"/>
+            </a:schemeClr>
+          </a:solidFill>
+        </p:spPr>
+        <p:style>
+          <a:lnRef idx="2">
+            <a:schemeClr val="accent1">
+              <a:shade val="50000"/>
+            </a:schemeClr>
+          </a:lnRef>
+          <a:fillRef idx="1">
+            <a:schemeClr val="accent1"/>
+          </a:fillRef>
+          <a:effectRef idx="0">
+            <a:schemeClr val="accent1"/>
+          </a:effectRef>
+          <a:fontRef idx="minor">
+            <a:schemeClr val="lt1"/>
+          </a:fontRef>
+        </p:style>
+        <p:txBody>
+          <a:bodyPr rtlCol="0" anchor="ctr"/>
+          <a:lstStyle/>
+          <a:p>
+            <a:pPr lvl="0" algn="ctr"/>
+            <a:r>
+              <a:rPr lang="ja-JP" altLang="en-US" sz="1050" b="1" dirty="0">
+                <a:solidFill>
+                  <a:schemeClr val="tx1"/>
+                </a:solidFill>
+                <a:latin typeface="+mn-ea"/>
+              </a:rPr>
+              <a:t>自分と</a:t>
+            </a:r>
+            <a:endParaRPr lang="en-US" altLang="ja-JP" sz="1050" b="1" dirty="0">
+              <a:solidFill>
+                <a:schemeClr val="tx1"/>
+              </a:solidFill>
+              <a:latin typeface="+mn-ea"/>
+            </a:endParaRPr>
+          </a:p>
+          <a:p>
+            <a:pPr lvl="0" algn="ctr"/>
+            <a:r>
+              <a:rPr lang="ja-JP" altLang="en-US" sz="1050" b="1" dirty="0">
+                <a:solidFill>
+                  <a:schemeClr val="tx1"/>
+                </a:solidFill>
+                <a:latin typeface="+mn-ea"/>
+              </a:rPr>
+              <a:t>結び付ける</a:t>
+            </a:r>
+          </a:p>
+        </p:txBody>
+      </p:sp>
+      <p:sp>
+        <p:nvSpPr>
+          <p:cNvPr id="12" name="正方形/長方形 11"/>
+          <p:cNvSpPr/>
+          <p:nvPr/>
+        </p:nvSpPr>
+        <p:spPr>
+          <a:xfrm>
+            <a:off x="1966414" y="2256357"/>
+            <a:ext cx="1455930" cy="1461895"/>
+          </a:xfrm>
+          <a:prstGeom prst="rect">
+            <a:avLst/>
+          </a:prstGeom>
+          <a:noFill/>
+          <a:ln>
+            <a:noFill/>
+          </a:ln>
+        </p:spPr>
+        <p:style>
+          <a:lnRef idx="2">
+            <a:schemeClr val="accent6"/>
+          </a:lnRef>
+          <a:fillRef idx="1">
+            <a:schemeClr val="lt1"/>
+          </a:fillRef>
+          <a:effectRef idx="0">
+            <a:schemeClr val="accent6"/>
+          </a:effectRef>
+          <a:fontRef idx="minor">
+            <a:schemeClr val="dk1"/>
+          </a:fontRef>
+        </p:style>
+        <p:txBody>
+          <a:bodyPr rtlCol="0" anchor="ctr"/>
+          <a:lstStyle/>
+          <a:p>
+            <a:pPr algn="ctr"/>
+            <a:r>
+              <a:rPr lang="ja-JP" altLang="en-US" sz="1800" b="1" dirty="0"/>
+              <a:t>学んだ</a:t>
+            </a:r>
+            <a:endParaRPr lang="en-US" altLang="ja-JP" sz="1800" b="1" dirty="0"/>
+          </a:p>
+          <a:p>
+            <a:pPr algn="ctr"/>
+            <a:r>
+              <a:rPr lang="ja-JP" altLang="en-US" sz="1800" b="1" dirty="0"/>
+              <a:t>手応えの積み重ね</a:t>
+            </a:r>
+          </a:p>
+        </p:txBody>
+      </p:sp>
+      <p:sp>
+        <p:nvSpPr>
+          <p:cNvPr id="13" name="右矢印 12"/>
+          <p:cNvSpPr/>
+          <p:nvPr/>
+        </p:nvSpPr>
+        <p:spPr>
+          <a:xfrm>
+            <a:off x="5019455" y="2957494"/>
+            <a:ext cx="1397567" cy="1008859"/>
+          </a:xfrm>
+          <a:prstGeom prst="rightArrow">
+            <a:avLst/>
+          </a:prstGeom>
+          <a:solidFill>
+            <a:schemeClr val="accent1">
+              <a:lumMod val="50000"/>
+            </a:schemeClr>
+          </a:solidFill>
+        </p:spPr>
+        <p:style>
+          <a:lnRef idx="2">
+            <a:schemeClr val="accent1">
+              <a:shade val="50000"/>
+            </a:schemeClr>
+          </a:lnRef>
+          <a:fillRef idx="1">
+            <a:schemeClr val="accent1"/>
+          </a:fillRef>
+          <a:effectRef idx="0">
+            <a:schemeClr val="accent1"/>
+          </a:effectRef>
+          <a:fontRef idx="minor">
+            <a:schemeClr val="lt1"/>
+          </a:fontRef>
+        </p:style>
+        <p:txBody>
+          <a:bodyPr rtlCol="0" anchor="ctr"/>
+          <a:lstStyle/>
+          <a:p>
+            <a:pPr algn="ctr"/>
+            <a:endParaRPr lang="ja-JP" altLang="en-US" sz="1050"/>
+          </a:p>
+        </p:txBody>
+      </p:sp>
+      <p:pic>
+        <p:nvPicPr>
+          <p:cNvPr id="18" name="図 17"/>
+          <p:cNvPicPr>
+            <a:picLocks noChangeAspect="1"/>
+          </p:cNvPicPr>
+          <p:nvPr/>
+        </p:nvPicPr>
+        <p:blipFill>
+          <a:blip r:embed="rId2"/>
+          <a:stretch>
+            <a:fillRect/>
+          </a:stretch>
+        </p:blipFill>
+        <p:spPr>
+          <a:xfrm>
+            <a:off x="6417022" y="1849402"/>
+            <a:ext cx="1660874" cy="2961434"/>
+          </a:xfrm>
+          <a:prstGeom prst="rect">
+            <a:avLst/>
+          </a:prstGeom>
+        </p:spPr>
+      </p:pic>
+      <p:sp>
+        <p:nvSpPr>
+          <p:cNvPr id="4" name="正方形/長方形 3">
+            <a:extLst>
+              <a:ext uri="{FF2B5EF4-FFF2-40B4-BE49-F238E27FC236}">
+                <a16:creationId xmlns:a16="http://schemas.microsoft.com/office/drawing/2014/main" id="{742EFCCB-E74E-F28C-C7FC-A70CD29D787D}"/>
+              </a:ext>
+            </a:extLst>
+          </p:cNvPr>
+          <p:cNvSpPr/>
+          <p:nvPr/>
+        </p:nvSpPr>
+        <p:spPr>
+          <a:xfrm>
+            <a:off x="0" y="0"/>
+            <a:ext cx="9144000" cy="613963"/>
+          </a:xfrm>
+          <a:prstGeom prst="rect">
+            <a:avLst/>
+          </a:prstGeom>
+          <a:solidFill>
+            <a:srgbClr val="5B9BD5"/>
+          </a:solidFill>
+          <a:ln>
+            <a:solidFill>
+              <a:schemeClr val="tx2">
+                <a:lumMod val="40000"/>
+                <a:lumOff val="60000"/>
+              </a:schemeClr>
+            </a:solidFill>
+          </a:ln>
+        </p:spPr>
+        <p:style>
+          <a:lnRef idx="2">
+            <a:schemeClr val="dk1"/>
+          </a:lnRef>
+          <a:fillRef idx="1">
+            <a:schemeClr val="lt1"/>
+          </a:fillRef>
+          <a:effectRef idx="0">
+            <a:schemeClr val="dk1"/>
+          </a:effectRef>
+          <a:fontRef idx="minor">
+            <a:schemeClr val="dk1"/>
+          </a:fontRef>
+        </p:style>
+        <p:txBody>
+          <a:bodyPr rtlCol="0" anchor="ctr"/>
+          <a:lstStyle/>
+          <a:p>
+            <a:r>
+              <a:rPr lang="ja-JP" altLang="en-US" sz="4000" b="1" dirty="0">
+                <a:solidFill>
+                  <a:schemeClr val="bg1"/>
+                </a:solidFill>
+                <a:latin typeface="メイリオ"/>
+                <a:ea typeface="メイリオ"/>
+                <a:cs typeface="メイリオ"/>
+              </a:rPr>
+              <a:t>　３・４校時の授業について　</a:t>
+            </a:r>
+            <a:endParaRPr lang="en-US" altLang="ja-JP" sz="3200" b="1" dirty="0">
+              <a:solidFill>
+                <a:schemeClr val="bg1"/>
+              </a:solidFill>
+            </a:endParaRPr>
+          </a:p>
+        </p:txBody>
+      </p:sp>
+      <p:sp>
+        <p:nvSpPr>
+          <p:cNvPr id="14" name="テキスト ボックス 13">
+            <a:extLst>
+              <a:ext uri="{FF2B5EF4-FFF2-40B4-BE49-F238E27FC236}">
+                <a16:creationId xmlns:a16="http://schemas.microsoft.com/office/drawing/2014/main" id="{2A1B9791-74B7-213E-9620-0883BECAEAAA}"/>
+              </a:ext>
+            </a:extLst>
+          </p:cNvPr>
+          <p:cNvSpPr txBox="1"/>
+          <p:nvPr/>
+        </p:nvSpPr>
+        <p:spPr>
+          <a:xfrm>
+            <a:off x="4452424" y="709560"/>
+            <a:ext cx="4586068" cy="1169551"/>
+          </a:xfrm>
+          <a:prstGeom prst="rect">
+            <a:avLst/>
+          </a:prstGeom>
+          <a:noFill/>
+        </p:spPr>
+        <p:txBody>
+          <a:bodyPr wrap="square">
+            <a:spAutoFit/>
+          </a:bodyPr>
+          <a:lstStyle/>
+          <a:p>
+            <a:pPr>
+              <a:buNone/>
+            </a:pPr>
+            <a:r>
+              <a:rPr lang="ja-JP" altLang="ja-JP" sz="1400" kern="100" dirty="0">
+                <a:effectLst/>
+                <a:latin typeface="ＭＳ 明朝" panose="02020609040205080304" pitchFamily="17" charset="-128"/>
+                <a:ea typeface="ＭＳ 明朝" panose="02020609040205080304" pitchFamily="17" charset="-128"/>
+                <a:cs typeface="Times New Roman" panose="02020603050405020304" pitchFamily="18" charset="0"/>
+              </a:rPr>
+              <a:t>文部科学省の資料では、主体的な学びについて「学ぶことに興味や関心を持ち、自己のキャリア形成や日々の生活、社会の課題と関連付けながら、見通しを持って粘り強く取り組み、自己の学習活動を振り返って次につなげること」とされています。</a:t>
+            </a:r>
+          </a:p>
+        </p:txBody>
+      </p:sp>
+    </p:spTree>
+    <p:extLst>
+      <p:ext uri="{BB962C8B-B14F-4D97-AF65-F5344CB8AC3E}">
+        <p14:creationId xmlns:p14="http://schemas.microsoft.com/office/powerpoint/2010/main" val="1324583746"/>
+      </p:ext>
+    </p:extLst>
+  </p:cSld>
+  <p:clrMapOvr>
+    <a:masterClrMapping/>
+  </p:clrMapOvr>
+  <p:timing>
+    <p:tnLst>
+      <p:par>
+        <p:cTn id="1" dur="indefinite" restart="never" nodeType="tmRoot">
+          <p:childTnLst>
+            <p:seq concurrent="1" nextAc="seek">
+              <p:cTn id="2" dur="indefinite" nodeType="mainSeq">
+                <p:childTnLst>
+                  <p:par>
+                    <p:cTn id="3" fill="hold">
+                      <p:stCondLst>
+                        <p:cond delay="indefinite"/>
+                      </p:stCondLst>
+                      <p:childTnLst>
+                        <p:par>
+                          <p:cTn id="4" fill="hold">
+                            <p:stCondLst>
+                              <p:cond delay="0"/>
+                            </p:stCondLst>
+                            <p:childTnLst>
+                              <p:par>
+                                <p:cTn id="5" presetID="1" presetClass="entr" presetSubtype="0" fill="hold" grpId="0" nodeType="clickEffect">
+                                  <p:stCondLst>
+                                    <p:cond delay="0"/>
+                                  </p:stCondLst>
+                                  <p:childTnLst>
+                                    <p:set>
+                                      <p:cBhvr>
+                                        <p:cTn id="6" dur="1" fill="hold">
+                                          <p:stCondLst>
+                                            <p:cond delay="0"/>
+                                          </p:stCondLst>
+                                        </p:cTn>
+                                        <p:tgtEl>
+                                          <p:spTgt spid="7"/>
+                                        </p:tgtEl>
+                                        <p:attrNameLst>
+                                          <p:attrName>style.visibility</p:attrName>
+                                        </p:attrNameLst>
+                                      </p:cBhvr>
+                                      <p:to>
+                                        <p:strVal val="visible"/>
+                                      </p:to>
+                                    </p:set>
+                                  </p:childTnLst>
+                                </p:cTn>
+                              </p:par>
+                              <p:par>
+                                <p:cTn id="7" presetID="1" presetClass="entr" presetSubtype="0" fill="hold" grpId="0" nodeType="withEffect">
+                                  <p:stCondLst>
+                                    <p:cond delay="0"/>
+                                  </p:stCondLst>
+                                  <p:childTnLst>
+                                    <p:set>
+                                      <p:cBhvr>
+                                        <p:cTn id="8" dur="1" fill="hold">
+                                          <p:stCondLst>
+                                            <p:cond delay="0"/>
+                                          </p:stCondLst>
+                                        </p:cTn>
+                                        <p:tgtEl>
+                                          <p:spTgt spid="9"/>
+                                        </p:tgtEl>
+                                        <p:attrNameLst>
+                                          <p:attrName>style.visibility</p:attrName>
+                                        </p:attrNameLst>
+                                      </p:cBhvr>
+                                      <p:to>
+                                        <p:strVal val="visible"/>
+                                      </p:to>
+                                    </p:set>
+                                  </p:childTnLst>
+                                </p:cTn>
+                              </p:par>
+                              <p:par>
+                                <p:cTn id="9" presetID="1" presetClass="entr" presetSubtype="0" fill="hold" grpId="0" nodeType="withEffect">
+                                  <p:stCondLst>
+                                    <p:cond delay="0"/>
+                                  </p:stCondLst>
+                                  <p:childTnLst>
+                                    <p:set>
+                                      <p:cBhvr>
+                                        <p:cTn id="10" dur="1" fill="hold">
+                                          <p:stCondLst>
+                                            <p:cond delay="0"/>
+                                          </p:stCondLst>
+                                        </p:cTn>
+                                        <p:tgtEl>
+                                          <p:spTgt spid="11"/>
+                                        </p:tgtEl>
+                                        <p:attrNameLst>
+                                          <p:attrName>style.visibility</p:attrName>
+                                        </p:attrNameLst>
+                                      </p:cBhvr>
+                                      <p:to>
+                                        <p:strVal val="visible"/>
+                                      </p:to>
+                                    </p:set>
+                                  </p:childTnLst>
+                                </p:cTn>
+                              </p:par>
+                              <p:par>
+                                <p:cTn id="11" presetID="1" presetClass="entr" presetSubtype="0" fill="hold" grpId="0" nodeType="withEffect">
+                                  <p:stCondLst>
+                                    <p:cond delay="0"/>
+                                  </p:stCondLst>
+                                  <p:childTnLst>
+                                    <p:set>
+                                      <p:cBhvr>
+                                        <p:cTn id="12" dur="1" fill="hold">
+                                          <p:stCondLst>
+                                            <p:cond delay="0"/>
+                                          </p:stCondLst>
+                                        </p:cTn>
+                                        <p:tgtEl>
+                                          <p:spTgt spid="10"/>
+                                        </p:tgtEl>
+                                        <p:attrNameLst>
+                                          <p:attrName>style.visibility</p:attrName>
+                                        </p:attrNameLst>
+                                      </p:cBhvr>
+                                      <p:to>
+                                        <p:strVal val="visible"/>
+                                      </p:to>
+                                    </p:set>
+                                  </p:childTnLst>
+                                </p:cTn>
+                              </p:par>
+                              <p:par>
+                                <p:cTn id="13" presetID="1" presetClass="entr" presetSubtype="0" fill="hold" grpId="0" nodeType="withEffect">
+                                  <p:stCondLst>
+                                    <p:cond delay="0"/>
+                                  </p:stCondLst>
+                                  <p:childTnLst>
+                                    <p:set>
+                                      <p:cBhvr>
+                                        <p:cTn id="14" dur="1" fill="hold">
+                                          <p:stCondLst>
+                                            <p:cond delay="0"/>
+                                          </p:stCondLst>
+                                        </p:cTn>
+                                        <p:tgtEl>
+                                          <p:spTgt spid="8"/>
+                                        </p:tgtEl>
+                                        <p:attrNameLst>
+                                          <p:attrName>style.visibility</p:attrName>
+                                        </p:attrNameLst>
+                                      </p:cBhvr>
+                                      <p:to>
+                                        <p:strVal val="visible"/>
+                                      </p:to>
+                                    </p:set>
+                                  </p:childTnLst>
+                                </p:cTn>
+                              </p:par>
+                              <p:par>
+                                <p:cTn id="15" presetID="1" presetClass="entr" presetSubtype="0" fill="hold" grpId="0" nodeType="withEffect">
+                                  <p:stCondLst>
+                                    <p:cond delay="0"/>
+                                  </p:stCondLst>
+                                  <p:childTnLst>
+                                    <p:set>
+                                      <p:cBhvr>
+                                        <p:cTn id="16" dur="1" fill="hold">
+                                          <p:stCondLst>
+                                            <p:cond delay="0"/>
+                                          </p:stCondLst>
+                                        </p:cTn>
+                                        <p:tgtEl>
+                                          <p:spTgt spid="12"/>
+                                        </p:tgtEl>
+                                        <p:attrNameLst>
+                                          <p:attrName>style.visibility</p:attrName>
+                                        </p:attrNameLst>
+                                      </p:cBhvr>
+                                      <p:to>
+                                        <p:strVal val="visible"/>
+                                      </p:to>
+                                    </p:set>
+                                  </p:childTnLst>
+                                </p:cTn>
+                              </p:par>
+                            </p:childTnLst>
+                          </p:cTn>
+                        </p:par>
+                      </p:childTnLst>
+                    </p:cTn>
+                  </p:par>
+                  <p:par>
+                    <p:cTn id="17" fill="hold">
+                      <p:stCondLst>
+                        <p:cond delay="indefinite"/>
+                      </p:stCondLst>
+                      <p:childTnLst>
+                        <p:par>
+                          <p:cTn id="18" fill="hold">
+                            <p:stCondLst>
+                              <p:cond delay="0"/>
+                            </p:stCondLst>
+                            <p:childTnLst>
+                              <p:par>
+                                <p:cTn id="19" presetID="1" presetClass="entr" presetSubtype="0" fill="hold" grpId="0" nodeType="clickEffect">
+                                  <p:stCondLst>
+                                    <p:cond delay="0"/>
+                                  </p:stCondLst>
+                                  <p:childTnLst>
+                                    <p:set>
+                                      <p:cBhvr>
+                                        <p:cTn id="20" dur="1" fill="hold">
+                                          <p:stCondLst>
+                                            <p:cond delay="0"/>
+                                          </p:stCondLst>
+                                        </p:cTn>
+                                        <p:tgtEl>
+                                          <p:spTgt spid="13"/>
+                                        </p:tgtEl>
+                                        <p:attrNameLst>
+                                          <p:attrName>style.visibility</p:attrName>
+                                        </p:attrNameLst>
+                                      </p:cBhvr>
+                                      <p:to>
+                                        <p:strVal val="visible"/>
+                                      </p:to>
+                                    </p:set>
+                                  </p:childTnLst>
+                                </p:cTn>
+                              </p:par>
+                              <p:par>
+                                <p:cTn id="21" presetID="1" presetClass="entr" presetSubtype="0" fill="hold" nodeType="withEffect">
+                                  <p:stCondLst>
+                                    <p:cond delay="0"/>
+                                  </p:stCondLst>
+                                  <p:childTnLst>
+                                    <p:set>
+                                      <p:cBhvr>
+                                        <p:cTn id="22" dur="1" fill="hold">
+                                          <p:stCondLst>
+                                            <p:cond delay="0"/>
+                                          </p:stCondLst>
+                                        </p:cTn>
+                                        <p:tgtEl>
+                                          <p:spTgt spid="18"/>
+                                        </p:tgtEl>
+                                        <p:attrNameLst>
+                                          <p:attrName>style.visibility</p:attrName>
+                                        </p:attrNameLst>
+                                      </p:cBhvr>
+                                      <p:to>
+                                        <p:strVal val="visible"/>
+                                      </p:to>
+                                    </p:set>
+                                  </p:childTnLst>
+                                </p:cTn>
+                              </p:par>
+                            </p:childTnLst>
+                          </p:cTn>
+                        </p:par>
+                      </p:childTnLst>
+                    </p:cTn>
+                  </p:par>
+                </p:childTnLst>
+              </p:cTn>
+              <p:prevCondLst>
+                <p:cond evt="onPrev" delay="0">
+                  <p:tgtEl>
+                    <p:sldTgt/>
+                  </p:tgtEl>
+                </p:cond>
+              </p:prevCondLst>
+              <p:nextCondLst>
+                <p:cond evt="onNext" delay="0">
+                  <p:tgtEl>
+                    <p:sldTgt/>
+                  </p:tgtEl>
+                </p:cond>
+              </p:nextCondLst>
+            </p:seq>
+          </p:childTnLst>
+        </p:cTn>
+      </p:par>
+    </p:tnLst>
+    <p:bldLst>
+      <p:bldP spid="7" grpId="0" animBg="1"/>
+      <p:bldP spid="8" grpId="0" animBg="1"/>
+      <p:bldP spid="9" grpId="0" animBg="1"/>
+      <p:bldP spid="10" grpId="0" animBg="1"/>
+      <p:bldP spid="11" grpId="0" animBg="1"/>
+      <p:bldP spid="12" grpId="0"/>
+      <p:bldP spid="13" grpId="0" animBg="1"/>
+    </p:bldLst>
+  </p:timing>
+</p:sld>
+</file>
+
+<file path=ppt/slides/slide6.xml><?xml version="1.0" encoding="utf-8"?>
+<p:sld xmlns:a="http://schemas.openxmlformats.org/drawingml/2006/main" xmlns:r="http://schemas.openxmlformats.org/officeDocument/2006/relationships" xmlns:p="http://schemas.openxmlformats.org/presentationml/2006/main">
+  <p:cSld>
+    <p:spTree>
+      <p:nvGrpSpPr>
         <p:cNvPr id="1" name="">
           <a:extLst>
             <a:ext uri="{FF2B5EF4-FFF2-40B4-BE49-F238E27FC236}">
-              <a16:creationId xmlns:a16="http://schemas.microsoft.com/office/drawing/2014/main" id="{5435304E-5B76-C7D3-FF30-435E1F2E4498}"/>
+              <a16:creationId xmlns:a16="http://schemas.microsoft.com/office/drawing/2014/main" id="{EE7ACCFB-11A9-A167-FC3C-2B1CFB996FEC}"/>
             </a:ext>
           </a:extLst>
         </p:cNvPr>
@@ -8080,7 +12597,7 @@
           <p:cNvPr id="8" name="正方形/長方形 7">
             <a:extLst>
               <a:ext uri="{FF2B5EF4-FFF2-40B4-BE49-F238E27FC236}">
-                <a16:creationId xmlns:a16="http://schemas.microsoft.com/office/drawing/2014/main" id="{949D3D17-D1C5-E481-ABD6-61E04CC72B25}"/>
+                <a16:creationId xmlns:a16="http://schemas.microsoft.com/office/drawing/2014/main" id="{553072CC-638E-F6B3-3AFC-C1FC2B03597D}"/>
               </a:ext>
             </a:extLst>
           </p:cNvPr>
@@ -8111,7 +12628,7 @@
           <p:cNvPr id="16" name="正方形/長方形 15">
             <a:extLst>
               <a:ext uri="{FF2B5EF4-FFF2-40B4-BE49-F238E27FC236}">
-                <a16:creationId xmlns:a16="http://schemas.microsoft.com/office/drawing/2014/main" id="{3C1E4B49-1192-695F-8291-48C66874AC46}"/>
+                <a16:creationId xmlns:a16="http://schemas.microsoft.com/office/drawing/2014/main" id="{5754C457-EAA5-6979-2193-2CF285EC2BD5}"/>
               </a:ext>
             </a:extLst>
           </p:cNvPr>
@@ -8165,18 +12682,7 @@
                 <a:ea typeface="メイリオ"/>
                 <a:cs typeface="メイリオ"/>
               </a:rPr>
-              <a:t>　</a:t>
-            </a:r>
-            <a:r>
-              <a:rPr lang="ja-JP" altLang="en-US" sz="4000" b="1" dirty="0">
-                <a:solidFill>
-                  <a:schemeClr val="bg1"/>
-                </a:solidFill>
-                <a:latin typeface="メイリオ"/>
-                <a:ea typeface="メイリオ"/>
-                <a:cs typeface="メイリオ"/>
-              </a:rPr>
-              <a:t>３・４校時の授業について　②考え</a:t>
+              <a:t>　３・４校時の授業について　</a:t>
             </a:r>
             <a:endParaRPr lang="en-US" altLang="ja-JP" sz="3200" b="1" dirty="0">
               <a:solidFill>
@@ -8191,7 +12697,7 @@
           <p:cNvPr id="9" name="正方形/長方形 8">
             <a:extLst>
               <a:ext uri="{FF2B5EF4-FFF2-40B4-BE49-F238E27FC236}">
-                <a16:creationId xmlns:a16="http://schemas.microsoft.com/office/drawing/2014/main" id="{C871D856-5C1D-8BEB-D3E7-9B8F19D3E72D}"/>
+                <a16:creationId xmlns:a16="http://schemas.microsoft.com/office/drawing/2014/main" id="{7A251EF3-8BF8-CF13-1EDD-BB47337CA447}"/>
               </a:ext>
             </a:extLst>
           </p:cNvPr>
@@ -8200,8 +12706,8 @@
         </p:nvSpPr>
         <p:spPr bwMode="white">
           <a:xfrm>
-            <a:off x="489758" y="822960"/>
-            <a:ext cx="4000000" cy="914400"/>
+            <a:off x="470947" y="970565"/>
+            <a:ext cx="8019225" cy="3507114"/>
           </a:xfrm>
           <a:prstGeom prst="rect">
             <a:avLst/>
@@ -8219,201 +12725,221 @@
           </a:bodyPr>
           <a:lstStyle/>
           <a:p>
-            <a:pPr algn="l"/>
-            <a:r>
-              <a:rPr lang="ja-JP" sz="2200" b="1" dirty="0">
+            <a:pPr>
+              <a:lnSpc>
+                <a:spcPct val="120000"/>
+              </a:lnSpc>
+            </a:pPr>
+            <a:r>
+              <a:rPr lang="ja-JP" altLang="en-US" sz="3000" b="1" dirty="0">
+                <a:solidFill>
+                  <a:schemeClr val="tx1">
+                    <a:lumMod val="65000"/>
+                    <a:lumOff val="35000"/>
+                  </a:schemeClr>
+                </a:solidFill>
                 <a:latin typeface="メイリオ"/>
                 <a:ea typeface="メイリオ"/>
                 <a:cs typeface="メイリオ"/>
               </a:rPr>
-              <a:t>2-1　算数（岩佐）</a:t>
-            </a:r>
-          </a:p>
-          <a:p>
-            <a:pPr algn="l"/>
-            <a:r>
-              <a:rPr lang="ja-JP" sz="1600" b="0" dirty="0">
-                <a:latin typeface="メイリオ"/>
-                <a:ea typeface="メイリオ"/>
+              <a:t>「主体的な学び」の具現に向けた３つの視点</a:t>
+            </a:r>
+            <a:endParaRPr lang="en-US" altLang="ja-JP" sz="3000" b="1" dirty="0">
+              <a:solidFill>
+                <a:schemeClr val="tx1">
+                  <a:lumMod val="65000"/>
+                  <a:lumOff val="35000"/>
+                </a:schemeClr>
+              </a:solidFill>
+              <a:latin typeface="メイリオ" panose="020B0604030504040204" pitchFamily="50" charset="-128"/>
+              <a:ea typeface="メイリオ" panose="020B0604030504040204" pitchFamily="50" charset="-128"/>
+              <a:cs typeface="メイリオ" panose="020B0604030504040204" pitchFamily="50" charset="-128"/>
+            </a:endParaRPr>
+          </a:p>
+          <a:p>
+            <a:pPr>
+              <a:lnSpc>
+                <a:spcPct val="120000"/>
+              </a:lnSpc>
+            </a:pPr>
+            <a:r>
+              <a:rPr lang="ja-JP" altLang="en-US" sz="2600" b="1" dirty="0">
+                <a:solidFill>
+                  <a:schemeClr val="tx1">
+                    <a:lumMod val="65000"/>
+                    <a:lumOff val="35000"/>
+                  </a:schemeClr>
+                </a:solidFill>
+                <a:latin typeface="メイリオ" panose="020B0604030504040204" pitchFamily="50" charset="-128"/>
+                <a:ea typeface="メイリオ" panose="020B0604030504040204" pitchFamily="50" charset="-128"/>
                 <a:cs typeface="メイリオ"/>
               </a:rPr>
-              <a:t>「長さのたんい」</a:t>
-            </a:r>
-          </a:p>
-        </p:txBody>
-      </p:sp>
-      <p:sp>
-        <p:nvSpPr>
-          <p:cNvPr id="2" name="正方形/長方形 1">
-            <a:extLst>
-              <a:ext uri="{FF2B5EF4-FFF2-40B4-BE49-F238E27FC236}">
-                <a16:creationId xmlns:a16="http://schemas.microsoft.com/office/drawing/2014/main" id="{C4539BEB-F3C9-6597-FF8D-13F6493EAAA1}"/>
-              </a:ext>
-            </a:extLst>
-          </p:cNvPr>
-          <p:cNvSpPr/>
-          <p:nvPr/>
-        </p:nvSpPr>
-        <p:spPr bwMode="white">
-          <a:xfrm>
-            <a:off x="4700000" y="822960"/>
-            <a:ext cx="4000000" cy="914400"/>
-          </a:xfrm>
-          <a:prstGeom prst="rect">
-            <a:avLst/>
-          </a:prstGeom>
-          <a:solidFill>
-            <a:schemeClr val="bg1"/>
-          </a:solidFill>
-          <a:ln>
-            <a:noFill/>
-          </a:ln>
-        </p:spPr>
-        <p:txBody>
-          <a:bodyPr wrap="square">
-            <a:spAutoFit/>
-          </a:bodyPr>
-          <a:lstStyle/>
-          <a:p>
-            <a:pPr algn="l"/>
-            <a:r>
-              <a:rPr lang="ja-JP" sz="2200" b="1" dirty="0">
-                <a:latin typeface="メイリオ"/>
-                <a:ea typeface="メイリオ"/>
+              <a:t>①</a:t>
+            </a:r>
+            <a:r>
+              <a:rPr lang="ja-JP" altLang="ja-JP" sz="2600" dirty="0">
+                <a:latin typeface="メイリオ" panose="020B0604030504040204" pitchFamily="50" charset="-128"/>
+                <a:ea typeface="メイリオ" panose="020B0604030504040204" pitchFamily="50" charset="-128"/>
+              </a:rPr>
+              <a:t>【自ら関心をもち、見通しをもつ工夫】</a:t>
+            </a:r>
+            <a:endParaRPr lang="en-US" altLang="ja-JP" sz="2600" dirty="0">
+              <a:latin typeface="メイリオ" panose="020B0604030504040204" pitchFamily="50" charset="-128"/>
+              <a:ea typeface="メイリオ" panose="020B0604030504040204" pitchFamily="50" charset="-128"/>
+            </a:endParaRPr>
+          </a:p>
+          <a:p>
+            <a:pPr>
+              <a:lnSpc>
+                <a:spcPct val="120000"/>
+              </a:lnSpc>
+            </a:pPr>
+            <a:r>
+              <a:rPr lang="ja-JP" altLang="en-US" sz="2600" dirty="0">
+                <a:latin typeface="メイリオ" panose="020B0604030504040204" pitchFamily="50" charset="-128"/>
+                <a:ea typeface="メイリオ" panose="020B0604030504040204" pitchFamily="50" charset="-128"/>
+              </a:rPr>
+              <a:t>　　　　　　　　</a:t>
+            </a:r>
+            <a:r>
+              <a:rPr lang="ja-JP" altLang="ja-JP" sz="2600" dirty="0">
+                <a:latin typeface="メイリオ" panose="020B0604030504040204" pitchFamily="50" charset="-128"/>
+                <a:ea typeface="メイリオ" panose="020B0604030504040204" pitchFamily="50" charset="-128"/>
+              </a:rPr>
+              <a:t>（教材との出会い・課題の設定）</a:t>
+            </a:r>
+            <a:endParaRPr lang="en-US" altLang="ja-JP" sz="2600" dirty="0">
+              <a:latin typeface="メイリオ" panose="020B0604030504040204" pitchFamily="50" charset="-128"/>
+              <a:ea typeface="メイリオ" panose="020B0604030504040204" pitchFamily="50" charset="-128"/>
+            </a:endParaRPr>
+          </a:p>
+          <a:p>
+            <a:pPr>
+              <a:lnSpc>
+                <a:spcPct val="120000"/>
+              </a:lnSpc>
+            </a:pPr>
+            <a:r>
+              <a:rPr lang="ja-JP" altLang="en-US" sz="2600" b="1" dirty="0">
+                <a:solidFill>
+                  <a:schemeClr val="tx1">
+                    <a:lumMod val="65000"/>
+                    <a:lumOff val="35000"/>
+                  </a:schemeClr>
+                </a:solidFill>
+                <a:latin typeface="メイリオ" panose="020B0604030504040204" pitchFamily="50" charset="-128"/>
+                <a:ea typeface="メイリオ" panose="020B0604030504040204" pitchFamily="50" charset="-128"/>
                 <a:cs typeface="メイリオ"/>
               </a:rPr>
-              <a:t>5-3　社会（小松）</a:t>
-            </a:r>
-          </a:p>
-          <a:p>
-            <a:pPr algn="l"/>
-            <a:r>
-              <a:rPr lang="ja-JP" sz="1600" b="0" dirty="0">
-                <a:latin typeface="メイリオ"/>
-                <a:ea typeface="メイリオ"/>
+              <a:t>②</a:t>
+            </a:r>
+            <a:r>
+              <a:rPr lang="ja-JP" altLang="ja-JP" sz="2600" dirty="0">
+                <a:latin typeface="メイリオ" panose="020B0604030504040204" pitchFamily="50" charset="-128"/>
+                <a:ea typeface="メイリオ" panose="020B0604030504040204" pitchFamily="50" charset="-128"/>
+              </a:rPr>
+              <a:t>【考えを深め、自己調整する工夫】</a:t>
+            </a:r>
+            <a:endParaRPr lang="en-US" altLang="ja-JP" sz="2600" dirty="0">
+              <a:latin typeface="メイリオ" panose="020B0604030504040204" pitchFamily="50" charset="-128"/>
+              <a:ea typeface="メイリオ" panose="020B0604030504040204" pitchFamily="50" charset="-128"/>
+            </a:endParaRPr>
+          </a:p>
+          <a:p>
+            <a:pPr>
+              <a:lnSpc>
+                <a:spcPct val="120000"/>
+              </a:lnSpc>
+            </a:pPr>
+            <a:r>
+              <a:rPr lang="ja-JP" altLang="en-US" sz="2600" dirty="0">
+                <a:latin typeface="メイリオ" panose="020B0604030504040204" pitchFamily="50" charset="-128"/>
+                <a:ea typeface="メイリオ" panose="020B0604030504040204" pitchFamily="50" charset="-128"/>
+              </a:rPr>
+              <a:t>　　　　　　　</a:t>
+            </a:r>
+            <a:r>
+              <a:rPr lang="ja-JP" altLang="ja-JP" sz="2600" dirty="0">
+                <a:latin typeface="メイリオ" panose="020B0604030504040204" pitchFamily="50" charset="-128"/>
+                <a:ea typeface="メイリオ" panose="020B0604030504040204" pitchFamily="50" charset="-128"/>
+              </a:rPr>
+              <a:t>（委ねる時間と協働的な問い直し）</a:t>
+            </a:r>
+            <a:endParaRPr lang="en-US" altLang="ja-JP" sz="2600" dirty="0">
+              <a:latin typeface="メイリオ" panose="020B0604030504040204" pitchFamily="50" charset="-128"/>
+              <a:ea typeface="メイリオ" panose="020B0604030504040204" pitchFamily="50" charset="-128"/>
+            </a:endParaRPr>
+          </a:p>
+          <a:p>
+            <a:pPr>
+              <a:lnSpc>
+                <a:spcPct val="120000"/>
+              </a:lnSpc>
+            </a:pPr>
+            <a:r>
+              <a:rPr lang="ja-JP" altLang="en-US" sz="2600" b="1" dirty="0">
+                <a:solidFill>
+                  <a:schemeClr val="tx1">
+                    <a:lumMod val="65000"/>
+                    <a:lumOff val="35000"/>
+                  </a:schemeClr>
+                </a:solidFill>
+                <a:latin typeface="メイリオ" panose="020B0604030504040204" pitchFamily="50" charset="-128"/>
+                <a:ea typeface="メイリオ" panose="020B0604030504040204" pitchFamily="50" charset="-128"/>
                 <a:cs typeface="メイリオ"/>
               </a:rPr>
-              <a:t>「日本の国土とわたしたちのくらし」</a:t>
-            </a:r>
-          </a:p>
-        </p:txBody>
-      </p:sp>
-      <p:sp>
-        <p:nvSpPr>
-          <p:cNvPr id="3" name="正方形/長方形 2">
-            <a:extLst>
-              <a:ext uri="{FF2B5EF4-FFF2-40B4-BE49-F238E27FC236}">
-                <a16:creationId xmlns:a16="http://schemas.microsoft.com/office/drawing/2014/main" id="{BE8968C1-738E-5797-EEAA-8EC7DE30B3AE}"/>
-              </a:ext>
-            </a:extLst>
-          </p:cNvPr>
-          <p:cNvSpPr/>
-          <p:nvPr/>
-        </p:nvSpPr>
-        <p:spPr bwMode="white">
-          <a:xfrm>
-            <a:off x="489758" y="2606040"/>
-            <a:ext cx="4000000" cy="914400"/>
-          </a:xfrm>
-          <a:prstGeom prst="rect">
-            <a:avLst/>
-          </a:prstGeom>
-          <a:solidFill>
-            <a:schemeClr val="bg1"/>
-          </a:solidFill>
-          <a:ln>
-            <a:noFill/>
-          </a:ln>
-        </p:spPr>
-        <p:txBody>
-          <a:bodyPr wrap="square">
-            <a:spAutoFit/>
-          </a:bodyPr>
-          <a:lstStyle/>
-          <a:p>
-            <a:pPr algn="l"/>
-            <a:r>
-              <a:rPr lang="ja-JP" sz="2200" b="1" dirty="0">
-                <a:latin typeface="メイリオ"/>
-                <a:ea typeface="メイリオ"/>
-                <a:cs typeface="メイリオ"/>
-              </a:rPr>
-              <a:t>4-2　国語（工藤）</a:t>
-            </a:r>
-          </a:p>
-          <a:p>
-            <a:pPr algn="l"/>
-            <a:r>
-              <a:rPr lang="ja-JP" sz="1600" b="0" dirty="0">
-                <a:latin typeface="メイリオ"/>
-                <a:ea typeface="メイリオ"/>
-                <a:cs typeface="メイリオ"/>
-              </a:rPr>
-              <a:t>「アップとルーズで伝える」</a:t>
-            </a:r>
-          </a:p>
-        </p:txBody>
-      </p:sp>
-      <p:sp>
-        <p:nvSpPr>
-          <p:cNvPr id="5" name="正方形/長方形 4">
-            <a:extLst>
-              <a:ext uri="{FF2B5EF4-FFF2-40B4-BE49-F238E27FC236}">
-                <a16:creationId xmlns:a16="http://schemas.microsoft.com/office/drawing/2014/main" id="{FD58072C-8A99-B42C-4A03-380C420A0218}"/>
-              </a:ext>
-            </a:extLst>
-          </p:cNvPr>
-          <p:cNvSpPr/>
-          <p:nvPr/>
-        </p:nvSpPr>
-        <p:spPr bwMode="white">
-          <a:xfrm>
-            <a:off x="4700000" y="2606040"/>
-            <a:ext cx="4000000" cy="914400"/>
-          </a:xfrm>
-          <a:prstGeom prst="rect">
-            <a:avLst/>
-          </a:prstGeom>
-          <a:solidFill>
-            <a:schemeClr val="bg1"/>
-          </a:solidFill>
-          <a:ln>
-            <a:noFill/>
-          </a:ln>
-        </p:spPr>
-        <p:txBody>
-          <a:bodyPr wrap="square">
-            <a:spAutoFit/>
-          </a:bodyPr>
-          <a:lstStyle/>
-          <a:p>
-            <a:pPr algn="l"/>
-            <a:r>
-              <a:rPr lang="ja-JP" sz="2200" b="1" dirty="0">
-                <a:latin typeface="メイリオ"/>
-                <a:ea typeface="メイリオ"/>
-                <a:cs typeface="メイリオ"/>
-              </a:rPr>
-              <a:t>6-3　道徳（松田）</a:t>
-            </a:r>
-          </a:p>
-          <a:p>
-            <a:pPr algn="l"/>
-            <a:r>
-              <a:rPr lang="ja-JP" sz="1600" b="0" dirty="0">
-                <a:latin typeface="メイリオ"/>
-                <a:ea typeface="メイリオ"/>
-                <a:cs typeface="メイリオ"/>
-              </a:rPr>
-              <a:t>「子ども会のキャンプ」</a:t>
-            </a:r>
+              <a:t>③</a:t>
+            </a:r>
+            <a:r>
+              <a:rPr lang="ja-JP" altLang="ja-JP" sz="2600" dirty="0">
+                <a:latin typeface="メイリオ" panose="020B0604030504040204" pitchFamily="50" charset="-128"/>
+                <a:ea typeface="メイリオ" panose="020B0604030504040204" pitchFamily="50" charset="-128"/>
+              </a:rPr>
+              <a:t>【学びを振り返り、次への行動へつなげる工夫】</a:t>
+            </a:r>
+            <a:endParaRPr lang="en-US" altLang="ja-JP" sz="2600" dirty="0">
+              <a:latin typeface="メイリオ" panose="020B0604030504040204" pitchFamily="50" charset="-128"/>
+              <a:ea typeface="メイリオ" panose="020B0604030504040204" pitchFamily="50" charset="-128"/>
+            </a:endParaRPr>
+          </a:p>
+          <a:p>
+            <a:pPr>
+              <a:lnSpc>
+                <a:spcPct val="120000"/>
+              </a:lnSpc>
+            </a:pPr>
+            <a:r>
+              <a:rPr lang="ja-JP" altLang="en-US" sz="2600" dirty="0">
+                <a:latin typeface="メイリオ" panose="020B0604030504040204" pitchFamily="50" charset="-128"/>
+                <a:ea typeface="メイリオ" panose="020B0604030504040204" pitchFamily="50" charset="-128"/>
+              </a:rPr>
+              <a:t>　　　　　　　　　　　　</a:t>
+            </a:r>
+            <a:r>
+              <a:rPr lang="ja-JP" altLang="ja-JP" sz="2600" dirty="0">
+                <a:latin typeface="メイリオ" panose="020B0604030504040204" pitchFamily="50" charset="-128"/>
+                <a:ea typeface="メイリオ" panose="020B0604030504040204" pitchFamily="50" charset="-128"/>
+              </a:rPr>
+              <a:t>（変容の自覚と実践化）</a:t>
+            </a:r>
+            <a:endParaRPr lang="en-US" altLang="ja-JP" sz="2600" b="1" dirty="0">
+              <a:solidFill>
+                <a:schemeClr val="tx1">
+                  <a:lumMod val="65000"/>
+                  <a:lumOff val="35000"/>
+                </a:schemeClr>
+              </a:solidFill>
+              <a:latin typeface="メイリオ" panose="020B0604030504040204" pitchFamily="50" charset="-128"/>
+              <a:ea typeface="メイリオ" panose="020B0604030504040204" pitchFamily="50" charset="-128"/>
+              <a:cs typeface="メイリオ" panose="020B0604030504040204" pitchFamily="50" charset="-128"/>
+            </a:endParaRPr>
           </a:p>
         </p:txBody>
       </p:sp>
     </p:spTree>
     <p:extLst>
       <p:ext uri="{BB962C8B-B14F-4D97-AF65-F5344CB8AC3E}">
-        <p14:creationId xmlns:p14="http://schemas.microsoft.com/office/powerpoint/2010/main" val="660057930"/>
+        <p14:creationId xmlns:p14="http://schemas.microsoft.com/office/powerpoint/2010/main" val="3216189916"/>
       </p:ext>
     </p:extLst>
   </p:cSld>
@@ -8423,7 +12949,7 @@
 </p:sld>
 </file>
 
-<file path=ppt/slides/slide6.xml><?xml version="1.0" encoding="utf-8"?>
+<file path=ppt/slides/slide7.xml><?xml version="1.0" encoding="utf-8"?>
 <p:sld xmlns:a="http://schemas.openxmlformats.org/drawingml/2006/main" xmlns:r="http://schemas.openxmlformats.org/officeDocument/2006/relationships" xmlns:p="http://schemas.openxmlformats.org/presentationml/2006/main">
   <p:cSld>
     <p:spTree>
@@ -8431,7 +12957,7 @@
         <p:cNvPr id="1" name="">
           <a:extLst>
             <a:ext uri="{FF2B5EF4-FFF2-40B4-BE49-F238E27FC236}">
-              <a16:creationId xmlns:a16="http://schemas.microsoft.com/office/drawing/2014/main" id="{FE7B42D7-2122-C921-2C93-C06AF6E3DA47}"/>
+              <a16:creationId xmlns:a16="http://schemas.microsoft.com/office/drawing/2014/main" id="{2F5B79F4-05D2-BF79-07BC-ED7DCF574AA9}"/>
             </a:ext>
           </a:extLst>
         </p:cNvPr>
@@ -8451,7 +12977,7 @@
           <p:cNvPr id="8" name="正方形/長方形 7">
             <a:extLst>
               <a:ext uri="{FF2B5EF4-FFF2-40B4-BE49-F238E27FC236}">
-                <a16:creationId xmlns:a16="http://schemas.microsoft.com/office/drawing/2014/main" id="{FD724A89-2580-D591-20FE-044E5BEFBAE5}"/>
+                <a16:creationId xmlns:a16="http://schemas.microsoft.com/office/drawing/2014/main" id="{62D3125A-579A-5C8B-1BAC-E2491CBE01AA}"/>
               </a:ext>
             </a:extLst>
           </p:cNvPr>
@@ -8482,7 +13008,7 @@
           <p:cNvPr id="16" name="正方形/長方形 15">
             <a:extLst>
               <a:ext uri="{FF2B5EF4-FFF2-40B4-BE49-F238E27FC236}">
-                <a16:creationId xmlns:a16="http://schemas.microsoft.com/office/drawing/2014/main" id="{4D9C61A6-0D7D-D7A1-EB3A-F1D29C27CCA7}"/>
+                <a16:creationId xmlns:a16="http://schemas.microsoft.com/office/drawing/2014/main" id="{1D217E0A-F267-CC5F-AAEF-3CC0E0E7BA77}"/>
               </a:ext>
             </a:extLst>
           </p:cNvPr>
@@ -8536,18 +13062,7 @@
                 <a:ea typeface="メイリオ"/>
                 <a:cs typeface="メイリオ"/>
               </a:rPr>
-              <a:t>　</a:t>
-            </a:r>
-            <a:r>
-              <a:rPr lang="ja-JP" altLang="en-US" sz="4000" b="1" dirty="0">
-                <a:solidFill>
-                  <a:schemeClr val="bg1"/>
-                </a:solidFill>
-                <a:latin typeface="メイリオ"/>
-                <a:ea typeface="メイリオ"/>
-                <a:cs typeface="メイリオ"/>
-              </a:rPr>
-              <a:t>３・４校時の授業について　③行動</a:t>
+              <a:t>　３・４校時の授業について　①関心</a:t>
             </a:r>
             <a:endParaRPr lang="en-US" altLang="ja-JP" sz="3200" b="1" dirty="0">
               <a:solidFill>
@@ -8562,7 +13077,7 @@
           <p:cNvPr id="9" name="正方形/長方形 8">
             <a:extLst>
               <a:ext uri="{FF2B5EF4-FFF2-40B4-BE49-F238E27FC236}">
-                <a16:creationId xmlns:a16="http://schemas.microsoft.com/office/drawing/2014/main" id="{C5D3743F-9B80-8301-2727-28B24CEB585F}"/>
+                <a16:creationId xmlns:a16="http://schemas.microsoft.com/office/drawing/2014/main" id="{77876903-AD43-5597-093C-B3A30EBDBD14}"/>
               </a:ext>
             </a:extLst>
           </p:cNvPr>
@@ -8571,8 +13086,8 @@
         </p:nvSpPr>
         <p:spPr bwMode="white">
           <a:xfrm>
-            <a:off x="489758" y="822960"/>
-            <a:ext cx="4000000" cy="914400"/>
+            <a:off x="489758" y="658368"/>
+            <a:ext cx="3628642" cy="749808"/>
           </a:xfrm>
           <a:prstGeom prst="rect">
             <a:avLst/>
@@ -8592,43 +13107,94 @@
           <a:p>
             <a:pPr algn="l"/>
             <a:r>
-              <a:rPr lang="ja-JP" sz="2200" b="1" dirty="0">
+              <a:rPr lang="ja-JP" sz="1800" b="1" dirty="0">
                 <a:latin typeface="メイリオ"/>
                 <a:ea typeface="メイリオ"/>
                 <a:cs typeface="メイリオ"/>
               </a:rPr>
-              <a:t>4-1　社会（三井）</a:t>
+              <a:t>1-全　体育（髙井・菅野・鈴木）</a:t>
             </a:r>
           </a:p>
           <a:p>
             <a:pPr algn="l"/>
             <a:r>
-              <a:rPr lang="ja-JP" sz="1600" b="0" dirty="0">
+              <a:rPr lang="ja-JP" sz="1200" b="0" dirty="0">
                 <a:latin typeface="メイリオ"/>
                 <a:ea typeface="メイリオ"/>
                 <a:cs typeface="メイリオ"/>
               </a:rPr>
-              <a:t>「健康なくらし」</a:t>
-            </a:r>
-          </a:p>
-        </p:txBody>
-      </p:sp>
-      <p:sp>
-        <p:nvSpPr>
-          <p:cNvPr id="2" name="正方形/長方形 1">
+              <a:t>「ボールをなげるのだ！あてるのだ！たおすのだ！」</a:t>
+            </a:r>
+          </a:p>
+        </p:txBody>
+      </p:sp>
+      <p:sp>
+        <p:nvSpPr>
+          <p:cNvPr id="6" name="正方形/長方形 5">
             <a:extLst>
               <a:ext uri="{FF2B5EF4-FFF2-40B4-BE49-F238E27FC236}">
-                <a16:creationId xmlns:a16="http://schemas.microsoft.com/office/drawing/2014/main" id="{6E270405-A8B6-2B0E-EA8E-6FC8C7CBA1D9}"/>
+                <a16:creationId xmlns:a16="http://schemas.microsoft.com/office/drawing/2014/main" id="{085A74E2-1D9E-0368-1A5B-0CDBA4352FC1}"/>
               </a:ext>
             </a:extLst>
           </p:cNvPr>
           <p:cNvSpPr/>
           <p:nvPr/>
         </p:nvSpPr>
+        <p:spPr>
+          <a:xfrm>
+            <a:off x="489758" y="1434268"/>
+            <a:ext cx="3628642" cy="2748932"/>
+          </a:xfrm>
+          <a:prstGeom prst="rect">
+            <a:avLst/>
+          </a:prstGeom>
+        </p:spPr>
+        <p:style>
+          <a:lnRef idx="2">
+            <a:schemeClr val="dk1"/>
+          </a:lnRef>
+          <a:fillRef idx="1">
+            <a:schemeClr val="lt1"/>
+          </a:fillRef>
+          <a:effectRef idx="0">
+            <a:schemeClr val="dk1"/>
+          </a:effectRef>
+          <a:fontRef idx="minor">
+            <a:schemeClr val="dk1"/>
+          </a:fontRef>
+        </p:style>
+        <p:txBody>
+          <a:bodyPr rtlCol="0" anchor="ctr"/>
+          <a:lstStyle/>
+          <a:p>
+            <a:pPr algn="ctr"/>
+            <a:r>
+              <a:rPr kumimoji="1" lang="ja-JP" altLang="en-US" sz="3200" dirty="0">
+                <a:latin typeface="メイリオ"/>
+                <a:ea typeface="メイリオ"/>
+                <a:cs typeface="メイリオ"/>
+              </a:rPr>
+              <a:t>写真</a:t>
+            </a:r>
+          </a:p>
+        </p:txBody>
+      </p:sp>
+      <p:sp>
+        <p:nvSpPr>
+          <p:cNvPr id="7" name="正方形/長方形 6">
+            <a:extLst>
+              <a:ext uri="{FF2B5EF4-FFF2-40B4-BE49-F238E27FC236}">
+                <a16:creationId xmlns:a16="http://schemas.microsoft.com/office/drawing/2014/main" id="{B19BE3AD-40B7-C3E5-338E-DF2FB57229DB}"/>
+              </a:ext>
+            </a:extLst>
+          </p:cNvPr>
+          <p:cNvSpPr/>
+          <p:nvPr/>
+        </p:nvSpPr>
         <p:spPr bwMode="white">
           <a:xfrm>
-            <a:off x="4700000" y="822960"/>
-            <a:ext cx="4000000" cy="914400"/>
+            <a:off x="4983758" y="658368"/>
+            <a:ext cx="3571042" cy="749808"/>
           </a:xfrm>
           <a:prstGeom prst="rect">
             <a:avLst/>
@@ -8653,7 +13219,7 @@
                 <a:ea typeface="メイリオ"/>
                 <a:cs typeface="メイリオ"/>
               </a:rPr>
-              <a:t>5-2　体育（古江）</a:t>
+              <a:t>5-1　図工（鈴木 寛明）</a:t>
             </a:r>
           </a:p>
           <a:p>
@@ -8664,27 +13230,78 @@
                 <a:ea typeface="メイリオ"/>
                 <a:cs typeface="メイリオ"/>
               </a:rPr>
-              <a:t>「ハンドボール」</a:t>
-            </a:r>
-          </a:p>
-        </p:txBody>
-      </p:sp>
-      <p:sp>
-        <p:nvSpPr>
-          <p:cNvPr id="3" name="正方形/長方形 2">
+              <a:t>「オナマエアート」</a:t>
+            </a:r>
+          </a:p>
+        </p:txBody>
+      </p:sp>
+      <p:sp>
+        <p:nvSpPr>
+          <p:cNvPr id="10" name="正方形/長方形 9">
             <a:extLst>
               <a:ext uri="{FF2B5EF4-FFF2-40B4-BE49-F238E27FC236}">
-                <a16:creationId xmlns:a16="http://schemas.microsoft.com/office/drawing/2014/main" id="{41044BF6-66AC-7531-FFD7-AE2565339A18}"/>
+                <a16:creationId xmlns:a16="http://schemas.microsoft.com/office/drawing/2014/main" id="{A280738D-FE28-ADBF-BF48-A9DCFE692FDE}"/>
               </a:ext>
             </a:extLst>
           </p:cNvPr>
           <p:cNvSpPr/>
           <p:nvPr/>
         </p:nvSpPr>
+        <p:spPr>
+          <a:xfrm>
+            <a:off x="4926158" y="1434268"/>
+            <a:ext cx="3628642" cy="2748932"/>
+          </a:xfrm>
+          <a:prstGeom prst="rect">
+            <a:avLst/>
+          </a:prstGeom>
+        </p:spPr>
+        <p:style>
+          <a:lnRef idx="2">
+            <a:schemeClr val="dk1"/>
+          </a:lnRef>
+          <a:fillRef idx="1">
+            <a:schemeClr val="lt1"/>
+          </a:fillRef>
+          <a:effectRef idx="0">
+            <a:schemeClr val="dk1"/>
+          </a:effectRef>
+          <a:fontRef idx="minor">
+            <a:schemeClr val="dk1"/>
+          </a:fontRef>
+        </p:style>
+        <p:txBody>
+          <a:bodyPr rtlCol="0" anchor="ctr"/>
+          <a:lstStyle/>
+          <a:p>
+            <a:pPr algn="ctr"/>
+            <a:r>
+              <a:rPr kumimoji="1" lang="ja-JP" altLang="en-US" sz="3200" dirty="0">
+                <a:latin typeface="メイリオ"/>
+                <a:ea typeface="メイリオ"/>
+                <a:cs typeface="メイリオ"/>
+              </a:rPr>
+              <a:t>写真</a:t>
+            </a:r>
+          </a:p>
+        </p:txBody>
+      </p:sp>
+      <p:sp>
+        <p:nvSpPr>
+          <p:cNvPr id="9" name="正方形/長方形 8">
+            <a:extLst>
+              <a:ext uri="{FF2B5EF4-FFF2-40B4-BE49-F238E27FC236}">
+                <a16:creationId xmlns:a16="http://schemas.microsoft.com/office/drawing/2014/main" id="{77876903-AD43-5597-093C-B3A30EBDBD14}"/>
+              </a:ext>
+            </a:extLst>
+          </p:cNvPr>
+          <p:cNvSpPr/>
+          <p:nvPr/>
+        </p:nvSpPr>
         <p:spPr bwMode="white">
           <a:xfrm>
-            <a:off x="489758" y="2606040"/>
-            <a:ext cx="4000000" cy="914400"/>
+            <a:off x="493776" y="4343400"/>
+            <a:ext cx="8156448" cy="685800"/>
           </a:xfrm>
           <a:prstGeom prst="rect">
             <a:avLst/>
@@ -8704,79 +13321,23 @@
           <a:p>
             <a:pPr algn="l"/>
             <a:r>
-              <a:rPr lang="ja-JP" sz="2200" b="1" dirty="0">
+              <a:rPr lang="ja-JP" sz="2000" b="1" dirty="0">
                 <a:latin typeface="メイリオ"/>
                 <a:ea typeface="メイリオ"/>
                 <a:cs typeface="メイリオ"/>
               </a:rPr>
-              <a:t>6-2　外国語（木下）</a:t>
+              <a:t>5-1　外国語（三宅 真行）</a:t>
             </a:r>
           </a:p>
           <a:p>
             <a:pPr algn="l"/>
             <a:r>
-              <a:rPr lang="ja-JP" sz="1600" b="0" dirty="0">
+              <a:rPr lang="ja-JP" sz="1400" b="0" dirty="0">
                 <a:latin typeface="メイリオ"/>
                 <a:ea typeface="メイリオ"/>
                 <a:cs typeface="メイリオ"/>
               </a:rPr>
-              <a:t>「Welcome to Japan.」</a:t>
-            </a:r>
-          </a:p>
-        </p:txBody>
-      </p:sp>
-      <p:sp>
-        <p:nvSpPr>
-          <p:cNvPr id="5" name="正方形/長方形 4">
-            <a:extLst>
-              <a:ext uri="{FF2B5EF4-FFF2-40B4-BE49-F238E27FC236}">
-                <a16:creationId xmlns:a16="http://schemas.microsoft.com/office/drawing/2014/main" id="{84877F31-44E4-C62E-AC94-341DD920F663}"/>
-              </a:ext>
-            </a:extLst>
-          </p:cNvPr>
-          <p:cNvSpPr/>
-          <p:nvPr/>
-        </p:nvSpPr>
-        <p:spPr bwMode="white">
-          <a:xfrm>
-            <a:off x="4700000" y="2606040"/>
-            <a:ext cx="4000000" cy="914400"/>
-          </a:xfrm>
-          <a:prstGeom prst="rect">
-            <a:avLst/>
-          </a:prstGeom>
-          <a:solidFill>
-            <a:schemeClr val="bg1"/>
-          </a:solidFill>
-          <a:ln>
-            <a:noFill/>
-          </a:ln>
-        </p:spPr>
-        <p:txBody>
-          <a:bodyPr wrap="square">
-            <a:spAutoFit/>
-          </a:bodyPr>
-          <a:lstStyle/>
-          <a:p>
-            <a:pPr algn="l"/>
-            <a:r>
-              <a:rPr lang="ja-JP" sz="2200" b="1" dirty="0">
-                <a:latin typeface="メイリオ"/>
-                <a:ea typeface="メイリオ"/>
-                <a:cs typeface="メイリオ"/>
-              </a:rPr>
-              <a:t>2-2　道徳（中牧）</a:t>
-            </a:r>
-          </a:p>
-          <a:p>
-            <a:pPr algn="l"/>
-            <a:r>
-              <a:rPr lang="ja-JP" sz="1600" b="0" dirty="0">
-                <a:latin typeface="メイリオ"/>
-                <a:ea typeface="メイリオ"/>
-                <a:cs typeface="メイリオ"/>
-              </a:rPr>
-              <a:t>「けんかをしたけど」</a:t>
+              <a:t>Unit２「When is your birthday?」</a:t>
             </a:r>
           </a:p>
         </p:txBody>
@@ -8784,7 +13345,7 @@
     </p:spTree>
     <p:extLst>
       <p:ext uri="{BB962C8B-B14F-4D97-AF65-F5344CB8AC3E}">
-        <p14:creationId xmlns:p14="http://schemas.microsoft.com/office/powerpoint/2010/main" val="255766459"/>
+        <p14:creationId xmlns:p14="http://schemas.microsoft.com/office/powerpoint/2010/main" val="2424294063"/>
       </p:ext>
     </p:extLst>
   </p:cSld>
@@ -8794,7 +13355,7 @@
 </p:sld>
 </file>
 
-<file path=ppt/slides/slide7.xml><?xml version="1.0" encoding="utf-8"?>
+<file path=ppt/slides/slide8.xml><?xml version="1.0" encoding="utf-8"?>
 <p:sld xmlns:a="http://schemas.openxmlformats.org/drawingml/2006/main" xmlns:r="http://schemas.openxmlformats.org/officeDocument/2006/relationships" xmlns:p="http://schemas.openxmlformats.org/presentationml/2006/main">
   <p:cSld>
     <p:spTree>
@@ -8802,7 +13363,7 @@
         <p:cNvPr id="1" name="">
           <a:extLst>
             <a:ext uri="{FF2B5EF4-FFF2-40B4-BE49-F238E27FC236}">
-              <a16:creationId xmlns:a16="http://schemas.microsoft.com/office/drawing/2014/main" id="{00AF3127-9088-B933-F3B3-92060C2A5D61}"/>
+              <a16:creationId xmlns:a16="http://schemas.microsoft.com/office/drawing/2014/main" id="{5435304E-5B76-C7D3-FF30-435E1F2E4498}"/>
             </a:ext>
           </a:extLst>
         </p:cNvPr>
@@ -8822,7 +13383,7 @@
           <p:cNvPr id="8" name="正方形/長方形 7">
             <a:extLst>
               <a:ext uri="{FF2B5EF4-FFF2-40B4-BE49-F238E27FC236}">
-                <a16:creationId xmlns:a16="http://schemas.microsoft.com/office/drawing/2014/main" id="{68A278EE-C276-19D9-FDFA-E4CE17C40DBB}"/>
+                <a16:creationId xmlns:a16="http://schemas.microsoft.com/office/drawing/2014/main" id="{949D3D17-D1C5-E481-ABD6-61E04CC72B25}"/>
               </a:ext>
             </a:extLst>
           </p:cNvPr>
@@ -8853,7 +13414,7 @@
           <p:cNvPr id="16" name="正方形/長方形 15">
             <a:extLst>
               <a:ext uri="{FF2B5EF4-FFF2-40B4-BE49-F238E27FC236}">
-                <a16:creationId xmlns:a16="http://schemas.microsoft.com/office/drawing/2014/main" id="{781A3B47-DC4E-4EA8-7D06-13C72654739F}"/>
+                <a16:creationId xmlns:a16="http://schemas.microsoft.com/office/drawing/2014/main" id="{3C1E4B49-1192-695F-8291-48C66874AC46}"/>
               </a:ext>
             </a:extLst>
           </p:cNvPr>
@@ -8907,18 +13468,7 @@
                 <a:ea typeface="メイリオ"/>
                 <a:cs typeface="メイリオ"/>
               </a:rPr>
-              <a:t>　</a:t>
-            </a:r>
-            <a:r>
-              <a:rPr lang="ja-JP" altLang="en-US" sz="4000" b="1" dirty="0">
-                <a:solidFill>
-                  <a:schemeClr val="bg1"/>
-                </a:solidFill>
-                <a:latin typeface="メイリオ"/>
-                <a:ea typeface="メイリオ"/>
-                <a:cs typeface="メイリオ"/>
-              </a:rPr>
-              <a:t>３・４校時の授業について　</a:t>
+              <a:t>　３・４校時の授業について　②考え</a:t>
             </a:r>
             <a:endParaRPr lang="en-US" altLang="ja-JP" sz="3200" b="1" dirty="0">
               <a:solidFill>
@@ -8933,7 +13483,7 @@
           <p:cNvPr id="9" name="正方形/長方形 8">
             <a:extLst>
               <a:ext uri="{FF2B5EF4-FFF2-40B4-BE49-F238E27FC236}">
-                <a16:creationId xmlns:a16="http://schemas.microsoft.com/office/drawing/2014/main" id="{C91E7600-9230-47CF-B47C-3B1B6F7C35BA}"/>
+                <a16:creationId xmlns:a16="http://schemas.microsoft.com/office/drawing/2014/main" id="{C871D856-5C1D-8BEB-D3E7-9B8F19D3E72D}"/>
               </a:ext>
             </a:extLst>
           </p:cNvPr>
@@ -8942,8 +13492,8 @@
         </p:nvSpPr>
         <p:spPr bwMode="white">
           <a:xfrm>
-            <a:off x="470947" y="970565"/>
-            <a:ext cx="8019225" cy="2723823"/>
+            <a:off x="489758" y="822960"/>
+            <a:ext cx="4000000" cy="914400"/>
           </a:xfrm>
           <a:prstGeom prst="rect">
             <a:avLst/>
@@ -8961,139 +13511,201 @@
           </a:bodyPr>
           <a:lstStyle/>
           <a:p>
-            <a:pPr>
-              <a:lnSpc>
-                <a:spcPct val="120000"/>
-              </a:lnSpc>
-            </a:pPr>
-            <a:r>
-              <a:rPr lang="ja-JP" altLang="en-US" sz="3600" b="1" dirty="0">
-                <a:solidFill>
-                  <a:schemeClr val="tx1">
-                    <a:lumMod val="65000"/>
-                    <a:lumOff val="35000"/>
-                  </a:schemeClr>
-                </a:solidFill>
+            <a:pPr algn="l"/>
+            <a:r>
+              <a:rPr lang="ja-JP" sz="2200" b="1" dirty="0">
                 <a:latin typeface="メイリオ"/>
                 <a:ea typeface="メイリオ"/>
                 <a:cs typeface="メイリオ"/>
               </a:rPr>
-              <a:t>研究主題の具現に向けた３つの視点</a:t>
-            </a:r>
-            <a:endParaRPr lang="en-US" altLang="ja-JP" sz="3600" b="1" dirty="0">
-              <a:solidFill>
-                <a:schemeClr val="tx1">
-                  <a:lumMod val="65000"/>
-                  <a:lumOff val="35000"/>
-                </a:schemeClr>
-              </a:solidFill>
-              <a:latin typeface="メイリオ" panose="020B0604030504040204" pitchFamily="50" charset="-128"/>
-              <a:ea typeface="メイリオ" panose="020B0604030504040204" pitchFamily="50" charset="-128"/>
-              <a:cs typeface="メイリオ" panose="020B0604030504040204" pitchFamily="50" charset="-128"/>
-            </a:endParaRPr>
-          </a:p>
-          <a:p>
-            <a:pPr>
-              <a:lnSpc>
-                <a:spcPct val="120000"/>
-              </a:lnSpc>
-            </a:pPr>
-            <a:r>
-              <a:rPr lang="ja-JP" altLang="en-US" sz="3600" b="1" dirty="0">
-                <a:solidFill>
-                  <a:schemeClr val="tx1">
-                    <a:lumMod val="65000"/>
-                    <a:lumOff val="35000"/>
-                  </a:schemeClr>
-                </a:solidFill>
+              <a:t>2-1　算数（岩佐 沙恵子）</a:t>
+            </a:r>
+          </a:p>
+          <a:p>
+            <a:pPr algn="l"/>
+            <a:r>
+              <a:rPr lang="ja-JP" sz="1600" b="0" dirty="0">
                 <a:latin typeface="メイリオ"/>
                 <a:ea typeface="メイリオ"/>
                 <a:cs typeface="メイリオ"/>
               </a:rPr>
-              <a:t>　①自ら関心をもち（教材との出会い）</a:t>
-            </a:r>
-            <a:endParaRPr lang="en-US" altLang="ja-JP" sz="3600" b="1" dirty="0">
-              <a:solidFill>
-                <a:schemeClr val="tx1">
-                  <a:lumMod val="65000"/>
-                  <a:lumOff val="35000"/>
-                </a:schemeClr>
-              </a:solidFill>
-              <a:latin typeface="メイリオ" panose="020B0604030504040204" pitchFamily="50" charset="-128"/>
-              <a:ea typeface="メイリオ" panose="020B0604030504040204" pitchFamily="50" charset="-128"/>
-              <a:cs typeface="メイリオ" panose="020B0604030504040204" pitchFamily="50" charset="-128"/>
-            </a:endParaRPr>
-          </a:p>
-          <a:p>
-            <a:pPr>
-              <a:lnSpc>
-                <a:spcPct val="120000"/>
-              </a:lnSpc>
-            </a:pPr>
-            <a:r>
-              <a:rPr lang="ja-JP" altLang="en-US" sz="3600" b="1" dirty="0">
-                <a:solidFill>
-                  <a:schemeClr val="tx1">
-                    <a:lumMod val="65000"/>
-                    <a:lumOff val="35000"/>
-                  </a:schemeClr>
-                </a:solidFill>
+              <a:t>「長さのたんい」</a:t>
+            </a:r>
+          </a:p>
+        </p:txBody>
+      </p:sp>
+      <p:sp>
+        <p:nvSpPr>
+          <p:cNvPr id="2" name="正方形/長方形 1">
+            <a:extLst>
+              <a:ext uri="{FF2B5EF4-FFF2-40B4-BE49-F238E27FC236}">
+                <a16:creationId xmlns:a16="http://schemas.microsoft.com/office/drawing/2014/main" id="{C4539BEB-F3C9-6597-FF8D-13F6493EAAA1}"/>
+              </a:ext>
+            </a:extLst>
+          </p:cNvPr>
+          <p:cNvSpPr/>
+          <p:nvPr/>
+        </p:nvSpPr>
+        <p:spPr bwMode="white">
+          <a:xfrm>
+            <a:off x="4700000" y="822960"/>
+            <a:ext cx="4000000" cy="914400"/>
+          </a:xfrm>
+          <a:prstGeom prst="rect">
+            <a:avLst/>
+          </a:prstGeom>
+          <a:solidFill>
+            <a:schemeClr val="bg1"/>
+          </a:solidFill>
+          <a:ln>
+            <a:noFill/>
+          </a:ln>
+        </p:spPr>
+        <p:txBody>
+          <a:bodyPr wrap="square">
+            <a:spAutoFit/>
+          </a:bodyPr>
+          <a:lstStyle/>
+          <a:p>
+            <a:pPr algn="l"/>
+            <a:r>
+              <a:rPr lang="ja-JP" sz="2200" b="1" dirty="0">
                 <a:latin typeface="メイリオ"/>
                 <a:ea typeface="メイリオ"/>
                 <a:cs typeface="メイリオ"/>
               </a:rPr>
-              <a:t>　②考え（委ねる時間と戻る場）</a:t>
-            </a:r>
-            <a:endParaRPr lang="en-US" altLang="ja-JP" sz="3600" b="1" dirty="0">
-              <a:solidFill>
-                <a:schemeClr val="tx1">
-                  <a:lumMod val="65000"/>
-                  <a:lumOff val="35000"/>
-                </a:schemeClr>
-              </a:solidFill>
-              <a:latin typeface="メイリオ" panose="020B0604030504040204" pitchFamily="50" charset="-128"/>
-              <a:ea typeface="メイリオ" panose="020B0604030504040204" pitchFamily="50" charset="-128"/>
-              <a:cs typeface="メイリオ" panose="020B0604030504040204" pitchFamily="50" charset="-128"/>
-            </a:endParaRPr>
-          </a:p>
-          <a:p>
-            <a:pPr>
-              <a:lnSpc>
-                <a:spcPct val="120000"/>
-              </a:lnSpc>
-            </a:pPr>
-            <a:r>
-              <a:rPr lang="ja-JP" altLang="en-US" sz="3600" b="1" dirty="0">
-                <a:solidFill>
-                  <a:schemeClr val="tx1">
-                    <a:lumMod val="65000"/>
-                    <a:lumOff val="35000"/>
-                  </a:schemeClr>
-                </a:solidFill>
+              <a:t>5-3　社会（小松 沙織）</a:t>
+            </a:r>
+          </a:p>
+          <a:p>
+            <a:pPr algn="l"/>
+            <a:r>
+              <a:rPr lang="ja-JP" sz="1400" b="0" dirty="0">
                 <a:latin typeface="メイリオ"/>
                 <a:ea typeface="メイリオ"/>
                 <a:cs typeface="メイリオ"/>
               </a:rPr>
-              <a:t>　③行動しようとする（学びを次へ）</a:t>
-            </a:r>
-            <a:endParaRPr lang="en-US" altLang="ja-JP" sz="3600" b="1" dirty="0">
-              <a:solidFill>
-                <a:schemeClr val="tx1">
-                  <a:lumMod val="65000"/>
-                  <a:lumOff val="35000"/>
-                </a:schemeClr>
-              </a:solidFill>
-              <a:latin typeface="メイリオ" panose="020B0604030504040204" pitchFamily="50" charset="-128"/>
-              <a:ea typeface="メイリオ" panose="020B0604030504040204" pitchFamily="50" charset="-128"/>
-              <a:cs typeface="メイリオ" panose="020B0604030504040204" pitchFamily="50" charset="-128"/>
-            </a:endParaRPr>
+              <a:t>「日本の国土とわたしたちのくらし」</a:t>
+            </a:r>
+          </a:p>
+        </p:txBody>
+      </p:sp>
+      <p:sp>
+        <p:nvSpPr>
+          <p:cNvPr id="3" name="正方形/長方形 2">
+            <a:extLst>
+              <a:ext uri="{FF2B5EF4-FFF2-40B4-BE49-F238E27FC236}">
+                <a16:creationId xmlns:a16="http://schemas.microsoft.com/office/drawing/2014/main" id="{BE8968C1-738E-5797-EEAA-8EC7DE30B3AE}"/>
+              </a:ext>
+            </a:extLst>
+          </p:cNvPr>
+          <p:cNvSpPr/>
+          <p:nvPr/>
+        </p:nvSpPr>
+        <p:spPr bwMode="white">
+          <a:xfrm>
+            <a:off x="489758" y="2606040"/>
+            <a:ext cx="4000000" cy="914400"/>
+          </a:xfrm>
+          <a:prstGeom prst="rect">
+            <a:avLst/>
+          </a:prstGeom>
+          <a:solidFill>
+            <a:schemeClr val="bg1"/>
+          </a:solidFill>
+          <a:ln>
+            <a:noFill/>
+          </a:ln>
+        </p:spPr>
+        <p:txBody>
+          <a:bodyPr wrap="square">
+            <a:spAutoFit/>
+          </a:bodyPr>
+          <a:lstStyle/>
+          <a:p>
+            <a:pPr algn="l"/>
+            <a:r>
+              <a:rPr lang="ja-JP" sz="2200" b="1" dirty="0">
+                <a:latin typeface="メイリオ"/>
+                <a:ea typeface="メイリオ"/>
+                <a:cs typeface="メイリオ"/>
+              </a:rPr>
+              <a:t>4-2　国語（工藤 由利）</a:t>
+            </a:r>
+          </a:p>
+          <a:p>
+            <a:pPr algn="l"/>
+            <a:r>
+              <a:rPr lang="ja-JP" sz="1400" b="0" dirty="0">
+                <a:latin typeface="メイリオ"/>
+                <a:ea typeface="メイリオ"/>
+                <a:cs typeface="メイリオ"/>
+              </a:rPr>
+              <a:t>「筆者の考えをとらえて自分の考えを発表しよう」</a:t>
+            </a:r>
+          </a:p>
+        </p:txBody>
+      </p:sp>
+      <p:sp>
+        <p:nvSpPr>
+          <p:cNvPr id="5" name="正方形/長方形 4">
+            <a:extLst>
+              <a:ext uri="{FF2B5EF4-FFF2-40B4-BE49-F238E27FC236}">
+                <a16:creationId xmlns:a16="http://schemas.microsoft.com/office/drawing/2014/main" id="{FD58072C-8A99-B42C-4A03-380C420A0218}"/>
+              </a:ext>
+            </a:extLst>
+          </p:cNvPr>
+          <p:cNvSpPr/>
+          <p:nvPr/>
+        </p:nvSpPr>
+        <p:spPr bwMode="white">
+          <a:xfrm>
+            <a:off x="4700000" y="2606040"/>
+            <a:ext cx="4000000" cy="914400"/>
+          </a:xfrm>
+          <a:prstGeom prst="rect">
+            <a:avLst/>
+          </a:prstGeom>
+          <a:solidFill>
+            <a:schemeClr val="bg1"/>
+          </a:solidFill>
+          <a:ln>
+            <a:noFill/>
+          </a:ln>
+        </p:spPr>
+        <p:txBody>
+          <a:bodyPr wrap="square">
+            <a:spAutoFit/>
+          </a:bodyPr>
+          <a:lstStyle/>
+          <a:p>
+            <a:pPr algn="l"/>
+            <a:r>
+              <a:rPr lang="ja-JP" sz="2200" b="1" dirty="0">
+                <a:latin typeface="メイリオ"/>
+                <a:ea typeface="メイリオ"/>
+                <a:cs typeface="メイリオ"/>
+              </a:rPr>
+              <a:t>6-3　道徳（松田 容子）</a:t>
+            </a:r>
+          </a:p>
+          <a:p>
+            <a:pPr algn="l"/>
+            <a:r>
+              <a:rPr lang="ja-JP" sz="1600" b="0" dirty="0">
+                <a:latin typeface="メイリオ"/>
+                <a:ea typeface="メイリオ"/>
+                <a:cs typeface="メイリオ"/>
+              </a:rPr>
+              <a:t>「子ども会のキャンプ」</a:t>
+            </a:r>
           </a:p>
         </p:txBody>
       </p:sp>
     </p:spTree>
     <p:extLst>
       <p:ext uri="{BB962C8B-B14F-4D97-AF65-F5344CB8AC3E}">
-        <p14:creationId xmlns:p14="http://schemas.microsoft.com/office/powerpoint/2010/main" val="668909022"/>
+        <p14:creationId xmlns:p14="http://schemas.microsoft.com/office/powerpoint/2010/main" val="660057930"/>
       </p:ext>
     </p:extLst>
   </p:cSld>
@@ -9103,35 +13715,22 @@
 </p:sld>
 </file>
 
-<file path=ppt/slides/slide8.xml><?xml version="1.0" encoding="utf-8"?>
-<p:sld xmlns:a="http://schemas.openxmlformats.org/drawingml/2006/main" xmlns:r="http://schemas.openxmlformats.org/officeDocument/2006/relationships" xmlns:p="http://schemas.openxmlformats.org/presentationml/2006/main">
+<file path=ppt/slides/slide9.xml><?xml version="1.0" encoding="utf-8"?>
+<p:sld xmlns:a="http://schemas.openxmlformats.org/drawingml/2006/main" xmlns:p="http://schemas.openxmlformats.org/presentationml/2006/main" xmlns:r="http://schemas.openxmlformats.org/officeDocument/2006/relationships">
   <p:cSld>
     <p:spTree>
       <p:nvGrpSpPr>
-        <p:cNvPr id="1" name="">
-          <a:extLst>
-            <a:ext uri="{FF2B5EF4-FFF2-40B4-BE49-F238E27FC236}">
-              <a16:creationId xmlns:a16="http://schemas.microsoft.com/office/drawing/2014/main" id="{F42973C5-949A-0B47-375C-47B674A7E0F7}"/>
-            </a:ext>
-          </a:extLst>
-        </p:cNvPr>
+        <p:cNvPr id="1" name=""/>
         <p:cNvGrpSpPr/>
         <p:nvPr/>
       </p:nvGrpSpPr>
-      <p:grpSpPr>
-        <a:xfrm>
-          <a:off x="0" y="0"/>
-          <a:ext cx="0" cy="0"/>
-          <a:chOff x="0" y="0"/>
-          <a:chExt cx="0" cy="0"/>
-        </a:xfrm>
-      </p:grpSpPr>
+      <p:grpSpPr/>
       <p:sp>
         <p:nvSpPr>
           <p:cNvPr id="8" name="正方形/長方形 7">
             <a:extLst>
               <a:ext uri="{FF2B5EF4-FFF2-40B4-BE49-F238E27FC236}">
-                <a16:creationId xmlns:a16="http://schemas.microsoft.com/office/drawing/2014/main" id="{C556DA15-1216-AE2D-19F4-BE0E23E4579F}"/>
+                <a16:creationId xmlns:a16="http://schemas.microsoft.com/office/drawing/2014/main" id="{949D3D17-D1C5-E481-ABD6-61E04CC72B25}"/>
               </a:ext>
             </a:extLst>
           </p:cNvPr>
@@ -9162,7 +13761,7 @@
           <p:cNvPr id="16" name="正方形/長方形 15">
             <a:extLst>
               <a:ext uri="{FF2B5EF4-FFF2-40B4-BE49-F238E27FC236}">
-                <a16:creationId xmlns:a16="http://schemas.microsoft.com/office/drawing/2014/main" id="{1CF88AA8-D5AA-2FFC-B5F9-8677ACCDECF3}"/>
+                <a16:creationId xmlns:a16="http://schemas.microsoft.com/office/drawing/2014/main" id="{3C1E4B49-1192-695F-8291-48C66874AC46}"/>
               </a:ext>
             </a:extLst>
           </p:cNvPr>
@@ -9216,18 +13815,7 @@
                 <a:ea typeface="メイリオ"/>
                 <a:cs typeface="メイリオ"/>
               </a:rPr>
-              <a:t>　</a:t>
-            </a:r>
-            <a:r>
-              <a:rPr lang="ja-JP" altLang="en-US" sz="4000" b="1" dirty="0">
-                <a:solidFill>
-                  <a:schemeClr val="bg1"/>
-                </a:solidFill>
-                <a:latin typeface="メイリオ"/>
-                <a:ea typeface="メイリオ"/>
-                <a:cs typeface="メイリオ"/>
-              </a:rPr>
-              <a:t>３・４校時の授業について　</a:t>
+              <a:t>　３・４校時の授業について　②考え</a:t>
             </a:r>
             <a:endParaRPr lang="en-US" altLang="ja-JP" sz="3200" b="1" dirty="0">
               <a:solidFill>
@@ -9242,7 +13830,7 @@
           <p:cNvPr id="9" name="正方形/長方形 8">
             <a:extLst>
               <a:ext uri="{FF2B5EF4-FFF2-40B4-BE49-F238E27FC236}">
-                <a16:creationId xmlns:a16="http://schemas.microsoft.com/office/drawing/2014/main" id="{E79F7953-85A4-8E6B-482F-C62C34E3940C}"/>
+                <a16:creationId xmlns:a16="http://schemas.microsoft.com/office/drawing/2014/main" id="{C871D856-5C1D-8BEB-D3E7-9B8F19D3E72D}"/>
               </a:ext>
             </a:extLst>
           </p:cNvPr>
@@ -9251,8 +13839,8 @@
         </p:nvSpPr>
         <p:spPr bwMode="white">
           <a:xfrm>
-            <a:off x="562387" y="606813"/>
-            <a:ext cx="8019225" cy="658642"/>
+            <a:off x="274320" y="777240"/>
+            <a:ext cx="8595360" cy="685800"/>
           </a:xfrm>
           <a:prstGeom prst="rect">
             <a:avLst/>
@@ -9270,36 +13858,26 @@
           </a:bodyPr>
           <a:lstStyle/>
           <a:p>
-            <a:pPr>
-              <a:lnSpc>
-                <a:spcPct val="120000"/>
-              </a:lnSpc>
-            </a:pPr>
-            <a:r>
-              <a:rPr lang="ja-JP" altLang="en-US" sz="3200" b="1" dirty="0">
-                <a:solidFill>
-                  <a:schemeClr val="tx1">
-                    <a:lumMod val="65000"/>
-                    <a:lumOff val="35000"/>
-                  </a:schemeClr>
-                </a:solidFill>
+            <a:pPr algn="l"/>
+            <a:r>
+              <a:rPr lang="ja-JP" sz="2200" b="1" dirty="0">
                 <a:latin typeface="メイリオ"/>
                 <a:ea typeface="メイリオ"/>
                 <a:cs typeface="メイリオ"/>
               </a:rPr>
-              <a:t>今後に向けて</a:t>
-            </a:r>
-            <a:endParaRPr lang="en-US" altLang="ja-JP" sz="3200" b="1" dirty="0">
-              <a:solidFill>
-                <a:schemeClr val="tx1">
-                  <a:lumMod val="65000"/>
-                  <a:lumOff val="35000"/>
-                </a:schemeClr>
-              </a:solidFill>
-              <a:latin typeface="メイリオ" panose="020B0604030504040204" pitchFamily="50" charset="-128"/>
-              <a:ea typeface="メイリオ" panose="020B0604030504040204" pitchFamily="50" charset="-128"/>
-              <a:cs typeface="メイリオ" panose="020B0604030504040204" pitchFamily="50" charset="-128"/>
-            </a:endParaRPr>
+              <a:t>3年　算数「たし算とひき算の筆算」</a:t>
+            </a:r>
+          </a:p>
+          <a:p>
+            <a:pPr algn="l"/>
+            <a:r>
+              <a:rPr lang="ja-JP" sz="1600" b="0" dirty="0">
+                <a:latin typeface="メイリオ"/>
+                <a:ea typeface="メイリオ"/>
+                <a:cs typeface="メイリオ"/>
+              </a:rPr>
+              <a:t>４学級で展開</a:t>
+            </a:r>
           </a:p>
         </p:txBody>
       </p:sp>
@@ -9308,7 +13886,7 @@
           <p:cNvPr id="2" name="正方形/長方形 1">
             <a:extLst>
               <a:ext uri="{FF2B5EF4-FFF2-40B4-BE49-F238E27FC236}">
-                <a16:creationId xmlns:a16="http://schemas.microsoft.com/office/drawing/2014/main" id="{111F27B4-4610-6AB1-6927-2CFCFD115F37}"/>
+                <a16:creationId xmlns:a16="http://schemas.microsoft.com/office/drawing/2014/main" id="{C4539BEB-F3C9-6597-FF8D-13F6493EAAA1}"/>
               </a:ext>
             </a:extLst>
           </p:cNvPr>
@@ -9317,8 +13895,8 @@
         </p:nvSpPr>
         <p:spPr bwMode="white">
           <a:xfrm>
-            <a:off x="562387" y="1356032"/>
-            <a:ext cx="8019225" cy="2431435"/>
+            <a:off x="4663440" y="1600200"/>
+            <a:ext cx="2011680" cy="777240"/>
           </a:xfrm>
           <a:prstGeom prst="rect">
             <a:avLst/>
@@ -9336,169 +13914,254 @@
           </a:bodyPr>
           <a:lstStyle/>
           <a:p>
-            <a:pPr>
-              <a:lnSpc>
-                <a:spcPct val="120000"/>
-              </a:lnSpc>
-            </a:pPr>
-            <a:r>
-              <a:rPr lang="ja-JP" altLang="en-US" sz="3200" b="1" u="sng" dirty="0">
-                <a:solidFill>
-                  <a:schemeClr val="tx1">
-                    <a:lumMod val="65000"/>
-                    <a:lumOff val="35000"/>
-                  </a:schemeClr>
-                </a:solidFill>
+            <a:pPr algn="ctr"/>
+            <a:r>
+              <a:rPr lang="ja-JP" sz="2000" b="1" dirty="0">
                 <a:latin typeface="メイリオ"/>
                 <a:ea typeface="メイリオ"/>
                 <a:cs typeface="メイリオ"/>
               </a:rPr>
-              <a:t>本日の視点を、明日の授業改善へ</a:t>
-            </a:r>
-            <a:endParaRPr lang="en-US" altLang="ja-JP" sz="3200" b="1" u="sng" dirty="0">
-              <a:solidFill>
-                <a:schemeClr val="tx1">
-                  <a:lumMod val="65000"/>
-                  <a:lumOff val="35000"/>
-                </a:schemeClr>
-              </a:solidFill>
-              <a:latin typeface="メイリオ" panose="020B0604030504040204" pitchFamily="50" charset="-128"/>
-              <a:ea typeface="メイリオ" panose="020B0604030504040204" pitchFamily="50" charset="-128"/>
-              <a:cs typeface="メイリオ" panose="020B0604030504040204" pitchFamily="50" charset="-128"/>
-            </a:endParaRPr>
-          </a:p>
-          <a:p>
-            <a:pPr>
-              <a:lnSpc>
-                <a:spcPct val="120000"/>
-              </a:lnSpc>
-            </a:pPr>
-            <a:r>
-              <a:rPr lang="ja-JP" altLang="en-US" sz="3200" b="1" dirty="0">
-                <a:solidFill>
-                  <a:schemeClr val="tx1">
-                    <a:lumMod val="65000"/>
-                    <a:lumOff val="35000"/>
-                  </a:schemeClr>
-                </a:solidFill>
+              <a:t>3-3</a:t>
+            </a:r>
+          </a:p>
+          <a:p>
+            <a:pPr algn="ctr"/>
+            <a:r>
+              <a:rPr lang="ja-JP" sz="1600" b="0" dirty="0">
                 <a:latin typeface="メイリオ"/>
                 <a:ea typeface="メイリオ"/>
                 <a:cs typeface="メイリオ"/>
               </a:rPr>
-              <a:t>・深い学びと研究主題は地続き</a:t>
-            </a:r>
-            <a:endParaRPr lang="en-US" altLang="ja-JP" sz="3200" b="1" dirty="0">
-              <a:solidFill>
-                <a:schemeClr val="tx1">
-                  <a:lumMod val="65000"/>
-                  <a:lumOff val="35000"/>
-                </a:schemeClr>
-              </a:solidFill>
-              <a:latin typeface="メイリオ" panose="020B0604030504040204" pitchFamily="50" charset="-128"/>
-              <a:ea typeface="メイリオ" panose="020B0604030504040204" pitchFamily="50" charset="-128"/>
-              <a:cs typeface="メイリオ" panose="020B0604030504040204" pitchFamily="50" charset="-128"/>
-            </a:endParaRPr>
-          </a:p>
-          <a:p>
-            <a:pPr>
-              <a:lnSpc>
-                <a:spcPct val="120000"/>
-              </a:lnSpc>
-            </a:pPr>
-            <a:r>
-              <a:rPr lang="ja-JP" altLang="en-US" sz="3200" b="1" dirty="0">
-                <a:solidFill>
-                  <a:schemeClr val="tx1">
-                    <a:lumMod val="65000"/>
-                    <a:lumOff val="35000"/>
-                  </a:schemeClr>
-                </a:solidFill>
+              <a:t>伊藤 蘭</a:t>
+            </a:r>
+          </a:p>
+        </p:txBody>
+      </p:sp>
+      <p:sp>
+        <p:nvSpPr>
+          <p:cNvPr id="3" name="正方形/長方形 2">
+            <a:extLst>
+              <a:ext uri="{FF2B5EF4-FFF2-40B4-BE49-F238E27FC236}">
+                <a16:creationId xmlns:a16="http://schemas.microsoft.com/office/drawing/2014/main" id="{BE8968C1-738E-5797-EEAA-8EC7DE30B3AE}"/>
+              </a:ext>
+            </a:extLst>
+          </p:cNvPr>
+          <p:cNvSpPr/>
+          <p:nvPr/>
+        </p:nvSpPr>
+        <p:spPr bwMode="white">
+          <a:xfrm>
+            <a:off x="6858000" y="1600200"/>
+            <a:ext cx="2011680" cy="777240"/>
+          </a:xfrm>
+          <a:prstGeom prst="rect">
+            <a:avLst/>
+          </a:prstGeom>
+          <a:solidFill>
+            <a:schemeClr val="bg1"/>
+          </a:solidFill>
+          <a:ln>
+            <a:noFill/>
+          </a:ln>
+        </p:spPr>
+        <p:txBody>
+          <a:bodyPr wrap="square">
+            <a:spAutoFit/>
+          </a:bodyPr>
+          <a:lstStyle/>
+          <a:p>
+            <a:pPr algn="ctr"/>
+            <a:r>
+              <a:rPr lang="ja-JP" sz="2000" b="1" dirty="0">
                 <a:latin typeface="メイリオ"/>
                 <a:ea typeface="メイリオ"/>
                 <a:cs typeface="メイリオ"/>
               </a:rPr>
-              <a:t>・「好き」を育み「得意」を伸ばす</a:t>
-            </a:r>
-            <a:r>
-              <a:rPr lang="en-US" altLang="ja-JP" sz="3200" b="1" dirty="0">
-                <a:solidFill>
-                  <a:schemeClr val="tx1">
-                    <a:lumMod val="65000"/>
-                    <a:lumOff val="35000"/>
-                  </a:schemeClr>
-                </a:solidFill>
-                <a:latin typeface="メイリオ" panose="020B0604030504040204" pitchFamily="50" charset="-128"/>
-                <a:ea typeface="メイリオ" panose="020B0604030504040204" pitchFamily="50" charset="-128"/>
-                <a:cs typeface="メイリオ" panose="020B0604030504040204" pitchFamily="50" charset="-128"/>
-              </a:rPr>
-              <a:t/>
-            </a:r>
-            <a:r>
-              <a:rPr lang="ja-JP" altLang="en-US" sz="3200" b="1" dirty="0">
-                <a:solidFill>
-                  <a:schemeClr val="tx1">
-                    <a:lumMod val="65000"/>
-                    <a:lumOff val="35000"/>
-                  </a:schemeClr>
-                </a:solidFill>
-                <a:latin typeface="メイリオ" panose="020B0604030504040204" pitchFamily="50" charset="-128"/>
-                <a:ea typeface="メイリオ" panose="020B0604030504040204" pitchFamily="50" charset="-128"/>
-                <a:cs typeface="メイリオ" panose="020B0604030504040204" pitchFamily="50" charset="-128"/>
-              </a:rPr>
-              <a:t/>
-            </a:r>
-            <a:endParaRPr lang="en-US" altLang="ja-JP" sz="3200" b="1" dirty="0">
-              <a:solidFill>
-                <a:schemeClr val="tx1">
-                  <a:lumMod val="65000"/>
-                  <a:lumOff val="35000"/>
-                </a:schemeClr>
-              </a:solidFill>
-              <a:latin typeface="メイリオ" panose="020B0604030504040204" pitchFamily="50" charset="-128"/>
-              <a:ea typeface="メイリオ" panose="020B0604030504040204" pitchFamily="50" charset="-128"/>
-              <a:cs typeface="メイリオ" panose="020B0604030504040204" pitchFamily="50" charset="-128"/>
-            </a:endParaRPr>
-          </a:p>
-          <a:p>
-            <a:pPr>
-              <a:lnSpc>
-                <a:spcPct val="120000"/>
-              </a:lnSpc>
-            </a:pPr>
-            <a:r>
-              <a:rPr lang="ja-JP" altLang="en-US" sz="3200" b="1" dirty="0">
-                <a:solidFill>
-                  <a:schemeClr val="tx1">
-                    <a:lumMod val="65000"/>
-                    <a:lumOff val="35000"/>
-                  </a:schemeClr>
-                </a:solidFill>
+              <a:t>少人数</a:t>
+            </a:r>
+          </a:p>
+          <a:p>
+            <a:pPr algn="ctr"/>
+            <a:r>
+              <a:rPr lang="ja-JP" sz="1600" b="0" dirty="0">
                 <a:latin typeface="メイリオ"/>
                 <a:ea typeface="メイリオ"/>
                 <a:cs typeface="メイリオ"/>
               </a:rPr>
-              <a:t>・「幸せな学校はみんながつくる」</a:t>
-            </a:r>
-            <a:endParaRPr lang="en-US" altLang="ja-JP" sz="3200" b="1" dirty="0">
-              <a:solidFill>
-                <a:schemeClr val="tx1">
-                  <a:lumMod val="65000"/>
-                  <a:lumOff val="35000"/>
-                </a:schemeClr>
-              </a:solidFill>
-              <a:latin typeface="メイリオ" panose="020B0604030504040204" pitchFamily="50" charset="-128"/>
-              <a:ea typeface="メイリオ" panose="020B0604030504040204" pitchFamily="50" charset="-128"/>
-              <a:cs typeface="メイリオ" panose="020B0604030504040204" pitchFamily="50" charset="-128"/>
-            </a:endParaRPr>
+              <a:t>鈴木 寛</a:t>
+            </a:r>
+          </a:p>
+        </p:txBody>
+      </p:sp>
+      <p:sp>
+        <p:nvSpPr>
+          <p:cNvPr id="5" name="正方形/長方形 4">
+            <a:extLst>
+              <a:ext uri="{FF2B5EF4-FFF2-40B4-BE49-F238E27FC236}">
+                <a16:creationId xmlns:a16="http://schemas.microsoft.com/office/drawing/2014/main" id="{FD58072C-8A99-B42C-4A03-380C420A0218}"/>
+              </a:ext>
+            </a:extLst>
+          </p:cNvPr>
+          <p:cNvSpPr/>
+          <p:nvPr/>
+        </p:nvSpPr>
+        <p:spPr bwMode="white">
+          <a:xfrm>
+            <a:off x="1371600" y="2926080"/>
+            <a:ext cx="6400800" cy="1097280"/>
+          </a:xfrm>
+          <a:prstGeom prst="rect">
+            <a:avLst/>
+          </a:prstGeom>
+          <a:solidFill>
+            <a:schemeClr val="bg1"/>
+          </a:solidFill>
+          <a:ln>
+            <a:noFill/>
+          </a:ln>
+        </p:spPr>
+        <p:txBody>
+          <a:bodyPr wrap="square">
+            <a:spAutoFit/>
+          </a:bodyPr>
+          <a:lstStyle/>
+          <a:p>
+            <a:pPr algn="l"/>
+            <a:r>
+              <a:rPr lang="ja-JP" sz="2200" b="1" dirty="0">
+                <a:latin typeface="メイリオ"/>
+                <a:ea typeface="メイリオ"/>
+                <a:cs typeface="メイリオ"/>
+              </a:rPr>
+              <a:t>6年　音楽（見城 麻美）</a:t>
+            </a:r>
+          </a:p>
+          <a:p>
+            <a:pPr algn="l"/>
+            <a:r>
+              <a:rPr lang="ja-JP" sz="1600" b="0" dirty="0">
+                <a:latin typeface="メイリオ"/>
+                <a:ea typeface="メイリオ"/>
+                <a:cs typeface="メイリオ"/>
+              </a:rPr>
+              <a:t>「パートの役割を活かして合奏しよう」</a:t>
+            </a:r>
+          </a:p>
+        </p:txBody>
+      </p:sp>
+      <p:sp>
+        <p:nvSpPr>
+          <p:cNvPr id="9" name="正方形/長方形 8">
+            <a:extLst>
+              <a:ext uri="{FF2B5EF4-FFF2-40B4-BE49-F238E27FC236}">
+                <a16:creationId xmlns:a16="http://schemas.microsoft.com/office/drawing/2014/main" id="{C871D856-5C1D-8BEB-D3E7-9B8F19D3E72D}"/>
+              </a:ext>
+            </a:extLst>
+          </p:cNvPr>
+          <p:cNvSpPr/>
+          <p:nvPr/>
+        </p:nvSpPr>
+        <p:spPr bwMode="white">
+          <a:xfrm>
+            <a:off x="2468880" y="1600200"/>
+            <a:ext cx="2011680" cy="777240"/>
+          </a:xfrm>
+          <a:prstGeom prst="rect">
+            <a:avLst/>
+          </a:prstGeom>
+          <a:solidFill>
+            <a:schemeClr val="bg1"/>
+          </a:solidFill>
+          <a:ln>
+            <a:noFill/>
+          </a:ln>
+        </p:spPr>
+        <p:txBody>
+          <a:bodyPr wrap="square">
+            <a:spAutoFit/>
+          </a:bodyPr>
+          <a:lstStyle/>
+          <a:p>
+            <a:pPr algn="ctr"/>
+            <a:r>
+              <a:rPr lang="ja-JP" sz="2000" b="1" dirty="0">
+                <a:latin typeface="メイリオ"/>
+                <a:ea typeface="メイリオ"/>
+                <a:cs typeface="メイリオ"/>
+              </a:rPr>
+              <a:t>3-2</a:t>
+            </a:r>
+          </a:p>
+          <a:p>
+            <a:pPr algn="ctr"/>
+            <a:r>
+              <a:rPr lang="ja-JP" sz="1600" b="0" dirty="0">
+                <a:latin typeface="メイリオ"/>
+                <a:ea typeface="メイリオ"/>
+                <a:cs typeface="メイリオ"/>
+              </a:rPr>
+              <a:t>岡﨑 智子</a:t>
+            </a:r>
+          </a:p>
+        </p:txBody>
+      </p:sp>
+      <p:sp>
+        <p:nvSpPr>
+          <p:cNvPr id="9" name="正方形/長方形 8">
+            <a:extLst>
+              <a:ext uri="{FF2B5EF4-FFF2-40B4-BE49-F238E27FC236}">
+                <a16:creationId xmlns:a16="http://schemas.microsoft.com/office/drawing/2014/main" id="{C871D856-5C1D-8BEB-D3E7-9B8F19D3E72D}"/>
+              </a:ext>
+            </a:extLst>
+          </p:cNvPr>
+          <p:cNvSpPr/>
+          <p:nvPr/>
+        </p:nvSpPr>
+        <p:spPr bwMode="white">
+          <a:xfrm>
+            <a:off x="274320" y="1600200"/>
+            <a:ext cx="2011680" cy="777240"/>
+          </a:xfrm>
+          <a:prstGeom prst="rect">
+            <a:avLst/>
+          </a:prstGeom>
+          <a:solidFill>
+            <a:schemeClr val="bg1"/>
+          </a:solidFill>
+          <a:ln>
+            <a:noFill/>
+          </a:ln>
+        </p:spPr>
+        <p:txBody>
+          <a:bodyPr wrap="square">
+            <a:spAutoFit/>
+          </a:bodyPr>
+          <a:lstStyle/>
+          <a:p>
+            <a:pPr algn="ctr"/>
+            <a:r>
+              <a:rPr lang="ja-JP" sz="2000" b="1" dirty="0">
+                <a:latin typeface="メイリオ"/>
+                <a:ea typeface="メイリオ"/>
+                <a:cs typeface="メイリオ"/>
+              </a:rPr>
+              <a:t>3-1</a:t>
+            </a:r>
+          </a:p>
+          <a:p>
+            <a:pPr algn="ctr"/>
+            <a:r>
+              <a:rPr lang="ja-JP" sz="1600" b="0" dirty="0">
+                <a:latin typeface="メイリオ"/>
+                <a:ea typeface="メイリオ"/>
+                <a:cs typeface="メイリオ"/>
+              </a:rPr>
+              <a:t>間 勇人</a:t>
+            </a:r>
           </a:p>
         </p:txBody>
       </p:sp>
     </p:spTree>
-    <p:extLst>
-      <p:ext uri="{BB962C8B-B14F-4D97-AF65-F5344CB8AC3E}">
-        <p14:creationId xmlns:p14="http://schemas.microsoft.com/office/powerpoint/2010/main" val="2299701922"/>
-      </p:ext>
-    </p:extLst>
   </p:cSld>
   <p:clrMapOvr>
     <a:masterClrMapping/>

--- a/output/★指導課訪問★３・４校時指導助言資料（例）.pptx
+++ b/output/★指導課訪問★３・４校時指導助言資料（例）.pptx
@@ -18,8 +18,8 @@
     <p:sldId id="262" r:id="rId6"/>
     <p:sldId id="519" r:id="rId7"/>
     <p:sldId id="515" r:id="rId8"/>
+    <p:sldId id="732" r:id="rId22"/>
     <p:sldId id="526" r:id="rId9"/>
-    <p:sldId id="732" r:id="rId22"/>
     <p:sldId id="527" r:id="rId10"/>
     <p:sldId id="729" r:id="rId11"/>
     <p:sldId id="521" r:id="rId12"/>
@@ -7947,8 +7947,8 @@
         </p:nvSpPr>
         <p:spPr bwMode="white">
           <a:xfrm>
-            <a:off x="489758" y="822960"/>
-            <a:ext cx="4000000" cy="914400"/>
+            <a:off x="3273552" y="822960"/>
+            <a:ext cx="2596896" cy="1280160"/>
           </a:xfrm>
           <a:prstGeom prst="rect">
             <a:avLst/>
@@ -7968,7 +7968,7 @@
           <a:p>
             <a:pPr algn="l"/>
             <a:r>
-              <a:rPr lang="ja-JP" sz="2200" b="1" dirty="0">
+              <a:rPr lang="ja-JP" sz="1400" b="1" dirty="0">
                 <a:latin typeface="メイリオ"/>
                 <a:ea typeface="メイリオ"/>
                 <a:cs typeface="メイリオ"/>
@@ -7979,7 +7979,7 @@
           <a:p>
             <a:pPr algn="l"/>
             <a:r>
-              <a:rPr lang="ja-JP" sz="1600" b="0" dirty="0">
+              <a:rPr lang="ja-JP" sz="1100" b="0" dirty="0">
                 <a:latin typeface="メイリオ"/>
                 <a:ea typeface="メイリオ"/>
                 <a:cs typeface="メイリオ"/>
@@ -8003,8 +8003,8 @@
         </p:nvSpPr>
         <p:spPr bwMode="white">
           <a:xfrm>
-            <a:off x="4700000" y="822960"/>
-            <a:ext cx="4000000" cy="914400"/>
+            <a:off x="6053328" y="822960"/>
+            <a:ext cx="2596896" cy="1280160"/>
           </a:xfrm>
           <a:prstGeom prst="rect">
             <a:avLst/>
@@ -8024,7 +8024,7 @@
           <a:p>
             <a:pPr algn="l"/>
             <a:r>
-              <a:rPr lang="ja-JP" sz="2200" b="1" dirty="0">
+              <a:rPr lang="ja-JP" sz="1400" b="1" dirty="0">
                 <a:latin typeface="メイリオ"/>
                 <a:ea typeface="メイリオ"/>
                 <a:cs typeface="メイリオ"/>
@@ -8035,7 +8035,7 @@
           <a:p>
             <a:pPr algn="l"/>
             <a:r>
-              <a:rPr lang="ja-JP" sz="1600" b="0" dirty="0">
+              <a:rPr lang="ja-JP" sz="1100" b="0" dirty="0">
                 <a:latin typeface="メイリオ"/>
                 <a:ea typeface="メイリオ"/>
                 <a:cs typeface="メイリオ"/>
@@ -8059,8 +8059,8 @@
         </p:nvSpPr>
         <p:spPr bwMode="white">
           <a:xfrm>
-            <a:off x="489758" y="2606040"/>
-            <a:ext cx="4000000" cy="914400"/>
+            <a:off x="493776" y="2606040"/>
+            <a:ext cx="3995928" cy="1280160"/>
           </a:xfrm>
           <a:prstGeom prst="rect">
             <a:avLst/>
@@ -8080,7 +8080,7 @@
           <a:p>
             <a:pPr algn="l"/>
             <a:r>
-              <a:rPr lang="ja-JP" sz="2200" b="1" dirty="0">
+              <a:rPr lang="ja-JP" sz="2000" b="1" dirty="0">
                 <a:latin typeface="メイリオ"/>
                 <a:ea typeface="メイリオ"/>
                 <a:cs typeface="メイリオ"/>
@@ -8091,7 +8091,7 @@
           <a:p>
             <a:pPr algn="l"/>
             <a:r>
-              <a:rPr lang="ja-JP" sz="1600" b="0" dirty="0">
+              <a:rPr lang="ja-JP" sz="1400" b="0" dirty="0">
                 <a:latin typeface="メイリオ"/>
                 <a:ea typeface="メイリオ"/>
                 <a:cs typeface="メイリオ"/>
@@ -8115,8 +8115,8 @@
         </p:nvSpPr>
         <p:spPr bwMode="white">
           <a:xfrm>
-            <a:off x="4700000" y="2606040"/>
-            <a:ext cx="4000000" cy="914400"/>
+            <a:off x="493776" y="822960"/>
+            <a:ext cx="2596896" cy="1280160"/>
           </a:xfrm>
           <a:prstGeom prst="rect">
             <a:avLst/>
@@ -8136,7 +8136,7 @@
           <a:p>
             <a:pPr algn="l"/>
             <a:r>
-              <a:rPr lang="ja-JP" sz="2200" b="1" dirty="0">
+              <a:rPr lang="ja-JP" sz="1400" b="1" dirty="0">
                 <a:latin typeface="メイリオ"/>
                 <a:ea typeface="メイリオ"/>
                 <a:cs typeface="メイリオ"/>
@@ -8147,12 +8147,68 @@
           <a:p>
             <a:pPr algn="l"/>
             <a:r>
-              <a:rPr lang="ja-JP" sz="1600" b="0" dirty="0">
+              <a:rPr lang="ja-JP" sz="1100" b="0" dirty="0">
                 <a:latin typeface="メイリオ"/>
                 <a:ea typeface="メイリオ"/>
                 <a:cs typeface="メイリオ"/>
               </a:rPr>
-              <a:t>「けんかをしたけど」</a:t>
+              <a:t>「ともだちとなかよく」</a:t>
+            </a:r>
+          </a:p>
+        </p:txBody>
+      </p:sp>
+      <p:sp>
+        <p:nvSpPr>
+          <p:cNvPr id="9" name="正方形/長方形 8">
+            <a:extLst>
+              <a:ext uri="{FF2B5EF4-FFF2-40B4-BE49-F238E27FC236}">
+                <a16:creationId xmlns:a16="http://schemas.microsoft.com/office/drawing/2014/main" id="{C5D3743F-9B80-8301-2727-28B24CEB585F}"/>
+              </a:ext>
+            </a:extLst>
+          </p:cNvPr>
+          <p:cNvSpPr/>
+          <p:nvPr/>
+        </p:nvSpPr>
+        <p:spPr bwMode="white">
+          <a:xfrm>
+            <a:off x="5038344" y="2606040"/>
+            <a:ext cx="3995928" cy="1280160"/>
+          </a:xfrm>
+          <a:prstGeom prst="rect">
+            <a:avLst/>
+          </a:prstGeom>
+          <a:solidFill>
+            <a:schemeClr val="bg1"/>
+          </a:solidFill>
+          <a:ln>
+            <a:noFill/>
+          </a:ln>
+        </p:spPr>
+        <p:txBody>
+          <a:bodyPr wrap="square">
+            <a:spAutoFit/>
+          </a:bodyPr>
+          <a:lstStyle/>
+          <a:p>
+            <a:pPr algn="l"/>
+            <a:r>
+              <a:rPr lang="ja-JP" sz="2000" b="1" dirty="0">
+                <a:latin typeface="メイリオ"/>
+                <a:ea typeface="メイリオ"/>
+                <a:cs typeface="メイリオ"/>
+              </a:rPr>
+              <a:t>6-2　音楽（見城 麻美）</a:t>
+            </a:r>
+          </a:p>
+          <a:p>
+            <a:pPr algn="l"/>
+            <a:r>
+              <a:rPr lang="ja-JP" sz="1400" b="0" dirty="0">
+                <a:latin typeface="メイリオ"/>
+                <a:ea typeface="メイリオ"/>
+                <a:cs typeface="メイリオ"/>
+              </a:rPr>
+              <a:t>「パートの役割を活かして合奏しよう」</a:t>
             </a:r>
           </a:p>
         </p:txBody>
@@ -13087,7 +13143,7 @@
         <p:spPr bwMode="white">
           <a:xfrm>
             <a:off x="489758" y="658368"/>
-            <a:ext cx="3628642" cy="749808"/>
+            <a:ext cx="3628642" cy="777240"/>
           </a:xfrm>
           <a:prstGeom prst="rect">
             <a:avLst/>
@@ -13107,7 +13163,7 @@
           <a:p>
             <a:pPr algn="l"/>
             <a:r>
-              <a:rPr lang="ja-JP" sz="1800" b="1" dirty="0">
+              <a:rPr lang="ja-JP" sz="1500" b="1" dirty="0">
                 <a:latin typeface="メイリオ"/>
                 <a:ea typeface="メイリオ"/>
                 <a:cs typeface="メイリオ"/>
@@ -13194,7 +13250,7 @@
         <p:spPr bwMode="white">
           <a:xfrm>
             <a:off x="4983758" y="658368"/>
-            <a:ext cx="3571042" cy="749808"/>
+            <a:ext cx="3571042" cy="777240"/>
           </a:xfrm>
           <a:prstGeom prst="rect">
             <a:avLst/>
@@ -13214,7 +13270,7 @@
           <a:p>
             <a:pPr algn="l"/>
             <a:r>
-              <a:rPr lang="ja-JP" sz="2200" b="1" dirty="0">
+              <a:rPr lang="ja-JP" sz="1800" b="1" dirty="0">
                 <a:latin typeface="メイリオ"/>
                 <a:ea typeface="メイリオ"/>
                 <a:cs typeface="メイリオ"/>
@@ -13225,7 +13281,7 @@
           <a:p>
             <a:pPr algn="l"/>
             <a:r>
-              <a:rPr lang="ja-JP" sz="1600" b="0" dirty="0">
+              <a:rPr lang="ja-JP" sz="1400" b="0" dirty="0">
                 <a:latin typeface="メイリオ"/>
                 <a:ea typeface="メイリオ"/>
                 <a:cs typeface="メイリオ"/>
@@ -13286,62 +13342,6 @@
           </a:p>
         </p:txBody>
       </p:sp>
-      <p:sp>
-        <p:nvSpPr>
-          <p:cNvPr id="9" name="正方形/長方形 8">
-            <a:extLst>
-              <a:ext uri="{FF2B5EF4-FFF2-40B4-BE49-F238E27FC236}">
-                <a16:creationId xmlns:a16="http://schemas.microsoft.com/office/drawing/2014/main" id="{77876903-AD43-5597-093C-B3A30EBDBD14}"/>
-              </a:ext>
-            </a:extLst>
-          </p:cNvPr>
-          <p:cNvSpPr/>
-          <p:nvPr/>
-        </p:nvSpPr>
-        <p:spPr bwMode="white">
-          <a:xfrm>
-            <a:off x="493776" y="4343400"/>
-            <a:ext cx="8156448" cy="685800"/>
-          </a:xfrm>
-          <a:prstGeom prst="rect">
-            <a:avLst/>
-          </a:prstGeom>
-          <a:solidFill>
-            <a:schemeClr val="bg1"/>
-          </a:solidFill>
-          <a:ln>
-            <a:noFill/>
-          </a:ln>
-        </p:spPr>
-        <p:txBody>
-          <a:bodyPr wrap="square">
-            <a:spAutoFit/>
-          </a:bodyPr>
-          <a:lstStyle/>
-          <a:p>
-            <a:pPr algn="l"/>
-            <a:r>
-              <a:rPr lang="ja-JP" sz="2000" b="1" dirty="0">
-                <a:latin typeface="メイリオ"/>
-                <a:ea typeface="メイリオ"/>
-                <a:cs typeface="メイリオ"/>
-              </a:rPr>
-              <a:t>5-1　外国語（三宅 真行）</a:t>
-            </a:r>
-          </a:p>
-          <a:p>
-            <a:pPr algn="l"/>
-            <a:r>
-              <a:rPr lang="ja-JP" sz="1400" b="0" dirty="0">
-                <a:latin typeface="メイリオ"/>
-                <a:ea typeface="メイリオ"/>
-                <a:cs typeface="メイリオ"/>
-              </a:rPr>
-              <a:t>Unit２「When is your birthday?」</a:t>
-            </a:r>
-          </a:p>
-        </p:txBody>
-      </p:sp>
     </p:spTree>
     <p:extLst>
       <p:ext uri="{BB962C8B-B14F-4D97-AF65-F5344CB8AC3E}">
@@ -13356,28 +13356,15 @@
 </file>
 
 <file path=ppt/slides/slide8.xml><?xml version="1.0" encoding="utf-8"?>
-<p:sld xmlns:a="http://schemas.openxmlformats.org/drawingml/2006/main" xmlns:r="http://schemas.openxmlformats.org/officeDocument/2006/relationships" xmlns:p="http://schemas.openxmlformats.org/presentationml/2006/main">
+<p:sld xmlns:a="http://schemas.openxmlformats.org/drawingml/2006/main" xmlns:p="http://schemas.openxmlformats.org/presentationml/2006/main" xmlns:r="http://schemas.openxmlformats.org/officeDocument/2006/relationships">
   <p:cSld>
     <p:spTree>
       <p:nvGrpSpPr>
-        <p:cNvPr id="1" name="">
-          <a:extLst>
-            <a:ext uri="{FF2B5EF4-FFF2-40B4-BE49-F238E27FC236}">
-              <a16:creationId xmlns:a16="http://schemas.microsoft.com/office/drawing/2014/main" id="{5435304E-5B76-C7D3-FF30-435E1F2E4498}"/>
-            </a:ext>
-          </a:extLst>
-        </p:cNvPr>
+        <p:cNvPr id="1" name=""/>
         <p:cNvGrpSpPr/>
         <p:nvPr/>
       </p:nvGrpSpPr>
-      <p:grpSpPr>
-        <a:xfrm>
-          <a:off x="0" y="0"/>
-          <a:ext cx="0" cy="0"/>
-          <a:chOff x="0" y="0"/>
-          <a:chExt cx="0" cy="0"/>
-        </a:xfrm>
-      </p:grpSpPr>
+      <p:grpSpPr/>
       <p:sp>
         <p:nvSpPr>
           <p:cNvPr id="8" name="正方形/長方形 7">
@@ -13468,7 +13455,7 @@
                 <a:ea typeface="メイリオ"/>
                 <a:cs typeface="メイリオ"/>
               </a:rPr>
-              <a:t>　３・４校時の授業について　②考え</a:t>
+              <a:t>　３・４校時の授業について　①関心</a:t>
             </a:r>
             <a:endParaRPr lang="en-US" altLang="ja-JP" sz="3200" b="1" dirty="0">
               <a:solidFill>
@@ -13492,8 +13479,8 @@
         </p:nvSpPr>
         <p:spPr bwMode="white">
           <a:xfrm>
-            <a:off x="489758" y="822960"/>
-            <a:ext cx="4000000" cy="914400"/>
+            <a:off x="274320" y="822960"/>
+            <a:ext cx="8595360" cy="777240"/>
           </a:xfrm>
           <a:prstGeom prst="rect">
             <a:avLst/>
@@ -13518,7 +13505,7 @@
                 <a:ea typeface="メイリオ"/>
                 <a:cs typeface="メイリオ"/>
               </a:rPr>
-              <a:t>2-1　算数（岩佐 沙恵子）</a:t>
+              <a:t>3年　算数「たし算とひき算の筆算」</a:t>
             </a:r>
           </a:p>
           <a:p>
@@ -13529,7 +13516,7 @@
                 <a:ea typeface="メイリオ"/>
                 <a:cs typeface="メイリオ"/>
               </a:rPr>
-              <a:t>「長さのたんい」</a:t>
+              <a:t>４学級で展開</a:t>
             </a:r>
           </a:p>
         </p:txBody>
@@ -13548,8 +13535,8 @@
         </p:nvSpPr>
         <p:spPr bwMode="white">
           <a:xfrm>
-            <a:off x="4700000" y="822960"/>
-            <a:ext cx="4000000" cy="914400"/>
+            <a:off x="4663440" y="1920240"/>
+            <a:ext cx="2011680" cy="1005840"/>
           </a:xfrm>
           <a:prstGeom prst="rect">
             <a:avLst/>
@@ -13567,25 +13554,25 @@
           </a:bodyPr>
           <a:lstStyle/>
           <a:p>
-            <a:pPr algn="l"/>
-            <a:r>
-              <a:rPr lang="ja-JP" sz="2200" b="1" dirty="0">
+            <a:pPr algn="ctr"/>
+            <a:r>
+              <a:rPr lang="ja-JP" sz="2000" b="1" dirty="0">
                 <a:latin typeface="メイリオ"/>
                 <a:ea typeface="メイリオ"/>
                 <a:cs typeface="メイリオ"/>
               </a:rPr>
-              <a:t>5-3　社会（小松 沙織）</a:t>
-            </a:r>
-          </a:p>
-          <a:p>
-            <a:pPr algn="l"/>
-            <a:r>
-              <a:rPr lang="ja-JP" sz="1400" b="0" dirty="0">
+              <a:t>3-3</a:t>
+            </a:r>
+          </a:p>
+          <a:p>
+            <a:pPr algn="ctr"/>
+            <a:r>
+              <a:rPr lang="ja-JP" sz="1600" b="0" dirty="0">
                 <a:latin typeface="メイリオ"/>
                 <a:ea typeface="メイリオ"/>
                 <a:cs typeface="メイリオ"/>
               </a:rPr>
-              <a:t>「日本の国土とわたしたちのくらし」</a:t>
+              <a:t>伊藤 蘭</a:t>
             </a:r>
           </a:p>
         </p:txBody>
@@ -13604,8 +13591,8 @@
         </p:nvSpPr>
         <p:spPr bwMode="white">
           <a:xfrm>
-            <a:off x="489758" y="2606040"/>
-            <a:ext cx="4000000" cy="914400"/>
+            <a:off x="1371600" y="3383280"/>
+            <a:ext cx="6400800" cy="1005840"/>
           </a:xfrm>
           <a:prstGeom prst="rect">
             <a:avLst/>
@@ -13625,12 +13612,12 @@
           <a:p>
             <a:pPr algn="l"/>
             <a:r>
-              <a:rPr lang="ja-JP" sz="2200" b="1" dirty="0">
+              <a:rPr lang="ja-JP" sz="1800" b="1" dirty="0">
                 <a:latin typeface="メイリオ"/>
                 <a:ea typeface="メイリオ"/>
                 <a:cs typeface="メイリオ"/>
               </a:rPr>
-              <a:t>4-2　国語（工藤 由利）</a:t>
+              <a:t>課題の設定</a:t>
             </a:r>
           </a:p>
           <a:p>
@@ -13641,17 +13628,17 @@
                 <a:ea typeface="メイリオ"/>
                 <a:cs typeface="メイリオ"/>
               </a:rPr>
-              <a:t>「筆者の考えをとらえて自分の考えを発表しよう」</a:t>
-            </a:r>
-          </a:p>
-        </p:txBody>
-      </p:sp>
-      <p:sp>
-        <p:nvSpPr>
-          <p:cNvPr id="5" name="正方形/長方形 4">
+              <a:t>「1000円札を出したときのおつり」（買い物文脈）</a:t>
+            </a:r>
+          </a:p>
+        </p:txBody>
+      </p:sp>
+      <p:sp>
+        <p:nvSpPr>
+          <p:cNvPr id="9" name="正方形/長方形 8">
             <a:extLst>
               <a:ext uri="{FF2B5EF4-FFF2-40B4-BE49-F238E27FC236}">
-                <a16:creationId xmlns:a16="http://schemas.microsoft.com/office/drawing/2014/main" id="{FD58072C-8A99-B42C-4A03-380C420A0218}"/>
+                <a16:creationId xmlns:a16="http://schemas.microsoft.com/office/drawing/2014/main" id="{C871D856-5C1D-8BEB-D3E7-9B8F19D3E72D}"/>
               </a:ext>
             </a:extLst>
           </p:cNvPr>
@@ -13660,8 +13647,8 @@
         </p:nvSpPr>
         <p:spPr bwMode="white">
           <a:xfrm>
-            <a:off x="4700000" y="2606040"/>
-            <a:ext cx="4000000" cy="914400"/>
+            <a:off x="2468879" y="1920240"/>
+            <a:ext cx="2011680" cy="1005840"/>
           </a:xfrm>
           <a:prstGeom prst="rect">
             <a:avLst/>
@@ -13679,35 +13666,142 @@
           </a:bodyPr>
           <a:lstStyle/>
           <a:p>
-            <a:pPr algn="l"/>
-            <a:r>
-              <a:rPr lang="ja-JP" sz="2200" b="1" dirty="0">
+            <a:pPr algn="ctr"/>
+            <a:r>
+              <a:rPr lang="ja-JP" sz="2000" b="1" dirty="0">
                 <a:latin typeface="メイリオ"/>
                 <a:ea typeface="メイリオ"/>
                 <a:cs typeface="メイリオ"/>
               </a:rPr>
-              <a:t>6-3　道徳（松田 容子）</a:t>
-            </a:r>
-          </a:p>
-          <a:p>
-            <a:pPr algn="l"/>
+              <a:t>3-2</a:t>
+            </a:r>
+          </a:p>
+          <a:p>
+            <a:pPr algn="ctr"/>
             <a:r>
               <a:rPr lang="ja-JP" sz="1600" b="0" dirty="0">
                 <a:latin typeface="メイリオ"/>
                 <a:ea typeface="メイリオ"/>
                 <a:cs typeface="メイリオ"/>
               </a:rPr>
-              <a:t>「子ども会のキャンプ」</a:t>
+              <a:t>岡﨑 智子</a:t>
+            </a:r>
+          </a:p>
+        </p:txBody>
+      </p:sp>
+      <p:sp>
+        <p:nvSpPr>
+          <p:cNvPr id="9" name="正方形/長方形 8">
+            <a:extLst>
+              <a:ext uri="{FF2B5EF4-FFF2-40B4-BE49-F238E27FC236}">
+                <a16:creationId xmlns:a16="http://schemas.microsoft.com/office/drawing/2014/main" id="{C871D856-5C1D-8BEB-D3E7-9B8F19D3E72D}"/>
+              </a:ext>
+            </a:extLst>
+          </p:cNvPr>
+          <p:cNvSpPr/>
+          <p:nvPr/>
+        </p:nvSpPr>
+        <p:spPr bwMode="white">
+          <a:xfrm>
+            <a:off x="274320" y="1920240"/>
+            <a:ext cx="2011680" cy="1005840"/>
+          </a:xfrm>
+          <a:prstGeom prst="rect">
+            <a:avLst/>
+          </a:prstGeom>
+          <a:solidFill>
+            <a:schemeClr val="bg1"/>
+          </a:solidFill>
+          <a:ln>
+            <a:noFill/>
+          </a:ln>
+        </p:spPr>
+        <p:txBody>
+          <a:bodyPr wrap="square">
+            <a:spAutoFit/>
+          </a:bodyPr>
+          <a:lstStyle/>
+          <a:p>
+            <a:pPr algn="ctr"/>
+            <a:r>
+              <a:rPr lang="ja-JP" sz="2000" b="1" dirty="0">
+                <a:latin typeface="メイリオ"/>
+                <a:ea typeface="メイリオ"/>
+                <a:cs typeface="メイリオ"/>
+              </a:rPr>
+              <a:t>3-1</a:t>
+            </a:r>
+          </a:p>
+          <a:p>
+            <a:pPr algn="ctr"/>
+            <a:r>
+              <a:rPr lang="ja-JP" sz="1600" b="0" dirty="0">
+                <a:latin typeface="メイリオ"/>
+                <a:ea typeface="メイリオ"/>
+                <a:cs typeface="メイリオ"/>
+              </a:rPr>
+              <a:t>間 勇人</a:t>
+            </a:r>
+          </a:p>
+        </p:txBody>
+      </p:sp>
+      <p:sp>
+        <p:nvSpPr>
+          <p:cNvPr id="9" name="正方形/長方形 8">
+            <a:extLst>
+              <a:ext uri="{FF2B5EF4-FFF2-40B4-BE49-F238E27FC236}">
+                <a16:creationId xmlns:a16="http://schemas.microsoft.com/office/drawing/2014/main" id="{C871D856-5C1D-8BEB-D3E7-9B8F19D3E72D}"/>
+              </a:ext>
+            </a:extLst>
+          </p:cNvPr>
+          <p:cNvSpPr/>
+          <p:nvPr/>
+        </p:nvSpPr>
+        <p:spPr bwMode="white">
+          <a:xfrm>
+            <a:off x="6858000" y="1920240"/>
+            <a:ext cx="2011680" cy="1005840"/>
+          </a:xfrm>
+          <a:prstGeom prst="rect">
+            <a:avLst/>
+          </a:prstGeom>
+          <a:solidFill>
+            <a:schemeClr val="bg1"/>
+          </a:solidFill>
+          <a:ln>
+            <a:noFill/>
+          </a:ln>
+        </p:spPr>
+        <p:txBody>
+          <a:bodyPr wrap="square">
+            <a:spAutoFit/>
+          </a:bodyPr>
+          <a:lstStyle/>
+          <a:p>
+            <a:pPr algn="ctr"/>
+            <a:r>
+              <a:rPr lang="ja-JP" sz="2000" b="1" dirty="0">
+                <a:latin typeface="メイリオ"/>
+                <a:ea typeface="メイリオ"/>
+                <a:cs typeface="メイリオ"/>
+              </a:rPr>
+              <a:t>少人数</a:t>
+            </a:r>
+          </a:p>
+          <a:p>
+            <a:pPr algn="ctr"/>
+            <a:r>
+              <a:rPr lang="ja-JP" sz="1600" b="0" dirty="0">
+                <a:latin typeface="メイリオ"/>
+                <a:ea typeface="メイリオ"/>
+                <a:cs typeface="メイリオ"/>
+              </a:rPr>
+              <a:t>鈴木 寛</a:t>
             </a:r>
           </a:p>
         </p:txBody>
       </p:sp>
     </p:spTree>
-    <p:extLst>
-      <p:ext uri="{BB962C8B-B14F-4D97-AF65-F5344CB8AC3E}">
-        <p14:creationId xmlns:p14="http://schemas.microsoft.com/office/powerpoint/2010/main" val="660057930"/>
-      </p:ext>
-    </p:extLst>
   </p:cSld>
   <p:clrMapOvr>
     <a:masterClrMapping/>
@@ -13716,15 +13810,28 @@
 </file>
 
 <file path=ppt/slides/slide9.xml><?xml version="1.0" encoding="utf-8"?>
-<p:sld xmlns:a="http://schemas.openxmlformats.org/drawingml/2006/main" xmlns:p="http://schemas.openxmlformats.org/presentationml/2006/main" xmlns:r="http://schemas.openxmlformats.org/officeDocument/2006/relationships">
+<p:sld xmlns:a="http://schemas.openxmlformats.org/drawingml/2006/main" xmlns:r="http://schemas.openxmlformats.org/officeDocument/2006/relationships" xmlns:p="http://schemas.openxmlformats.org/presentationml/2006/main">
   <p:cSld>
     <p:spTree>
       <p:nvGrpSpPr>
-        <p:cNvPr id="1" name=""/>
+        <p:cNvPr id="1" name="">
+          <a:extLst>
+            <a:ext uri="{FF2B5EF4-FFF2-40B4-BE49-F238E27FC236}">
+              <a16:creationId xmlns:a16="http://schemas.microsoft.com/office/drawing/2014/main" id="{5435304E-5B76-C7D3-FF30-435E1F2E4498}"/>
+            </a:ext>
+          </a:extLst>
+        </p:cNvPr>
         <p:cNvGrpSpPr/>
         <p:nvPr/>
       </p:nvGrpSpPr>
-      <p:grpSpPr/>
+      <p:grpSpPr>
+        <a:xfrm>
+          <a:off x="0" y="0"/>
+          <a:ext cx="0" cy="0"/>
+          <a:chOff x="0" y="0"/>
+          <a:chExt cx="0" cy="0"/>
+        </a:xfrm>
+      </p:grpSpPr>
       <p:sp>
         <p:nvSpPr>
           <p:cNvPr id="8" name="正方形/長方形 7">
@@ -13839,8 +13946,8 @@
         </p:nvSpPr>
         <p:spPr bwMode="white">
           <a:xfrm>
-            <a:off x="274320" y="777240"/>
-            <a:ext cx="8595360" cy="685800"/>
+            <a:off x="489758" y="822960"/>
+            <a:ext cx="4000000" cy="914400"/>
           </a:xfrm>
           <a:prstGeom prst="rect">
             <a:avLst/>
@@ -13865,7 +13972,7 @@
                 <a:ea typeface="メイリオ"/>
                 <a:cs typeface="メイリオ"/>
               </a:rPr>
-              <a:t>3年　算数「たし算とひき算の筆算」</a:t>
+              <a:t>2-1　算数（岩佐 沙恵子）</a:t>
             </a:r>
           </a:p>
           <a:p>
@@ -13876,7 +13983,7 @@
                 <a:ea typeface="メイリオ"/>
                 <a:cs typeface="メイリオ"/>
               </a:rPr>
-              <a:t>４学級で展開</a:t>
+              <a:t>「長さのたんい」</a:t>
             </a:r>
           </a:p>
         </p:txBody>
@@ -13895,8 +14002,8 @@
         </p:nvSpPr>
         <p:spPr bwMode="white">
           <a:xfrm>
-            <a:off x="4663440" y="1600200"/>
-            <a:ext cx="2011680" cy="777240"/>
+            <a:off x="4700000" y="822960"/>
+            <a:ext cx="4000000" cy="914400"/>
           </a:xfrm>
           <a:prstGeom prst="rect">
             <a:avLst/>
@@ -13914,25 +14021,25 @@
           </a:bodyPr>
           <a:lstStyle/>
           <a:p>
-            <a:pPr algn="ctr"/>
-            <a:r>
-              <a:rPr lang="ja-JP" sz="2000" b="1" dirty="0">
+            <a:pPr algn="l"/>
+            <a:r>
+              <a:rPr lang="ja-JP" sz="2200" b="1" dirty="0">
                 <a:latin typeface="メイリオ"/>
                 <a:ea typeface="メイリオ"/>
                 <a:cs typeface="メイリオ"/>
               </a:rPr>
-              <a:t>3-3</a:t>
-            </a:r>
-          </a:p>
-          <a:p>
-            <a:pPr algn="ctr"/>
-            <a:r>
-              <a:rPr lang="ja-JP" sz="1600" b="0" dirty="0">
+              <a:t>5-3　社会（小松 沙織）</a:t>
+            </a:r>
+          </a:p>
+          <a:p>
+            <a:pPr algn="l"/>
+            <a:r>
+              <a:rPr lang="ja-JP" sz="1400" b="0" dirty="0">
                 <a:latin typeface="メイリオ"/>
                 <a:ea typeface="メイリオ"/>
                 <a:cs typeface="メイリオ"/>
               </a:rPr>
-              <a:t>伊藤 蘭</a:t>
+              <a:t>「日本の国土とわたしたちのくらし」</a:t>
             </a:r>
           </a:p>
         </p:txBody>
@@ -13951,8 +14058,8 @@
         </p:nvSpPr>
         <p:spPr bwMode="white">
           <a:xfrm>
-            <a:off x="6858000" y="1600200"/>
-            <a:ext cx="2011680" cy="777240"/>
+            <a:off x="489758" y="2606040"/>
+            <a:ext cx="4000000" cy="914400"/>
           </a:xfrm>
           <a:prstGeom prst="rect">
             <a:avLst/>
@@ -13970,25 +14077,25 @@
           </a:bodyPr>
           <a:lstStyle/>
           <a:p>
-            <a:pPr algn="ctr"/>
-            <a:r>
-              <a:rPr lang="ja-JP" sz="2000" b="1" dirty="0">
+            <a:pPr algn="l"/>
+            <a:r>
+              <a:rPr lang="ja-JP" sz="2200" b="1" dirty="0">
                 <a:latin typeface="メイリオ"/>
                 <a:ea typeface="メイリオ"/>
                 <a:cs typeface="メイリオ"/>
               </a:rPr>
-              <a:t>少人数</a:t>
-            </a:r>
-          </a:p>
-          <a:p>
-            <a:pPr algn="ctr"/>
+              <a:t>4-2　国語（工藤 由利）</a:t>
+            </a:r>
+          </a:p>
+          <a:p>
+            <a:pPr algn="l"/>
             <a:r>
               <a:rPr lang="ja-JP" sz="1600" b="0" dirty="0">
                 <a:latin typeface="メイリオ"/>
                 <a:ea typeface="メイリオ"/>
                 <a:cs typeface="メイリオ"/>
               </a:rPr>
-              <a:t>鈴木 寛</a:t>
+              <a:t>「アップとルーズで伝える」</a:t>
             </a:r>
           </a:p>
         </p:txBody>
@@ -14007,8 +14114,8 @@
         </p:nvSpPr>
         <p:spPr bwMode="white">
           <a:xfrm>
-            <a:off x="1371600" y="2926080"/>
-            <a:ext cx="6400800" cy="1097280"/>
+            <a:off x="4700000" y="2606040"/>
+            <a:ext cx="4000000" cy="914400"/>
           </a:xfrm>
           <a:prstGeom prst="rect">
             <a:avLst/>
@@ -14033,7 +14140,7 @@
                 <a:ea typeface="メイリオ"/>
                 <a:cs typeface="メイリオ"/>
               </a:rPr>
-              <a:t>6年　音楽（見城 麻美）</a:t>
+              <a:t>6-3　道徳（松田 容子）</a:t>
             </a:r>
           </a:p>
           <a:p>
@@ -14044,124 +14151,17 @@
                 <a:ea typeface="メイリオ"/>
                 <a:cs typeface="メイリオ"/>
               </a:rPr>
-              <a:t>「パートの役割を活かして合奏しよう」</a:t>
-            </a:r>
-          </a:p>
-        </p:txBody>
-      </p:sp>
-      <p:sp>
-        <p:nvSpPr>
-          <p:cNvPr id="9" name="正方形/長方形 8">
-            <a:extLst>
-              <a:ext uri="{FF2B5EF4-FFF2-40B4-BE49-F238E27FC236}">
-                <a16:creationId xmlns:a16="http://schemas.microsoft.com/office/drawing/2014/main" id="{C871D856-5C1D-8BEB-D3E7-9B8F19D3E72D}"/>
-              </a:ext>
-            </a:extLst>
-          </p:cNvPr>
-          <p:cNvSpPr/>
-          <p:nvPr/>
-        </p:nvSpPr>
-        <p:spPr bwMode="white">
-          <a:xfrm>
-            <a:off x="2468880" y="1600200"/>
-            <a:ext cx="2011680" cy="777240"/>
-          </a:xfrm>
-          <a:prstGeom prst="rect">
-            <a:avLst/>
-          </a:prstGeom>
-          <a:solidFill>
-            <a:schemeClr val="bg1"/>
-          </a:solidFill>
-          <a:ln>
-            <a:noFill/>
-          </a:ln>
-        </p:spPr>
-        <p:txBody>
-          <a:bodyPr wrap="square">
-            <a:spAutoFit/>
-          </a:bodyPr>
-          <a:lstStyle/>
-          <a:p>
-            <a:pPr algn="ctr"/>
-            <a:r>
-              <a:rPr lang="ja-JP" sz="2000" b="1" dirty="0">
-                <a:latin typeface="メイリオ"/>
-                <a:ea typeface="メイリオ"/>
-                <a:cs typeface="メイリオ"/>
-              </a:rPr>
-              <a:t>3-2</a:t>
-            </a:r>
-          </a:p>
-          <a:p>
-            <a:pPr algn="ctr"/>
-            <a:r>
-              <a:rPr lang="ja-JP" sz="1600" b="0" dirty="0">
-                <a:latin typeface="メイリオ"/>
-                <a:ea typeface="メイリオ"/>
-                <a:cs typeface="メイリオ"/>
-              </a:rPr>
-              <a:t>岡﨑 智子</a:t>
-            </a:r>
-          </a:p>
-        </p:txBody>
-      </p:sp>
-      <p:sp>
-        <p:nvSpPr>
-          <p:cNvPr id="9" name="正方形/長方形 8">
-            <a:extLst>
-              <a:ext uri="{FF2B5EF4-FFF2-40B4-BE49-F238E27FC236}">
-                <a16:creationId xmlns:a16="http://schemas.microsoft.com/office/drawing/2014/main" id="{C871D856-5C1D-8BEB-D3E7-9B8F19D3E72D}"/>
-              </a:ext>
-            </a:extLst>
-          </p:cNvPr>
-          <p:cNvSpPr/>
-          <p:nvPr/>
-        </p:nvSpPr>
-        <p:spPr bwMode="white">
-          <a:xfrm>
-            <a:off x="274320" y="1600200"/>
-            <a:ext cx="2011680" cy="777240"/>
-          </a:xfrm>
-          <a:prstGeom prst="rect">
-            <a:avLst/>
-          </a:prstGeom>
-          <a:solidFill>
-            <a:schemeClr val="bg1"/>
-          </a:solidFill>
-          <a:ln>
-            <a:noFill/>
-          </a:ln>
-        </p:spPr>
-        <p:txBody>
-          <a:bodyPr wrap="square">
-            <a:spAutoFit/>
-          </a:bodyPr>
-          <a:lstStyle/>
-          <a:p>
-            <a:pPr algn="ctr"/>
-            <a:r>
-              <a:rPr lang="ja-JP" sz="2000" b="1" dirty="0">
-                <a:latin typeface="メイリオ"/>
-                <a:ea typeface="メイリオ"/>
-                <a:cs typeface="メイリオ"/>
-              </a:rPr>
-              <a:t>3-1</a:t>
-            </a:r>
-          </a:p>
-          <a:p>
-            <a:pPr algn="ctr"/>
-            <a:r>
-              <a:rPr lang="ja-JP" sz="1600" b="0" dirty="0">
-                <a:latin typeface="メイリオ"/>
-                <a:ea typeface="メイリオ"/>
-                <a:cs typeface="メイリオ"/>
-              </a:rPr>
-              <a:t>間 勇人</a:t>
+              <a:t>「自分の役割を果たす」</a:t>
             </a:r>
           </a:p>
         </p:txBody>
       </p:sp>
     </p:spTree>
+    <p:extLst>
+      <p:ext uri="{BB962C8B-B14F-4D97-AF65-F5344CB8AC3E}">
+        <p14:creationId xmlns:p14="http://schemas.microsoft.com/office/powerpoint/2010/main" val="660057930"/>
+      </p:ext>
+    </p:extLst>
   </p:cSld>
   <p:clrMapOvr>
     <a:masterClrMapping/>

--- a/output/★指導課訪問★３・４校時指導助言資料（例）.pptx
+++ b/output/★指導課訪問★３・４校時指導助言資料（例）.pptx
@@ -25,6 +25,8 @@
     <p:sldId id="521" r:id="rId12"/>
     <p:sldId id="728" r:id="rId13"/>
     <p:sldId id="355" r:id="rId14"/>
+    <p:sldId id="733" r:id="rId23"/>
+    <p:sldId id="734" r:id="rId24"/>
     <p:sldId id="727" r:id="rId15"/>
   </p:sldIdLst>
   <p:sldSz cx="9144000" cy="5143500" type="screen16x9"/>
@@ -10334,6 +10336,638 @@
 </file>
 
 <file path=ppt/slides/slide15.xml><?xml version="1.0" encoding="utf-8"?>
+<p:sld xmlns:a="http://schemas.openxmlformats.org/drawingml/2006/main" xmlns:p="http://schemas.openxmlformats.org/presentationml/2006/main" xmlns:r="http://schemas.openxmlformats.org/officeDocument/2006/relationships">
+  <p:cSld>
+    <p:spTree>
+      <p:nvGrpSpPr>
+        <p:cNvPr id="1" name=""/>
+        <p:cNvGrpSpPr/>
+        <p:nvPr/>
+      </p:nvGrpSpPr>
+      <p:grpSpPr/>
+      <p:sp>
+        <p:nvSpPr>
+          <p:cNvPr id="2" name="Rectangle 1"/>
+          <p:cNvSpPr/>
+          <p:nvPr/>
+        </p:nvSpPr>
+        <p:spPr>
+          <a:xfrm>
+            <a:off x="0" y="0"/>
+            <a:ext cx="9144000" cy="612648"/>
+          </a:xfrm>
+          <a:prstGeom prst="rect">
+            <a:avLst/>
+          </a:prstGeom>
+          <a:solidFill>
+            <a:srgbClr val="5B9BD5"/>
+          </a:solidFill>
+          <a:ln>
+            <a:noFill/>
+          </a:ln>
+        </p:spPr>
+        <p:style>
+          <a:lnRef idx="1">
+            <a:schemeClr val="accent1"/>
+          </a:lnRef>
+          <a:fillRef idx="3">
+            <a:schemeClr val="accent1"/>
+          </a:fillRef>
+          <a:effectRef idx="2">
+            <a:schemeClr val="accent1"/>
+          </a:effectRef>
+          <a:fontRef idx="minor">
+            <a:schemeClr val="lt1"/>
+          </a:fontRef>
+        </p:style>
+        <p:txBody>
+          <a:bodyPr rtlCol="0" anchor="ctr"/>
+          <a:lstStyle/>
+          <a:p>
+            <a:pPr algn="ctr"/>
+            <a:r>
+              <a:rPr lang="ja-JP" sz="3200" b="1" dirty="0">
+                <a:solidFill>
+                  <a:srgbClr val="FFFFFF"/>
+                </a:solidFill>
+                <a:latin typeface="メイリオ"/>
+                <a:ea typeface="メイリオ"/>
+                <a:cs typeface="メイリオ"/>
+              </a:rPr>
+              <a:t>　まとめ（今後に向けて）　ICTの活用①</a:t>
+            </a:r>
+          </a:p>
+        </p:txBody>
+      </p:sp>
+      <p:pic>
+        <p:nvPicPr>
+          <p:cNvPr id="3" name="Picture 2" descr="image.png"/>
+          <p:cNvPicPr>
+            <a:picLocks noChangeAspect="1"/>
+          </p:cNvPicPr>
+          <p:nvPr/>
+        </p:nvPicPr>
+        <p:blipFill>
+          <a:blip r:embed="rId2"/>
+          <a:stretch>
+            <a:fillRect/>
+          </a:stretch>
+        </p:blipFill>
+        <p:spPr>
+          <a:xfrm>
+            <a:off x="1371600" y="914400"/>
+            <a:ext cx="6400800" cy="3383280"/>
+          </a:xfrm>
+          <a:prstGeom prst="rect">
+            <a:avLst/>
+          </a:prstGeom>
+        </p:spPr>
+      </p:pic>
+      <p:sp>
+        <p:nvSpPr>
+          <p:cNvPr id="4" name="TextBox 3"/>
+          <p:cNvSpPr txBox="1"/>
+          <p:nvPr/>
+        </p:nvSpPr>
+        <p:spPr>
+          <a:xfrm>
+            <a:off x="457200" y="4434840"/>
+            <a:ext cx="8229600" cy="502920"/>
+          </a:xfrm>
+          <a:prstGeom prst="rect">
+            <a:avLst/>
+          </a:prstGeom>
+          <a:noFill/>
+        </p:spPr>
+        <p:txBody>
+          <a:bodyPr wrap="square">
+            <a:spAutoFit/>
+          </a:bodyPr>
+          <a:lstStyle/>
+          <a:p>
+            <a:pPr algn="ctr"/>
+            <a:r>
+              <a:rPr lang="ja-JP" sz="1800" b="1" dirty="0">
+                <a:solidFill>
+                  <a:srgbClr val="1F4E79"/>
+                </a:solidFill>
+                <a:latin typeface="メイリオ"/>
+                <a:ea typeface="メイリオ"/>
+                <a:cs typeface="メイリオ"/>
+              </a:rPr>
+              <a:t>個別最適な学びと協働的な学びの一体的な充実</a:t>
+            </a:r>
+          </a:p>
+        </p:txBody>
+      </p:sp>
+    </p:spTree>
+  </p:cSld>
+  <p:clrMapOvr>
+    <a:masterClrMapping/>
+  </p:clrMapOvr>
+</p:sld>
+</file>
+
+<file path=ppt/slides/slide16.xml><?xml version="1.0" encoding="utf-8"?>
+<p:sld xmlns:a="http://schemas.openxmlformats.org/drawingml/2006/main" xmlns:p="http://schemas.openxmlformats.org/presentationml/2006/main" xmlns:r="http://schemas.openxmlformats.org/officeDocument/2006/relationships">
+  <p:cSld>
+    <p:spTree>
+      <p:nvGrpSpPr>
+        <p:cNvPr id="1" name=""/>
+        <p:cNvGrpSpPr/>
+        <p:nvPr/>
+      </p:nvGrpSpPr>
+      <p:grpSpPr/>
+      <p:sp>
+        <p:nvSpPr>
+          <p:cNvPr id="2" name="Rectangle 1"/>
+          <p:cNvSpPr/>
+          <p:nvPr/>
+        </p:nvSpPr>
+        <p:spPr>
+          <a:xfrm>
+            <a:off x="0" y="0"/>
+            <a:ext cx="9144000" cy="612648"/>
+          </a:xfrm>
+          <a:prstGeom prst="rect">
+            <a:avLst/>
+          </a:prstGeom>
+          <a:solidFill>
+            <a:srgbClr val="5B9BD5"/>
+          </a:solidFill>
+          <a:ln>
+            <a:noFill/>
+          </a:ln>
+        </p:spPr>
+        <p:style>
+          <a:lnRef idx="1">
+            <a:schemeClr val="accent1"/>
+          </a:lnRef>
+          <a:fillRef idx="3">
+            <a:schemeClr val="accent1"/>
+          </a:fillRef>
+          <a:effectRef idx="2">
+            <a:schemeClr val="accent1"/>
+          </a:effectRef>
+          <a:fontRef idx="minor">
+            <a:schemeClr val="lt1"/>
+          </a:fontRef>
+        </p:style>
+        <p:txBody>
+          <a:bodyPr rtlCol="0" anchor="ctr"/>
+          <a:lstStyle/>
+          <a:p>
+            <a:pPr algn="ctr"/>
+            <a:r>
+              <a:rPr lang="ja-JP" sz="3200" b="1" dirty="0">
+                <a:solidFill>
+                  <a:srgbClr val="FFFFFF"/>
+                </a:solidFill>
+                <a:latin typeface="メイリオ"/>
+                <a:ea typeface="メイリオ"/>
+                <a:cs typeface="メイリオ"/>
+              </a:rPr>
+              <a:t>　まとめ（今後に向けて）　ICTの活用</a:t>
+            </a:r>
+          </a:p>
+        </p:txBody>
+      </p:sp>
+      <p:sp>
+        <p:nvSpPr>
+          <p:cNvPr id="3" name="TextBox 2"/>
+          <p:cNvSpPr txBox="1"/>
+          <p:nvPr/>
+        </p:nvSpPr>
+        <p:spPr>
+          <a:xfrm>
+            <a:off x="457200" y="777240"/>
+            <a:ext cx="8229600" cy="548640"/>
+          </a:xfrm>
+          <a:prstGeom prst="rect">
+            <a:avLst/>
+          </a:prstGeom>
+          <a:noFill/>
+        </p:spPr>
+        <p:txBody>
+          <a:bodyPr wrap="square">
+            <a:spAutoFit/>
+          </a:bodyPr>
+          <a:lstStyle/>
+          <a:p>
+            <a:pPr algn="ctr"/>
+            <a:r>
+              <a:rPr lang="ja-JP" sz="2400" b="1" dirty="0">
+                <a:solidFill>
+                  <a:srgbClr val="1F4E79"/>
+                </a:solidFill>
+                <a:latin typeface="メイリオ"/>
+                <a:ea typeface="メイリオ"/>
+                <a:cs typeface="メイリオ"/>
+              </a:rPr>
+              <a:t>今後のICT活用に向けて</a:t>
+            </a:r>
+          </a:p>
+        </p:txBody>
+      </p:sp>
+      <p:sp>
+        <p:nvSpPr>
+          <p:cNvPr id="4" name="Rectangle 3"/>
+          <p:cNvSpPr/>
+          <p:nvPr/>
+        </p:nvSpPr>
+        <p:spPr>
+          <a:xfrm>
+            <a:off x="457200" y="1554480"/>
+            <a:ext cx="8229600" cy="960120"/>
+          </a:xfrm>
+          <a:prstGeom prst="rect">
+            <a:avLst/>
+          </a:prstGeom>
+          <a:solidFill>
+            <a:srgbClr val="E8F1FA"/>
+          </a:solidFill>
+          <a:ln w="19050">
+            <a:solidFill>
+              <a:srgbClr val="5B9BD5"/>
+            </a:solidFill>
+          </a:ln>
+        </p:spPr>
+        <p:style>
+          <a:lnRef idx="1">
+            <a:schemeClr val="accent1"/>
+          </a:lnRef>
+          <a:fillRef idx="3">
+            <a:schemeClr val="accent1"/>
+          </a:fillRef>
+          <a:effectRef idx="2">
+            <a:schemeClr val="accent1"/>
+          </a:effectRef>
+          <a:fontRef idx="minor">
+            <a:schemeClr val="lt1"/>
+          </a:fontRef>
+        </p:style>
+        <p:txBody>
+          <a:bodyPr rtlCol="0" anchor="ctr"/>
+          <a:lstStyle/>
+        </p:txBody>
+      </p:sp>
+      <p:sp>
+        <p:nvSpPr>
+          <p:cNvPr id="5" name="TextBox 4"/>
+          <p:cNvSpPr txBox="1"/>
+          <p:nvPr/>
+        </p:nvSpPr>
+        <p:spPr>
+          <a:xfrm>
+            <a:off x="640080" y="1609344"/>
+            <a:ext cx="2743200" cy="457200"/>
+          </a:xfrm>
+          <a:prstGeom prst="rect">
+            <a:avLst/>
+          </a:prstGeom>
+          <a:noFill/>
+        </p:spPr>
+        <p:txBody>
+          <a:bodyPr wrap="square">
+            <a:spAutoFit/>
+          </a:bodyPr>
+          <a:lstStyle/>
+          <a:p>
+            <a:pPr algn="l"/>
+            <a:r>
+              <a:rPr lang="ja-JP" sz="1600" b="1" dirty="0">
+                <a:solidFill>
+                  <a:srgbClr val="1F4E79"/>
+                </a:solidFill>
+                <a:latin typeface="メイリオ"/>
+                <a:ea typeface="メイリオ"/>
+                <a:cs typeface="メイリオ"/>
+              </a:rPr>
+              <a:t>① 個別最適な学び</a:t>
+            </a:r>
+          </a:p>
+        </p:txBody>
+      </p:sp>
+      <p:sp>
+        <p:nvSpPr>
+          <p:cNvPr id="6" name="TextBox 5"/>
+          <p:cNvSpPr txBox="1"/>
+          <p:nvPr/>
+        </p:nvSpPr>
+        <p:spPr>
+          <a:xfrm>
+            <a:off x="3383280" y="1645920"/>
+            <a:ext cx="5120640" cy="822960"/>
+          </a:xfrm>
+          <a:prstGeom prst="rect">
+            <a:avLst/>
+          </a:prstGeom>
+          <a:noFill/>
+        </p:spPr>
+        <p:txBody>
+          <a:bodyPr wrap="square">
+            <a:spAutoFit/>
+          </a:bodyPr>
+          <a:lstStyle/>
+          <a:p>
+            <a:pPr algn="l"/>
+            <a:r>
+              <a:rPr lang="ja-JP" sz="1200" b="0" dirty="0">
+                <a:solidFill>
+                  <a:srgbClr val="000000"/>
+                </a:solidFill>
+                <a:latin typeface="メイリオ"/>
+                <a:ea typeface="メイリオ"/>
+                <a:cs typeface="メイリオ"/>
+              </a:rPr>
+              <a:t>習熟度・興味関心に応じた自分のペースの学習。</a:t>
+            </a:r>
+          </a:p>
+          <a:p>
+            <a:pPr algn="l"/>
+            <a:r>
+              <a:rPr lang="ja-JP" sz="1200" b="0" dirty="0">
+                <a:solidFill>
+                  <a:srgbClr val="000000"/>
+                </a:solidFill>
+                <a:latin typeface="メイリオ"/>
+                <a:ea typeface="メイリオ"/>
+                <a:cs typeface="メイリオ"/>
+              </a:rPr>
+              <a:t>試行錯誤を「自分のもの」にできる環境。</a:t>
+            </a:r>
+          </a:p>
+        </p:txBody>
+      </p:sp>
+      <p:sp>
+        <p:nvSpPr>
+          <p:cNvPr id="7" name="Rectangle 6"/>
+          <p:cNvSpPr/>
+          <p:nvPr/>
+        </p:nvSpPr>
+        <p:spPr>
+          <a:xfrm>
+            <a:off x="457200" y="2651760"/>
+            <a:ext cx="8229600" cy="960120"/>
+          </a:xfrm>
+          <a:prstGeom prst="rect">
+            <a:avLst/>
+          </a:prstGeom>
+          <a:solidFill>
+            <a:srgbClr val="E8F1FA"/>
+          </a:solidFill>
+          <a:ln w="19050">
+            <a:solidFill>
+              <a:srgbClr val="5B9BD5"/>
+            </a:solidFill>
+          </a:ln>
+        </p:spPr>
+        <p:style>
+          <a:lnRef idx="1">
+            <a:schemeClr val="accent1"/>
+          </a:lnRef>
+          <a:fillRef idx="3">
+            <a:schemeClr val="accent1"/>
+          </a:fillRef>
+          <a:effectRef idx="2">
+            <a:schemeClr val="accent1"/>
+          </a:effectRef>
+          <a:fontRef idx="minor">
+            <a:schemeClr val="lt1"/>
+          </a:fontRef>
+        </p:style>
+        <p:txBody>
+          <a:bodyPr rtlCol="0" anchor="ctr"/>
+          <a:lstStyle/>
+        </p:txBody>
+      </p:sp>
+      <p:sp>
+        <p:nvSpPr>
+          <p:cNvPr id="8" name="TextBox 7"/>
+          <p:cNvSpPr txBox="1"/>
+          <p:nvPr/>
+        </p:nvSpPr>
+        <p:spPr>
+          <a:xfrm>
+            <a:off x="640080" y="2706624"/>
+            <a:ext cx="2743200" cy="457200"/>
+          </a:xfrm>
+          <a:prstGeom prst="rect">
+            <a:avLst/>
+          </a:prstGeom>
+          <a:noFill/>
+        </p:spPr>
+        <p:txBody>
+          <a:bodyPr wrap="square">
+            <a:spAutoFit/>
+          </a:bodyPr>
+          <a:lstStyle/>
+          <a:p>
+            <a:pPr algn="l"/>
+            <a:r>
+              <a:rPr lang="ja-JP" sz="1600" b="1" dirty="0">
+                <a:solidFill>
+                  <a:srgbClr val="1F4E79"/>
+                </a:solidFill>
+                <a:latin typeface="メイリオ"/>
+                <a:ea typeface="メイリオ"/>
+                <a:cs typeface="メイリオ"/>
+              </a:rPr>
+              <a:t>② 協働的な学び</a:t>
+            </a:r>
+          </a:p>
+        </p:txBody>
+      </p:sp>
+      <p:sp>
+        <p:nvSpPr>
+          <p:cNvPr id="9" name="TextBox 8"/>
+          <p:cNvSpPr txBox="1"/>
+          <p:nvPr/>
+        </p:nvSpPr>
+        <p:spPr>
+          <a:xfrm>
+            <a:off x="3383280" y="2743200"/>
+            <a:ext cx="5120640" cy="822960"/>
+          </a:xfrm>
+          <a:prstGeom prst="rect">
+            <a:avLst/>
+          </a:prstGeom>
+          <a:noFill/>
+        </p:spPr>
+        <p:txBody>
+          <a:bodyPr wrap="square">
+            <a:spAutoFit/>
+          </a:bodyPr>
+          <a:lstStyle/>
+          <a:p>
+            <a:pPr algn="l"/>
+            <a:r>
+              <a:rPr lang="ja-JP" sz="1200" b="0" dirty="0">
+                <a:solidFill>
+                  <a:srgbClr val="000000"/>
+                </a:solidFill>
+                <a:latin typeface="メイリオ"/>
+                <a:ea typeface="メイリオ"/>
+                <a:cs typeface="メイリオ"/>
+              </a:rPr>
+              <a:t>考えのリアルタイム共有・比較。</a:t>
+            </a:r>
+          </a:p>
+          <a:p>
+            <a:pPr algn="l"/>
+            <a:r>
+              <a:rPr lang="ja-JP" sz="1200" b="0" dirty="0">
+                <a:solidFill>
+                  <a:srgbClr val="000000"/>
+                </a:solidFill>
+                <a:latin typeface="メイリオ"/>
+                <a:ea typeface="メイリオ"/>
+                <a:cs typeface="メイリオ"/>
+              </a:rPr>
+              <a:t>友達の見方を即座に取り入れて自分の学びを更新。</a:t>
+            </a:r>
+          </a:p>
+        </p:txBody>
+      </p:sp>
+      <p:sp>
+        <p:nvSpPr>
+          <p:cNvPr id="10" name="Rectangle 9"/>
+          <p:cNvSpPr/>
+          <p:nvPr/>
+        </p:nvSpPr>
+        <p:spPr>
+          <a:xfrm>
+            <a:off x="457200" y="3749039"/>
+            <a:ext cx="8229600" cy="960120"/>
+          </a:xfrm>
+          <a:prstGeom prst="rect">
+            <a:avLst/>
+          </a:prstGeom>
+          <a:solidFill>
+            <a:srgbClr val="E8F1FA"/>
+          </a:solidFill>
+          <a:ln w="19050">
+            <a:solidFill>
+              <a:srgbClr val="5B9BD5"/>
+            </a:solidFill>
+          </a:ln>
+        </p:spPr>
+        <p:style>
+          <a:lnRef idx="1">
+            <a:schemeClr val="accent1"/>
+          </a:lnRef>
+          <a:fillRef idx="3">
+            <a:schemeClr val="accent1"/>
+          </a:fillRef>
+          <a:effectRef idx="2">
+            <a:schemeClr val="accent1"/>
+          </a:effectRef>
+          <a:fontRef idx="minor">
+            <a:schemeClr val="lt1"/>
+          </a:fontRef>
+        </p:style>
+        <p:txBody>
+          <a:bodyPr rtlCol="0" anchor="ctr"/>
+          <a:lstStyle/>
+        </p:txBody>
+      </p:sp>
+      <p:sp>
+        <p:nvSpPr>
+          <p:cNvPr id="11" name="TextBox 10"/>
+          <p:cNvSpPr txBox="1"/>
+          <p:nvPr/>
+        </p:nvSpPr>
+        <p:spPr>
+          <a:xfrm>
+            <a:off x="640080" y="3803903"/>
+            <a:ext cx="2743200" cy="457200"/>
+          </a:xfrm>
+          <a:prstGeom prst="rect">
+            <a:avLst/>
+          </a:prstGeom>
+          <a:noFill/>
+        </p:spPr>
+        <p:txBody>
+          <a:bodyPr wrap="square">
+            <a:spAutoFit/>
+          </a:bodyPr>
+          <a:lstStyle/>
+          <a:p>
+            <a:pPr algn="l"/>
+            <a:r>
+              <a:rPr lang="ja-JP" sz="1600" b="1" dirty="0">
+                <a:solidFill>
+                  <a:srgbClr val="1F4E79"/>
+                </a:solidFill>
+                <a:latin typeface="メイリオ"/>
+                <a:ea typeface="メイリオ"/>
+                <a:cs typeface="メイリオ"/>
+              </a:rPr>
+              <a:t>③ 教師の見取り</a:t>
+            </a:r>
+          </a:p>
+        </p:txBody>
+      </p:sp>
+      <p:sp>
+        <p:nvSpPr>
+          <p:cNvPr id="12" name="TextBox 11"/>
+          <p:cNvSpPr txBox="1"/>
+          <p:nvPr/>
+        </p:nvSpPr>
+        <p:spPr>
+          <a:xfrm>
+            <a:off x="3383280" y="3840479"/>
+            <a:ext cx="5120640" cy="822960"/>
+          </a:xfrm>
+          <a:prstGeom prst="rect">
+            <a:avLst/>
+          </a:prstGeom>
+          <a:noFill/>
+        </p:spPr>
+        <p:txBody>
+          <a:bodyPr wrap="square">
+            <a:spAutoFit/>
+          </a:bodyPr>
+          <a:lstStyle/>
+          <a:p>
+            <a:pPr algn="l"/>
+            <a:r>
+              <a:rPr lang="ja-JP" sz="1200" b="0" dirty="0">
+                <a:solidFill>
+                  <a:srgbClr val="000000"/>
+                </a:solidFill>
+                <a:latin typeface="メイリオ"/>
+                <a:ea typeface="メイリオ"/>
+                <a:cs typeface="メイリオ"/>
+              </a:rPr>
+              <a:t>思考過程の可視化（手元・画面の記録）。</a:t>
+            </a:r>
+          </a:p>
+          <a:p>
+            <a:pPr algn="l"/>
+            <a:r>
+              <a:rPr lang="ja-JP" sz="1200" b="0" dirty="0">
+                <a:solidFill>
+                  <a:srgbClr val="000000"/>
+                </a:solidFill>
+                <a:latin typeface="メイリオ"/>
+                <a:ea typeface="メイリオ"/>
+                <a:cs typeface="メイリオ"/>
+              </a:rPr>
+              <a:t>つまずきや到達状況の把握と、的確な手立てへ。</a:t>
+            </a:r>
+          </a:p>
+        </p:txBody>
+      </p:sp>
+    </p:spTree>
+  </p:cSld>
+  <p:clrMapOvr>
+    <a:masterClrMapping/>
+  </p:clrMapOvr>
+</p:sld>
+</file>
+
+<file path=ppt/slides/slide17.xml><?xml version="1.0" encoding="utf-8"?>
 <p:sld xmlns:a="http://schemas.openxmlformats.org/drawingml/2006/main" xmlns:r="http://schemas.openxmlformats.org/officeDocument/2006/relationships" xmlns:p="http://schemas.openxmlformats.org/presentationml/2006/main">
   <p:cSld>
     <p:spTree>
@@ -13338,6 +13972,62 @@
                 <a:cs typeface="メイリオ"/>
               </a:rPr>
               <a:t>写真</a:t>
+            </a:r>
+          </a:p>
+        </p:txBody>
+      </p:sp>
+      <p:sp>
+        <p:nvSpPr>
+          <p:cNvPr id="9" name="正方形/長方形 8">
+            <a:extLst>
+              <a:ext uri="{FF2B5EF4-FFF2-40B4-BE49-F238E27FC236}">
+                <a16:creationId xmlns:a16="http://schemas.microsoft.com/office/drawing/2014/main" id="{77876903-AD43-5597-093C-B3A30EBDBD14}"/>
+              </a:ext>
+            </a:extLst>
+          </p:cNvPr>
+          <p:cNvSpPr/>
+          <p:nvPr/>
+        </p:nvSpPr>
+        <p:spPr bwMode="white">
+          <a:xfrm>
+            <a:off x="493776" y="4343400"/>
+            <a:ext cx="8156448" cy="685800"/>
+          </a:xfrm>
+          <a:prstGeom prst="rect">
+            <a:avLst/>
+          </a:prstGeom>
+          <a:solidFill>
+            <a:schemeClr val="bg1"/>
+          </a:solidFill>
+          <a:ln>
+            <a:noFill/>
+          </a:ln>
+        </p:spPr>
+        <p:txBody>
+          <a:bodyPr wrap="square">
+            <a:spAutoFit/>
+          </a:bodyPr>
+          <a:lstStyle/>
+          <a:p>
+            <a:pPr algn="l"/>
+            <a:r>
+              <a:rPr lang="ja-JP" sz="1800" b="1" dirty="0">
+                <a:latin typeface="メイリオ"/>
+                <a:ea typeface="メイリオ"/>
+                <a:cs typeface="メイリオ"/>
+              </a:rPr>
+              <a:t>5-1　外国語（三宅 真行）</a:t>
+            </a:r>
+          </a:p>
+          <a:p>
+            <a:pPr algn="l"/>
+            <a:r>
+              <a:rPr lang="ja-JP" sz="1400" b="0" dirty="0">
+                <a:latin typeface="メイリオ"/>
+                <a:ea typeface="メイリオ"/>
+                <a:cs typeface="メイリオ"/>
+              </a:rPr>
+              <a:t>Unit 2「When is your birthday?」</a:t>
             </a:r>
           </a:p>
         </p:txBody>
